--- a/20261023 - ATY - Estrutura x Vagas.pptx
+++ b/20261023 - ATY - Estrutura x Vagas.pptx
@@ -5,21 +5,21 @@
     <p:sldMasterId id="2147483787" r:id="rId4"/>
   </p:sldMasterIdLst>
   <p:notesMasterIdLst>
-    <p:notesMasterId r:id="rId33"/>
+    <p:notesMasterId r:id="rId9"/>
   </p:notesMasterIdLst>
   <p:handoutMasterIdLst>
-    <p:handoutMasterId r:id="rId34"/>
+    <p:handoutMasterId r:id="rId10"/>
   </p:handoutMasterIdLst>
   <p:sldIdLst>
     <p:sldId id="2147475257" r:id="rId5"/>
-    <p:sldId id="2147475470" r:id="rId16"/>
-    <p:sldId id="2147475471" r:id="rId17"/>
-    <p:sldId id="2147475469" r:id="rId32"/>
+    <p:sldId id="2147475470" r:id="rId6"/>
+    <p:sldId id="2147475471" r:id="rId7"/>
+    <p:sldId id="2147475469" r:id="rId8"/>
   </p:sldIdLst>
   <p:sldSz cx="12192000" cy="6858000"/>
   <p:notesSz cx="6797675" cy="9928225"/>
   <p:custDataLst>
-    <p:tags r:id="rId35"/>
+    <p:tags r:id="rId11"/>
   </p:custDataLst>
   <p:defaultTextStyle>
     <a:defPPr>
@@ -152,57 +152,27 @@
         <p14:section name="Seção Padrão" id="{956BDAC4-B98A-4B57-A8DB-23B54F0D1082}">
           <p14:sldIdLst>
             <p14:sldId id="2147475257"/>
-            <p14:sldId id="2147475518"/>
+            <p14:sldId id="2147475470"/>
+            <p14:sldId id="2147475471"/>
           </p14:sldIdLst>
         </p14:section>
         <p14:section name="Metodologia" id="{3D678D25-2541-45D6-B6BB-4B56A803BE73}">
-          <p14:sldIdLst>
-            <p14:sldId id="2147475519"/>
-            <p14:sldId id="2147475472"/>
-            <p14:sldId id="2147475616"/>
-          </p14:sldIdLst>
+          <p14:sldIdLst/>
         </p14:section>
         <p14:section name="Delivery" id="{8C5AC9BE-490F-4AC9-BA7A-82739033ABD7}">
-          <p14:sldIdLst>
-            <p14:sldId id="2147475633"/>
-            <p14:sldId id="2147475580"/>
-            <p14:sldId id="2147475588"/>
-            <p14:sldId id="2147475602"/>
-            <p14:sldId id="2147475600"/>
-            <p14:sldId id="2147475620"/>
-            <p14:sldId id="2147475624"/>
-            <p14:sldId id="2147475592"/>
-            <p14:sldId id="2147475593"/>
-            <p14:sldId id="2147475594"/>
-            <p14:sldId id="2147475597"/>
-            <p14:sldId id="2147475595"/>
-          </p14:sldIdLst>
+          <p14:sldIdLst/>
         </p14:section>
         <p14:section name="Desconsolidação" id="{44D6E2CF-3F8E-4B51-8792-9A2049612CC8}">
-          <p14:sldIdLst>
-            <p14:sldId id="2147475520"/>
-            <p14:sldId id="2147475626"/>
-          </p14:sldIdLst>
+          <p14:sldIdLst/>
         </p14:section>
         <p14:section name="Desconsolidação | Relevância" id="{F0F01AE5-3637-420D-B6DE-1415257202FA}">
-          <p14:sldIdLst>
-            <p14:sldId id="2147475627"/>
-          </p14:sldIdLst>
+          <p14:sldIdLst/>
         </p14:section>
         <p14:section name="Combinado" id="{E41362AF-1D6A-4543-8884-D1549D6501DA}">
-          <p14:sldIdLst>
-            <p14:sldId id="2147475634"/>
-            <p14:sldId id="2147475636"/>
-            <p14:sldId id="2147475635"/>
-            <p14:sldId id="2147475637"/>
-          </p14:sldIdLst>
+          <p14:sldIdLst/>
         </p14:section>
         <p14:section name="3 charges" id="{E78628E5-7BFA-4604-9148-1E2DDA4D7B83}">
-          <p14:sldIdLst>
-            <p14:sldId id="2147475638"/>
-            <p14:sldId id="2147475639"/>
-            <p14:sldId id="2147475641"/>
-          </p14:sldIdLst>
+          <p14:sldIdLst/>
         </p14:section>
         <p14:section name="Fim" id="{C1DC953D-9B49-46ED-98E8-011CE27E333B}">
           <p14:sldIdLst>
@@ -210,9 +180,6 @@
           </p14:sldIdLst>
         </p14:section>
       </p14:sectionLst>
-    </p:ext>
-    <p:ext uri="{EFAFB233-063F-42B5-8137-9DF3F51BA10A}">
-      <p15:sldGuideLst xmlns:p15="http://schemas.microsoft.com/office/powerpoint/2012/main"/>
     </p:ext>
   </p:extLst>
 </p:presentation>
@@ -227,20 +194,25 @@
 <file path=ppt/revisionInfo.xml><?xml version="1.0" encoding="utf-8"?>
 <p1510:revInfo xmlns:a="http://schemas.openxmlformats.org/drawingml/2006/main" xmlns:r="http://schemas.openxmlformats.org/officeDocument/2006/relationships" xmlns:p1510="http://schemas.microsoft.com/office/powerpoint/2015/10/main">
   <p1510:revLst>
-    <p1510:client id="{6DAF7378-E459-43EE-BB24-DF86A692652A}" v="31" dt="2026-10-19T16:33:28.710"/>
+    <p1510:client id="{D72EF2EF-A580-BB62-1BAE-F06225036B72}" v="17" dt="2026-10-23T21:35:42.480"/>
   </p1510:revLst>
 </p1510:revInfo>
 </file>
 
 <file path=ppt/charts/chart1.xml><?xml version="1.0" encoding="utf-8"?>
-<c:chartSpace xmlns:c="http://schemas.openxmlformats.org/drawingml/2006/chart" xmlns:a="http://schemas.openxmlformats.org/drawingml/2006/main" xmlns:r="http://schemas.openxmlformats.org/officeDocument/2006/relationships">
+<c:chartSpace xmlns:c="http://schemas.openxmlformats.org/drawingml/2006/chart" xmlns:a="http://schemas.openxmlformats.org/drawingml/2006/main" xmlns:r="http://schemas.openxmlformats.org/officeDocument/2006/relationships" xmlns:c16r2="http://schemas.microsoft.com/office/drawing/2015/06/chart">
   <c:date1904 val="0"/>
+  <c:lang val="pt-BR"/>
+  <c:roundedCorners val="1"/>
+  <c:style val="2"/>
   <c:chart>
     <c:autoTitleDeleted val="1"/>
     <c:plotArea>
+      <c:layout/>
       <c:barChart>
         <c:barDir val="bar"/>
         <c:grouping val="stacked"/>
+        <c:varyColors val="1"/>
         <c:ser>
           <c:idx val="0"/>
           <c:order val="0"/>
@@ -260,11 +232,47 @@
               <a:srgbClr val="6B2D6B"/>
             </a:solidFill>
           </c:spPr>
+          <c:invertIfNegative val="1"/>
+          <c:dLbls>
+            <c:spPr>
+              <a:noFill/>
+              <a:ln>
+                <a:noFill/>
+              </a:ln>
+              <a:effectLst/>
+            </c:spPr>
+            <c:txPr>
+              <a:bodyPr/>
+              <a:lstStyle/>
+              <a:p>
+                <a:pPr>
+                  <a:defRPr sz="1000">
+                    <a:solidFill>
+                      <a:srgbClr val="FFFFFF"/>
+                    </a:solidFill>
+                  </a:defRPr>
+                </a:pPr>
+                <a:endParaRPr lang="en-US"/>
+              </a:p>
+            </c:txPr>
+            <c:showLegendKey val="0"/>
+            <c:showVal val="1"/>
+            <c:showCatName val="0"/>
+            <c:showSerName val="0"/>
+            <c:showPercent val="0"/>
+            <c:showBubbleSize val="0"/>
+            <c:showLeaderLines val="0"/>
+            <c:extLst>
+              <c:ext xmlns:c15="http://schemas.microsoft.com/office/drawing/2012/chart" uri="{CE6537A1-D6FC-4f65-9D91-7224C49458BB}">
+                <c15:showLeaderLines val="0"/>
+              </c:ext>
+            </c:extLst>
+          </c:dLbls>
           <c:cat>
             <c:strRef>
-              <c:f>Sheet1!$A$2:$A$9</c:f>
+              <c:f>Sheet1!$A$2:$A$7</c:f>
               <c:strCache>
-                <c:ptCount val="8"/>
+                <c:ptCount val="6"/>
                 <c:pt idx="0">
                   <c:v>COO</c:v>
                 </c:pt>
@@ -275,18 +283,12 @@
                   <c:v>CFSO</c:v>
                 </c:pt>
                 <c:pt idx="3">
-                  <c:v>Air Product</c:v>
+                  <c:v>Talent</c:v>
                 </c:pt>
                 <c:pt idx="4">
-                  <c:v>Talent</c:v>
+                  <c:v>CCO</c:v>
                 </c:pt>
                 <c:pt idx="5">
-                  <c:v>CCO</c:v>
-                </c:pt>
-                <c:pt idx="6">
-                  <c:v>Ocean Prod.</c:v>
-                </c:pt>
-                <c:pt idx="7">
                   <c:v>Services</c:v>
                 </c:pt>
               </c:strCache>
@@ -294,12 +296,12 @@
           </c:cat>
           <c:val>
             <c:numRef>
-              <c:f>Sheet1!$B$2:$B$9</c:f>
+              <c:f>Sheet1!$B$2:$B$7</c:f>
               <c:numCache>
                 <c:formatCode>General</c:formatCode>
-                <c:ptCount val="8"/>
+                <c:ptCount val="6"/>
                 <c:pt idx="0">
-                  <c:v>6</c:v>
+                  <c:v>8</c:v>
                 </c:pt>
                 <c:pt idx="1">
                   <c:v>2</c:v>
@@ -308,23 +310,31 @@
                   <c:v>7</c:v>
                 </c:pt>
                 <c:pt idx="3">
-                  <c:v>2</c:v>
+                  <c:v>6</c:v>
                 </c:pt>
                 <c:pt idx="4">
-                  <c:v>6</c:v>
+                  <c:v>5</c:v>
                 </c:pt>
                 <c:pt idx="5">
-                  <c:v>5</c:v>
-                </c:pt>
-                <c:pt idx="6">
-                  <c:v>4</c:v>
-                </c:pt>
-                <c:pt idx="7">
                   <c:v>5</c:v>
                 </c:pt>
               </c:numCache>
             </c:numRef>
           </c:val>
+          <c:extLst>
+            <c:ext xmlns:c14="http://schemas.microsoft.com/office/drawing/2007/8/2/chart" uri="{6F2FDCE9-48DA-4B69-8628-5D25D57E5C99}">
+              <c14:invertSolidFillFmt>
+                <c14:spPr xmlns:c14="http://schemas.microsoft.com/office/drawing/2007/8/2/chart">
+                  <a:solidFill>
+                    <a:srgbClr val="FFFFFF"/>
+                  </a:solidFill>
+                </c14:spPr>
+              </c14:invertSolidFillFmt>
+            </c:ext>
+            <c:ext xmlns:c16="http://schemas.microsoft.com/office/drawing/2014/chart" uri="{C3380CC4-5D6E-409C-BE32-E72D297353CC}">
+              <c16:uniqueId val="{00000000-715D-444F-A5E7-9FC24C82F348}"/>
+            </c:ext>
+          </c:extLst>
         </c:ser>
         <c:ser>
           <c:idx val="1"/>
@@ -345,11 +355,47 @@
               <a:srgbClr val="66C1C0"/>
             </a:solidFill>
           </c:spPr>
+          <c:invertIfNegative val="1"/>
+          <c:dLbls>
+            <c:spPr>
+              <a:noFill/>
+              <a:ln>
+                <a:noFill/>
+              </a:ln>
+              <a:effectLst/>
+            </c:spPr>
+            <c:txPr>
+              <a:bodyPr/>
+              <a:lstStyle/>
+              <a:p>
+                <a:pPr>
+                  <a:defRPr sz="1000">
+                    <a:solidFill>
+                      <a:srgbClr val="FFFFFF"/>
+                    </a:solidFill>
+                  </a:defRPr>
+                </a:pPr>
+                <a:endParaRPr lang="en-US"/>
+              </a:p>
+            </c:txPr>
+            <c:showLegendKey val="0"/>
+            <c:showVal val="1"/>
+            <c:showCatName val="0"/>
+            <c:showSerName val="0"/>
+            <c:showPercent val="0"/>
+            <c:showBubbleSize val="0"/>
+            <c:showLeaderLines val="0"/>
+            <c:extLst>
+              <c:ext xmlns:c15="http://schemas.microsoft.com/office/drawing/2012/chart" uri="{CE6537A1-D6FC-4f65-9D91-7224C49458BB}">
+                <c15:showLeaderLines val="0"/>
+              </c:ext>
+            </c:extLst>
+          </c:dLbls>
           <c:cat>
             <c:strRef>
-              <c:f>Sheet1!$A$2:$A$9</c:f>
+              <c:f>Sheet1!$A$2:$A$7</c:f>
               <c:strCache>
-                <c:ptCount val="8"/>
+                <c:ptCount val="6"/>
                 <c:pt idx="0">
                   <c:v>COO</c:v>
                 </c:pt>
@@ -360,18 +406,12 @@
                   <c:v>CFSO</c:v>
                 </c:pt>
                 <c:pt idx="3">
-                  <c:v>Air Product</c:v>
+                  <c:v>Talent</c:v>
                 </c:pt>
                 <c:pt idx="4">
-                  <c:v>Talent</c:v>
+                  <c:v>CCO</c:v>
                 </c:pt>
                 <c:pt idx="5">
-                  <c:v>CCO</c:v>
-                </c:pt>
-                <c:pt idx="6">
-                  <c:v>Ocean Prod.</c:v>
-                </c:pt>
-                <c:pt idx="7">
                   <c:v>Services</c:v>
                 </c:pt>
               </c:strCache>
@@ -379,12 +419,12 @@
           </c:cat>
           <c:val>
             <c:numRef>
-              <c:f>Sheet1!$C$2:$C$9</c:f>
+              <c:f>Sheet1!$C$2:$C$7</c:f>
               <c:numCache>
                 <c:formatCode>General</c:formatCode>
-                <c:ptCount val="8"/>
+                <c:ptCount val="6"/>
                 <c:pt idx="0">
-                  <c:v>148</c:v>
+                  <c:v>191</c:v>
                 </c:pt>
                 <c:pt idx="1">
                   <c:v>45</c:v>
@@ -393,44 +433,38 @@
                   <c:v>26</c:v>
                 </c:pt>
                 <c:pt idx="3">
-                  <c:v>26</c:v>
+                  <c:v>17</c:v>
                 </c:pt>
                 <c:pt idx="4">
-                  <c:v>18</c:v>
-                </c:pt>
-                <c:pt idx="5">
-                  <c:v>13</c:v>
-                </c:pt>
-                <c:pt idx="6">
-                  <c:v>14</c:v>
+                  <c:v>12</c:v>
                 </c:pt>
               </c:numCache>
             </c:numRef>
           </c:val>
-        </c:ser>
-        <c:dLbls>
-          <c:txPr>
-            <a:bodyPr/>
-            <a:lstStyle/>
-            <a:p>
-              <a:pPr>
-                <a:defRPr sz="950">
+          <c:extLst>
+            <c:ext xmlns:c14="http://schemas.microsoft.com/office/drawing/2007/8/2/chart" uri="{6F2FDCE9-48DA-4B69-8628-5D25D57E5C99}">
+              <c14:invertSolidFillFmt>
+                <c14:spPr xmlns:c14="http://schemas.microsoft.com/office/drawing/2007/8/2/chart">
                   <a:solidFill>
                     <a:srgbClr val="FFFFFF"/>
                   </a:solidFill>
-                </a:defRPr>
-              </a:pPr>
-            </a:p>
-          </c:txPr>
+                </c14:spPr>
+              </c14:invertSolidFillFmt>
+            </c:ext>
+            <c:ext xmlns:c16="http://schemas.microsoft.com/office/drawing/2014/chart" uri="{C3380CC4-5D6E-409C-BE32-E72D297353CC}">
+              <c16:uniqueId val="{00000001-715D-444F-A5E7-9FC24C82F348}"/>
+            </c:ext>
+          </c:extLst>
+        </c:ser>
+        <c:dLbls>
           <c:showLegendKey val="0"/>
           <c:showVal val="1"/>
           <c:showCatName val="0"/>
           <c:showSerName val="0"/>
           <c:showPercent val="0"/>
           <c:showBubbleSize val="0"/>
-          <c:showLeaderLines val="1"/>
         </c:dLbls>
-        <c:gapWidth val="35"/>
+        <c:gapWidth val="40"/>
         <c:overlap val="100"/>
         <c:axId val="-2068027336"/>
         <c:axId val="-2113994440"/>
@@ -442,6 +476,741 @@
         </c:scaling>
         <c:delete val="0"/>
         <c:axPos val="l"/>
+        <c:numFmt formatCode="General" sourceLinked="0"/>
+        <c:majorTickMark val="out"/>
+        <c:minorTickMark val="none"/>
+        <c:tickLblPos val="nextTo"/>
+        <c:spPr>
+          <a:ln>
+            <a:solidFill>
+              <a:srgbClr val="BFBFBF"/>
+            </a:solidFill>
+          </a:ln>
+        </c:spPr>
+        <c:txPr>
+          <a:bodyPr/>
+          <a:lstStyle/>
+          <a:p>
+            <a:pPr>
+              <a:defRPr sz="1000"/>
+            </a:pPr>
+            <a:endParaRPr lang="en-US"/>
+          </a:p>
+        </c:txPr>
+        <c:crossAx val="-2113994440"/>
+        <c:crosses val="autoZero"/>
+        <c:auto val="1"/>
+        <c:lblAlgn val="ctr"/>
+        <c:lblOffset val="100"/>
+        <c:tickLblSkip val="1"/>
+        <c:noMultiLvlLbl val="0"/>
+      </c:catAx>
+      <c:valAx>
+        <c:axId val="-2113994440"/>
+        <c:scaling>
+          <c:orientation val="minMax"/>
+        </c:scaling>
+        <c:delete val="1"/>
+        <c:axPos val="t"/>
+        <c:numFmt formatCode="General" sourceLinked="1"/>
+        <c:majorTickMark val="out"/>
+        <c:minorTickMark val="none"/>
+        <c:tickLblPos val="nextTo"/>
+        <c:crossAx val="-2068027336"/>
+        <c:crosses val="autoZero"/>
+        <c:crossBetween val="between"/>
+      </c:valAx>
+    </c:plotArea>
+    <c:legend>
+      <c:legendPos val="t"/>
+      <c:overlay val="0"/>
+      <c:txPr>
+        <a:bodyPr/>
+        <a:lstStyle/>
+        <a:p>
+          <a:pPr>
+            <a:defRPr sz="950"/>
+          </a:pPr>
+          <a:endParaRPr lang="en-US"/>
+        </a:p>
+      </c:txPr>
+    </c:legend>
+    <c:plotVisOnly val="1"/>
+    <c:dispBlanksAs val="gap"/>
+    <c:showDLblsOverMax val="1"/>
+  </c:chart>
+  <c:txPr>
+    <a:bodyPr/>
+    <a:lstStyle/>
+    <a:p>
+      <a:pPr>
+        <a:defRPr sz="1000">
+          <a:solidFill>
+            <a:srgbClr val="262626"/>
+          </a:solidFill>
+          <a:latin typeface="Arial"/>
+        </a:defRPr>
+      </a:pPr>
+      <a:endParaRPr lang="en-US"/>
+    </a:p>
+  </c:txPr>
+  <c:externalData r:id="rId1">
+    <c:autoUpdate val="0"/>
+  </c:externalData>
+</c:chartSpace>
+</file>
+
+<file path=ppt/charts/chart2.xml><?xml version="1.0" encoding="utf-8"?>
+<c:chartSpace xmlns:c="http://schemas.openxmlformats.org/drawingml/2006/chart" xmlns:a="http://schemas.openxmlformats.org/drawingml/2006/main" xmlns:r="http://schemas.openxmlformats.org/officeDocument/2006/relationships" xmlns:c16r2="http://schemas.microsoft.com/office/drawing/2015/06/chart">
+  <c:date1904 val="0"/>
+  <c:lang val="pt-BR"/>
+  <c:roundedCorners val="1"/>
+  <c:style val="2"/>
+  <c:chart>
+    <c:autoTitleDeleted val="1"/>
+    <c:plotArea>
+      <c:layout/>
+      <c:barChart>
+        <c:barDir val="bar"/>
+        <c:grouping val="stacked"/>
+        <c:varyColors val="1"/>
+        <c:ser>
+          <c:idx val="0"/>
+          <c:order val="0"/>
+          <c:tx>
+            <c:strRef>
+              <c:f>Sheet1!$B$1</c:f>
+              <c:strCache>
+                <c:ptCount val="1"/>
+                <c:pt idx="0">
+                  <c:v>Na planilha</c:v>
+                </c:pt>
+              </c:strCache>
+            </c:strRef>
+          </c:tx>
+          <c:spPr>
+            <a:solidFill>
+              <a:srgbClr val="6B2D6B"/>
+            </a:solidFill>
+          </c:spPr>
+          <c:invertIfNegative val="1"/>
+          <c:dLbls>
+            <c:spPr>
+              <a:noFill/>
+              <a:ln>
+                <a:noFill/>
+              </a:ln>
+              <a:effectLst/>
+            </c:spPr>
+            <c:txPr>
+              <a:bodyPr/>
+              <a:lstStyle/>
+              <a:p>
+                <a:pPr>
+                  <a:defRPr sz="850">
+                    <a:solidFill>
+                      <a:srgbClr val="FFFFFF"/>
+                    </a:solidFill>
+                  </a:defRPr>
+                </a:pPr>
+                <a:endParaRPr lang="en-US"/>
+              </a:p>
+            </c:txPr>
+            <c:showLegendKey val="0"/>
+            <c:showVal val="1"/>
+            <c:showCatName val="0"/>
+            <c:showSerName val="0"/>
+            <c:showPercent val="0"/>
+            <c:showBubbleSize val="0"/>
+            <c:showLeaderLines val="0"/>
+            <c:extLst>
+              <c:ext xmlns:c15="http://schemas.microsoft.com/office/drawing/2012/chart" uri="{CE6537A1-D6FC-4f65-9D91-7224C49458BB}">
+                <c15:showLeaderLines val="0"/>
+              </c:ext>
+            </c:extLst>
+          </c:dLbls>
+          <c:cat>
+            <c:strRef>
+              <c:f>Sheet1!$A$2:$A$11</c:f>
+              <c:strCache>
+                <c:ptCount val="10"/>
+                <c:pt idx="0">
+                  <c:v>Air Operations</c:v>
+                </c:pt>
+                <c:pt idx="1">
+                  <c:v>Air Product</c:v>
+                </c:pt>
+                <c:pt idx="2">
+                  <c:v>Talent Mgmt</c:v>
+                </c:pt>
+                <c:pt idx="3">
+                  <c:v>Healthcare</c:v>
+                </c:pt>
+                <c:pt idx="4">
+                  <c:v>Financial</c:v>
+                </c:pt>
+                <c:pt idx="5">
+                  <c:v>Ocean Operations</c:v>
+                </c:pt>
+                <c:pt idx="6">
+                  <c:v>Technology</c:v>
+                </c:pt>
+                <c:pt idx="7">
+                  <c:v>Ocean Product</c:v>
+                </c:pt>
+                <c:pt idx="8">
+                  <c:v>High Tech (TL)</c:v>
+                </c:pt>
+                <c:pt idx="9">
+                  <c:v>Outros 3</c:v>
+                </c:pt>
+              </c:strCache>
+            </c:strRef>
+          </c:cat>
+          <c:val>
+            <c:numRef>
+              <c:f>Sheet1!$B$2:$B$11</c:f>
+              <c:numCache>
+                <c:formatCode>General</c:formatCode>
+                <c:ptCount val="10"/>
+                <c:pt idx="0">
+                  <c:v>14</c:v>
+                </c:pt>
+                <c:pt idx="1">
+                  <c:v>7</c:v>
+                </c:pt>
+                <c:pt idx="2">
+                  <c:v>4</c:v>
+                </c:pt>
+                <c:pt idx="3">
+                  <c:v>3</c:v>
+                </c:pt>
+                <c:pt idx="4">
+                  <c:v>3</c:v>
+                </c:pt>
+                <c:pt idx="5">
+                  <c:v>3</c:v>
+                </c:pt>
+                <c:pt idx="6">
+                  <c:v>2</c:v>
+                </c:pt>
+                <c:pt idx="7">
+                  <c:v>2</c:v>
+                </c:pt>
+                <c:pt idx="9">
+                  <c:v>3</c:v>
+                </c:pt>
+              </c:numCache>
+            </c:numRef>
+          </c:val>
+          <c:extLst>
+            <c:ext xmlns:c14="http://schemas.microsoft.com/office/drawing/2007/8/2/chart" uri="{6F2FDCE9-48DA-4B69-8628-5D25D57E5C99}">
+              <c14:invertSolidFillFmt>
+                <c14:spPr xmlns:c14="http://schemas.microsoft.com/office/drawing/2007/8/2/chart">
+                  <a:solidFill>
+                    <a:srgbClr val="FFFFFF"/>
+                  </a:solidFill>
+                </c14:spPr>
+              </c14:invertSolidFillFmt>
+            </c:ext>
+            <c:ext xmlns:c16="http://schemas.microsoft.com/office/drawing/2014/chart" uri="{C3380CC4-5D6E-409C-BE32-E72D297353CC}">
+              <c16:uniqueId val="{00000000-4DB0-4A9A-8736-7DA5879002DA}"/>
+            </c:ext>
+          </c:extLst>
+        </c:ser>
+        <c:ser>
+          <c:idx val="1"/>
+          <c:order val="1"/>
+          <c:tx>
+            <c:strRef>
+              <c:f>Sheet1!$C$1</c:f>
+              <c:strCache>
+                <c:ptCount val="1"/>
+                <c:pt idx="0">
+                  <c:v>Só no draft</c:v>
+                </c:pt>
+              </c:strCache>
+            </c:strRef>
+          </c:tx>
+          <c:spPr>
+            <a:solidFill>
+              <a:srgbClr val="F4A261"/>
+            </a:solidFill>
+          </c:spPr>
+          <c:invertIfNegative val="1"/>
+          <c:dLbls>
+            <c:spPr>
+              <a:noFill/>
+              <a:ln>
+                <a:noFill/>
+              </a:ln>
+              <a:effectLst/>
+            </c:spPr>
+            <c:txPr>
+              <a:bodyPr/>
+              <a:lstStyle/>
+              <a:p>
+                <a:pPr>
+                  <a:defRPr sz="850">
+                    <a:solidFill>
+                      <a:srgbClr val="FFFFFF"/>
+                    </a:solidFill>
+                  </a:defRPr>
+                </a:pPr>
+                <a:endParaRPr lang="en-US"/>
+              </a:p>
+            </c:txPr>
+            <c:showLegendKey val="0"/>
+            <c:showVal val="1"/>
+            <c:showCatName val="0"/>
+            <c:showSerName val="0"/>
+            <c:showPercent val="0"/>
+            <c:showBubbleSize val="0"/>
+            <c:showLeaderLines val="0"/>
+            <c:extLst>
+              <c:ext xmlns:c15="http://schemas.microsoft.com/office/drawing/2012/chart" uri="{CE6537A1-D6FC-4f65-9D91-7224C49458BB}">
+                <c15:showLeaderLines val="0"/>
+              </c:ext>
+            </c:extLst>
+          </c:dLbls>
+          <c:cat>
+            <c:strRef>
+              <c:f>Sheet1!$A$2:$A$11</c:f>
+              <c:strCache>
+                <c:ptCount val="10"/>
+                <c:pt idx="0">
+                  <c:v>Air Operations</c:v>
+                </c:pt>
+                <c:pt idx="1">
+                  <c:v>Air Product</c:v>
+                </c:pt>
+                <c:pt idx="2">
+                  <c:v>Talent Mgmt</c:v>
+                </c:pt>
+                <c:pt idx="3">
+                  <c:v>Healthcare</c:v>
+                </c:pt>
+                <c:pt idx="4">
+                  <c:v>Financial</c:v>
+                </c:pt>
+                <c:pt idx="5">
+                  <c:v>Ocean Operations</c:v>
+                </c:pt>
+                <c:pt idx="6">
+                  <c:v>Technology</c:v>
+                </c:pt>
+                <c:pt idx="7">
+                  <c:v>Ocean Product</c:v>
+                </c:pt>
+                <c:pt idx="8">
+                  <c:v>High Tech (TL)</c:v>
+                </c:pt>
+                <c:pt idx="9">
+                  <c:v>Outros 3</c:v>
+                </c:pt>
+              </c:strCache>
+            </c:strRef>
+          </c:cat>
+          <c:val>
+            <c:numRef>
+              <c:f>Sheet1!$C$2:$C$11</c:f>
+              <c:numCache>
+                <c:formatCode>General</c:formatCode>
+                <c:ptCount val="10"/>
+                <c:pt idx="8">
+                  <c:v>1</c:v>
+                </c:pt>
+              </c:numCache>
+            </c:numRef>
+          </c:val>
+          <c:extLst>
+            <c:ext xmlns:c14="http://schemas.microsoft.com/office/drawing/2007/8/2/chart" uri="{6F2FDCE9-48DA-4B69-8628-5D25D57E5C99}">
+              <c14:invertSolidFillFmt>
+                <c14:spPr xmlns:c14="http://schemas.microsoft.com/office/drawing/2007/8/2/chart">
+                  <a:solidFill>
+                    <a:srgbClr val="FFFFFF"/>
+                  </a:solidFill>
+                </c14:spPr>
+              </c14:invertSolidFillFmt>
+            </c:ext>
+            <c:ext xmlns:c16="http://schemas.microsoft.com/office/drawing/2014/chart" uri="{C3380CC4-5D6E-409C-BE32-E72D297353CC}">
+              <c16:uniqueId val="{00000001-4DB0-4A9A-8736-7DA5879002DA}"/>
+            </c:ext>
+          </c:extLst>
+        </c:ser>
+        <c:dLbls>
+          <c:showLegendKey val="0"/>
+          <c:showVal val="1"/>
+          <c:showCatName val="0"/>
+          <c:showSerName val="0"/>
+          <c:showPercent val="0"/>
+          <c:showBubbleSize val="0"/>
+        </c:dLbls>
+        <c:gapWidth val="30"/>
+        <c:overlap val="100"/>
+        <c:axId val="-2068027336"/>
+        <c:axId val="-2113994440"/>
+      </c:barChart>
+      <c:catAx>
+        <c:axId val="-2068027336"/>
+        <c:scaling>
+          <c:orientation val="maxMin"/>
+        </c:scaling>
+        <c:delete val="0"/>
+        <c:axPos val="l"/>
+        <c:numFmt formatCode="General" sourceLinked="0"/>
+        <c:majorTickMark val="out"/>
+        <c:minorTickMark val="none"/>
+        <c:tickLblPos val="nextTo"/>
+        <c:spPr>
+          <a:ln>
+            <a:solidFill>
+              <a:srgbClr val="BFBFBF"/>
+            </a:solidFill>
+          </a:ln>
+        </c:spPr>
+        <c:txPr>
+          <a:bodyPr/>
+          <a:lstStyle/>
+          <a:p>
+            <a:pPr>
+              <a:defRPr sz="850"/>
+            </a:pPr>
+            <a:endParaRPr lang="en-US"/>
+          </a:p>
+        </c:txPr>
+        <c:crossAx val="-2113994440"/>
+        <c:crosses val="autoZero"/>
+        <c:auto val="1"/>
+        <c:lblAlgn val="ctr"/>
+        <c:lblOffset val="100"/>
+        <c:tickLblSkip val="1"/>
+        <c:noMultiLvlLbl val="0"/>
+      </c:catAx>
+      <c:valAx>
+        <c:axId val="-2113994440"/>
+        <c:scaling>
+          <c:orientation val="minMax"/>
+        </c:scaling>
+        <c:delete val="1"/>
+        <c:axPos val="t"/>
+        <c:numFmt formatCode="General" sourceLinked="1"/>
+        <c:majorTickMark val="out"/>
+        <c:minorTickMark val="none"/>
+        <c:tickLblPos val="nextTo"/>
+        <c:crossAx val="-2068027336"/>
+        <c:crosses val="autoZero"/>
+        <c:crossBetween val="between"/>
+      </c:valAx>
+    </c:plotArea>
+    <c:legend>
+      <c:legendPos val="t"/>
+      <c:overlay val="0"/>
+      <c:txPr>
+        <a:bodyPr/>
+        <a:lstStyle/>
+        <a:p>
+          <a:pPr>
+            <a:defRPr sz="800"/>
+          </a:pPr>
+          <a:endParaRPr lang="en-US"/>
+        </a:p>
+      </c:txPr>
+    </c:legend>
+    <c:plotVisOnly val="1"/>
+    <c:dispBlanksAs val="gap"/>
+    <c:showDLblsOverMax val="1"/>
+  </c:chart>
+  <c:txPr>
+    <a:bodyPr/>
+    <a:lstStyle/>
+    <a:p>
+      <a:pPr>
+        <a:defRPr sz="850">
+          <a:solidFill>
+            <a:srgbClr val="262626"/>
+          </a:solidFill>
+          <a:latin typeface="Arial"/>
+        </a:defRPr>
+      </a:pPr>
+      <a:endParaRPr lang="en-US"/>
+    </a:p>
+  </c:txPr>
+  <c:externalData r:id="rId1">
+    <c:autoUpdate val="0"/>
+  </c:externalData>
+</c:chartSpace>
+</file>
+
+<file path=ppt/charts/chart3.xml><?xml version="1.0" encoding="utf-8"?>
+<c:chartSpace xmlns:c="http://schemas.openxmlformats.org/drawingml/2006/chart" xmlns:a="http://schemas.openxmlformats.org/drawingml/2006/main" xmlns:r="http://schemas.openxmlformats.org/officeDocument/2006/relationships" xmlns:c16r2="http://schemas.microsoft.com/office/drawing/2015/06/chart">
+  <c:date1904 val="0"/>
+  <c:lang val="pt-BR"/>
+  <c:roundedCorners val="1"/>
+  <c:style val="2"/>
+  <c:chart>
+    <c:autoTitleDeleted val="1"/>
+    <c:plotArea>
+      <c:layout/>
+      <c:barChart>
+        <c:barDir val="bar"/>
+        <c:grouping val="stacked"/>
+        <c:varyColors val="1"/>
+        <c:ser>
+          <c:idx val="0"/>
+          <c:order val="0"/>
+          <c:tx>
+            <c:strRef>
+              <c:f>Sheet1!$B$1</c:f>
+              <c:strCache>
+                <c:ptCount val="1"/>
+                <c:pt idx="0">
+                  <c:v>Diretos</c:v>
+                </c:pt>
+              </c:strCache>
+            </c:strRef>
+          </c:tx>
+          <c:spPr>
+            <a:solidFill>
+              <a:srgbClr val="6B2D6B"/>
+            </a:solidFill>
+          </c:spPr>
+          <c:invertIfNegative val="1"/>
+          <c:dLbls>
+            <c:spPr>
+              <a:noFill/>
+              <a:ln>
+                <a:noFill/>
+              </a:ln>
+              <a:effectLst/>
+            </c:spPr>
+            <c:txPr>
+              <a:bodyPr/>
+              <a:lstStyle/>
+              <a:p>
+                <a:pPr>
+                  <a:defRPr sz="950">
+                    <a:solidFill>
+                      <a:srgbClr val="FFFFFF"/>
+                    </a:solidFill>
+                  </a:defRPr>
+                </a:pPr>
+                <a:endParaRPr lang="en-US"/>
+              </a:p>
+            </c:txPr>
+            <c:showLegendKey val="0"/>
+            <c:showVal val="1"/>
+            <c:showCatName val="0"/>
+            <c:showSerName val="0"/>
+            <c:showPercent val="0"/>
+            <c:showBubbleSize val="0"/>
+            <c:showLeaderLines val="0"/>
+            <c:extLst>
+              <c:ext xmlns:c15="http://schemas.microsoft.com/office/drawing/2012/chart" uri="{CE6537A1-D6FC-4f65-9D91-7224C49458BB}">
+                <c15:showLeaderLines val="0"/>
+              </c:ext>
+            </c:extLst>
+          </c:dLbls>
+          <c:cat>
+            <c:strRef>
+              <c:f>Sheet1!$A$2:$A$6</c:f>
+              <c:strCache>
+                <c:ptCount val="5"/>
+                <c:pt idx="0">
+                  <c:v>Carol Mendoza (head)</c:v>
+                </c:pt>
+                <c:pt idx="1">
+                  <c:v>Daniela Bueno (lead coord.)</c:v>
+                </c:pt>
+                <c:pt idx="2">
+                  <c:v>Thais Cosenza (Sr. TL CC)</c:v>
+                </c:pt>
+                <c:pt idx="3">
+                  <c:v>Pamela Ibarra (TL)</c:v>
+                </c:pt>
+                <c:pt idx="4">
+                  <c:v>Gabriella Pereira (TL)</c:v>
+                </c:pt>
+              </c:strCache>
+            </c:strRef>
+          </c:cat>
+          <c:val>
+            <c:numRef>
+              <c:f>Sheet1!$B$2:$B$6</c:f>
+              <c:numCache>
+                <c:formatCode>General</c:formatCode>
+                <c:ptCount val="5"/>
+                <c:pt idx="0">
+                  <c:v>4</c:v>
+                </c:pt>
+                <c:pt idx="1">
+                  <c:v>4</c:v>
+                </c:pt>
+                <c:pt idx="2">
+                  <c:v>4</c:v>
+                </c:pt>
+                <c:pt idx="3">
+                  <c:v>12</c:v>
+                </c:pt>
+                <c:pt idx="4">
+                  <c:v>9</c:v>
+                </c:pt>
+              </c:numCache>
+            </c:numRef>
+          </c:val>
+          <c:extLst>
+            <c:ext xmlns:c14="http://schemas.microsoft.com/office/drawing/2007/8/2/chart" uri="{6F2FDCE9-48DA-4B69-8628-5D25D57E5C99}">
+              <c14:invertSolidFillFmt>
+                <c14:spPr xmlns:c14="http://schemas.microsoft.com/office/drawing/2007/8/2/chart">
+                  <a:solidFill>
+                    <a:srgbClr val="FFFFFF"/>
+                  </a:solidFill>
+                </c14:spPr>
+              </c14:invertSolidFillFmt>
+            </c:ext>
+            <c:ext xmlns:c16="http://schemas.microsoft.com/office/drawing/2014/chart" uri="{C3380CC4-5D6E-409C-BE32-E72D297353CC}">
+              <c16:uniqueId val="{00000000-77D7-445C-8899-73759AF0F55A}"/>
+            </c:ext>
+          </c:extLst>
+        </c:ser>
+        <c:ser>
+          <c:idx val="1"/>
+          <c:order val="1"/>
+          <c:tx>
+            <c:strRef>
+              <c:f>Sheet1!$C$1</c:f>
+              <c:strCache>
+                <c:ptCount val="1"/>
+                <c:pt idx="0">
+                  <c:v>Indiretos</c:v>
+                </c:pt>
+              </c:strCache>
+            </c:strRef>
+          </c:tx>
+          <c:spPr>
+            <a:solidFill>
+              <a:srgbClr val="66C1C0"/>
+            </a:solidFill>
+          </c:spPr>
+          <c:invertIfNegative val="1"/>
+          <c:dLbls>
+            <c:spPr>
+              <a:noFill/>
+              <a:ln>
+                <a:noFill/>
+              </a:ln>
+              <a:effectLst/>
+            </c:spPr>
+            <c:txPr>
+              <a:bodyPr/>
+              <a:lstStyle/>
+              <a:p>
+                <a:pPr>
+                  <a:defRPr sz="950">
+                    <a:solidFill>
+                      <a:srgbClr val="FFFFFF"/>
+                    </a:solidFill>
+                  </a:defRPr>
+                </a:pPr>
+                <a:endParaRPr lang="en-US"/>
+              </a:p>
+            </c:txPr>
+            <c:showLegendKey val="0"/>
+            <c:showVal val="1"/>
+            <c:showCatName val="0"/>
+            <c:showSerName val="0"/>
+            <c:showPercent val="0"/>
+            <c:showBubbleSize val="0"/>
+            <c:showLeaderLines val="0"/>
+            <c:extLst>
+              <c:ext xmlns:c15="http://schemas.microsoft.com/office/drawing/2012/chart" uri="{CE6537A1-D6FC-4f65-9D91-7224C49458BB}">
+                <c15:showLeaderLines val="0"/>
+              </c:ext>
+            </c:extLst>
+          </c:dLbls>
+          <c:cat>
+            <c:strRef>
+              <c:f>Sheet1!$A$2:$A$6</c:f>
+              <c:strCache>
+                <c:ptCount val="5"/>
+                <c:pt idx="0">
+                  <c:v>Carol Mendoza (head)</c:v>
+                </c:pt>
+                <c:pt idx="1">
+                  <c:v>Daniela Bueno (lead coord.)</c:v>
+                </c:pt>
+                <c:pt idx="2">
+                  <c:v>Thais Cosenza (Sr. TL CC)</c:v>
+                </c:pt>
+                <c:pt idx="3">
+                  <c:v>Pamela Ibarra (TL)</c:v>
+                </c:pt>
+                <c:pt idx="4">
+                  <c:v>Gabriella Pereira (TL)</c:v>
+                </c:pt>
+              </c:strCache>
+            </c:strRef>
+          </c:cat>
+          <c:val>
+            <c:numRef>
+              <c:f>Sheet1!$C$2:$C$6</c:f>
+              <c:numCache>
+                <c:formatCode>General</c:formatCode>
+                <c:ptCount val="5"/>
+                <c:pt idx="0">
+                  <c:v>78</c:v>
+                </c:pt>
+                <c:pt idx="1">
+                  <c:v>43</c:v>
+                </c:pt>
+                <c:pt idx="2">
+                  <c:v>23</c:v>
+                </c:pt>
+                <c:pt idx="3">
+                  <c:v>9</c:v>
+                </c:pt>
+                <c:pt idx="4">
+                  <c:v>7</c:v>
+                </c:pt>
+              </c:numCache>
+            </c:numRef>
+          </c:val>
+          <c:extLst>
+            <c:ext xmlns:c14="http://schemas.microsoft.com/office/drawing/2007/8/2/chart" uri="{6F2FDCE9-48DA-4B69-8628-5D25D57E5C99}">
+              <c14:invertSolidFillFmt>
+                <c14:spPr xmlns:c14="http://schemas.microsoft.com/office/drawing/2007/8/2/chart">
+                  <a:solidFill>
+                    <a:srgbClr val="FFFFFF"/>
+                  </a:solidFill>
+                </c14:spPr>
+              </c14:invertSolidFillFmt>
+            </c:ext>
+            <c:ext xmlns:c16="http://schemas.microsoft.com/office/drawing/2014/chart" uri="{C3380CC4-5D6E-409C-BE32-E72D297353CC}">
+              <c16:uniqueId val="{00000001-77D7-445C-8899-73759AF0F55A}"/>
+            </c:ext>
+          </c:extLst>
+        </c:ser>
+        <c:dLbls>
+          <c:showLegendKey val="0"/>
+          <c:showVal val="1"/>
+          <c:showCatName val="0"/>
+          <c:showSerName val="0"/>
+          <c:showPercent val="0"/>
+          <c:showBubbleSize val="0"/>
+        </c:dLbls>
+        <c:gapWidth val="40"/>
+        <c:overlap val="100"/>
+        <c:axId val="-2068027336"/>
+        <c:axId val="-2113994440"/>
+      </c:barChart>
+      <c:catAx>
+        <c:axId val="-2068027336"/>
+        <c:scaling>
+          <c:orientation val="maxMin"/>
+        </c:scaling>
+        <c:delete val="0"/>
+        <c:axPos val="l"/>
+        <c:numFmt formatCode="General" sourceLinked="0"/>
         <c:majorTickMark val="out"/>
         <c:minorTickMark val="none"/>
         <c:tickLblPos val="nextTo"/>
@@ -459,6 +1228,7 @@
             <a:pPr>
               <a:defRPr sz="950"/>
             </a:pPr>
+            <a:endParaRPr lang="en-US"/>
           </a:p>
         </c:txPr>
         <c:crossAx val="-2113994440"/>
@@ -471,14 +1241,18 @@
       </c:catAx>
       <c:valAx>
         <c:axId val="-2113994440"/>
-        <c:scaling/>
-        <c:delete/>
-        <c:axPos val="b"/>
+        <c:scaling>
+          <c:orientation val="minMax"/>
+        </c:scaling>
+        <c:delete val="1"/>
+        <c:axPos val="t"/>
+        <c:numFmt formatCode="General" sourceLinked="1"/>
         <c:majorTickMark val="out"/>
         <c:minorTickMark val="none"/>
         <c:tickLblPos val="nextTo"/>
         <c:crossAx val="-2068027336"/>
         <c:crosses val="autoZero"/>
+        <c:crossBetween val="between"/>
       </c:valAx>
     </c:plotArea>
     <c:legend>
@@ -491,529 +1265,13 @@
           <a:pPr>
             <a:defRPr sz="900"/>
           </a:pPr>
+          <a:endParaRPr lang="en-US"/>
         </a:p>
       </c:txPr>
     </c:legend>
+    <c:plotVisOnly val="1"/>
     <c:dispBlanksAs val="gap"/>
-  </c:chart>
-  <c:txPr>
-    <a:bodyPr/>
-    <a:lstStyle/>
-    <a:p>
-      <a:pPr>
-        <a:defRPr sz="950">
-          <a:solidFill>
-            <a:srgbClr val="262626"/>
-          </a:solidFill>
-          <a:latin typeface="Arial"/>
-        </a:defRPr>
-      </a:pPr>
-      <a:endParaRPr lang="en-US"/>
-    </a:p>
-  </c:txPr>
-  <c:externalData r:id="rId1">
-    <c:autoUpdate val="0"/>
-  </c:externalData>
-</c:chartSpace>
-</file>
-
-<file path=ppt/charts/chart2.xml><?xml version="1.0" encoding="utf-8"?>
-<c:chartSpace xmlns:c="http://schemas.openxmlformats.org/drawingml/2006/chart" xmlns:a="http://schemas.openxmlformats.org/drawingml/2006/main" xmlns:r="http://schemas.openxmlformats.org/officeDocument/2006/relationships">
-  <c:date1904 val="0"/>
-  <c:chart>
-    <c:autoTitleDeleted val="1"/>
-    <c:plotArea>
-      <c:barChart>
-        <c:barDir val="bar"/>
-        <c:grouping val="stacked"/>
-        <c:ser>
-          <c:idx val="0"/>
-          <c:order val="0"/>
-          <c:tx>
-            <c:strRef>
-              <c:f>Sheet1!$B$1</c:f>
-              <c:strCache>
-                <c:ptCount val="1"/>
-                <c:pt idx="0">
-                  <c:v>Publicadas no Gupy</c:v>
-                </c:pt>
-              </c:strCache>
-            </c:strRef>
-          </c:tx>
-          <c:spPr>
-            <a:solidFill>
-              <a:srgbClr val="009796"/>
-            </a:solidFill>
-          </c:spPr>
-          <c:cat>
-            <c:strRef>
-              <c:f>Sheet1!$A$2:$A$9</c:f>
-              <c:strCache>
-                <c:ptCount val="8"/>
-                <c:pt idx="0">
-                  <c:v>COO</c:v>
-                </c:pt>
-                <c:pt idx="1">
-                  <c:v>CITO</c:v>
-                </c:pt>
-                <c:pt idx="2">
-                  <c:v>CFSO</c:v>
-                </c:pt>
-                <c:pt idx="3">
-                  <c:v>Air Product</c:v>
-                </c:pt>
-                <c:pt idx="4">
-                  <c:v>Talent</c:v>
-                </c:pt>
-                <c:pt idx="5">
-                  <c:v>CCO</c:v>
-                </c:pt>
-                <c:pt idx="6">
-                  <c:v>Ocean Prod.</c:v>
-                </c:pt>
-                <c:pt idx="7">
-                  <c:v>Services</c:v>
-                </c:pt>
-              </c:strCache>
-            </c:strRef>
-          </c:cat>
-          <c:val>
-            <c:numRef>
-              <c:f>Sheet1!$B$2:$B$9</c:f>
-              <c:numCache>
-                <c:formatCode>General</c:formatCode>
-                <c:ptCount val="8"/>
-                <c:pt idx="0">
-                  <c:v>6</c:v>
-                </c:pt>
-                <c:pt idx="5">
-                  <c:v>2</c:v>
-                </c:pt>
-              </c:numCache>
-            </c:numRef>
-          </c:val>
-        </c:ser>
-        <c:ser>
-          <c:idx val="1"/>
-          <c:order val="1"/>
-          <c:tx>
-            <c:strRef>
-              <c:f>Sheet1!$C$1</c:f>
-              <c:strCache>
-                <c:ptCount val="1"/>
-                <c:pt idx="0">
-                  <c:v>Sem processo</c:v>
-                </c:pt>
-              </c:strCache>
-            </c:strRef>
-          </c:tx>
-          <c:spPr>
-            <a:solidFill>
-              <a:srgbClr val="6B2D6B"/>
-            </a:solidFill>
-          </c:spPr>
-          <c:cat>
-            <c:strRef>
-              <c:f>Sheet1!$A$2:$A$9</c:f>
-              <c:strCache>
-                <c:ptCount val="8"/>
-                <c:pt idx="0">
-                  <c:v>COO</c:v>
-                </c:pt>
-                <c:pt idx="1">
-                  <c:v>CITO</c:v>
-                </c:pt>
-                <c:pt idx="2">
-                  <c:v>CFSO</c:v>
-                </c:pt>
-                <c:pt idx="3">
-                  <c:v>Air Product</c:v>
-                </c:pt>
-                <c:pt idx="4">
-                  <c:v>Talent</c:v>
-                </c:pt>
-                <c:pt idx="5">
-                  <c:v>CCO</c:v>
-                </c:pt>
-                <c:pt idx="6">
-                  <c:v>Ocean Prod.</c:v>
-                </c:pt>
-                <c:pt idx="7">
-                  <c:v>Services</c:v>
-                </c:pt>
-              </c:strCache>
-            </c:strRef>
-          </c:cat>
-          <c:val>
-            <c:numRef>
-              <c:f>Sheet1!$C$2:$C$9</c:f>
-              <c:numCache>
-                <c:formatCode>General</c:formatCode>
-                <c:ptCount val="8"/>
-                <c:pt idx="0">
-                  <c:v>19</c:v>
-                </c:pt>
-                <c:pt idx="1">
-                  <c:v>2</c:v>
-                </c:pt>
-                <c:pt idx="2">
-                  <c:v>3</c:v>
-                </c:pt>
-                <c:pt idx="3">
-                  <c:v>7</c:v>
-                </c:pt>
-                <c:pt idx="4">
-                  <c:v>4</c:v>
-                </c:pt>
-                <c:pt idx="5">
-                  <c:v>3</c:v>
-                </c:pt>
-                <c:pt idx="6">
-                  <c:v>2</c:v>
-                </c:pt>
-                <c:pt idx="7">
-                  <c:v>1</c:v>
-                </c:pt>
-              </c:numCache>
-            </c:numRef>
-          </c:val>
-        </c:ser>
-        <c:dLbls>
-          <c:txPr>
-            <a:bodyPr/>
-            <a:lstStyle/>
-            <a:p>
-              <a:pPr>
-                <a:defRPr sz="950">
-                  <a:solidFill>
-                    <a:srgbClr val="FFFFFF"/>
-                  </a:solidFill>
-                </a:defRPr>
-              </a:pPr>
-            </a:p>
-          </c:txPr>
-          <c:showLegendKey val="0"/>
-          <c:showVal val="1"/>
-          <c:showCatName val="0"/>
-          <c:showSerName val="0"/>
-          <c:showPercent val="0"/>
-          <c:showBubbleSize val="0"/>
-          <c:showLeaderLines val="1"/>
-        </c:dLbls>
-        <c:gapWidth val="35"/>
-        <c:overlap val="100"/>
-        <c:axId val="-2068027336"/>
-        <c:axId val="-2113994440"/>
-      </c:barChart>
-      <c:catAx>
-        <c:axId val="-2068027336"/>
-        <c:scaling>
-          <c:orientation val="maxMin"/>
-        </c:scaling>
-        <c:delete val="0"/>
-        <c:axPos val="l"/>
-        <c:majorTickMark val="out"/>
-        <c:minorTickMark val="none"/>
-        <c:tickLblPos val="nextTo"/>
-        <c:spPr>
-          <a:ln>
-            <a:solidFill>
-              <a:srgbClr val="BFBFBF"/>
-            </a:solidFill>
-          </a:ln>
-        </c:spPr>
-        <c:txPr>
-          <a:bodyPr/>
-          <a:lstStyle/>
-          <a:p>
-            <a:pPr>
-              <a:defRPr sz="950"/>
-            </a:pPr>
-          </a:p>
-        </c:txPr>
-        <c:crossAx val="-2113994440"/>
-        <c:crosses val="autoZero"/>
-        <c:auto val="1"/>
-        <c:lblAlgn val="ctr"/>
-        <c:lblOffset val="100"/>
-        <c:tickLblSkip val="1"/>
-        <c:noMultiLvlLbl val="0"/>
-      </c:catAx>
-      <c:valAx>
-        <c:axId val="-2113994440"/>
-        <c:scaling/>
-        <c:delete/>
-        <c:axPos val="b"/>
-        <c:majorTickMark val="out"/>
-        <c:minorTickMark val="none"/>
-        <c:tickLblPos val="nextTo"/>
-        <c:crossAx val="-2068027336"/>
-        <c:crosses val="autoZero"/>
-      </c:valAx>
-    </c:plotArea>
-    <c:legend>
-      <c:legendPos val="t"/>
-      <c:overlay val="0"/>
-      <c:txPr>
-        <a:bodyPr/>
-        <a:lstStyle/>
-        <a:p>
-          <a:pPr>
-            <a:defRPr sz="900"/>
-          </a:pPr>
-        </a:p>
-      </c:txPr>
-    </c:legend>
-    <c:dispBlanksAs val="gap"/>
-  </c:chart>
-  <c:txPr>
-    <a:bodyPr/>
-    <a:lstStyle/>
-    <a:p>
-      <a:pPr>
-        <a:defRPr sz="950">
-          <a:solidFill>
-            <a:srgbClr val="262626"/>
-          </a:solidFill>
-          <a:latin typeface="Arial"/>
-        </a:defRPr>
-      </a:pPr>
-      <a:endParaRPr lang="en-US"/>
-    </a:p>
-  </c:txPr>
-  <c:externalData r:id="rId1">
-    <c:autoUpdate val="0"/>
-  </c:externalData>
-</c:chartSpace>
-</file>
-
-<file path=ppt/charts/chart3.xml><?xml version="1.0" encoding="utf-8"?>
-<c:chartSpace xmlns:c="http://schemas.openxmlformats.org/drawingml/2006/chart" xmlns:a="http://schemas.openxmlformats.org/drawingml/2006/main" xmlns:r="http://schemas.openxmlformats.org/officeDocument/2006/relationships">
-  <c:date1904 val="0"/>
-  <c:chart>
-    <c:autoTitleDeleted val="1"/>
-    <c:plotArea>
-      <c:barChart>
-        <c:barDir val="col"/>
-        <c:grouping val="clustered"/>
-        <c:ser>
-          <c:idx val="0"/>
-          <c:order val="0"/>
-          <c:tx>
-            <c:strRef>
-              <c:f>Sheet1!$B$1</c:f>
-              <c:strCache>
-                <c:ptCount val="1"/>
-                <c:pt idx="0">
-                  <c:v>Pessoas</c:v>
-                </c:pt>
-              </c:strCache>
-            </c:strRef>
-          </c:tx>
-          <c:spPr>
-            <a:solidFill>
-              <a:srgbClr val="66C1C0"/>
-            </a:solidFill>
-          </c:spPr>
-          <c:cat>
-            <c:strRef>
-              <c:f>Sheet1!$A$2:$A$6</c:f>
-              <c:strCache>
-                <c:ptCount val="5"/>
-                <c:pt idx="0">
-                  <c:v>L4 · head</c:v>
-                </c:pt>
-                <c:pt idx="1">
-                  <c:v>L5</c:v>
-                </c:pt>
-                <c:pt idx="2">
-                  <c:v>L6</c:v>
-                </c:pt>
-                <c:pt idx="3">
-                  <c:v>L7</c:v>
-                </c:pt>
-                <c:pt idx="4">
-                  <c:v>L8</c:v>
-                </c:pt>
-              </c:strCache>
-            </c:strRef>
-          </c:cat>
-          <c:val>
-            <c:numRef>
-              <c:f>Sheet1!$B$2:$B$6</c:f>
-              <c:numCache>
-                <c:formatCode>General</c:formatCode>
-                <c:ptCount val="5"/>
-                <c:pt idx="0">
-                  <c:v>1</c:v>
-                </c:pt>
-                <c:pt idx="1">
-                  <c:v>4</c:v>
-                </c:pt>
-                <c:pt idx="2">
-                  <c:v>12</c:v>
-                </c:pt>
-                <c:pt idx="3">
-                  <c:v>52</c:v>
-                </c:pt>
-                <c:pt idx="4">
-                  <c:v>17</c:v>
-                </c:pt>
-              </c:numCache>
-            </c:numRef>
-          </c:val>
-        </c:ser>
-        <c:ser>
-          <c:idx val="1"/>
-          <c:order val="1"/>
-          <c:tx>
-            <c:strRef>
-              <c:f>Sheet1!$C$1</c:f>
-              <c:strCache>
-                <c:ptCount val="1"/>
-                <c:pt idx="0">
-                  <c:v>Gestores</c:v>
-                </c:pt>
-              </c:strCache>
-            </c:strRef>
-          </c:tx>
-          <c:spPr>
-            <a:solidFill>
-              <a:srgbClr val="6B2D6B"/>
-            </a:solidFill>
-          </c:spPr>
-          <c:cat>
-            <c:strRef>
-              <c:f>Sheet1!$A$2:$A$6</c:f>
-              <c:strCache>
-                <c:ptCount val="5"/>
-                <c:pt idx="0">
-                  <c:v>L4 · head</c:v>
-                </c:pt>
-                <c:pt idx="1">
-                  <c:v>L5</c:v>
-                </c:pt>
-                <c:pt idx="2">
-                  <c:v>L6</c:v>
-                </c:pt>
-                <c:pt idx="3">
-                  <c:v>L7</c:v>
-                </c:pt>
-                <c:pt idx="4">
-                  <c:v>L8</c:v>
-                </c:pt>
-              </c:strCache>
-            </c:strRef>
-          </c:cat>
-          <c:val>
-            <c:numRef>
-              <c:f>Sheet1!$C$2:$C$6</c:f>
-              <c:numCache>
-                <c:formatCode>General</c:formatCode>
-                <c:ptCount val="5"/>
-                <c:pt idx="0">
-                  <c:v>1</c:v>
-                </c:pt>
-                <c:pt idx="1">
-                  <c:v>3</c:v>
-                </c:pt>
-                <c:pt idx="2">
-                  <c:v>7</c:v>
-                </c:pt>
-                <c:pt idx="3">
-                  <c:v>4</c:v>
-                </c:pt>
-              </c:numCache>
-            </c:numRef>
-          </c:val>
-        </c:ser>
-        <c:dLbls>
-          <c:txPr>
-            <a:bodyPr/>
-            <a:lstStyle/>
-            <a:p>
-              <a:pPr>
-                <a:defRPr sz="950">
-                  <a:solidFill>
-                    <a:srgbClr val="262626"/>
-                  </a:solidFill>
-                </a:defRPr>
-              </a:pPr>
-            </a:p>
-          </c:txPr>
-          <c:dLblPos val="outEnd"/>
-          <c:showLegendKey val="0"/>
-          <c:showVal val="1"/>
-          <c:showCatName val="0"/>
-          <c:showSerName val="0"/>
-          <c:showPercent val="0"/>
-          <c:showBubbleSize val="0"/>
-          <c:showLeaderLines val="1"/>
-        </c:dLbls>
-        <c:gapWidth val="60"/>
-        <c:axId val="-2068027336"/>
-        <c:axId val="-2113994440"/>
-      </c:barChart>
-      <c:catAx>
-        <c:axId val="-2068027336"/>
-        <c:scaling>
-          <c:orientation val="minMax"/>
-        </c:scaling>
-        <c:delete val="0"/>
-        <c:axPos val="b"/>
-        <c:majorTickMark val="out"/>
-        <c:minorTickMark val="none"/>
-        <c:tickLblPos val="nextTo"/>
-        <c:spPr>
-          <a:ln>
-            <a:solidFill>
-              <a:srgbClr val="BFBFBF"/>
-            </a:solidFill>
-          </a:ln>
-        </c:spPr>
-        <c:txPr>
-          <a:bodyPr/>
-          <a:lstStyle/>
-          <a:p>
-            <a:pPr>
-              <a:defRPr sz="950"/>
-            </a:pPr>
-          </a:p>
-        </c:txPr>
-        <c:crossAx val="-2113994440"/>
-        <c:crosses val="autoZero"/>
-        <c:auto val="1"/>
-        <c:lblAlgn val="ctr"/>
-        <c:lblOffset val="100"/>
-        <c:tickLblSkip val="1"/>
-        <c:noMultiLvlLbl val="0"/>
-      </c:catAx>
-      <c:valAx>
-        <c:axId val="-2113994440"/>
-        <c:scaling/>
-        <c:delete/>
-        <c:axPos val="l"/>
-        <c:majorTickMark val="out"/>
-        <c:minorTickMark val="none"/>
-        <c:tickLblPos val="nextTo"/>
-        <c:crossAx val="-2068027336"/>
-        <c:crosses val="autoZero"/>
-      </c:valAx>
-    </c:plotArea>
-    <c:legend>
-      <c:legendPos val="t"/>
-      <c:overlay val="0"/>
-      <c:txPr>
-        <a:bodyPr/>
-        <a:lstStyle/>
-        <a:p>
-          <a:pPr>
-            <a:defRPr sz="900"/>
-          </a:pPr>
-        </a:p>
-      </c:txPr>
-    </c:legend>
-    <c:dispBlanksAs val="gap"/>
+    <c:showDLblsOverMax val="1"/>
   </c:chart>
   <c:txPr>
     <a:bodyPr/>
@@ -1037,14 +1295,19 @@
 </file>
 
 <file path=ppt/charts/chart4.xml><?xml version="1.0" encoding="utf-8"?>
-<c:chartSpace xmlns:c="http://schemas.openxmlformats.org/drawingml/2006/chart" xmlns:a="http://schemas.openxmlformats.org/drawingml/2006/main" xmlns:r="http://schemas.openxmlformats.org/officeDocument/2006/relationships">
+<c:chartSpace xmlns:c="http://schemas.openxmlformats.org/drawingml/2006/chart" xmlns:a="http://schemas.openxmlformats.org/drawingml/2006/main" xmlns:r="http://schemas.openxmlformats.org/officeDocument/2006/relationships" xmlns:c16r2="http://schemas.microsoft.com/office/drawing/2015/06/chart">
   <c:date1904 val="0"/>
+  <c:lang val="pt-BR"/>
+  <c:roundedCorners val="1"/>
+  <c:style val="2"/>
   <c:chart>
     <c:autoTitleDeleted val="1"/>
     <c:plotArea>
+      <c:layout/>
       <c:barChart>
         <c:barDir val="bar"/>
         <c:grouping val="stacked"/>
+        <c:varyColors val="1"/>
         <c:ser>
           <c:idx val="0"/>
           <c:order val="0"/>
@@ -1064,6 +1327,42 @@
               <a:srgbClr val="009796"/>
             </a:solidFill>
           </c:spPr>
+          <c:invertIfNegative val="1"/>
+          <c:dLbls>
+            <c:spPr>
+              <a:noFill/>
+              <a:ln>
+                <a:noFill/>
+              </a:ln>
+              <a:effectLst/>
+            </c:spPr>
+            <c:txPr>
+              <a:bodyPr/>
+              <a:lstStyle/>
+              <a:p>
+                <a:pPr>
+                  <a:defRPr sz="1000">
+                    <a:solidFill>
+                      <a:srgbClr val="FFFFFF"/>
+                    </a:solidFill>
+                  </a:defRPr>
+                </a:pPr>
+                <a:endParaRPr lang="en-US"/>
+              </a:p>
+            </c:txPr>
+            <c:showLegendKey val="0"/>
+            <c:showVal val="1"/>
+            <c:showCatName val="0"/>
+            <c:showSerName val="0"/>
+            <c:showPercent val="0"/>
+            <c:showBubbleSize val="0"/>
+            <c:showLeaderLines val="0"/>
+            <c:extLst>
+              <c:ext xmlns:c15="http://schemas.microsoft.com/office/drawing/2012/chart" uri="{CE6537A1-D6FC-4f65-9D91-7224C49458BB}">
+                <c15:showLeaderLines val="0"/>
+              </c:ext>
+            </c:extLst>
+          </c:dLbls>
           <c:cat>
             <c:strRef>
               <c:f>Sheet1!$A$2:$A$4</c:f>
@@ -1096,6 +1395,20 @@
               </c:numCache>
             </c:numRef>
           </c:val>
+          <c:extLst>
+            <c:ext xmlns:c14="http://schemas.microsoft.com/office/drawing/2007/8/2/chart" uri="{6F2FDCE9-48DA-4B69-8628-5D25D57E5C99}">
+              <c14:invertSolidFillFmt>
+                <c14:spPr xmlns:c14="http://schemas.microsoft.com/office/drawing/2007/8/2/chart">
+                  <a:solidFill>
+                    <a:srgbClr val="FFFFFF"/>
+                  </a:solidFill>
+                </c14:spPr>
+              </c14:invertSolidFillFmt>
+            </c:ext>
+            <c:ext xmlns:c16="http://schemas.microsoft.com/office/drawing/2014/chart" uri="{C3380CC4-5D6E-409C-BE32-E72D297353CC}">
+              <c16:uniqueId val="{00000000-3938-4E81-BF19-71A447943072}"/>
+            </c:ext>
+          </c:extLst>
         </c:ser>
         <c:ser>
           <c:idx val="1"/>
@@ -1116,6 +1429,42 @@
               <a:srgbClr val="6B2D6B"/>
             </a:solidFill>
           </c:spPr>
+          <c:invertIfNegative val="1"/>
+          <c:dLbls>
+            <c:spPr>
+              <a:noFill/>
+              <a:ln>
+                <a:noFill/>
+              </a:ln>
+              <a:effectLst/>
+            </c:spPr>
+            <c:txPr>
+              <a:bodyPr/>
+              <a:lstStyle/>
+              <a:p>
+                <a:pPr>
+                  <a:defRPr sz="1000">
+                    <a:solidFill>
+                      <a:srgbClr val="FFFFFF"/>
+                    </a:solidFill>
+                  </a:defRPr>
+                </a:pPr>
+                <a:endParaRPr lang="en-US"/>
+              </a:p>
+            </c:txPr>
+            <c:showLegendKey val="0"/>
+            <c:showVal val="1"/>
+            <c:showCatName val="0"/>
+            <c:showSerName val="0"/>
+            <c:showPercent val="0"/>
+            <c:showBubbleSize val="0"/>
+            <c:showLeaderLines val="0"/>
+            <c:extLst>
+              <c:ext xmlns:c15="http://schemas.microsoft.com/office/drawing/2012/chart" uri="{CE6537A1-D6FC-4f65-9D91-7224C49458BB}">
+                <c15:showLeaderLines val="0"/>
+              </c:ext>
+            </c:extLst>
+          </c:dLbls>
           <c:cat>
             <c:strRef>
               <c:f>Sheet1!$A$2:$A$4</c:f>
@@ -1148,28 +1497,28 @@
               </c:numCache>
             </c:numRef>
           </c:val>
-        </c:ser>
-        <c:dLbls>
-          <c:txPr>
-            <a:bodyPr/>
-            <a:lstStyle/>
-            <a:p>
-              <a:pPr>
-                <a:defRPr sz="1000">
+          <c:extLst>
+            <c:ext xmlns:c14="http://schemas.microsoft.com/office/drawing/2007/8/2/chart" uri="{6F2FDCE9-48DA-4B69-8628-5D25D57E5C99}">
+              <c14:invertSolidFillFmt>
+                <c14:spPr xmlns:c14="http://schemas.microsoft.com/office/drawing/2007/8/2/chart">
                   <a:solidFill>
                     <a:srgbClr val="FFFFFF"/>
                   </a:solidFill>
-                </a:defRPr>
-              </a:pPr>
-            </a:p>
-          </c:txPr>
+                </c14:spPr>
+              </c14:invertSolidFillFmt>
+            </c:ext>
+            <c:ext xmlns:c16="http://schemas.microsoft.com/office/drawing/2014/chart" uri="{C3380CC4-5D6E-409C-BE32-E72D297353CC}">
+              <c16:uniqueId val="{00000001-3938-4E81-BF19-71A447943072}"/>
+            </c:ext>
+          </c:extLst>
+        </c:ser>
+        <c:dLbls>
           <c:showLegendKey val="0"/>
           <c:showVal val="1"/>
           <c:showCatName val="0"/>
           <c:showSerName val="0"/>
           <c:showPercent val="0"/>
           <c:showBubbleSize val="0"/>
-          <c:showLeaderLines val="1"/>
         </c:dLbls>
         <c:gapWidth val="45"/>
         <c:overlap val="100"/>
@@ -1183,6 +1532,7 @@
         </c:scaling>
         <c:delete val="0"/>
         <c:axPos val="l"/>
+        <c:numFmt formatCode="General" sourceLinked="0"/>
         <c:majorTickMark val="out"/>
         <c:minorTickMark val="none"/>
         <c:tickLblPos val="nextTo"/>
@@ -1200,6 +1550,7 @@
             <a:pPr>
               <a:defRPr sz="1000"/>
             </a:pPr>
+            <a:endParaRPr lang="en-US"/>
           </a:p>
         </c:txPr>
         <c:crossAx val="-2113994440"/>
@@ -1212,14 +1563,18 @@
       </c:catAx>
       <c:valAx>
         <c:axId val="-2113994440"/>
-        <c:scaling/>
-        <c:delete/>
-        <c:axPos val="b"/>
+        <c:scaling>
+          <c:orientation val="minMax"/>
+        </c:scaling>
+        <c:delete val="1"/>
+        <c:axPos val="t"/>
+        <c:numFmt formatCode="General" sourceLinked="1"/>
         <c:majorTickMark val="out"/>
         <c:minorTickMark val="none"/>
         <c:tickLblPos val="nextTo"/>
         <c:crossAx val="-2068027336"/>
         <c:crosses val="autoZero"/>
+        <c:crossBetween val="between"/>
       </c:valAx>
     </c:plotArea>
     <c:legend>
@@ -1232,10 +1587,13 @@
           <a:pPr>
             <a:defRPr sz="950"/>
           </a:pPr>
+          <a:endParaRPr lang="en-US"/>
         </a:p>
       </c:txPr>
     </c:legend>
+    <c:plotVisOnly val="1"/>
     <c:dispBlanksAs val="gap"/>
+    <c:showDLblsOverMax val="1"/>
   </c:chart>
   <c:txPr>
     <a:bodyPr/>
@@ -1388,7 +1746,7 @@
               <a:pPr>
                 <a:defRPr/>
               </a:pPr>
-              <a:t>23/10/2026</a:t>
+              <a:t>26/10/2026</a:t>
             </a:fld>
             <a:endParaRPr lang="en-GB"/>
           </a:p>
@@ -1499,7 +1857,7 @@
               <a:pPr>
                 <a:defRPr/>
               </a:pPr>
-              <a:t>‹#›</a:t>
+              <a:t>‹nº›</a:t>
             </a:fld>
             <a:endParaRPr lang="en-GB"/>
           </a:p>
@@ -1644,7 +2002,7 @@
               <a:pPr>
                 <a:defRPr/>
               </a:pPr>
-              <a:t>23/10/2026</a:t>
+              <a:t>26/10/2026</a:t>
             </a:fld>
             <a:endParaRPr lang="pt-BR"/>
           </a:p>
@@ -1860,7 +2218,7 @@
               <a:pPr>
                 <a:defRPr/>
               </a:pPr>
-              <a:t>‹#›</a:t>
+              <a:t>‹nº›</a:t>
             </a:fld>
             <a:endParaRPr lang="pt-BR"/>
           </a:p>
@@ -2078,7 +2436,7 @@
               <a:pPr>
                 <a:defRPr/>
               </a:pPr>
-              <a:t>23/10/2026</a:t>
+              <a:t>26/10/2026</a:t>
             </a:fld>
             <a:endParaRPr lang="pt-BR"/>
           </a:p>
@@ -2126,7 +2484,7 @@
 </p:notes>
 </file>
 
-<file path=ppt/notesSlides/notesSlide4.xml><?xml version="1.0" encoding="utf-8"?>
+<file path=ppt/notesSlides/notesSlide2.xml><?xml version="1.0" encoding="utf-8"?>
 <p:notes xmlns:a="http://schemas.openxmlformats.org/drawingml/2006/main" xmlns:r="http://schemas.openxmlformats.org/officeDocument/2006/relationships" xmlns:p="http://schemas.openxmlformats.org/presentationml/2006/main">
   <p:cSld>
     <p:spTree>
@@ -2228,7 +2586,7 @@
               <a:pPr>
                 <a:defRPr/>
               </a:pPr>
-              <a:t>23/10/2026</a:t>
+              <a:t>26/10/2026</a:t>
             </a:fld>
             <a:endParaRPr lang="pt-BR"/>
           </a:p>
@@ -2263,7 +2621,7 @@
               <a:pPr>
                 <a:defRPr/>
               </a:pPr>
-              <a:t>28</a:t>
+              <a:t>4</a:t>
             </a:fld>
             <a:endParaRPr lang="pt-BR"/>
           </a:p>
@@ -3015,7 +3373,7 @@
           <a:p>
             <a:fld id="{1EC99A45-0693-4E08-8AE4-0362204955FE}" type="datetimeFigureOut">
               <a:rPr lang="pt-BR" smtClean="0"/>
-              <a:t>23/10/2026</a:t>
+              <a:t>26/10/2026</a:t>
             </a:fld>
             <a:endParaRPr lang="pt-BR"/>
           </a:p>
@@ -3069,7 +3427,7 @@
           <a:p>
             <a:fld id="{17F306FA-AAEB-4883-ABC4-766D94449B75}" type="slidenum">
               <a:rPr lang="pt-BR" smtClean="0"/>
-              <a:t>‹#›</a:t>
+              <a:t>‹nº›</a:t>
             </a:fld>
             <a:endParaRPr lang="pt-BR"/>
           </a:p>
@@ -3486,7 +3844,7 @@
                 <a:cs typeface="Arial"/>
               </a:rPr>
               <a:pPr lvl="0" algn="r" rtl="0"/>
-              <a:t>‹#›</a:t>
+              <a:t>‹nº›</a:t>
             </a:fld>
             <a:endParaRPr lang="pt-BR" sz="700" noProof="0">
               <a:solidFill>
@@ -3756,16 +4114,7 @@
           <a:lstStyle/>
           <a:p>
             <a:pPr rtl="0"/>
-            <a:r>
-              <a:rPr lang="pt-BR" sz="600" noProof="0">
-                <a:solidFill>
-                  <a:srgbClr val="000000"/>
-                </a:solidFill>
-                <a:latin typeface="Bradley Hand ITC" panose="03070402050302030203" pitchFamily="66" charset="0"/>
-                <a:cs typeface="Arial" panose="020B0604020202020204" pitchFamily="34" charset="0"/>
-              </a:rPr>
-              <a:t/>
-            </a:r>
+            <a:endParaRPr/>
           </a:p>
         </p:txBody>
       </p:sp>
@@ -4142,12 +4491,12 @@
           <a:graphicData uri="http://schemas.openxmlformats.org/presentationml/2006/ole">
             <mc:AlternateContent xmlns:mc="http://schemas.openxmlformats.org/markup-compatibility/2006">
               <mc:Choice xmlns:v="urn:schemas-microsoft-com:vml" Requires="v">
-                <p:oleObj name="think-cell Slide" r:id="rId13" imgW="421" imgH="423" progId="TCLayout.ActiveDocument.1">
+                <p:oleObj name="think-cell Slide" r:id="rId12" imgW="421" imgH="423" progId="TCLayout.ActiveDocument.1">
                   <p:embed/>
                 </p:oleObj>
               </mc:Choice>
               <mc:Fallback>
-                <p:oleObj name="think-cell Slide" r:id="rId13" imgW="421" imgH="423" progId="TCLayout.ActiveDocument.1">
+                <p:oleObj name="think-cell Slide" r:id="rId12" imgW="421" imgH="423" progId="TCLayout.ActiveDocument.1">
                   <p:embed/>
                   <p:pic>
                     <p:nvPicPr>
@@ -4162,7 +4511,7 @@
                       <p:nvPr/>
                     </p:nvPicPr>
                     <p:blipFill>
-                      <a:blip r:embed="rId14"/>
+                      <a:blip r:embed="rId13"/>
                       <a:stretch>
                         <a:fillRect/>
                       </a:stretch>
@@ -4202,7 +4551,7 @@
           </p:nvPr>
         </p:nvPicPr>
         <p:blipFill>
-          <a:blip r:embed="rId15"/>
+          <a:blip r:embed="rId14"/>
           <a:stretch>
             <a:fillRect/>
           </a:stretch>
@@ -4251,7 +4600,7 @@
           <a:p>
             <a:pPr algn="l"/>
             <a:r>
-              <a:rPr lang="pt-BR" sz="1200" dirty="0">
+              <a:rPr lang="pt-BR" sz="1200">
                 <a:solidFill>
                   <a:srgbClr val="FFFFFF"/>
                 </a:solidFill>
@@ -4779,12 +5128,12 @@
           </p:cNvPicPr>
           <p:nvPr>
             <p:custDataLst>
-              <p:tags r:id="rId10"/>
+              <p:tags r:id="rId9"/>
             </p:custDataLst>
           </p:nvPr>
         </p:nvPicPr>
         <p:blipFill>
-          <a:blip r:embed="rId16"/>
+          <a:blip r:embed="rId15"/>
           <a:srcRect b="428"/>
           <a:stretch>
             <a:fillRect/>
@@ -4809,7 +5158,7 @@
           <p:nvPr/>
         </p:nvPicPr>
         <p:blipFill>
-          <a:blip r:embed="rId17"/>
+          <a:blip r:embed="rId16"/>
           <a:stretch>
             <a:fillRect/>
           </a:stretch>
@@ -4838,7 +5187,7 @@
 </file>
 
 <file path=ppt/slides/slide2.xml><?xml version="1.0" encoding="utf-8"?>
-<p:sld xmlns:a="http://schemas.openxmlformats.org/drawingml/2006/main" xmlns:p="http://schemas.openxmlformats.org/presentationml/2006/main" xmlns:r="http://schemas.openxmlformats.org/officeDocument/2006/relationships">
+<p:sld xmlns:a="http://schemas.openxmlformats.org/drawingml/2006/main" xmlns:r="http://schemas.openxmlformats.org/officeDocument/2006/relationships" xmlns:p="http://schemas.openxmlformats.org/presentationml/2006/main">
   <p:cSld>
     <p:spTree>
       <p:nvGrpSpPr>
@@ -4846,7 +5195,14 @@
         <p:cNvGrpSpPr/>
         <p:nvPr/>
       </p:nvGrpSpPr>
-      <p:grpSpPr/>
+      <p:grpSpPr>
+        <a:xfrm>
+          <a:off x="0" y="0"/>
+          <a:ext cx="0" cy="0"/>
+          <a:chOff x="0" y="0"/>
+          <a:chExt cx="0" cy="0"/>
+        </a:xfrm>
+      </p:grpSpPr>
       <p:sp>
         <p:nvSpPr>
           <p:cNvPr id="2" name="Title 1"/>
@@ -4863,7 +5219,7 @@
           <a:lstStyle/>
           <a:p>
             <a:r>
-              <a:t>O COO concentra 25 das 49 vagas e a estrutura mais longa da casa; no CCO, 7 dos 8 gestores lideram até 2 pessoas</a:t>
+              <a:t>O COO lidera 199 das 330 pessoas e concentra 34 das 49 vagas; só 8 diretos respondem por uma estrutura 25 vezes maior</a:t>
             </a:r>
           </a:p>
         </p:txBody>
@@ -4875,7 +5231,7 @@
             <a:spLocks noGrp="1"/>
           </p:cNvSpPr>
           <p:nvPr>
-            <p:ph type="body" idx="10" sz="quarter"/>
+            <p:ph type="body" sz="quarter" idx="10"/>
           </p:nvPr>
         </p:nvSpPr>
         <p:spPr/>
@@ -4896,7 +5252,7 @@
             <a:spLocks noGrp="1"/>
           </p:cNvSpPr>
           <p:nvPr>
-            <p:ph type="body" idx="11" sz="quarter"/>
+            <p:ph type="body" sz="quarter" idx="11"/>
           </p:nvPr>
         </p:nvSpPr>
         <p:spPr>
@@ -4910,7 +5266,7 @@
           <a:lstStyle/>
           <a:p>
             <a:r>
-              <a:t>336 pessoas em 7 níveis · 66 gestores · média de 5,1 diretos por gestor · 49 vagas, 8 publicadas no Gupy</a:t>
+              <a:t>Co-CEO: 330 liderados · 6 diretorias · 49 vagas, 8 publicadas no Gupy · draft propõe levar Air Product e Ocean Product do COO para o CEO</a:t>
             </a:r>
           </a:p>
         </p:txBody>
@@ -4922,7 +5278,7 @@
             <a:spLocks noGrp="1"/>
           </p:cNvSpPr>
           <p:nvPr>
-            <p:ph type="body" idx="13" sz="quarter"/>
+            <p:ph type="body" sz="quarter" idx="13"/>
           </p:nvPr>
         </p:nvSpPr>
         <p:spPr/>
@@ -4931,7 +5287,7 @@
           <a:lstStyle/>
           <a:p>
             <a:r>
-              <a:t>Fonte: ATY | Gestores por Level (organograma out/26, diretos e indiretos) · planilha de vagas (21/10/26) · Gupy · % do quadro em aberto = vagas ÷ (pessoas + vagas)</a:t>
+              <a:t>Fonte: ATY | Draft 23 Out 26 (Factorial) · planilha de vagas (21/10/26) · Gupy · indiretos = liderados − diretos · % aberto = vagas ÷ (liderados + 1 + vagas)</a:t>
             </a:r>
           </a:p>
         </p:txBody>
@@ -4953,7 +5309,7 @@
           <a:noFill/>
         </p:spPr>
         <p:txBody>
-          <a:bodyPr wrap="square" lIns="18288" rIns="18288" tIns="0" bIns="0" anchor="t">
+          <a:bodyPr wrap="square" lIns="18288" tIns="0" rIns="18288" bIns="0" anchor="t">
             <a:spAutoFit/>
           </a:bodyPr>
           <a:lstStyle/>
@@ -4970,7 +5326,7 @@
                 </a:solidFill>
                 <a:latin typeface="Arial"/>
               </a:rPr>
-              <a:t>Diretos e indiretos por diretoria (L3)</a:t>
+              <a:t>Diretos e indiretos por diretoria</a:t>
             </a:r>
           </a:p>
           <a:p>
@@ -4986,7 +5342,7 @@
                 </a:solidFill>
                 <a:latin typeface="Arial"/>
               </a:rPr>
-              <a:t>nº de pessoas abaixo de cada reporte do Co-CEO</a:t>
+              <a:t>nº de liderados de cada reporte do Co-CEO no draft</a:t>
             </a:r>
           </a:p>
         </p:txBody>
@@ -5001,11 +5357,11 @@
         </p:nvGraphicFramePr>
         <p:xfrm>
           <a:off x="310896" y="1828800"/>
-          <a:ext cx="5715000" cy="2148840"/>
+          <a:ext cx="5715000" cy="2103120"/>
         </p:xfrm>
         <a:graphic>
           <a:graphicData uri="http://schemas.openxmlformats.org/drawingml/2006/chart">
-            <c:chart xmlns:c="http://schemas.openxmlformats.org/drawingml/2006/chart" r:id="rId2"/>
+            <c:chart xmlns:c="http://schemas.openxmlformats.org/drawingml/2006/chart" xmlns:r="http://schemas.openxmlformats.org/officeDocument/2006/relationships" r:id="rId2"/>
           </a:graphicData>
         </a:graphic>
       </p:graphicFrame>
@@ -5062,7 +5418,7 @@
           <a:noFill/>
         </p:spPr>
         <p:txBody>
-          <a:bodyPr wrap="square" lIns="18288" rIns="18288" tIns="0" bIns="0" anchor="t">
+          <a:bodyPr wrap="square" lIns="18288" tIns="0" rIns="18288" bIns="0" anchor="t">
             <a:spAutoFit/>
           </a:bodyPr>
           <a:lstStyle/>
@@ -5079,7 +5435,7 @@
                 </a:solidFill>
                 <a:latin typeface="Arial"/>
               </a:rPr>
-              <a:t>Vagas em aberto por diretoria</a:t>
+              <a:t>Onde estão as vagas ainda sem processo</a:t>
             </a:r>
           </a:p>
           <a:p>
@@ -5095,7 +5451,7 @@
                 </a:solidFill>
                 <a:latin typeface="Arial"/>
               </a:rPr>
-              <a:t>publicadas no Gupy × ainda sem processo</a:t>
+              <a:t>41 vagas da planilha por área + 1 vaga de TL que só aparece no draft</a:t>
             </a:r>
           </a:p>
         </p:txBody>
@@ -5109,12 +5465,12 @@
           <p:nvPr/>
         </p:nvGraphicFramePr>
         <p:xfrm>
-          <a:off x="310896" y="4407408"/>
-          <a:ext cx="5715000" cy="1874519"/>
+          <a:off x="310896" y="4434840"/>
+          <a:ext cx="5715000" cy="1783080"/>
         </p:xfrm>
         <a:graphic>
           <a:graphicData uri="http://schemas.openxmlformats.org/drawingml/2006/chart">
-            <c:chart xmlns:c="http://schemas.openxmlformats.org/drawingml/2006/chart" r:id="rId3"/>
+            <c:chart xmlns:c="http://schemas.openxmlformats.org/drawingml/2006/chart" xmlns:r="http://schemas.openxmlformats.org/officeDocument/2006/relationships" r:id="rId3"/>
           </a:graphicData>
         </a:graphic>
       </p:graphicFrame>
@@ -5171,7 +5527,7 @@
           <a:noFill/>
         </p:spPr>
         <p:txBody>
-          <a:bodyPr wrap="square" lIns="18288" rIns="18288" tIns="0" bIns="0" anchor="t">
+          <a:bodyPr wrap="square" lIns="18288" tIns="0" rIns="18288" bIns="0" anchor="t">
             <a:spAutoFit/>
           </a:bodyPr>
           <a:lstStyle/>
@@ -5188,7 +5544,7 @@
                 </a:solidFill>
                 <a:latin typeface="Arial"/>
               </a:rPr>
-              <a:t>Estrutura de gestão × vagas por diretoria</a:t>
+              <a:t>Estrutura × vagas por diretoria</a:t>
             </a:r>
           </a:p>
           <a:p>
@@ -5204,7 +5560,7 @@
                 </a:solidFill>
                 <a:latin typeface="Arial"/>
               </a:rPr>
-              <a:t>gestor = quem lidera ao menos uma pessoa</a:t>
+              <a:t>liderados por direto = tamanho da estrutura que cada direto sustenta</a:t>
             </a:r>
           </a:p>
         </p:txBody>
@@ -5219,27 +5575,76 @@
         </p:nvGraphicFramePr>
         <p:xfrm>
           <a:off x="6227064" y="1874519"/>
-          <a:ext cx="5623560" cy="2743200"/>
+          <a:ext cx="5623560" cy="2438400"/>
         </p:xfrm>
         <a:graphic>
           <a:graphicData uri="http://schemas.openxmlformats.org/drawingml/2006/table">
             <a:tbl>
-              <a:tblPr firstRow="0" bandRow="0">
+              <a:tblPr>
                 <a:tableStyleId>{5940675A-B579-460E-94D1-54222C63F5DA}</a:tableStyleId>
               </a:tblPr>
               <a:tblGrid>
-                <a:gridCol w="1188720"/>
-                <a:gridCol w="640080"/>
-                <a:gridCol w="777240"/>
-                <a:gridCol w="731520"/>
-                <a:gridCol w="1051560"/>
-                <a:gridCol w="594360"/>
-                <a:gridCol w="640080"/>
+                <a:gridCol w="1097280">
+                  <a:extLst>
+                    <a:ext uri="{9D8B030D-6E8A-4147-A177-3AD203B41FA5}">
+                      <a16:colId xmlns:a16="http://schemas.microsoft.com/office/drawing/2014/main" val="20000"/>
+                    </a:ext>
+                  </a:extLst>
+                </a:gridCol>
+                <a:gridCol w="566928">
+                  <a:extLst>
+                    <a:ext uri="{9D8B030D-6E8A-4147-A177-3AD203B41FA5}">
+                      <a16:colId xmlns:a16="http://schemas.microsoft.com/office/drawing/2014/main" val="20001"/>
+                    </a:ext>
+                  </a:extLst>
+                </a:gridCol>
+                <a:gridCol w="713232">
+                  <a:extLst>
+                    <a:ext uri="{9D8B030D-6E8A-4147-A177-3AD203B41FA5}">
+                      <a16:colId xmlns:a16="http://schemas.microsoft.com/office/drawing/2014/main" val="20002"/>
+                    </a:ext>
+                  </a:extLst>
+                </a:gridCol>
+                <a:gridCol w="731520">
+                  <a:extLst>
+                    <a:ext uri="{9D8B030D-6E8A-4147-A177-3AD203B41FA5}">
+                      <a16:colId xmlns:a16="http://schemas.microsoft.com/office/drawing/2014/main" val="20003"/>
+                    </a:ext>
+                  </a:extLst>
+                </a:gridCol>
+                <a:gridCol w="914400">
+                  <a:extLst>
+                    <a:ext uri="{9D8B030D-6E8A-4147-A177-3AD203B41FA5}">
+                      <a16:colId xmlns:a16="http://schemas.microsoft.com/office/drawing/2014/main" val="20004"/>
+                    </a:ext>
+                  </a:extLst>
+                </a:gridCol>
+                <a:gridCol w="502920">
+                  <a:extLst>
+                    <a:ext uri="{9D8B030D-6E8A-4147-A177-3AD203B41FA5}">
+                      <a16:colId xmlns:a16="http://schemas.microsoft.com/office/drawing/2014/main" val="20005"/>
+                    </a:ext>
+                  </a:extLst>
+                </a:gridCol>
+                <a:gridCol w="548640">
+                  <a:extLst>
+                    <a:ext uri="{9D8B030D-6E8A-4147-A177-3AD203B41FA5}">
+                      <a16:colId xmlns:a16="http://schemas.microsoft.com/office/drawing/2014/main" val="20006"/>
+                    </a:ext>
+                  </a:extLst>
+                </a:gridCol>
+                <a:gridCol w="548640">
+                  <a:extLst>
+                    <a:ext uri="{9D8B030D-6E8A-4147-A177-3AD203B41FA5}">
+                      <a16:colId xmlns:a16="http://schemas.microsoft.com/office/drawing/2014/main" val="20007"/>
+                    </a:ext>
+                  </a:extLst>
+                </a:gridCol>
               </a:tblGrid>
-              <a:tr h="274320">
-                <a:tc>
-                  <a:txBody>
-                    <a:bodyPr wrap="square"/>
+              <a:tr h="301752">
+                <a:tc>
+                  <a:txBody>
+                    <a:bodyPr/>
                     <a:lstStyle/>
                     <a:p>
                       <a:pPr algn="l"/>
@@ -5262,7 +5667,7 @@
                 </a:tc>
                 <a:tc>
                   <a:txBody>
-                    <a:bodyPr wrap="square"/>
+                    <a:bodyPr/>
                     <a:lstStyle/>
                     <a:p>
                       <a:pPr algn="ctr"/>
@@ -5285,7 +5690,7 @@
                 </a:tc>
                 <a:tc>
                   <a:txBody>
-                    <a:bodyPr wrap="square"/>
+                    <a:bodyPr/>
                     <a:lstStyle/>
                     <a:p>
                       <a:pPr algn="ctr"/>
@@ -5308,7 +5713,7 @@
                 </a:tc>
                 <a:tc>
                   <a:txBody>
-                    <a:bodyPr wrap="square"/>
+                    <a:bodyPr/>
                     <a:lstStyle/>
                     <a:p>
                       <a:pPr algn="ctr"/>
@@ -5319,7 +5724,7 @@
                           </a:solidFill>
                           <a:latin typeface="Arial"/>
                         </a:rPr>
-                        <a:t>Gestores</a:t>
+                        <a:t>Liderados</a:t>
                       </a:r>
                     </a:p>
                   </a:txBody>
@@ -5331,7 +5736,7 @@
                 </a:tc>
                 <a:tc>
                   <a:txBody>
-                    <a:bodyPr wrap="square"/>
+                    <a:bodyPr/>
                     <a:lstStyle/>
                     <a:p>
                       <a:pPr algn="ctr"/>
@@ -5342,7 +5747,7 @@
                           </a:solidFill>
                           <a:latin typeface="Arial"/>
                         </a:rPr>
-                        <a:t>Gestores com até 2 diretos</a:t>
+                        <a:t>Liderados por direto</a:t>
                       </a:r>
                     </a:p>
                   </a:txBody>
@@ -5354,7 +5759,7 @@
                 </a:tc>
                 <a:tc>
                   <a:txBody>
-                    <a:bodyPr wrap="square"/>
+                    <a:bodyPr/>
                     <a:lstStyle/>
                     <a:p>
                       <a:pPr algn="ctr"/>
@@ -5377,7 +5782,7 @@
                 </a:tc>
                 <a:tc>
                   <a:txBody>
-                    <a:bodyPr wrap="square"/>
+                    <a:bodyPr/>
                     <a:lstStyle/>
                     <a:p>
                       <a:pPr algn="ctr"/>
@@ -5388,6 +5793,29 @@
                           </a:solidFill>
                           <a:latin typeface="Arial"/>
                         </a:rPr>
+                        <a:t>A abrir</a:t>
+                      </a:r>
+                    </a:p>
+                  </a:txBody>
+                  <a:tcPr marL="54864" marR="54864" marT="18288" marB="18288" anchor="ctr">
+                    <a:solidFill>
+                      <a:srgbClr val="009796"/>
+                    </a:solidFill>
+                  </a:tcPr>
+                </a:tc>
+                <a:tc>
+                  <a:txBody>
+                    <a:bodyPr/>
+                    <a:lstStyle/>
+                    <a:p>
+                      <a:pPr algn="ctr"/>
+                      <a:r>
+                        <a:rPr sz="950" b="1">
+                          <a:solidFill>
+                            <a:srgbClr val="FFFFFF"/>
+                          </a:solidFill>
+                          <a:latin typeface="Arial"/>
+                        </a:rPr>
                         <a:t>% aberto</a:t>
                       </a:r>
                     </a:p>
@@ -5398,11 +5826,16 @@
                     </a:solidFill>
                   </a:tcPr>
                 </a:tc>
+                <a:extLst>
+                  <a:ext uri="{0D108BD9-81ED-4DB2-BD59-A6C34878D82A}">
+                    <a16:rowId xmlns:a16="http://schemas.microsoft.com/office/drawing/2014/main" val="10000"/>
+                  </a:ext>
+                </a:extLst>
               </a:tr>
-              <a:tr h="274320">
-                <a:tc>
-                  <a:txBody>
-                    <a:bodyPr wrap="square"/>
+              <a:tr h="301752">
+                <a:tc>
+                  <a:txBody>
+                    <a:bodyPr/>
                     <a:lstStyle/>
                     <a:p>
                       <a:pPr algn="l"/>
@@ -5425,7 +5858,7 @@
                 </a:tc>
                 <a:tc>
                   <a:txBody>
-                    <a:bodyPr wrap="square"/>
+                    <a:bodyPr/>
                     <a:lstStyle/>
                     <a:p>
                       <a:pPr algn="ctr"/>
@@ -5436,19 +5869,760 @@
                           </a:solidFill>
                           <a:latin typeface="Arial"/>
                         </a:rPr>
+                        <a:t>8</a:t>
+                      </a:r>
+                    </a:p>
+                  </a:txBody>
+                  <a:tcPr marL="54864" marR="54864" marT="18288" marB="18288" anchor="ctr">
+                    <a:solidFill>
+                      <a:srgbClr val="F2F2F2"/>
+                    </a:solidFill>
+                  </a:tcPr>
+                </a:tc>
+                <a:tc>
+                  <a:txBody>
+                    <a:bodyPr/>
+                    <a:lstStyle/>
+                    <a:p>
+                      <a:pPr algn="ctr"/>
+                      <a:r>
+                        <a:rPr sz="950" b="0">
+                          <a:solidFill>
+                            <a:srgbClr val="000000"/>
+                          </a:solidFill>
+                          <a:latin typeface="Arial"/>
+                        </a:rPr>
+                        <a:t>191</a:t>
+                      </a:r>
+                    </a:p>
+                  </a:txBody>
+                  <a:tcPr marL="54864" marR="54864" marT="18288" marB="18288" anchor="ctr">
+                    <a:solidFill>
+                      <a:srgbClr val="F2F2F2"/>
+                    </a:solidFill>
+                  </a:tcPr>
+                </a:tc>
+                <a:tc>
+                  <a:txBody>
+                    <a:bodyPr/>
+                    <a:lstStyle/>
+                    <a:p>
+                      <a:pPr algn="ctr"/>
+                      <a:r>
+                        <a:rPr sz="950" b="0">
+                          <a:solidFill>
+                            <a:srgbClr val="000000"/>
+                          </a:solidFill>
+                          <a:latin typeface="Arial"/>
+                        </a:rPr>
+                        <a:t>199</a:t>
+                      </a:r>
+                    </a:p>
+                  </a:txBody>
+                  <a:tcPr marL="54864" marR="54864" marT="18288" marB="18288" anchor="ctr">
+                    <a:solidFill>
+                      <a:srgbClr val="F2F2F2"/>
+                    </a:solidFill>
+                  </a:tcPr>
+                </a:tc>
+                <a:tc>
+                  <a:txBody>
+                    <a:bodyPr/>
+                    <a:lstStyle/>
+                    <a:p>
+                      <a:pPr algn="ctr"/>
+                      <a:r>
+                        <a:rPr sz="950" b="1">
+                          <a:solidFill>
+                            <a:srgbClr val="6B2D6B"/>
+                          </a:solidFill>
+                          <a:latin typeface="Arial"/>
+                        </a:rPr>
+                        <a:t>24,9</a:t>
+                      </a:r>
+                    </a:p>
+                  </a:txBody>
+                  <a:tcPr marL="54864" marR="54864" marT="18288" marB="18288" anchor="ctr">
+                    <a:solidFill>
+                      <a:srgbClr val="F2F2F2"/>
+                    </a:solidFill>
+                  </a:tcPr>
+                </a:tc>
+                <a:tc>
+                  <a:txBody>
+                    <a:bodyPr/>
+                    <a:lstStyle/>
+                    <a:p>
+                      <a:pPr algn="ctr"/>
+                      <a:r>
+                        <a:rPr sz="950" b="0">
+                          <a:solidFill>
+                            <a:srgbClr val="000000"/>
+                          </a:solidFill>
+                          <a:latin typeface="Arial"/>
+                        </a:rPr>
+                        <a:t>34</a:t>
+                      </a:r>
+                    </a:p>
+                  </a:txBody>
+                  <a:tcPr marL="54864" marR="54864" marT="18288" marB="18288" anchor="ctr">
+                    <a:solidFill>
+                      <a:srgbClr val="F2F2F2"/>
+                    </a:solidFill>
+                  </a:tcPr>
+                </a:tc>
+                <a:tc>
+                  <a:txBody>
+                    <a:bodyPr/>
+                    <a:lstStyle/>
+                    <a:p>
+                      <a:pPr algn="ctr"/>
+                      <a:r>
+                        <a:rPr sz="950" b="1">
+                          <a:solidFill>
+                            <a:srgbClr val="6B2D6B"/>
+                          </a:solidFill>
+                          <a:latin typeface="Arial"/>
+                        </a:rPr>
+                        <a:t>28</a:t>
+                      </a:r>
+                    </a:p>
+                  </a:txBody>
+                  <a:tcPr marL="54864" marR="54864" marT="18288" marB="18288" anchor="ctr">
+                    <a:solidFill>
+                      <a:srgbClr val="F2F2F2"/>
+                    </a:solidFill>
+                  </a:tcPr>
+                </a:tc>
+                <a:tc>
+                  <a:txBody>
+                    <a:bodyPr/>
+                    <a:lstStyle/>
+                    <a:p>
+                      <a:pPr algn="ctr"/>
+                      <a:r>
+                        <a:rPr sz="950" b="1">
+                          <a:solidFill>
+                            <a:srgbClr val="6B2D6B"/>
+                          </a:solidFill>
+                          <a:latin typeface="Arial"/>
+                        </a:rPr>
+                        <a:t>15%</a:t>
+                      </a:r>
+                    </a:p>
+                  </a:txBody>
+                  <a:tcPr marL="54864" marR="54864" marT="18288" marB="18288" anchor="ctr">
+                    <a:solidFill>
+                      <a:srgbClr val="F2F2F2"/>
+                    </a:solidFill>
+                  </a:tcPr>
+                </a:tc>
+                <a:extLst>
+                  <a:ext uri="{0D108BD9-81ED-4DB2-BD59-A6C34878D82A}">
+                    <a16:rowId xmlns:a16="http://schemas.microsoft.com/office/drawing/2014/main" val="10001"/>
+                  </a:ext>
+                </a:extLst>
+              </a:tr>
+              <a:tr h="301752">
+                <a:tc>
+                  <a:txBody>
+                    <a:bodyPr/>
+                    <a:lstStyle/>
+                    <a:p>
+                      <a:pPr algn="l"/>
+                      <a:r>
+                        <a:rPr sz="950" b="1">
+                          <a:solidFill>
+                            <a:srgbClr val="000000"/>
+                          </a:solidFill>
+                          <a:latin typeface="Arial"/>
+                        </a:rPr>
+                        <a:t>CITO</a:t>
+                      </a:r>
+                    </a:p>
+                  </a:txBody>
+                  <a:tcPr marL="54864" marR="54864" marT="18288" marB="18288" anchor="ctr">
+                    <a:solidFill>
+                      <a:srgbClr val="FFFFFF"/>
+                    </a:solidFill>
+                  </a:tcPr>
+                </a:tc>
+                <a:tc>
+                  <a:txBody>
+                    <a:bodyPr/>
+                    <a:lstStyle/>
+                    <a:p>
+                      <a:pPr algn="ctr"/>
+                      <a:r>
+                        <a:rPr sz="950" b="0">
+                          <a:solidFill>
+                            <a:srgbClr val="000000"/>
+                          </a:solidFill>
+                          <a:latin typeface="Arial"/>
+                        </a:rPr>
+                        <a:t>2</a:t>
+                      </a:r>
+                    </a:p>
+                  </a:txBody>
+                  <a:tcPr marL="54864" marR="54864" marT="18288" marB="18288" anchor="ctr">
+                    <a:solidFill>
+                      <a:srgbClr val="FFFFFF"/>
+                    </a:solidFill>
+                  </a:tcPr>
+                </a:tc>
+                <a:tc>
+                  <a:txBody>
+                    <a:bodyPr/>
+                    <a:lstStyle/>
+                    <a:p>
+                      <a:pPr algn="ctr"/>
+                      <a:r>
+                        <a:rPr sz="950" b="0">
+                          <a:solidFill>
+                            <a:srgbClr val="000000"/>
+                          </a:solidFill>
+                          <a:latin typeface="Arial"/>
+                        </a:rPr>
+                        <a:t>45</a:t>
+                      </a:r>
+                    </a:p>
+                  </a:txBody>
+                  <a:tcPr marL="54864" marR="54864" marT="18288" marB="18288" anchor="ctr">
+                    <a:solidFill>
+                      <a:srgbClr val="FFFFFF"/>
+                    </a:solidFill>
+                  </a:tcPr>
+                </a:tc>
+                <a:tc>
+                  <a:txBody>
+                    <a:bodyPr/>
+                    <a:lstStyle/>
+                    <a:p>
+                      <a:pPr algn="ctr"/>
+                      <a:r>
+                        <a:rPr sz="950" b="0">
+                          <a:solidFill>
+                            <a:srgbClr val="000000"/>
+                          </a:solidFill>
+                          <a:latin typeface="Arial"/>
+                        </a:rPr>
+                        <a:t>47</a:t>
+                      </a:r>
+                    </a:p>
+                  </a:txBody>
+                  <a:tcPr marL="54864" marR="54864" marT="18288" marB="18288" anchor="ctr">
+                    <a:solidFill>
+                      <a:srgbClr val="FFFFFF"/>
+                    </a:solidFill>
+                  </a:tcPr>
+                </a:tc>
+                <a:tc>
+                  <a:txBody>
+                    <a:bodyPr/>
+                    <a:lstStyle/>
+                    <a:p>
+                      <a:pPr algn="ctr"/>
+                      <a:r>
+                        <a:rPr sz="950" b="1">
+                          <a:solidFill>
+                            <a:srgbClr val="6B2D6B"/>
+                          </a:solidFill>
+                          <a:latin typeface="Arial"/>
+                        </a:rPr>
+                        <a:t>23,5</a:t>
+                      </a:r>
+                    </a:p>
+                  </a:txBody>
+                  <a:tcPr marL="54864" marR="54864" marT="18288" marB="18288" anchor="ctr">
+                    <a:solidFill>
+                      <a:srgbClr val="FFFFFF"/>
+                    </a:solidFill>
+                  </a:tcPr>
+                </a:tc>
+                <a:tc>
+                  <a:txBody>
+                    <a:bodyPr/>
+                    <a:lstStyle/>
+                    <a:p>
+                      <a:pPr algn="ctr"/>
+                      <a:r>
+                        <a:rPr sz="950" b="0">
+                          <a:solidFill>
+                            <a:srgbClr val="000000"/>
+                          </a:solidFill>
+                          <a:latin typeface="Arial"/>
+                        </a:rPr>
+                        <a:t>2</a:t>
+                      </a:r>
+                    </a:p>
+                  </a:txBody>
+                  <a:tcPr marL="54864" marR="54864" marT="18288" marB="18288" anchor="ctr">
+                    <a:solidFill>
+                      <a:srgbClr val="FFFFFF"/>
+                    </a:solidFill>
+                  </a:tcPr>
+                </a:tc>
+                <a:tc>
+                  <a:txBody>
+                    <a:bodyPr/>
+                    <a:lstStyle/>
+                    <a:p>
+                      <a:pPr algn="ctr"/>
+                      <a:r>
+                        <a:rPr sz="950" b="0">
+                          <a:solidFill>
+                            <a:srgbClr val="000000"/>
+                          </a:solidFill>
+                          <a:latin typeface="Arial"/>
+                        </a:rPr>
+                        <a:t>2</a:t>
+                      </a:r>
+                    </a:p>
+                  </a:txBody>
+                  <a:tcPr marL="54864" marR="54864" marT="18288" marB="18288" anchor="ctr">
+                    <a:solidFill>
+                      <a:srgbClr val="FFFFFF"/>
+                    </a:solidFill>
+                  </a:tcPr>
+                </a:tc>
+                <a:tc>
+                  <a:txBody>
+                    <a:bodyPr/>
+                    <a:lstStyle/>
+                    <a:p>
+                      <a:pPr algn="ctr"/>
+                      <a:r>
+                        <a:rPr sz="950" b="0">
+                          <a:solidFill>
+                            <a:srgbClr val="000000"/>
+                          </a:solidFill>
+                          <a:latin typeface="Arial"/>
+                        </a:rPr>
+                        <a:t>4%</a:t>
+                      </a:r>
+                    </a:p>
+                  </a:txBody>
+                  <a:tcPr marL="54864" marR="54864" marT="18288" marB="18288" anchor="ctr">
+                    <a:solidFill>
+                      <a:srgbClr val="FFFFFF"/>
+                    </a:solidFill>
+                  </a:tcPr>
+                </a:tc>
+                <a:extLst>
+                  <a:ext uri="{0D108BD9-81ED-4DB2-BD59-A6C34878D82A}">
+                    <a16:rowId xmlns:a16="http://schemas.microsoft.com/office/drawing/2014/main" val="10002"/>
+                  </a:ext>
+                </a:extLst>
+              </a:tr>
+              <a:tr h="301752">
+                <a:tc>
+                  <a:txBody>
+                    <a:bodyPr/>
+                    <a:lstStyle/>
+                    <a:p>
+                      <a:pPr algn="l"/>
+                      <a:r>
+                        <a:rPr sz="950" b="1">
+                          <a:solidFill>
+                            <a:srgbClr val="000000"/>
+                          </a:solidFill>
+                          <a:latin typeface="Arial"/>
+                        </a:rPr>
+                        <a:t>CFSO</a:t>
+                      </a:r>
+                    </a:p>
+                  </a:txBody>
+                  <a:tcPr marL="54864" marR="54864" marT="18288" marB="18288" anchor="ctr">
+                    <a:solidFill>
+                      <a:srgbClr val="F2F2F2"/>
+                    </a:solidFill>
+                  </a:tcPr>
+                </a:tc>
+                <a:tc>
+                  <a:txBody>
+                    <a:bodyPr/>
+                    <a:lstStyle/>
+                    <a:p>
+                      <a:pPr algn="ctr"/>
+                      <a:r>
+                        <a:rPr sz="950" b="0">
+                          <a:solidFill>
+                            <a:srgbClr val="000000"/>
+                          </a:solidFill>
+                          <a:latin typeface="Arial"/>
+                        </a:rPr>
+                        <a:t>7</a:t>
+                      </a:r>
+                    </a:p>
+                  </a:txBody>
+                  <a:tcPr marL="54864" marR="54864" marT="18288" marB="18288" anchor="ctr">
+                    <a:solidFill>
+                      <a:srgbClr val="F2F2F2"/>
+                    </a:solidFill>
+                  </a:tcPr>
+                </a:tc>
+                <a:tc>
+                  <a:txBody>
+                    <a:bodyPr/>
+                    <a:lstStyle/>
+                    <a:p>
+                      <a:pPr algn="ctr"/>
+                      <a:r>
+                        <a:rPr sz="950" b="0">
+                          <a:solidFill>
+                            <a:srgbClr val="000000"/>
+                          </a:solidFill>
+                          <a:latin typeface="Arial"/>
+                        </a:rPr>
+                        <a:t>26</a:t>
+                      </a:r>
+                    </a:p>
+                  </a:txBody>
+                  <a:tcPr marL="54864" marR="54864" marT="18288" marB="18288" anchor="ctr">
+                    <a:solidFill>
+                      <a:srgbClr val="F2F2F2"/>
+                    </a:solidFill>
+                  </a:tcPr>
+                </a:tc>
+                <a:tc>
+                  <a:txBody>
+                    <a:bodyPr/>
+                    <a:lstStyle/>
+                    <a:p>
+                      <a:pPr algn="ctr"/>
+                      <a:r>
+                        <a:rPr sz="950" b="0">
+                          <a:solidFill>
+                            <a:srgbClr val="000000"/>
+                          </a:solidFill>
+                          <a:latin typeface="Arial"/>
+                        </a:rPr>
+                        <a:t>33</a:t>
+                      </a:r>
+                    </a:p>
+                  </a:txBody>
+                  <a:tcPr marL="54864" marR="54864" marT="18288" marB="18288" anchor="ctr">
+                    <a:solidFill>
+                      <a:srgbClr val="F2F2F2"/>
+                    </a:solidFill>
+                  </a:tcPr>
+                </a:tc>
+                <a:tc>
+                  <a:txBody>
+                    <a:bodyPr/>
+                    <a:lstStyle/>
+                    <a:p>
+                      <a:pPr algn="ctr"/>
+                      <a:r>
+                        <a:rPr sz="950" b="0">
+                          <a:solidFill>
+                            <a:srgbClr val="000000"/>
+                          </a:solidFill>
+                          <a:latin typeface="Arial"/>
+                        </a:rPr>
+                        <a:t>4,7</a:t>
+                      </a:r>
+                    </a:p>
+                  </a:txBody>
+                  <a:tcPr marL="54864" marR="54864" marT="18288" marB="18288" anchor="ctr">
+                    <a:solidFill>
+                      <a:srgbClr val="F2F2F2"/>
+                    </a:solidFill>
+                  </a:tcPr>
+                </a:tc>
+                <a:tc>
+                  <a:txBody>
+                    <a:bodyPr/>
+                    <a:lstStyle/>
+                    <a:p>
+                      <a:pPr algn="ctr"/>
+                      <a:r>
+                        <a:rPr sz="950" b="0">
+                          <a:solidFill>
+                            <a:srgbClr val="000000"/>
+                          </a:solidFill>
+                          <a:latin typeface="Arial"/>
+                        </a:rPr>
+                        <a:t>3</a:t>
+                      </a:r>
+                    </a:p>
+                  </a:txBody>
+                  <a:tcPr marL="54864" marR="54864" marT="18288" marB="18288" anchor="ctr">
+                    <a:solidFill>
+                      <a:srgbClr val="F2F2F2"/>
+                    </a:solidFill>
+                  </a:tcPr>
+                </a:tc>
+                <a:tc>
+                  <a:txBody>
+                    <a:bodyPr/>
+                    <a:lstStyle/>
+                    <a:p>
+                      <a:pPr algn="ctr"/>
+                      <a:r>
+                        <a:rPr sz="950" b="0">
+                          <a:solidFill>
+                            <a:srgbClr val="000000"/>
+                          </a:solidFill>
+                          <a:latin typeface="Arial"/>
+                        </a:rPr>
+                        <a:t>3</a:t>
+                      </a:r>
+                    </a:p>
+                  </a:txBody>
+                  <a:tcPr marL="54864" marR="54864" marT="18288" marB="18288" anchor="ctr">
+                    <a:solidFill>
+                      <a:srgbClr val="F2F2F2"/>
+                    </a:solidFill>
+                  </a:tcPr>
+                </a:tc>
+                <a:tc>
+                  <a:txBody>
+                    <a:bodyPr/>
+                    <a:lstStyle/>
+                    <a:p>
+                      <a:pPr algn="ctr"/>
+                      <a:r>
+                        <a:rPr sz="950" b="0">
+                          <a:solidFill>
+                            <a:srgbClr val="000000"/>
+                          </a:solidFill>
+                          <a:latin typeface="Arial"/>
+                        </a:rPr>
+                        <a:t>8%</a:t>
+                      </a:r>
+                    </a:p>
+                  </a:txBody>
+                  <a:tcPr marL="54864" marR="54864" marT="18288" marB="18288" anchor="ctr">
+                    <a:solidFill>
+                      <a:srgbClr val="F2F2F2"/>
+                    </a:solidFill>
+                  </a:tcPr>
+                </a:tc>
+                <a:extLst>
+                  <a:ext uri="{0D108BD9-81ED-4DB2-BD59-A6C34878D82A}">
+                    <a16:rowId xmlns:a16="http://schemas.microsoft.com/office/drawing/2014/main" val="10003"/>
+                  </a:ext>
+                </a:extLst>
+              </a:tr>
+              <a:tr h="301752">
+                <a:tc>
+                  <a:txBody>
+                    <a:bodyPr/>
+                    <a:lstStyle/>
+                    <a:p>
+                      <a:pPr algn="l"/>
+                      <a:r>
+                        <a:rPr sz="950" b="1">
+                          <a:solidFill>
+                            <a:srgbClr val="000000"/>
+                          </a:solidFill>
+                          <a:latin typeface="Arial"/>
+                        </a:rPr>
+                        <a:t>Talent</a:t>
+                      </a:r>
+                    </a:p>
+                  </a:txBody>
+                  <a:tcPr marL="54864" marR="54864" marT="18288" marB="18288" anchor="ctr">
+                    <a:solidFill>
+                      <a:srgbClr val="FFFFFF"/>
+                    </a:solidFill>
+                  </a:tcPr>
+                </a:tc>
+                <a:tc>
+                  <a:txBody>
+                    <a:bodyPr/>
+                    <a:lstStyle/>
+                    <a:p>
+                      <a:pPr algn="ctr"/>
+                      <a:r>
+                        <a:rPr sz="950" b="0">
+                          <a:solidFill>
+                            <a:srgbClr val="000000"/>
+                          </a:solidFill>
+                          <a:latin typeface="Arial"/>
+                        </a:rPr>
                         <a:t>6</a:t>
                       </a:r>
                     </a:p>
                   </a:txBody>
                   <a:tcPr marL="54864" marR="54864" marT="18288" marB="18288" anchor="ctr">
                     <a:solidFill>
+                      <a:srgbClr val="FFFFFF"/>
+                    </a:solidFill>
+                  </a:tcPr>
+                </a:tc>
+                <a:tc>
+                  <a:txBody>
+                    <a:bodyPr/>
+                    <a:lstStyle/>
+                    <a:p>
+                      <a:pPr algn="ctr"/>
+                      <a:r>
+                        <a:rPr sz="950" b="0">
+                          <a:solidFill>
+                            <a:srgbClr val="000000"/>
+                          </a:solidFill>
+                          <a:latin typeface="Arial"/>
+                        </a:rPr>
+                        <a:t>17</a:t>
+                      </a:r>
+                    </a:p>
+                  </a:txBody>
+                  <a:tcPr marL="54864" marR="54864" marT="18288" marB="18288" anchor="ctr">
+                    <a:solidFill>
+                      <a:srgbClr val="FFFFFF"/>
+                    </a:solidFill>
+                  </a:tcPr>
+                </a:tc>
+                <a:tc>
+                  <a:txBody>
+                    <a:bodyPr/>
+                    <a:lstStyle/>
+                    <a:p>
+                      <a:pPr algn="ctr"/>
+                      <a:r>
+                        <a:rPr sz="950" b="0">
+                          <a:solidFill>
+                            <a:srgbClr val="000000"/>
+                          </a:solidFill>
+                          <a:latin typeface="Arial"/>
+                        </a:rPr>
+                        <a:t>23</a:t>
+                      </a:r>
+                    </a:p>
+                  </a:txBody>
+                  <a:tcPr marL="54864" marR="54864" marT="18288" marB="18288" anchor="ctr">
+                    <a:solidFill>
+                      <a:srgbClr val="FFFFFF"/>
+                    </a:solidFill>
+                  </a:tcPr>
+                </a:tc>
+                <a:tc>
+                  <a:txBody>
+                    <a:bodyPr/>
+                    <a:lstStyle/>
+                    <a:p>
+                      <a:pPr algn="ctr"/>
+                      <a:r>
+                        <a:rPr sz="950" b="0">
+                          <a:solidFill>
+                            <a:srgbClr val="000000"/>
+                          </a:solidFill>
+                          <a:latin typeface="Arial"/>
+                        </a:rPr>
+                        <a:t>3,8</a:t>
+                      </a:r>
+                    </a:p>
+                  </a:txBody>
+                  <a:tcPr marL="54864" marR="54864" marT="18288" marB="18288" anchor="ctr">
+                    <a:solidFill>
+                      <a:srgbClr val="FFFFFF"/>
+                    </a:solidFill>
+                  </a:tcPr>
+                </a:tc>
+                <a:tc>
+                  <a:txBody>
+                    <a:bodyPr/>
+                    <a:lstStyle/>
+                    <a:p>
+                      <a:pPr algn="ctr"/>
+                      <a:r>
+                        <a:rPr sz="950" b="0">
+                          <a:solidFill>
+                            <a:srgbClr val="000000"/>
+                          </a:solidFill>
+                          <a:latin typeface="Arial"/>
+                        </a:rPr>
+                        <a:t>4</a:t>
+                      </a:r>
+                    </a:p>
+                  </a:txBody>
+                  <a:tcPr marL="54864" marR="54864" marT="18288" marB="18288" anchor="ctr">
+                    <a:solidFill>
+                      <a:srgbClr val="FFFFFF"/>
+                    </a:solidFill>
+                  </a:tcPr>
+                </a:tc>
+                <a:tc>
+                  <a:txBody>
+                    <a:bodyPr/>
+                    <a:lstStyle/>
+                    <a:p>
+                      <a:pPr algn="ctr"/>
+                      <a:r>
+                        <a:rPr sz="950" b="0">
+                          <a:solidFill>
+                            <a:srgbClr val="000000"/>
+                          </a:solidFill>
+                          <a:latin typeface="Arial"/>
+                        </a:rPr>
+                        <a:t>4</a:t>
+                      </a:r>
+                    </a:p>
+                  </a:txBody>
+                  <a:tcPr marL="54864" marR="54864" marT="18288" marB="18288" anchor="ctr">
+                    <a:solidFill>
+                      <a:srgbClr val="FFFFFF"/>
+                    </a:solidFill>
+                  </a:tcPr>
+                </a:tc>
+                <a:tc>
+                  <a:txBody>
+                    <a:bodyPr/>
+                    <a:lstStyle/>
+                    <a:p>
+                      <a:pPr algn="ctr"/>
+                      <a:r>
+                        <a:rPr sz="950" b="0">
+                          <a:solidFill>
+                            <a:srgbClr val="000000"/>
+                          </a:solidFill>
+                          <a:latin typeface="Arial"/>
+                        </a:rPr>
+                        <a:t>14%</a:t>
+                      </a:r>
+                    </a:p>
+                  </a:txBody>
+                  <a:tcPr marL="54864" marR="54864" marT="18288" marB="18288" anchor="ctr">
+                    <a:solidFill>
+                      <a:srgbClr val="FFFFFF"/>
+                    </a:solidFill>
+                  </a:tcPr>
+                </a:tc>
+                <a:extLst>
+                  <a:ext uri="{0D108BD9-81ED-4DB2-BD59-A6C34878D82A}">
+                    <a16:rowId xmlns:a16="http://schemas.microsoft.com/office/drawing/2014/main" val="10004"/>
+                  </a:ext>
+                </a:extLst>
+              </a:tr>
+              <a:tr h="301752">
+                <a:tc>
+                  <a:txBody>
+                    <a:bodyPr/>
+                    <a:lstStyle/>
+                    <a:p>
+                      <a:pPr algn="l"/>
+                      <a:r>
+                        <a:rPr sz="950" b="1">
+                          <a:solidFill>
+                            <a:srgbClr val="000000"/>
+                          </a:solidFill>
+                          <a:latin typeface="Arial"/>
+                        </a:rPr>
+                        <a:t>CCO</a:t>
+                      </a:r>
+                    </a:p>
+                  </a:txBody>
+                  <a:tcPr marL="54864" marR="54864" marT="18288" marB="18288" anchor="ctr">
+                    <a:solidFill>
                       <a:srgbClr val="F2F2F2"/>
                     </a:solidFill>
                   </a:tcPr>
                 </a:tc>
                 <a:tc>
                   <a:txBody>
-                    <a:bodyPr wrap="square"/>
+                    <a:bodyPr/>
                     <a:lstStyle/>
                     <a:p>
                       <a:pPr algn="ctr"/>
@@ -5459,7 +6633,7 @@
                           </a:solidFill>
                           <a:latin typeface="Arial"/>
                         </a:rPr>
-                        <a:t>148</a:t>
+                        <a:t>5</a:t>
                       </a:r>
                     </a:p>
                   </a:txBody>
@@ -5471,7 +6645,7 @@
                 </a:tc>
                 <a:tc>
                   <a:txBody>
-                    <a:bodyPr wrap="square"/>
+                    <a:bodyPr/>
                     <a:lstStyle/>
                     <a:p>
                       <a:pPr algn="ctr"/>
@@ -5482,7 +6656,7 @@
                           </a:solidFill>
                           <a:latin typeface="Arial"/>
                         </a:rPr>
-                        <a:t>29</a:t>
+                        <a:t>12</a:t>
                       </a:r>
                     </a:p>
                   </a:txBody>
@@ -5494,7 +6668,7 @@
                 </a:tc>
                 <a:tc>
                   <a:txBody>
-                    <a:bodyPr wrap="square"/>
+                    <a:bodyPr/>
                     <a:lstStyle/>
                     <a:p>
                       <a:pPr algn="ctr"/>
@@ -5505,1219 +6679,481 @@
                           </a:solidFill>
                           <a:latin typeface="Arial"/>
                         </a:rPr>
+                        <a:t>17</a:t>
+                      </a:r>
+                    </a:p>
+                  </a:txBody>
+                  <a:tcPr marL="54864" marR="54864" marT="18288" marB="18288" anchor="ctr">
+                    <a:solidFill>
+                      <a:srgbClr val="F2F2F2"/>
+                    </a:solidFill>
+                  </a:tcPr>
+                </a:tc>
+                <a:tc>
+                  <a:txBody>
+                    <a:bodyPr/>
+                    <a:lstStyle/>
+                    <a:p>
+                      <a:pPr algn="ctr"/>
+                      <a:r>
+                        <a:rPr sz="950" b="0">
+                          <a:solidFill>
+                            <a:srgbClr val="000000"/>
+                          </a:solidFill>
+                          <a:latin typeface="Arial"/>
+                        </a:rPr>
+                        <a:t>3,4</a:t>
+                      </a:r>
+                    </a:p>
+                  </a:txBody>
+                  <a:tcPr marL="54864" marR="54864" marT="18288" marB="18288" anchor="ctr">
+                    <a:solidFill>
+                      <a:srgbClr val="F2F2F2"/>
+                    </a:solidFill>
+                  </a:tcPr>
+                </a:tc>
+                <a:tc>
+                  <a:txBody>
+                    <a:bodyPr/>
+                    <a:lstStyle/>
+                    <a:p>
+                      <a:pPr algn="ctr"/>
+                      <a:r>
+                        <a:rPr sz="950" b="0">
+                          <a:solidFill>
+                            <a:srgbClr val="000000"/>
+                          </a:solidFill>
+                          <a:latin typeface="Arial"/>
+                        </a:rPr>
+                        <a:t>5</a:t>
+                      </a:r>
+                    </a:p>
+                  </a:txBody>
+                  <a:tcPr marL="54864" marR="54864" marT="18288" marB="18288" anchor="ctr">
+                    <a:solidFill>
+                      <a:srgbClr val="F2F2F2"/>
+                    </a:solidFill>
+                  </a:tcPr>
+                </a:tc>
+                <a:tc>
+                  <a:txBody>
+                    <a:bodyPr/>
+                    <a:lstStyle/>
+                    <a:p>
+                      <a:pPr algn="ctr"/>
+                      <a:r>
+                        <a:rPr sz="950" b="0">
+                          <a:solidFill>
+                            <a:srgbClr val="000000"/>
+                          </a:solidFill>
+                          <a:latin typeface="Arial"/>
+                        </a:rPr>
+                        <a:t>3</a:t>
+                      </a:r>
+                    </a:p>
+                  </a:txBody>
+                  <a:tcPr marL="54864" marR="54864" marT="18288" marB="18288" anchor="ctr">
+                    <a:solidFill>
+                      <a:srgbClr val="F2F2F2"/>
+                    </a:solidFill>
+                  </a:tcPr>
+                </a:tc>
+                <a:tc>
+                  <a:txBody>
+                    <a:bodyPr/>
+                    <a:lstStyle/>
+                    <a:p>
+                      <a:pPr algn="ctr"/>
+                      <a:r>
+                        <a:rPr sz="950" b="1">
+                          <a:solidFill>
+                            <a:srgbClr val="6B2D6B"/>
+                          </a:solidFill>
+                          <a:latin typeface="Arial"/>
+                        </a:rPr>
+                        <a:t>22%</a:t>
+                      </a:r>
+                    </a:p>
+                  </a:txBody>
+                  <a:tcPr marL="54864" marR="54864" marT="18288" marB="18288" anchor="ctr">
+                    <a:solidFill>
+                      <a:srgbClr val="F2F2F2"/>
+                    </a:solidFill>
+                  </a:tcPr>
+                </a:tc>
+                <a:extLst>
+                  <a:ext uri="{0D108BD9-81ED-4DB2-BD59-A6C34878D82A}">
+                    <a16:rowId xmlns:a16="http://schemas.microsoft.com/office/drawing/2014/main" val="10005"/>
+                  </a:ext>
+                </a:extLst>
+              </a:tr>
+              <a:tr h="301752">
+                <a:tc>
+                  <a:txBody>
+                    <a:bodyPr/>
+                    <a:lstStyle/>
+                    <a:p>
+                      <a:pPr algn="l"/>
+                      <a:r>
+                        <a:rPr sz="950" b="1">
+                          <a:solidFill>
+                            <a:srgbClr val="000000"/>
+                          </a:solidFill>
+                          <a:latin typeface="Arial"/>
+                        </a:rPr>
+                        <a:t>Services</a:t>
+                      </a:r>
+                    </a:p>
+                  </a:txBody>
+                  <a:tcPr marL="54864" marR="54864" marT="18288" marB="18288" anchor="ctr">
+                    <a:solidFill>
+                      <a:srgbClr val="FFFFFF"/>
+                    </a:solidFill>
+                  </a:tcPr>
+                </a:tc>
+                <a:tc>
+                  <a:txBody>
+                    <a:bodyPr/>
+                    <a:lstStyle/>
+                    <a:p>
+                      <a:pPr algn="ctr"/>
+                      <a:r>
+                        <a:rPr sz="950" b="0">
+                          <a:solidFill>
+                            <a:srgbClr val="000000"/>
+                          </a:solidFill>
+                          <a:latin typeface="Arial"/>
+                        </a:rPr>
+                        <a:t>5</a:t>
+                      </a:r>
+                    </a:p>
+                  </a:txBody>
+                  <a:tcPr marL="54864" marR="54864" marT="18288" marB="18288" anchor="ctr">
+                    <a:solidFill>
+                      <a:srgbClr val="FFFFFF"/>
+                    </a:solidFill>
+                  </a:tcPr>
+                </a:tc>
+                <a:tc>
+                  <a:txBody>
+                    <a:bodyPr/>
+                    <a:lstStyle/>
+                    <a:p>
+                      <a:pPr algn="ctr"/>
+                      <a:r>
+                        <a:rPr sz="950" b="0">
+                          <a:solidFill>
+                            <a:srgbClr val="000000"/>
+                          </a:solidFill>
+                          <a:latin typeface="Arial"/>
+                        </a:rPr>
+                        <a:t>0</a:t>
+                      </a:r>
+                    </a:p>
+                  </a:txBody>
+                  <a:tcPr marL="54864" marR="54864" marT="18288" marB="18288" anchor="ctr">
+                    <a:solidFill>
+                      <a:srgbClr val="FFFFFF"/>
+                    </a:solidFill>
+                  </a:tcPr>
+                </a:tc>
+                <a:tc>
+                  <a:txBody>
+                    <a:bodyPr/>
+                    <a:lstStyle/>
+                    <a:p>
+                      <a:pPr algn="ctr"/>
+                      <a:r>
+                        <a:rPr sz="950" b="0">
+                          <a:solidFill>
+                            <a:srgbClr val="000000"/>
+                          </a:solidFill>
+                          <a:latin typeface="Arial"/>
+                        </a:rPr>
+                        <a:t>5</a:t>
+                      </a:r>
+                    </a:p>
+                  </a:txBody>
+                  <a:tcPr marL="54864" marR="54864" marT="18288" marB="18288" anchor="ctr">
+                    <a:solidFill>
+                      <a:srgbClr val="FFFFFF"/>
+                    </a:solidFill>
+                  </a:tcPr>
+                </a:tc>
+                <a:tc>
+                  <a:txBody>
+                    <a:bodyPr/>
+                    <a:lstStyle/>
+                    <a:p>
+                      <a:pPr algn="ctr"/>
+                      <a:r>
+                        <a:rPr sz="950" b="0">
+                          <a:solidFill>
+                            <a:srgbClr val="000000"/>
+                          </a:solidFill>
+                          <a:latin typeface="Arial"/>
+                        </a:rPr>
+                        <a:t>1,0</a:t>
+                      </a:r>
+                    </a:p>
+                  </a:txBody>
+                  <a:tcPr marL="54864" marR="54864" marT="18288" marB="18288" anchor="ctr">
+                    <a:solidFill>
+                      <a:srgbClr val="FFFFFF"/>
+                    </a:solidFill>
+                  </a:tcPr>
+                </a:tc>
+                <a:tc>
+                  <a:txBody>
+                    <a:bodyPr/>
+                    <a:lstStyle/>
+                    <a:p>
+                      <a:pPr algn="ctr"/>
+                      <a:r>
+                        <a:rPr sz="950" b="0">
+                          <a:solidFill>
+                            <a:srgbClr val="000000"/>
+                          </a:solidFill>
+                          <a:latin typeface="Arial"/>
+                        </a:rPr>
+                        <a:t>1</a:t>
+                      </a:r>
+                    </a:p>
+                  </a:txBody>
+                  <a:tcPr marL="54864" marR="54864" marT="18288" marB="18288" anchor="ctr">
+                    <a:solidFill>
+                      <a:srgbClr val="FFFFFF"/>
+                    </a:solidFill>
+                  </a:tcPr>
+                </a:tc>
+                <a:tc>
+                  <a:txBody>
+                    <a:bodyPr/>
+                    <a:lstStyle/>
+                    <a:p>
+                      <a:pPr algn="ctr"/>
+                      <a:r>
+                        <a:rPr sz="950" b="0">
+                          <a:solidFill>
+                            <a:srgbClr val="000000"/>
+                          </a:solidFill>
+                          <a:latin typeface="Arial"/>
+                        </a:rPr>
+                        <a:t>1</a:t>
+                      </a:r>
+                    </a:p>
+                  </a:txBody>
+                  <a:tcPr marL="54864" marR="54864" marT="18288" marB="18288" anchor="ctr">
+                    <a:solidFill>
+                      <a:srgbClr val="FFFFFF"/>
+                    </a:solidFill>
+                  </a:tcPr>
+                </a:tc>
+                <a:tc>
+                  <a:txBody>
+                    <a:bodyPr/>
+                    <a:lstStyle/>
+                    <a:p>
+                      <a:pPr algn="ctr"/>
+                      <a:r>
+                        <a:rPr sz="950" b="0">
+                          <a:solidFill>
+                            <a:srgbClr val="000000"/>
+                          </a:solidFill>
+                          <a:latin typeface="Arial"/>
+                        </a:rPr>
+                        <a:t>14%</a:t>
+                      </a:r>
+                    </a:p>
+                  </a:txBody>
+                  <a:tcPr marL="54864" marR="54864" marT="18288" marB="18288" anchor="ctr">
+                    <a:solidFill>
+                      <a:srgbClr val="FFFFFF"/>
+                    </a:solidFill>
+                  </a:tcPr>
+                </a:tc>
+                <a:extLst>
+                  <a:ext uri="{0D108BD9-81ED-4DB2-BD59-A6C34878D82A}">
+                    <a16:rowId xmlns:a16="http://schemas.microsoft.com/office/drawing/2014/main" val="10006"/>
+                  </a:ext>
+                </a:extLst>
+              </a:tr>
+              <a:tr h="301752">
+                <a:tc>
+                  <a:txBody>
+                    <a:bodyPr/>
+                    <a:lstStyle/>
+                    <a:p>
+                      <a:pPr algn="l"/>
+                      <a:r>
+                        <a:rPr sz="950" b="1">
+                          <a:solidFill>
+                            <a:srgbClr val="009796"/>
+                          </a:solidFill>
+                          <a:latin typeface="Arial"/>
+                        </a:rPr>
+                        <a:t>Total (Co-CEO)</a:t>
+                      </a:r>
+                    </a:p>
+                  </a:txBody>
+                  <a:tcPr marL="54864" marR="54864" marT="18288" marB="18288" anchor="ctr">
+                    <a:solidFill>
+                      <a:srgbClr val="E8F4F4"/>
+                    </a:solidFill>
+                  </a:tcPr>
+                </a:tc>
+                <a:tc>
+                  <a:txBody>
+                    <a:bodyPr/>
+                    <a:lstStyle/>
+                    <a:p>
+                      <a:pPr algn="ctr"/>
+                      <a:r>
+                        <a:rPr sz="950" b="1">
+                          <a:solidFill>
+                            <a:srgbClr val="009796"/>
+                          </a:solidFill>
+                          <a:latin typeface="Arial"/>
+                        </a:rPr>
                         <a:t>6</a:t>
                       </a:r>
                     </a:p>
                   </a:txBody>
                   <a:tcPr marL="54864" marR="54864" marT="18288" marB="18288" anchor="ctr">
                     <a:solidFill>
-                      <a:srgbClr val="F2F2F2"/>
-                    </a:solidFill>
-                  </a:tcPr>
-                </a:tc>
-                <a:tc>
-                  <a:txBody>
-                    <a:bodyPr wrap="square"/>
-                    <a:lstStyle/>
-                    <a:p>
-                      <a:pPr algn="ctr"/>
-                      <a:r>
-                        <a:rPr sz="950" b="0">
-                          <a:solidFill>
-                            <a:srgbClr val="000000"/>
-                          </a:solidFill>
-                          <a:latin typeface="Arial"/>
-                        </a:rPr>
-                        <a:t>25</a:t>
-                      </a:r>
-                    </a:p>
-                  </a:txBody>
-                  <a:tcPr marL="54864" marR="54864" marT="18288" marB="18288" anchor="ctr">
-                    <a:solidFill>
-                      <a:srgbClr val="F2F2F2"/>
-                    </a:solidFill>
-                  </a:tcPr>
-                </a:tc>
-                <a:tc>
-                  <a:txBody>
-                    <a:bodyPr wrap="square"/>
-                    <a:lstStyle/>
-                    <a:p>
-                      <a:pPr algn="ctr"/>
-                      <a:r>
-                        <a:rPr sz="950" b="0">
-                          <a:solidFill>
-                            <a:srgbClr val="000000"/>
-                          </a:solidFill>
-                          <a:latin typeface="Arial"/>
-                        </a:rPr>
-                        <a:t>14%</a:t>
-                      </a:r>
-                    </a:p>
-                  </a:txBody>
-                  <a:tcPr marL="54864" marR="54864" marT="18288" marB="18288" anchor="ctr">
-                    <a:solidFill>
-                      <a:srgbClr val="F2F2F2"/>
-                    </a:solidFill>
-                  </a:tcPr>
-                </a:tc>
-              </a:tr>
-              <a:tr h="274320">
-                <a:tc>
-                  <a:txBody>
-                    <a:bodyPr wrap="square"/>
-                    <a:lstStyle/>
-                    <a:p>
-                      <a:pPr algn="l"/>
+                      <a:srgbClr val="E8F4F4"/>
+                    </a:solidFill>
+                  </a:tcPr>
+                </a:tc>
+                <a:tc>
+                  <a:txBody>
+                    <a:bodyPr/>
+                    <a:lstStyle/>
+                    <a:p>
+                      <a:pPr algn="ctr"/>
                       <a:r>
                         <a:rPr sz="950" b="1">
                           <a:solidFill>
-                            <a:srgbClr val="000000"/>
-                          </a:solidFill>
-                          <a:latin typeface="Arial"/>
-                        </a:rPr>
-                        <a:t>CITO</a:t>
-                      </a:r>
-                    </a:p>
-                  </a:txBody>
-                  <a:tcPr marL="54864" marR="54864" marT="18288" marB="18288" anchor="ctr">
-                    <a:solidFill>
-                      <a:srgbClr val="FFFFFF"/>
-                    </a:solidFill>
-                  </a:tcPr>
-                </a:tc>
-                <a:tc>
-                  <a:txBody>
-                    <a:bodyPr wrap="square"/>
-                    <a:lstStyle/>
-                    <a:p>
-                      <a:pPr algn="ctr"/>
-                      <a:r>
-                        <a:rPr sz="950" b="0">
-                          <a:solidFill>
-                            <a:srgbClr val="000000"/>
-                          </a:solidFill>
-                          <a:latin typeface="Arial"/>
-                        </a:rPr>
-                        <a:t>2</a:t>
-                      </a:r>
-                    </a:p>
-                  </a:txBody>
-                  <a:tcPr marL="54864" marR="54864" marT="18288" marB="18288" anchor="ctr">
-                    <a:solidFill>
-                      <a:srgbClr val="FFFFFF"/>
-                    </a:solidFill>
-                  </a:tcPr>
-                </a:tc>
-                <a:tc>
-                  <a:txBody>
-                    <a:bodyPr wrap="square"/>
-                    <a:lstStyle/>
-                    <a:p>
-                      <a:pPr algn="ctr"/>
-                      <a:r>
-                        <a:rPr sz="950" b="0">
-                          <a:solidFill>
-                            <a:srgbClr val="000000"/>
-                          </a:solidFill>
-                          <a:latin typeface="Arial"/>
-                        </a:rPr>
-                        <a:t>45</a:t>
-                      </a:r>
-                    </a:p>
-                  </a:txBody>
-                  <a:tcPr marL="54864" marR="54864" marT="18288" marB="18288" anchor="ctr">
-                    <a:solidFill>
-                      <a:srgbClr val="FFFFFF"/>
-                    </a:solidFill>
-                  </a:tcPr>
-                </a:tc>
-                <a:tc>
-                  <a:txBody>
-                    <a:bodyPr wrap="square"/>
-                    <a:lstStyle/>
-                    <a:p>
-                      <a:pPr algn="ctr"/>
-                      <a:r>
-                        <a:rPr sz="950" b="0">
-                          <a:solidFill>
-                            <a:srgbClr val="000000"/>
-                          </a:solidFill>
-                          <a:latin typeface="Arial"/>
-                        </a:rPr>
-                        <a:t>5</a:t>
-                      </a:r>
-                    </a:p>
-                  </a:txBody>
-                  <a:tcPr marL="54864" marR="54864" marT="18288" marB="18288" anchor="ctr">
-                    <a:solidFill>
-                      <a:srgbClr val="FFFFFF"/>
-                    </a:solidFill>
-                  </a:tcPr>
-                </a:tc>
-                <a:tc>
-                  <a:txBody>
-                    <a:bodyPr wrap="square"/>
-                    <a:lstStyle/>
-                    <a:p>
-                      <a:pPr algn="ctr"/>
-                      <a:r>
-                        <a:rPr sz="950" b="0">
-                          <a:solidFill>
-                            <a:srgbClr val="000000"/>
-                          </a:solidFill>
-                          <a:latin typeface="Arial"/>
-                        </a:rPr>
-                        <a:t>1</a:t>
-                      </a:r>
-                    </a:p>
-                  </a:txBody>
-                  <a:tcPr marL="54864" marR="54864" marT="18288" marB="18288" anchor="ctr">
-                    <a:solidFill>
-                      <a:srgbClr val="FFFFFF"/>
-                    </a:solidFill>
-                  </a:tcPr>
-                </a:tc>
-                <a:tc>
-                  <a:txBody>
-                    <a:bodyPr wrap="square"/>
-                    <a:lstStyle/>
-                    <a:p>
-                      <a:pPr algn="ctr"/>
-                      <a:r>
-                        <a:rPr sz="950" b="0">
-                          <a:solidFill>
-                            <a:srgbClr val="000000"/>
-                          </a:solidFill>
-                          <a:latin typeface="Arial"/>
-                        </a:rPr>
-                        <a:t>2</a:t>
-                      </a:r>
-                    </a:p>
-                  </a:txBody>
-                  <a:tcPr marL="54864" marR="54864" marT="18288" marB="18288" anchor="ctr">
-                    <a:solidFill>
-                      <a:srgbClr val="FFFFFF"/>
-                    </a:solidFill>
-                  </a:tcPr>
-                </a:tc>
-                <a:tc>
-                  <a:txBody>
-                    <a:bodyPr wrap="square"/>
-                    <a:lstStyle/>
-                    <a:p>
-                      <a:pPr algn="ctr"/>
-                      <a:r>
-                        <a:rPr sz="950" b="0">
-                          <a:solidFill>
-                            <a:srgbClr val="000000"/>
-                          </a:solidFill>
-                          <a:latin typeface="Arial"/>
-                        </a:rPr>
-                        <a:t>4%</a:t>
-                      </a:r>
-                    </a:p>
-                  </a:txBody>
-                  <a:tcPr marL="54864" marR="54864" marT="18288" marB="18288" anchor="ctr">
-                    <a:solidFill>
-                      <a:srgbClr val="FFFFFF"/>
-                    </a:solidFill>
-                  </a:tcPr>
-                </a:tc>
-              </a:tr>
-              <a:tr h="274320">
-                <a:tc>
-                  <a:txBody>
-                    <a:bodyPr wrap="square"/>
-                    <a:lstStyle/>
-                    <a:p>
-                      <a:pPr algn="l"/>
+                            <a:srgbClr val="009796"/>
+                          </a:solidFill>
+                          <a:latin typeface="Arial"/>
+                        </a:rPr>
+                        <a:t>324</a:t>
+                      </a:r>
+                    </a:p>
+                  </a:txBody>
+                  <a:tcPr marL="54864" marR="54864" marT="18288" marB="18288" anchor="ctr">
+                    <a:solidFill>
+                      <a:srgbClr val="E8F4F4"/>
+                    </a:solidFill>
+                  </a:tcPr>
+                </a:tc>
+                <a:tc>
+                  <a:txBody>
+                    <a:bodyPr/>
+                    <a:lstStyle/>
+                    <a:p>
+                      <a:pPr algn="ctr"/>
                       <a:r>
                         <a:rPr sz="950" b="1">
                           <a:solidFill>
-                            <a:srgbClr val="000000"/>
-                          </a:solidFill>
-                          <a:latin typeface="Arial"/>
-                        </a:rPr>
-                        <a:t>CFSO</a:t>
-                      </a:r>
-                    </a:p>
-                  </a:txBody>
-                  <a:tcPr marL="54864" marR="54864" marT="18288" marB="18288" anchor="ctr">
-                    <a:solidFill>
-                      <a:srgbClr val="F2F2F2"/>
-                    </a:solidFill>
-                  </a:tcPr>
-                </a:tc>
-                <a:tc>
-                  <a:txBody>
-                    <a:bodyPr wrap="square"/>
-                    <a:lstStyle/>
-                    <a:p>
-                      <a:pPr algn="ctr"/>
-                      <a:r>
-                        <a:rPr sz="950" b="0">
-                          <a:solidFill>
-                            <a:srgbClr val="000000"/>
-                          </a:solidFill>
-                          <a:latin typeface="Arial"/>
-                        </a:rPr>
-                        <a:t>7</a:t>
-                      </a:r>
-                    </a:p>
-                  </a:txBody>
-                  <a:tcPr marL="54864" marR="54864" marT="18288" marB="18288" anchor="ctr">
-                    <a:solidFill>
-                      <a:srgbClr val="F2F2F2"/>
-                    </a:solidFill>
-                  </a:tcPr>
-                </a:tc>
-                <a:tc>
-                  <a:txBody>
-                    <a:bodyPr wrap="square"/>
-                    <a:lstStyle/>
-                    <a:p>
-                      <a:pPr algn="ctr"/>
-                      <a:r>
-                        <a:rPr sz="950" b="0">
-                          <a:solidFill>
-                            <a:srgbClr val="000000"/>
-                          </a:solidFill>
-                          <a:latin typeface="Arial"/>
-                        </a:rPr>
-                        <a:t>26</a:t>
-                      </a:r>
-                    </a:p>
-                  </a:txBody>
-                  <a:tcPr marL="54864" marR="54864" marT="18288" marB="18288" anchor="ctr">
-                    <a:solidFill>
-                      <a:srgbClr val="F2F2F2"/>
-                    </a:solidFill>
-                  </a:tcPr>
-                </a:tc>
-                <a:tc>
-                  <a:txBody>
-                    <a:bodyPr wrap="square"/>
-                    <a:lstStyle/>
-                    <a:p>
-                      <a:pPr algn="ctr"/>
-                      <a:r>
-                        <a:rPr sz="950" b="0">
-                          <a:solidFill>
-                            <a:srgbClr val="000000"/>
-                          </a:solidFill>
-                          <a:latin typeface="Arial"/>
-                        </a:rPr>
-                        <a:t>6</a:t>
-                      </a:r>
-                    </a:p>
-                  </a:txBody>
-                  <a:tcPr marL="54864" marR="54864" marT="18288" marB="18288" anchor="ctr">
-                    <a:solidFill>
-                      <a:srgbClr val="F2F2F2"/>
-                    </a:solidFill>
-                  </a:tcPr>
-                </a:tc>
-                <a:tc>
-                  <a:txBody>
-                    <a:bodyPr wrap="square"/>
-                    <a:lstStyle/>
-                    <a:p>
-                      <a:pPr algn="ctr"/>
-                      <a:r>
-                        <a:rPr sz="950" b="0">
-                          <a:solidFill>
-                            <a:srgbClr val="000000"/>
-                          </a:solidFill>
-                          <a:latin typeface="Arial"/>
-                        </a:rPr>
-                        <a:t>1</a:t>
-                      </a:r>
-                    </a:p>
-                  </a:txBody>
-                  <a:tcPr marL="54864" marR="54864" marT="18288" marB="18288" anchor="ctr">
-                    <a:solidFill>
-                      <a:srgbClr val="F2F2F2"/>
-                    </a:solidFill>
-                  </a:tcPr>
-                </a:tc>
-                <a:tc>
-                  <a:txBody>
-                    <a:bodyPr wrap="square"/>
-                    <a:lstStyle/>
-                    <a:p>
-                      <a:pPr algn="ctr"/>
-                      <a:r>
-                        <a:rPr sz="950" b="0">
-                          <a:solidFill>
-                            <a:srgbClr val="000000"/>
-                          </a:solidFill>
-                          <a:latin typeface="Arial"/>
-                        </a:rPr>
-                        <a:t>3</a:t>
-                      </a:r>
-                    </a:p>
-                  </a:txBody>
-                  <a:tcPr marL="54864" marR="54864" marT="18288" marB="18288" anchor="ctr">
-                    <a:solidFill>
-                      <a:srgbClr val="F2F2F2"/>
-                    </a:solidFill>
-                  </a:tcPr>
-                </a:tc>
-                <a:tc>
-                  <a:txBody>
-                    <a:bodyPr wrap="square"/>
-                    <a:lstStyle/>
-                    <a:p>
-                      <a:pPr algn="ctr"/>
-                      <a:r>
-                        <a:rPr sz="950" b="0">
-                          <a:solidFill>
-                            <a:srgbClr val="000000"/>
-                          </a:solidFill>
-                          <a:latin typeface="Arial"/>
-                        </a:rPr>
-                        <a:t>8%</a:t>
-                      </a:r>
-                    </a:p>
-                  </a:txBody>
-                  <a:tcPr marL="54864" marR="54864" marT="18288" marB="18288" anchor="ctr">
-                    <a:solidFill>
-                      <a:srgbClr val="F2F2F2"/>
-                    </a:solidFill>
-                  </a:tcPr>
-                </a:tc>
-              </a:tr>
-              <a:tr h="274320">
-                <a:tc>
-                  <a:txBody>
-                    <a:bodyPr wrap="square"/>
-                    <a:lstStyle/>
-                    <a:p>
-                      <a:pPr algn="l"/>
+                            <a:srgbClr val="009796"/>
+                          </a:solidFill>
+                          <a:latin typeface="Arial"/>
+                        </a:rPr>
+                        <a:t>330</a:t>
+                      </a:r>
+                    </a:p>
+                  </a:txBody>
+                  <a:tcPr marL="54864" marR="54864" marT="18288" marB="18288" anchor="ctr">
+                    <a:solidFill>
+                      <a:srgbClr val="E8F4F4"/>
+                    </a:solidFill>
+                  </a:tcPr>
+                </a:tc>
+                <a:tc>
+                  <a:txBody>
+                    <a:bodyPr/>
+                    <a:lstStyle/>
+                    <a:p>
+                      <a:pPr algn="ctr"/>
                       <a:r>
                         <a:rPr sz="950" b="1">
                           <a:solidFill>
-                            <a:srgbClr val="000000"/>
-                          </a:solidFill>
-                          <a:latin typeface="Arial"/>
-                        </a:rPr>
-                        <a:t>Air Product</a:t>
-                      </a:r>
-                    </a:p>
-                  </a:txBody>
-                  <a:tcPr marL="54864" marR="54864" marT="18288" marB="18288" anchor="ctr">
-                    <a:solidFill>
-                      <a:srgbClr val="FFFFFF"/>
-                    </a:solidFill>
-                  </a:tcPr>
-                </a:tc>
-                <a:tc>
-                  <a:txBody>
-                    <a:bodyPr wrap="square"/>
-                    <a:lstStyle/>
-                    <a:p>
-                      <a:pPr algn="ctr"/>
-                      <a:r>
-                        <a:rPr sz="950" b="0">
-                          <a:solidFill>
-                            <a:srgbClr val="000000"/>
-                          </a:solidFill>
-                          <a:latin typeface="Arial"/>
-                        </a:rPr>
-                        <a:t>2</a:t>
-                      </a:r>
-                    </a:p>
-                  </a:txBody>
-                  <a:tcPr marL="54864" marR="54864" marT="18288" marB="18288" anchor="ctr">
-                    <a:solidFill>
-                      <a:srgbClr val="FFFFFF"/>
-                    </a:solidFill>
-                  </a:tcPr>
-                </a:tc>
-                <a:tc>
-                  <a:txBody>
-                    <a:bodyPr wrap="square"/>
-                    <a:lstStyle/>
-                    <a:p>
-                      <a:pPr algn="ctr"/>
-                      <a:r>
-                        <a:rPr sz="950" b="0">
-                          <a:solidFill>
-                            <a:srgbClr val="000000"/>
-                          </a:solidFill>
-                          <a:latin typeface="Arial"/>
-                        </a:rPr>
-                        <a:t>26</a:t>
-                      </a:r>
-                    </a:p>
-                  </a:txBody>
-                  <a:tcPr marL="54864" marR="54864" marT="18288" marB="18288" anchor="ctr">
-                    <a:solidFill>
-                      <a:srgbClr val="FFFFFF"/>
-                    </a:solidFill>
-                  </a:tcPr>
-                </a:tc>
-                <a:tc>
-                  <a:txBody>
-                    <a:bodyPr wrap="square"/>
-                    <a:lstStyle/>
-                    <a:p>
-                      <a:pPr algn="ctr"/>
-                      <a:r>
-                        <a:rPr sz="950" b="0">
-                          <a:solidFill>
-                            <a:srgbClr val="000000"/>
-                          </a:solidFill>
-                          <a:latin typeface="Arial"/>
-                        </a:rPr>
-                        <a:t>6</a:t>
-                      </a:r>
-                    </a:p>
-                  </a:txBody>
-                  <a:tcPr marL="54864" marR="54864" marT="18288" marB="18288" anchor="ctr">
-                    <a:solidFill>
-                      <a:srgbClr val="FFFFFF"/>
-                    </a:solidFill>
-                  </a:tcPr>
-                </a:tc>
-                <a:tc>
-                  <a:txBody>
-                    <a:bodyPr wrap="square"/>
-                    <a:lstStyle/>
-                    <a:p>
-                      <a:pPr algn="ctr"/>
-                      <a:r>
-                        <a:rPr sz="950" b="0">
-                          <a:solidFill>
-                            <a:srgbClr val="000000"/>
-                          </a:solidFill>
-                          <a:latin typeface="Arial"/>
-                        </a:rPr>
-                        <a:t>1</a:t>
-                      </a:r>
-                    </a:p>
-                  </a:txBody>
-                  <a:tcPr marL="54864" marR="54864" marT="18288" marB="18288" anchor="ctr">
-                    <a:solidFill>
-                      <a:srgbClr val="FFFFFF"/>
-                    </a:solidFill>
-                  </a:tcPr>
-                </a:tc>
-                <a:tc>
-                  <a:txBody>
-                    <a:bodyPr wrap="square"/>
-                    <a:lstStyle/>
-                    <a:p>
-                      <a:pPr algn="ctr"/>
-                      <a:r>
-                        <a:rPr sz="950" b="0">
-                          <a:solidFill>
-                            <a:srgbClr val="000000"/>
-                          </a:solidFill>
-                          <a:latin typeface="Arial"/>
-                        </a:rPr>
-                        <a:t>7</a:t>
-                      </a:r>
-                    </a:p>
-                  </a:txBody>
-                  <a:tcPr marL="54864" marR="54864" marT="18288" marB="18288" anchor="ctr">
-                    <a:solidFill>
-                      <a:srgbClr val="FFFFFF"/>
-                    </a:solidFill>
-                  </a:tcPr>
-                </a:tc>
-                <a:tc>
-                  <a:txBody>
-                    <a:bodyPr wrap="square"/>
+                            <a:srgbClr val="009796"/>
+                          </a:solidFill>
+                          <a:latin typeface="Arial"/>
+                        </a:rPr>
+                        <a:t> </a:t>
+                      </a:r>
+                    </a:p>
+                  </a:txBody>
+                  <a:tcPr marL="54864" marR="54864" marT="18288" marB="18288" anchor="ctr">
+                    <a:solidFill>
+                      <a:srgbClr val="E8F4F4"/>
+                    </a:solidFill>
+                  </a:tcPr>
+                </a:tc>
+                <a:tc>
+                  <a:txBody>
+                    <a:bodyPr/>
                     <a:lstStyle/>
                     <a:p>
                       <a:pPr algn="ctr"/>
                       <a:r>
                         <a:rPr sz="950" b="1">
                           <a:solidFill>
-                            <a:srgbClr val="6B2D6B"/>
-                          </a:solidFill>
-                          <a:latin typeface="Arial"/>
-                        </a:rPr>
-                        <a:t>19%</a:t>
-                      </a:r>
-                    </a:p>
-                  </a:txBody>
-                  <a:tcPr marL="54864" marR="54864" marT="18288" marB="18288" anchor="ctr">
-                    <a:solidFill>
-                      <a:srgbClr val="FFFFFF"/>
-                    </a:solidFill>
-                  </a:tcPr>
-                </a:tc>
-              </a:tr>
-              <a:tr h="274320">
-                <a:tc>
-                  <a:txBody>
-                    <a:bodyPr wrap="square"/>
-                    <a:lstStyle/>
-                    <a:p>
-                      <a:pPr algn="l"/>
+                            <a:srgbClr val="009796"/>
+                          </a:solidFill>
+                          <a:latin typeface="Arial"/>
+                        </a:rPr>
+                        <a:t>49</a:t>
+                      </a:r>
+                    </a:p>
+                  </a:txBody>
+                  <a:tcPr marL="54864" marR="54864" marT="18288" marB="18288" anchor="ctr">
+                    <a:solidFill>
+                      <a:srgbClr val="E8F4F4"/>
+                    </a:solidFill>
+                  </a:tcPr>
+                </a:tc>
+                <a:tc>
+                  <a:txBody>
+                    <a:bodyPr/>
+                    <a:lstStyle/>
+                    <a:p>
+                      <a:pPr algn="ctr"/>
                       <a:r>
                         <a:rPr sz="950" b="1">
                           <a:solidFill>
-                            <a:srgbClr val="000000"/>
-                          </a:solidFill>
-                          <a:latin typeface="Arial"/>
-                        </a:rPr>
-                        <a:t>Talent</a:t>
-                      </a:r>
-                    </a:p>
-                  </a:txBody>
-                  <a:tcPr marL="54864" marR="54864" marT="18288" marB="18288" anchor="ctr">
-                    <a:solidFill>
-                      <a:srgbClr val="F2F2F2"/>
-                    </a:solidFill>
-                  </a:tcPr>
-                </a:tc>
-                <a:tc>
-                  <a:txBody>
-                    <a:bodyPr wrap="square"/>
-                    <a:lstStyle/>
-                    <a:p>
-                      <a:pPr algn="ctr"/>
-                      <a:r>
-                        <a:rPr sz="950" b="0">
-                          <a:solidFill>
-                            <a:srgbClr val="000000"/>
-                          </a:solidFill>
-                          <a:latin typeface="Arial"/>
-                        </a:rPr>
-                        <a:t>6</a:t>
-                      </a:r>
-                    </a:p>
-                  </a:txBody>
-                  <a:tcPr marL="54864" marR="54864" marT="18288" marB="18288" anchor="ctr">
-                    <a:solidFill>
-                      <a:srgbClr val="F2F2F2"/>
-                    </a:solidFill>
-                  </a:tcPr>
-                </a:tc>
-                <a:tc>
-                  <a:txBody>
-                    <a:bodyPr wrap="square"/>
-                    <a:lstStyle/>
-                    <a:p>
-                      <a:pPr algn="ctr"/>
-                      <a:r>
-                        <a:rPr sz="950" b="0">
-                          <a:solidFill>
-                            <a:srgbClr val="000000"/>
-                          </a:solidFill>
-                          <a:latin typeface="Arial"/>
-                        </a:rPr>
-                        <a:t>18</a:t>
-                      </a:r>
-                    </a:p>
-                  </a:txBody>
-                  <a:tcPr marL="54864" marR="54864" marT="18288" marB="18288" anchor="ctr">
-                    <a:solidFill>
-                      <a:srgbClr val="F2F2F2"/>
-                    </a:solidFill>
-                  </a:tcPr>
-                </a:tc>
-                <a:tc>
-                  <a:txBody>
-                    <a:bodyPr wrap="square"/>
-                    <a:lstStyle/>
-                    <a:p>
-                      <a:pPr algn="ctr"/>
-                      <a:r>
-                        <a:rPr sz="950" b="0">
-                          <a:solidFill>
-                            <a:srgbClr val="000000"/>
-                          </a:solidFill>
-                          <a:latin typeface="Arial"/>
-                        </a:rPr>
-                        <a:t>6</a:t>
-                      </a:r>
-                    </a:p>
-                  </a:txBody>
-                  <a:tcPr marL="54864" marR="54864" marT="18288" marB="18288" anchor="ctr">
-                    <a:solidFill>
-                      <a:srgbClr val="F2F2F2"/>
-                    </a:solidFill>
-                  </a:tcPr>
-                </a:tc>
-                <a:tc>
-                  <a:txBody>
-                    <a:bodyPr wrap="square"/>
-                    <a:lstStyle/>
-                    <a:p>
-                      <a:pPr algn="ctr"/>
-                      <a:r>
-                        <a:rPr sz="950" b="0">
-                          <a:solidFill>
-                            <a:srgbClr val="000000"/>
-                          </a:solidFill>
-                          <a:latin typeface="Arial"/>
-                        </a:rPr>
-                        <a:t>2</a:t>
-                      </a:r>
-                    </a:p>
-                  </a:txBody>
-                  <a:tcPr marL="54864" marR="54864" marT="18288" marB="18288" anchor="ctr">
-                    <a:solidFill>
-                      <a:srgbClr val="F2F2F2"/>
-                    </a:solidFill>
-                  </a:tcPr>
-                </a:tc>
-                <a:tc>
-                  <a:txBody>
-                    <a:bodyPr wrap="square"/>
-                    <a:lstStyle/>
-                    <a:p>
-                      <a:pPr algn="ctr"/>
-                      <a:r>
-                        <a:rPr sz="950" b="0">
-                          <a:solidFill>
-                            <a:srgbClr val="000000"/>
-                          </a:solidFill>
-                          <a:latin typeface="Arial"/>
-                        </a:rPr>
-                        <a:t>4</a:t>
-                      </a:r>
-                    </a:p>
-                  </a:txBody>
-                  <a:tcPr marL="54864" marR="54864" marT="18288" marB="18288" anchor="ctr">
-                    <a:solidFill>
-                      <a:srgbClr val="F2F2F2"/>
-                    </a:solidFill>
-                  </a:tcPr>
-                </a:tc>
-                <a:tc>
-                  <a:txBody>
-                    <a:bodyPr wrap="square"/>
-                    <a:lstStyle/>
-                    <a:p>
-                      <a:pPr algn="ctr"/>
-                      <a:r>
-                        <a:rPr sz="950" b="0">
-                          <a:solidFill>
-                            <a:srgbClr val="000000"/>
-                          </a:solidFill>
-                          <a:latin typeface="Arial"/>
-                        </a:rPr>
-                        <a:t>14%</a:t>
-                      </a:r>
-                    </a:p>
-                  </a:txBody>
-                  <a:tcPr marL="54864" marR="54864" marT="18288" marB="18288" anchor="ctr">
-                    <a:solidFill>
-                      <a:srgbClr val="F2F2F2"/>
-                    </a:solidFill>
-                  </a:tcPr>
-                </a:tc>
-              </a:tr>
-              <a:tr h="274320">
-                <a:tc>
-                  <a:txBody>
-                    <a:bodyPr wrap="square"/>
-                    <a:lstStyle/>
-                    <a:p>
-                      <a:pPr algn="l"/>
+                            <a:srgbClr val="009796"/>
+                          </a:solidFill>
+                          <a:latin typeface="Arial"/>
+                        </a:rPr>
+                        <a:t>41</a:t>
+                      </a:r>
+                    </a:p>
+                  </a:txBody>
+                  <a:tcPr marL="54864" marR="54864" marT="18288" marB="18288" anchor="ctr">
+                    <a:solidFill>
+                      <a:srgbClr val="E8F4F4"/>
+                    </a:solidFill>
+                  </a:tcPr>
+                </a:tc>
+                <a:tc>
+                  <a:txBody>
+                    <a:bodyPr/>
+                    <a:lstStyle/>
+                    <a:p>
+                      <a:pPr algn="ctr"/>
                       <a:r>
                         <a:rPr sz="950" b="1">
                           <a:solidFill>
-                            <a:srgbClr val="000000"/>
-                          </a:solidFill>
-                          <a:latin typeface="Arial"/>
-                        </a:rPr>
-                        <a:t>CCO</a:t>
-                      </a:r>
-                    </a:p>
-                  </a:txBody>
-                  <a:tcPr marL="54864" marR="54864" marT="18288" marB="18288" anchor="ctr">
-                    <a:solidFill>
-                      <a:srgbClr val="FFFFFF"/>
-                    </a:solidFill>
-                  </a:tcPr>
-                </a:tc>
-                <a:tc>
-                  <a:txBody>
-                    <a:bodyPr wrap="square"/>
-                    <a:lstStyle/>
-                    <a:p>
-                      <a:pPr algn="ctr"/>
-                      <a:r>
-                        <a:rPr sz="950" b="0">
-                          <a:solidFill>
-                            <a:srgbClr val="000000"/>
-                          </a:solidFill>
-                          <a:latin typeface="Arial"/>
-                        </a:rPr>
-                        <a:t>5</a:t>
-                      </a:r>
-                    </a:p>
-                  </a:txBody>
-                  <a:tcPr marL="54864" marR="54864" marT="18288" marB="18288" anchor="ctr">
-                    <a:solidFill>
-                      <a:srgbClr val="FFFFFF"/>
-                    </a:solidFill>
-                  </a:tcPr>
-                </a:tc>
-                <a:tc>
-                  <a:txBody>
-                    <a:bodyPr wrap="square"/>
-                    <a:lstStyle/>
-                    <a:p>
-                      <a:pPr algn="ctr"/>
-                      <a:r>
-                        <a:rPr sz="950" b="0">
-                          <a:solidFill>
-                            <a:srgbClr val="000000"/>
-                          </a:solidFill>
-                          <a:latin typeface="Arial"/>
-                        </a:rPr>
-                        <a:t>13</a:t>
-                      </a:r>
-                    </a:p>
-                  </a:txBody>
-                  <a:tcPr marL="54864" marR="54864" marT="18288" marB="18288" anchor="ctr">
-                    <a:solidFill>
-                      <a:srgbClr val="FFFFFF"/>
-                    </a:solidFill>
-                  </a:tcPr>
-                </a:tc>
-                <a:tc>
-                  <a:txBody>
-                    <a:bodyPr wrap="square"/>
-                    <a:lstStyle/>
-                    <a:p>
-                      <a:pPr algn="ctr"/>
-                      <a:r>
-                        <a:rPr sz="950" b="0">
-                          <a:solidFill>
-                            <a:srgbClr val="000000"/>
-                          </a:solidFill>
-                          <a:latin typeface="Arial"/>
-                        </a:rPr>
-                        <a:t>8</a:t>
-                      </a:r>
-                    </a:p>
-                  </a:txBody>
-                  <a:tcPr marL="54864" marR="54864" marT="18288" marB="18288" anchor="ctr">
-                    <a:solidFill>
-                      <a:srgbClr val="FFFFFF"/>
-                    </a:solidFill>
-                  </a:tcPr>
-                </a:tc>
-                <a:tc>
-                  <a:txBody>
-                    <a:bodyPr wrap="square"/>
-                    <a:lstStyle/>
-                    <a:p>
-                      <a:pPr algn="ctr"/>
-                      <a:r>
-                        <a:rPr sz="950" b="1">
-                          <a:solidFill>
-                            <a:srgbClr val="6B2D6B"/>
-                          </a:solidFill>
-                          <a:latin typeface="Arial"/>
-                        </a:rPr>
-                        <a:t>7</a:t>
-                      </a:r>
-                    </a:p>
-                  </a:txBody>
-                  <a:tcPr marL="54864" marR="54864" marT="18288" marB="18288" anchor="ctr">
-                    <a:solidFill>
-                      <a:srgbClr val="FFFFFF"/>
-                    </a:solidFill>
-                  </a:tcPr>
-                </a:tc>
-                <a:tc>
-                  <a:txBody>
-                    <a:bodyPr wrap="square"/>
-                    <a:lstStyle/>
-                    <a:p>
-                      <a:pPr algn="ctr"/>
-                      <a:r>
-                        <a:rPr sz="950" b="0">
-                          <a:solidFill>
-                            <a:srgbClr val="000000"/>
-                          </a:solidFill>
-                          <a:latin typeface="Arial"/>
-                        </a:rPr>
-                        <a:t>5</a:t>
-                      </a:r>
-                    </a:p>
-                  </a:txBody>
-                  <a:tcPr marL="54864" marR="54864" marT="18288" marB="18288" anchor="ctr">
-                    <a:solidFill>
-                      <a:srgbClr val="FFFFFF"/>
-                    </a:solidFill>
-                  </a:tcPr>
-                </a:tc>
-                <a:tc>
-                  <a:txBody>
-                    <a:bodyPr wrap="square"/>
-                    <a:lstStyle/>
-                    <a:p>
-                      <a:pPr algn="ctr"/>
-                      <a:r>
-                        <a:rPr sz="950" b="1">
-                          <a:solidFill>
-                            <a:srgbClr val="6B2D6B"/>
-                          </a:solidFill>
-                          <a:latin typeface="Arial"/>
-                        </a:rPr>
-                        <a:t>21%</a:t>
-                      </a:r>
-                    </a:p>
-                  </a:txBody>
-                  <a:tcPr marL="54864" marR="54864" marT="18288" marB="18288" anchor="ctr">
-                    <a:solidFill>
-                      <a:srgbClr val="FFFFFF"/>
-                    </a:solidFill>
-                  </a:tcPr>
-                </a:tc>
-              </a:tr>
-              <a:tr h="274320">
-                <a:tc>
-                  <a:txBody>
-                    <a:bodyPr wrap="square"/>
-                    <a:lstStyle/>
-                    <a:p>
-                      <a:pPr algn="l"/>
-                      <a:r>
-                        <a:rPr sz="950" b="1">
-                          <a:solidFill>
-                            <a:srgbClr val="000000"/>
-                          </a:solidFill>
-                          <a:latin typeface="Arial"/>
-                        </a:rPr>
-                        <a:t>Ocean Product</a:t>
-                      </a:r>
-                    </a:p>
-                  </a:txBody>
-                  <a:tcPr marL="54864" marR="54864" marT="18288" marB="18288" anchor="ctr">
-                    <a:solidFill>
-                      <a:srgbClr val="F2F2F2"/>
-                    </a:solidFill>
-                  </a:tcPr>
-                </a:tc>
-                <a:tc>
-                  <a:txBody>
-                    <a:bodyPr wrap="square"/>
-                    <a:lstStyle/>
-                    <a:p>
-                      <a:pPr algn="ctr"/>
-                      <a:r>
-                        <a:rPr sz="950" b="0">
-                          <a:solidFill>
-                            <a:srgbClr val="000000"/>
-                          </a:solidFill>
-                          <a:latin typeface="Arial"/>
-                        </a:rPr>
-                        <a:t>4</a:t>
-                      </a:r>
-                    </a:p>
-                  </a:txBody>
-                  <a:tcPr marL="54864" marR="54864" marT="18288" marB="18288" anchor="ctr">
-                    <a:solidFill>
-                      <a:srgbClr val="F2F2F2"/>
-                    </a:solidFill>
-                  </a:tcPr>
-                </a:tc>
-                <a:tc>
-                  <a:txBody>
-                    <a:bodyPr wrap="square"/>
-                    <a:lstStyle/>
-                    <a:p>
-                      <a:pPr algn="ctr"/>
-                      <a:r>
-                        <a:rPr sz="950" b="0">
-                          <a:solidFill>
-                            <a:srgbClr val="000000"/>
-                          </a:solidFill>
-                          <a:latin typeface="Arial"/>
-                        </a:rPr>
-                        <a:t>14</a:t>
-                      </a:r>
-                    </a:p>
-                  </a:txBody>
-                  <a:tcPr marL="54864" marR="54864" marT="18288" marB="18288" anchor="ctr">
-                    <a:solidFill>
-                      <a:srgbClr val="F2F2F2"/>
-                    </a:solidFill>
-                  </a:tcPr>
-                </a:tc>
-                <a:tc>
-                  <a:txBody>
-                    <a:bodyPr wrap="square"/>
-                    <a:lstStyle/>
-                    <a:p>
-                      <a:pPr algn="ctr"/>
-                      <a:r>
-                        <a:rPr sz="950" b="0">
-                          <a:solidFill>
-                            <a:srgbClr val="000000"/>
-                          </a:solidFill>
-                          <a:latin typeface="Arial"/>
-                        </a:rPr>
-                        <a:t>4</a:t>
-                      </a:r>
-                    </a:p>
-                  </a:txBody>
-                  <a:tcPr marL="54864" marR="54864" marT="18288" marB="18288" anchor="ctr">
-                    <a:solidFill>
-                      <a:srgbClr val="F2F2F2"/>
-                    </a:solidFill>
-                  </a:tcPr>
-                </a:tc>
-                <a:tc>
-                  <a:txBody>
-                    <a:bodyPr wrap="square"/>
-                    <a:lstStyle/>
-                    <a:p>
-                      <a:pPr algn="ctr"/>
-                      <a:r>
-                        <a:rPr sz="950" b="0">
-                          <a:solidFill>
-                            <a:srgbClr val="000000"/>
-                          </a:solidFill>
-                          <a:latin typeface="Arial"/>
-                        </a:rPr>
-                        <a:t>0</a:t>
-                      </a:r>
-                    </a:p>
-                  </a:txBody>
-                  <a:tcPr marL="54864" marR="54864" marT="18288" marB="18288" anchor="ctr">
-                    <a:solidFill>
-                      <a:srgbClr val="F2F2F2"/>
-                    </a:solidFill>
-                  </a:tcPr>
-                </a:tc>
-                <a:tc>
-                  <a:txBody>
-                    <a:bodyPr wrap="square"/>
-                    <a:lstStyle/>
-                    <a:p>
-                      <a:pPr algn="ctr"/>
-                      <a:r>
-                        <a:rPr sz="950" b="0">
-                          <a:solidFill>
-                            <a:srgbClr val="000000"/>
-                          </a:solidFill>
-                          <a:latin typeface="Arial"/>
-                        </a:rPr>
-                        <a:t>2</a:t>
-                      </a:r>
-                    </a:p>
-                  </a:txBody>
-                  <a:tcPr marL="54864" marR="54864" marT="18288" marB="18288" anchor="ctr">
-                    <a:solidFill>
-                      <a:srgbClr val="F2F2F2"/>
-                    </a:solidFill>
-                  </a:tcPr>
-                </a:tc>
-                <a:tc>
-                  <a:txBody>
-                    <a:bodyPr wrap="square"/>
-                    <a:lstStyle/>
-                    <a:p>
-                      <a:pPr algn="ctr"/>
-                      <a:r>
-                        <a:rPr sz="950" b="0">
-                          <a:solidFill>
-                            <a:srgbClr val="000000"/>
-                          </a:solidFill>
-                          <a:latin typeface="Arial"/>
-                        </a:rPr>
-                        <a:t>10%</a:t>
-                      </a:r>
-                    </a:p>
-                  </a:txBody>
-                  <a:tcPr marL="54864" marR="54864" marT="18288" marB="18288" anchor="ctr">
-                    <a:solidFill>
-                      <a:srgbClr val="F2F2F2"/>
-                    </a:solidFill>
-                  </a:tcPr>
-                </a:tc>
-              </a:tr>
-              <a:tr h="274320">
-                <a:tc>
-                  <a:txBody>
-                    <a:bodyPr wrap="square"/>
-                    <a:lstStyle/>
-                    <a:p>
-                      <a:pPr algn="l"/>
-                      <a:r>
-                        <a:rPr sz="950" b="1">
-                          <a:solidFill>
-                            <a:srgbClr val="000000"/>
-                          </a:solidFill>
-                          <a:latin typeface="Arial"/>
-                        </a:rPr>
-                        <a:t>Services</a:t>
-                      </a:r>
-                    </a:p>
-                  </a:txBody>
-                  <a:tcPr marL="54864" marR="54864" marT="18288" marB="18288" anchor="ctr">
-                    <a:solidFill>
-                      <a:srgbClr val="FFFFFF"/>
-                    </a:solidFill>
-                  </a:tcPr>
-                </a:tc>
-                <a:tc>
-                  <a:txBody>
-                    <a:bodyPr wrap="square"/>
-                    <a:lstStyle/>
-                    <a:p>
-                      <a:pPr algn="ctr"/>
-                      <a:r>
-                        <a:rPr sz="950" b="0">
-                          <a:solidFill>
-                            <a:srgbClr val="000000"/>
-                          </a:solidFill>
-                          <a:latin typeface="Arial"/>
-                        </a:rPr>
-                        <a:t>5</a:t>
-                      </a:r>
-                    </a:p>
-                  </a:txBody>
-                  <a:tcPr marL="54864" marR="54864" marT="18288" marB="18288" anchor="ctr">
-                    <a:solidFill>
-                      <a:srgbClr val="FFFFFF"/>
-                    </a:solidFill>
-                  </a:tcPr>
-                </a:tc>
-                <a:tc>
-                  <a:txBody>
-                    <a:bodyPr wrap="square"/>
-                    <a:lstStyle/>
-                    <a:p>
-                      <a:pPr algn="ctr"/>
-                      <a:r>
-                        <a:rPr sz="950" b="0">
-                          <a:solidFill>
-                            <a:srgbClr val="000000"/>
-                          </a:solidFill>
-                          <a:latin typeface="Arial"/>
-                        </a:rPr>
-                        <a:t>0</a:t>
-                      </a:r>
-                    </a:p>
-                  </a:txBody>
-                  <a:tcPr marL="54864" marR="54864" marT="18288" marB="18288" anchor="ctr">
-                    <a:solidFill>
-                      <a:srgbClr val="FFFFFF"/>
-                    </a:solidFill>
-                  </a:tcPr>
-                </a:tc>
-                <a:tc>
-                  <a:txBody>
-                    <a:bodyPr wrap="square"/>
-                    <a:lstStyle/>
-                    <a:p>
-                      <a:pPr algn="ctr"/>
-                      <a:r>
-                        <a:rPr sz="950" b="0">
-                          <a:solidFill>
-                            <a:srgbClr val="000000"/>
-                          </a:solidFill>
-                          <a:latin typeface="Arial"/>
-                        </a:rPr>
-                        <a:t>1</a:t>
-                      </a:r>
-                    </a:p>
-                  </a:txBody>
-                  <a:tcPr marL="54864" marR="54864" marT="18288" marB="18288" anchor="ctr">
-                    <a:solidFill>
-                      <a:srgbClr val="FFFFFF"/>
-                    </a:solidFill>
-                  </a:tcPr>
-                </a:tc>
-                <a:tc>
-                  <a:txBody>
-                    <a:bodyPr wrap="square"/>
-                    <a:lstStyle/>
-                    <a:p>
-                      <a:pPr algn="ctr"/>
-                      <a:r>
-                        <a:rPr sz="950" b="0">
-                          <a:solidFill>
-                            <a:srgbClr val="000000"/>
-                          </a:solidFill>
-                          <a:latin typeface="Arial"/>
-                        </a:rPr>
-                        <a:t>0</a:t>
-                      </a:r>
-                    </a:p>
-                  </a:txBody>
-                  <a:tcPr marL="54864" marR="54864" marT="18288" marB="18288" anchor="ctr">
-                    <a:solidFill>
-                      <a:srgbClr val="FFFFFF"/>
-                    </a:solidFill>
-                  </a:tcPr>
-                </a:tc>
-                <a:tc>
-                  <a:txBody>
-                    <a:bodyPr wrap="square"/>
-                    <a:lstStyle/>
-                    <a:p>
-                      <a:pPr algn="ctr"/>
-                      <a:r>
-                        <a:rPr sz="950" b="0">
-                          <a:solidFill>
-                            <a:srgbClr val="000000"/>
-                          </a:solidFill>
-                          <a:latin typeface="Arial"/>
-                        </a:rPr>
-                        <a:t>1</a:t>
-                      </a:r>
-                    </a:p>
-                  </a:txBody>
-                  <a:tcPr marL="54864" marR="54864" marT="18288" marB="18288" anchor="ctr">
-                    <a:solidFill>
-                      <a:srgbClr val="FFFFFF"/>
-                    </a:solidFill>
-                  </a:tcPr>
-                </a:tc>
-                <a:tc>
-                  <a:txBody>
-                    <a:bodyPr wrap="square"/>
-                    <a:lstStyle/>
-                    <a:p>
-                      <a:pPr algn="ctr"/>
-                      <a:r>
-                        <a:rPr sz="950" b="0">
-                          <a:solidFill>
-                            <a:srgbClr val="000000"/>
-                          </a:solidFill>
-                          <a:latin typeface="Arial"/>
-                        </a:rPr>
-                        <a:t>14%</a:t>
-                      </a:r>
-                    </a:p>
-                  </a:txBody>
-                  <a:tcPr marL="54864" marR="54864" marT="18288" marB="18288" anchor="ctr">
-                    <a:solidFill>
-                      <a:srgbClr val="FFFFFF"/>
-                    </a:solidFill>
-                  </a:tcPr>
-                </a:tc>
-              </a:tr>
-              <a:tr h="274320">
-                <a:tc>
-                  <a:txBody>
-                    <a:bodyPr wrap="square"/>
-                    <a:lstStyle/>
-                    <a:p>
-                      <a:pPr algn="l"/>
-                      <a:r>
-                        <a:rPr sz="950" b="1">
-                          <a:solidFill>
                             <a:srgbClr val="009796"/>
                           </a:solidFill>
                           <a:latin typeface="Arial"/>
                         </a:rPr>
-                        <a:t>Total (Co-CEO)</a:t>
+                        <a:t>13%</a:t>
                       </a:r>
                     </a:p>
                   </a:txBody>
@@ -6727,144 +7163,11 @@
                     </a:solidFill>
                   </a:tcPr>
                 </a:tc>
-                <a:tc>
-                  <a:txBody>
-                    <a:bodyPr wrap="square"/>
-                    <a:lstStyle/>
-                    <a:p>
-                      <a:pPr algn="ctr"/>
-                      <a:r>
-                        <a:rPr sz="950" b="1">
-                          <a:solidFill>
-                            <a:srgbClr val="009796"/>
-                          </a:solidFill>
-                          <a:latin typeface="Arial"/>
-                        </a:rPr>
-                        <a:t>8</a:t>
-                      </a:r>
-                    </a:p>
-                  </a:txBody>
-                  <a:tcPr marL="54864" marR="54864" marT="18288" marB="18288" anchor="ctr">
-                    <a:solidFill>
-                      <a:srgbClr val="E8F4F4"/>
-                    </a:solidFill>
-                  </a:tcPr>
-                </a:tc>
-                <a:tc>
-                  <a:txBody>
-                    <a:bodyPr wrap="square"/>
-                    <a:lstStyle/>
-                    <a:p>
-                      <a:pPr algn="ctr"/>
-                      <a:r>
-                        <a:rPr sz="950" b="1">
-                          <a:solidFill>
-                            <a:srgbClr val="009796"/>
-                          </a:solidFill>
-                          <a:latin typeface="Arial"/>
-                        </a:rPr>
-                        <a:t>327</a:t>
-                      </a:r>
-                    </a:p>
-                  </a:txBody>
-                  <a:tcPr marL="54864" marR="54864" marT="18288" marB="18288" anchor="ctr">
-                    <a:solidFill>
-                      <a:srgbClr val="E8F4F4"/>
-                    </a:solidFill>
-                  </a:tcPr>
-                </a:tc>
-                <a:tc>
-                  <a:txBody>
-                    <a:bodyPr wrap="square"/>
-                    <a:lstStyle/>
-                    <a:p>
-                      <a:pPr algn="ctr"/>
-                      <a:r>
-                        <a:rPr sz="950" b="1">
-                          <a:solidFill>
-                            <a:srgbClr val="009796"/>
-                          </a:solidFill>
-                          <a:latin typeface="Arial"/>
-                        </a:rPr>
-                        <a:t>66</a:t>
-                      </a:r>
-                    </a:p>
-                  </a:txBody>
-                  <a:tcPr marL="54864" marR="54864" marT="18288" marB="18288" anchor="ctr">
-                    <a:solidFill>
-                      <a:srgbClr val="E8F4F4"/>
-                    </a:solidFill>
-                  </a:tcPr>
-                </a:tc>
-                <a:tc>
-                  <a:txBody>
-                    <a:bodyPr wrap="square"/>
-                    <a:lstStyle/>
-                    <a:p>
-                      <a:pPr algn="ctr"/>
-                      <a:r>
-                        <a:rPr sz="950" b="1">
-                          <a:solidFill>
-                            <a:srgbClr val="009796"/>
-                          </a:solidFill>
-                          <a:latin typeface="Arial"/>
-                        </a:rPr>
-                        <a:t>18</a:t>
-                      </a:r>
-                    </a:p>
-                  </a:txBody>
-                  <a:tcPr marL="54864" marR="54864" marT="18288" marB="18288" anchor="ctr">
-                    <a:solidFill>
-                      <a:srgbClr val="E8F4F4"/>
-                    </a:solidFill>
-                  </a:tcPr>
-                </a:tc>
-                <a:tc>
-                  <a:txBody>
-                    <a:bodyPr wrap="square"/>
-                    <a:lstStyle/>
-                    <a:p>
-                      <a:pPr algn="ctr"/>
-                      <a:r>
-                        <a:rPr sz="950" b="1">
-                          <a:solidFill>
-                            <a:srgbClr val="009796"/>
-                          </a:solidFill>
-                          <a:latin typeface="Arial"/>
-                        </a:rPr>
-                        <a:t>49</a:t>
-                      </a:r>
-                    </a:p>
-                  </a:txBody>
-                  <a:tcPr marL="54864" marR="54864" marT="18288" marB="18288" anchor="ctr">
-                    <a:solidFill>
-                      <a:srgbClr val="E8F4F4"/>
-                    </a:solidFill>
-                  </a:tcPr>
-                </a:tc>
-                <a:tc>
-                  <a:txBody>
-                    <a:bodyPr wrap="square"/>
-                    <a:lstStyle/>
-                    <a:p>
-                      <a:pPr algn="ctr"/>
-                      <a:r>
-                        <a:rPr sz="950" b="1">
-                          <a:solidFill>
-                            <a:srgbClr val="009796"/>
-                          </a:solidFill>
-                          <a:latin typeface="Arial"/>
-                        </a:rPr>
-                        <a:t>13%</a:t>
-                      </a:r>
-                    </a:p>
-                  </a:txBody>
-                  <a:tcPr marL="54864" marR="54864" marT="18288" marB="18288" anchor="ctr">
-                    <a:solidFill>
-                      <a:srgbClr val="E8F4F4"/>
-                    </a:solidFill>
-                  </a:tcPr>
-                </a:tc>
+                <a:extLst>
+                  <a:ext uri="{0D108BD9-81ED-4DB2-BD59-A6C34878D82A}">
+                    <a16:rowId xmlns:a16="http://schemas.microsoft.com/office/drawing/2014/main" val="10007"/>
+                  </a:ext>
+                </a:extLst>
               </a:tr>
             </a:tbl>
           </a:graphicData>
@@ -6878,8 +7181,8 @@
         </p:nvSpPr>
         <p:spPr>
           <a:xfrm>
-            <a:off x="6227064" y="4754880"/>
-            <a:ext cx="5623560" cy="1417320"/>
+            <a:off x="6227064" y="4526280"/>
+            <a:ext cx="5623560" cy="1645920"/>
           </a:xfrm>
           <a:prstGeom prst="roundRect">
             <a:avLst>
@@ -6897,10 +7200,10 @@
           <a:effectLst/>
         </p:spPr>
         <p:txBody>
-          <a:bodyPr rtlCol="0" anchor="ctr" wrap="square" lIns="137160" rIns="137160" tIns="73152" bIns="73152"/>
+          <a:bodyPr wrap="square" lIns="137160" tIns="73152" rIns="137160" bIns="73152" rtlCol="0" anchor="ctr"/>
           <a:lstStyle/>
           <a:p>
-            <a:pPr algn="l" marL="171450" indent="-171450">
+            <a:pPr marL="171450" indent="-171450" algn="l">
               <a:spcAft>
                 <a:spcPts val="400"/>
               </a:spcAft>
@@ -6911,7 +7214,7 @@
               <a:buChar char="§"/>
             </a:pPr>
             <a:r>
-              <a:rPr sz="950" b="1">
+              <a:rPr sz="900" b="1">
                 <a:solidFill>
                   <a:srgbClr val="262626"/>
                 </a:solidFill>
@@ -6920,17 +7223,17 @@
               <a:t>COO: </a:t>
             </a:r>
             <a:r>
-              <a:rPr sz="950" b="0">
+              <a:rPr sz="900" b="0">
                 <a:solidFill>
                   <a:srgbClr val="262626"/>
                 </a:solidFill>
                 <a:latin typeface="Arial"/>
               </a:rPr>
-              <a:t>6 diretos sustentam 148 indiretos em 6 níveis; é a única diretoria que chega ao L8</a:t>
+              <a:t>8 diretos para 199 liderados e 34 vagas; sem Air Product e Ocean Product, como propõe o draft, cai para 6 diretos, 151 liderados e 25 vagas</a:t>
             </a:r>
           </a:p>
           <a:p>
-            <a:pPr algn="l" marL="171450" indent="-171450">
+            <a:pPr marL="171450" indent="-171450" algn="l">
               <a:spcAft>
                 <a:spcPts val="400"/>
               </a:spcAft>
@@ -6941,26 +7244,26 @@
               <a:buChar char="§"/>
             </a:pPr>
             <a:r>
-              <a:rPr sz="950" b="1">
+              <a:rPr sz="900" b="1">
                 <a:solidFill>
                   <a:srgbClr val="262626"/>
                 </a:solidFill>
                 <a:latin typeface="Arial"/>
               </a:rPr>
-              <a:t>CCO: </a:t>
+              <a:t>CITO: </a:t>
             </a:r>
             <a:r>
-              <a:rPr sz="950" b="0">
+              <a:rPr sz="900" b="0">
                 <a:solidFill>
                   <a:srgbClr val="262626"/>
                 </a:solidFill>
                 <a:latin typeface="Arial"/>
               </a:rPr>
-              <a:t>8 gestores para 19 pessoas, 7 deles com até 2 diretos, e 21% do quadro em aberto</a:t>
+              <a:t>2 diretos sustentam 47 pessoas; o Head of Operation tem 27 diretos, o maior time da casa</a:t>
             </a:r>
           </a:p>
           <a:p>
-            <a:pPr algn="l" marL="171450" indent="-171450">
+            <a:pPr marL="171450" indent="-171450" algn="l">
               <a:spcAft>
                 <a:spcPts val="400"/>
               </a:spcAft>
@@ -6971,22 +7274,52 @@
               <a:buChar char="§"/>
             </a:pPr>
             <a:r>
-              <a:rPr sz="950" b="1">
+              <a:rPr sz="900" b="1">
                 <a:solidFill>
                   <a:srgbClr val="262626"/>
                 </a:solidFill>
                 <a:latin typeface="Arial"/>
               </a:rPr>
-              <a:t>CITO e Air Product: </a:t>
+              <a:t>CCO: </a:t>
             </a:r>
             <a:r>
-              <a:rPr sz="950" b="0">
+              <a:rPr sz="900" b="0">
                 <a:solidFill>
                   <a:srgbClr val="262626"/>
                 </a:solidFill>
                 <a:latin typeface="Arial"/>
               </a:rPr>
-              <a:t>2 diretos cada; no CITO, o Head of Operation tem 27 diretos, o maior time da casa</a:t>
+              <a:t>22% do quadro em aberto e heads de indústria com 2 liderados ou menos</a:t>
+            </a:r>
+          </a:p>
+          <a:p>
+            <a:pPr marL="171450" indent="-171450" algn="l">
+              <a:spcAft>
+                <a:spcPts val="400"/>
+              </a:spcAft>
+              <a:buClr>
+                <a:srgbClr val="009796"/>
+              </a:buClr>
+              <a:buFont typeface="Wingdings"/>
+              <a:buChar char="§"/>
+            </a:pPr>
+            <a:r>
+              <a:rPr sz="900" b="1">
+                <a:solidFill>
+                  <a:srgbClr val="262626"/>
+                </a:solidFill>
+                <a:latin typeface="Arial"/>
+              </a:rPr>
+              <a:t>Vaga de TL de High Tech </a:t>
+            </a:r>
+            <a:r>
+              <a:rPr sz="900" b="0">
+                <a:solidFill>
+                  <a:srgbClr val="262626"/>
+                </a:solidFill>
+                <a:latin typeface="Arial"/>
+              </a:rPr>
+              <a:t>(CCO) aparece no draft, mas não na planilha de vagas: as vagas de chefia passam de 7 para 8</a:t>
             </a:r>
           </a:p>
         </p:txBody>
@@ -7024,7 +7357,7 @@
 </file>
 
 <file path=ppt/slides/slide3.xml><?xml version="1.0" encoding="utf-8"?>
-<p:sld xmlns:a="http://schemas.openxmlformats.org/drawingml/2006/main" xmlns:p="http://schemas.openxmlformats.org/presentationml/2006/main" xmlns:r="http://schemas.openxmlformats.org/officeDocument/2006/relationships">
+<p:sld xmlns:a="http://schemas.openxmlformats.org/drawingml/2006/main" xmlns:r="http://schemas.openxmlformats.org/officeDocument/2006/relationships" xmlns:p="http://schemas.openxmlformats.org/presentationml/2006/main">
   <p:cSld>
     <p:spTree>
       <p:nvGrpSpPr>
@@ -7032,7 +7365,14 @@
         <p:cNvGrpSpPr/>
         <p:nvPr/>
       </p:nvGrpSpPr>
-      <p:grpSpPr/>
+      <p:grpSpPr>
+        <a:xfrm>
+          <a:off x="0" y="0"/>
+          <a:ext cx="0" cy="0"/>
+          <a:chOff x="0" y="0"/>
+          <a:chExt cx="0" cy="0"/>
+        </a:xfrm>
+      </p:grpSpPr>
       <p:sp>
         <p:nvSpPr>
           <p:cNvPr id="2" name="Title 1"/>
@@ -7049,7 +7389,7 @@
           <a:lstStyle/>
           <a:p>
             <a:r>
-              <a:t>No COO, Air Operations tem 4 níveis de gestão, da head ao TL que lidera TL, e concentra 19 das 25 vagas, 14 delas ainda sem processo</a:t>
+              <a:t>No COO, Air Operations lidera 82 pessoas por 4 níveis de gestão e é o maior gargalo: 19 das 34 vagas, 14 ainda sem processo</a:t>
             </a:r>
           </a:p>
         </p:txBody>
@@ -7061,7 +7401,7 @@
             <a:spLocks noGrp="1"/>
           </p:cNvSpPr>
           <p:nvPr>
-            <p:ph type="body" idx="10" sz="quarter"/>
+            <p:ph type="body" sz="quarter" idx="10"/>
           </p:nvPr>
         </p:nvSpPr>
         <p:spPr/>
@@ -7082,7 +7422,7 @@
             <a:spLocks noGrp="1"/>
           </p:cNvSpPr>
           <p:nvPr>
-            <p:ph type="body" idx="11" sz="quarter"/>
+            <p:ph type="body" sz="quarter" idx="11"/>
           </p:nvPr>
         </p:nvSpPr>
         <p:spPr>
@@ -7096,7 +7436,7 @@
           <a:lstStyle/>
           <a:p>
             <a:r>
-              <a:t>COO: 155 pessoas · 29 gestores · 25 vagas, 6 publicadas · blocos de Operações: 12 das 17 vagas a abrir</a:t>
+              <a:t>COO: 199 liderados · 8 heads diretos · 34 vagas, 6 publicadas · nos blocos de Operações, 12 das 17 vagas ainda a abrir</a:t>
             </a:r>
           </a:p>
         </p:txBody>
@@ -7108,7 +7448,7 @@
             <a:spLocks noGrp="1"/>
           </p:cNvSpPr>
           <p:nvPr>
-            <p:ph type="body" idx="13" sz="quarter"/>
+            <p:ph type="body" sz="quarter" idx="13"/>
           </p:nvPr>
         </p:nvSpPr>
         <p:spPr/>
@@ -7117,7 +7457,7 @@
           <a:lstStyle/>
           <a:p>
             <a:r>
-              <a:t>Fonte: ATY | Gestores por Level (organograma out/26) · Base Setembro/26 (RH) para os blocos de Operações · planilha de vagas (21/10/26) · Gupy</a:t>
+              <a:t>Fonte: ATY | Draft 23 Out 26 (organograma Factorial) · Base Setembro/26 (RH) para os blocos de Operações · planilha de vagas (21/10/26) · Gupy</a:t>
             </a:r>
           </a:p>
         </p:txBody>
@@ -7139,7 +7479,7 @@
           <a:noFill/>
         </p:spPr>
         <p:txBody>
-          <a:bodyPr wrap="square" lIns="18288" rIns="18288" tIns="0" bIns="0" anchor="t">
+          <a:bodyPr wrap="square" lIns="18288" tIns="0" rIns="18288" bIns="0" anchor="t">
             <a:spAutoFit/>
           </a:bodyPr>
           <a:lstStyle/>
@@ -7156,7 +7496,7 @@
                 </a:solidFill>
                 <a:latin typeface="Arial"/>
               </a:rPr>
-              <a:t>Air Operations por nível</a:t>
+              <a:t>Cadeia de gestão da Air Operations</a:t>
             </a:r>
           </a:p>
           <a:p>
@@ -7172,7 +7512,7 @@
                 </a:solidFill>
                 <a:latin typeface="Arial"/>
               </a:rPr>
-              <a:t>pessoas e gestores em cada nível, da head (L4) à execução (L8)</a:t>
+              <a:t>diretos e indiretos de cada gestor, da head ao team leader</a:t>
             </a:r>
           </a:p>
         </p:txBody>
@@ -7191,7 +7531,7 @@
         </p:xfrm>
         <a:graphic>
           <a:graphicData uri="http://schemas.openxmlformats.org/drawingml/2006/chart">
-            <c:chart xmlns:c="http://schemas.openxmlformats.org/drawingml/2006/chart" r:id="rId2"/>
+            <c:chart xmlns:c="http://schemas.openxmlformats.org/drawingml/2006/chart" xmlns:r="http://schemas.openxmlformats.org/officeDocument/2006/relationships" r:id="rId2"/>
           </a:graphicData>
         </a:graphic>
       </p:graphicFrame>
@@ -7248,7 +7588,7 @@
           <a:noFill/>
         </p:spPr>
         <p:txBody>
-          <a:bodyPr wrap="square" lIns="18288" rIns="18288" tIns="0" bIns="0" anchor="t">
+          <a:bodyPr wrap="square" lIns="18288" tIns="0" rIns="18288" bIns="0" anchor="t">
             <a:spAutoFit/>
           </a:bodyPr>
           <a:lstStyle/>
@@ -7300,7 +7640,7 @@
         </p:xfrm>
         <a:graphic>
           <a:graphicData uri="http://schemas.openxmlformats.org/drawingml/2006/chart">
-            <c:chart xmlns:c="http://schemas.openxmlformats.org/drawingml/2006/chart" r:id="rId3"/>
+            <c:chart xmlns:c="http://schemas.openxmlformats.org/drawingml/2006/chart" xmlns:r="http://schemas.openxmlformats.org/officeDocument/2006/relationships" r:id="rId3"/>
           </a:graphicData>
         </a:graphic>
       </p:graphicFrame>
@@ -7357,7 +7697,7 @@
           <a:noFill/>
         </p:spPr>
         <p:txBody>
-          <a:bodyPr wrap="square" lIns="18288" rIns="18288" tIns="0" bIns="0" anchor="t">
+          <a:bodyPr wrap="square" lIns="18288" tIns="0" rIns="18288" bIns="0" anchor="t">
             <a:spAutoFit/>
           </a:bodyPr>
           <a:lstStyle/>
@@ -7374,7 +7714,7 @@
                 </a:solidFill>
                 <a:latin typeface="Arial"/>
               </a:rPr>
-              <a:t>Cadeia de gestão × vagas por área do COO</a:t>
+              <a:t>Heads do COO: estrutura × vagas</a:t>
             </a:r>
           </a:p>
           <a:p>
@@ -7390,7 +7730,7 @@
                 </a:solidFill>
                 <a:latin typeface="Arial"/>
               </a:rPr>
-              <a:t>diretos e indiretos de cada head</a:t>
+              <a:t>diretos e liderados de cada head no draft</a:t>
             </a:r>
           </a:p>
         </p:txBody>
@@ -7405,28 +7745,69 @@
         </p:nvGraphicFramePr>
         <p:xfrm>
           <a:off x="6227064" y="1874519"/>
-          <a:ext cx="5623560" cy="2468880"/>
+          <a:ext cx="5623560" cy="2779776"/>
         </p:xfrm>
         <a:graphic>
           <a:graphicData uri="http://schemas.openxmlformats.org/drawingml/2006/table">
             <a:tbl>
-              <a:tblPr firstRow="0" bandRow="0">
+              <a:tblPr>
                 <a:tableStyleId>{5940675A-B579-460E-94D1-54222C63F5DA}</a:tableStyleId>
               </a:tblPr>
               <a:tblGrid>
-                <a:gridCol w="1417320"/>
-                <a:gridCol w="548640"/>
-                <a:gridCol w="658368"/>
-                <a:gridCol w="658368"/>
-                <a:gridCol w="777240"/>
-                <a:gridCol w="548640"/>
-                <a:gridCol w="484632"/>
-                <a:gridCol w="530352"/>
+                <a:gridCol w="1965960">
+                  <a:extLst>
+                    <a:ext uri="{9D8B030D-6E8A-4147-A177-3AD203B41FA5}">
+                      <a16:colId xmlns:a16="http://schemas.microsoft.com/office/drawing/2014/main" val="20000"/>
+                    </a:ext>
+                  </a:extLst>
+                </a:gridCol>
+                <a:gridCol w="566928">
+                  <a:extLst>
+                    <a:ext uri="{9D8B030D-6E8A-4147-A177-3AD203B41FA5}">
+                      <a16:colId xmlns:a16="http://schemas.microsoft.com/office/drawing/2014/main" val="20001"/>
+                    </a:ext>
+                  </a:extLst>
+                </a:gridCol>
+                <a:gridCol w="713232">
+                  <a:extLst>
+                    <a:ext uri="{9D8B030D-6E8A-4147-A177-3AD203B41FA5}">
+                      <a16:colId xmlns:a16="http://schemas.microsoft.com/office/drawing/2014/main" val="20002"/>
+                    </a:ext>
+                  </a:extLst>
+                </a:gridCol>
+                <a:gridCol w="713232">
+                  <a:extLst>
+                    <a:ext uri="{9D8B030D-6E8A-4147-A177-3AD203B41FA5}">
+                      <a16:colId xmlns:a16="http://schemas.microsoft.com/office/drawing/2014/main" val="20003"/>
+                    </a:ext>
+                  </a:extLst>
+                </a:gridCol>
+                <a:gridCol w="548640">
+                  <a:extLst>
+                    <a:ext uri="{9D8B030D-6E8A-4147-A177-3AD203B41FA5}">
+                      <a16:colId xmlns:a16="http://schemas.microsoft.com/office/drawing/2014/main" val="20004"/>
+                    </a:ext>
+                  </a:extLst>
+                </a:gridCol>
+                <a:gridCol w="566928">
+                  <a:extLst>
+                    <a:ext uri="{9D8B030D-6E8A-4147-A177-3AD203B41FA5}">
+                      <a16:colId xmlns:a16="http://schemas.microsoft.com/office/drawing/2014/main" val="20005"/>
+                    </a:ext>
+                  </a:extLst>
+                </a:gridCol>
+                <a:gridCol w="548640">
+                  <a:extLst>
+                    <a:ext uri="{9D8B030D-6E8A-4147-A177-3AD203B41FA5}">
+                      <a16:colId xmlns:a16="http://schemas.microsoft.com/office/drawing/2014/main" val="20006"/>
+                    </a:ext>
+                  </a:extLst>
+                </a:gridCol>
               </a:tblGrid>
-              <a:tr h="274320">
-                <a:tc>
-                  <a:txBody>
-                    <a:bodyPr wrap="square"/>
+              <a:tr h="246888">
+                <a:tc>
+                  <a:txBody>
+                    <a:bodyPr/>
                     <a:lstStyle/>
                     <a:p>
                       <a:pPr algn="l"/>
@@ -7437,7 +7818,7 @@
                           </a:solidFill>
                           <a:latin typeface="Arial"/>
                         </a:rPr>
-                        <a:t>Área</a:t>
+                        <a:t>Área (head)</a:t>
                       </a:r>
                     </a:p>
                   </a:txBody>
@@ -7449,7 +7830,7 @@
                 </a:tc>
                 <a:tc>
                   <a:txBody>
-                    <a:bodyPr wrap="square"/>
+                    <a:bodyPr/>
                     <a:lstStyle/>
                     <a:p>
                       <a:pPr algn="ctr"/>
@@ -7472,7 +7853,7 @@
                 </a:tc>
                 <a:tc>
                   <a:txBody>
-                    <a:bodyPr wrap="square"/>
+                    <a:bodyPr/>
                     <a:lstStyle/>
                     <a:p>
                       <a:pPr algn="ctr"/>
@@ -7495,7 +7876,7 @@
                 </a:tc>
                 <a:tc>
                   <a:txBody>
-                    <a:bodyPr wrap="square"/>
+                    <a:bodyPr/>
                     <a:lstStyle/>
                     <a:p>
                       <a:pPr algn="ctr"/>
@@ -7506,7 +7887,7 @@
                           </a:solidFill>
                           <a:latin typeface="Arial"/>
                         </a:rPr>
-                        <a:t>Gestores</a:t>
+                        <a:t>Liderados</a:t>
                       </a:r>
                     </a:p>
                   </a:txBody>
@@ -7518,7 +7899,7 @@
                 </a:tc>
                 <a:tc>
                   <a:txBody>
-                    <a:bodyPr wrap="square"/>
+                    <a:bodyPr/>
                     <a:lstStyle/>
                     <a:p>
                       <a:pPr algn="ctr"/>
@@ -7529,7 +7910,7 @@
                           </a:solidFill>
                           <a:latin typeface="Arial"/>
                         </a:rPr>
-                        <a:t>Camadas de gestão</a:t>
+                        <a:t>Vagas</a:t>
                       </a:r>
                     </a:p>
                   </a:txBody>
@@ -7541,7 +7922,7 @@
                 </a:tc>
                 <a:tc>
                   <a:txBody>
-                    <a:bodyPr wrap="square"/>
+                    <a:bodyPr/>
                     <a:lstStyle/>
                     <a:p>
                       <a:pPr algn="ctr"/>
@@ -7552,7 +7933,7 @@
                           </a:solidFill>
                           <a:latin typeface="Arial"/>
                         </a:rPr>
-                        <a:t>Maior time</a:t>
+                        <a:t>A abrir</a:t>
                       </a:r>
                     </a:p>
                   </a:txBody>
@@ -7564,7 +7945,7 @@
                 </a:tc>
                 <a:tc>
                   <a:txBody>
-                    <a:bodyPr wrap="square"/>
+                    <a:bodyPr/>
                     <a:lstStyle/>
                     <a:p>
                       <a:pPr algn="ctr"/>
@@ -7575,7 +7956,7 @@
                           </a:solidFill>
                           <a:latin typeface="Arial"/>
                         </a:rPr>
-                        <a:t>Vagas</a:t>
+                        <a:t>% aberto</a:t>
                       </a:r>
                     </a:p>
                   </a:txBody>
@@ -7585,34 +7966,184 @@
                     </a:solidFill>
                   </a:tcPr>
                 </a:tc>
-                <a:tc>
-                  <a:txBody>
-                    <a:bodyPr wrap="square"/>
-                    <a:lstStyle/>
-                    <a:p>
-                      <a:pPr algn="ctr"/>
+                <a:extLst>
+                  <a:ext uri="{0D108BD9-81ED-4DB2-BD59-A6C34878D82A}">
+                    <a16:rowId xmlns:a16="http://schemas.microsoft.com/office/drawing/2014/main" val="10000"/>
+                  </a:ext>
+                </a:extLst>
+              </a:tr>
+              <a:tr h="246888">
+                <a:tc>
+                  <a:txBody>
+                    <a:bodyPr/>
+                    <a:lstStyle/>
+                    <a:p>
+                      <a:pPr algn="l"/>
                       <a:r>
                         <a:rPr sz="900" b="1">
                           <a:solidFill>
-                            <a:srgbClr val="FFFFFF"/>
-                          </a:solidFill>
-                          <a:latin typeface="Arial"/>
-                        </a:rPr>
-                        <a:t>Sem proc.</a:t>
-                      </a:r>
-                    </a:p>
-                  </a:txBody>
-                  <a:tcPr marL="54864" marR="54864" marT="18288" marB="18288" anchor="ctr">
-                    <a:solidFill>
-                      <a:srgbClr val="009796"/>
-                    </a:solidFill>
-                  </a:tcPr>
-                </a:tc>
+                            <a:srgbClr val="000000"/>
+                          </a:solidFill>
+                          <a:latin typeface="Arial"/>
+                        </a:rPr>
+                        <a:t>Air Operations (Carol)</a:t>
+                      </a:r>
+                    </a:p>
+                  </a:txBody>
+                  <a:tcPr marL="54864" marR="54864" marT="18288" marB="18288" anchor="ctr">
+                    <a:solidFill>
+                      <a:srgbClr val="F2F2F2"/>
+                    </a:solidFill>
+                  </a:tcPr>
+                </a:tc>
+                <a:tc>
+                  <a:txBody>
+                    <a:bodyPr/>
+                    <a:lstStyle/>
+                    <a:p>
+                      <a:pPr algn="ctr"/>
+                      <a:r>
+                        <a:rPr sz="900" b="0">
+                          <a:solidFill>
+                            <a:srgbClr val="000000"/>
+                          </a:solidFill>
+                          <a:latin typeface="Arial"/>
+                        </a:rPr>
+                        <a:t>4</a:t>
+                      </a:r>
+                    </a:p>
+                  </a:txBody>
+                  <a:tcPr marL="54864" marR="54864" marT="18288" marB="18288" anchor="ctr">
+                    <a:solidFill>
+                      <a:srgbClr val="F2F2F2"/>
+                    </a:solidFill>
+                  </a:tcPr>
+                </a:tc>
+                <a:tc>
+                  <a:txBody>
+                    <a:bodyPr/>
+                    <a:lstStyle/>
+                    <a:p>
+                      <a:pPr algn="ctr"/>
+                      <a:r>
+                        <a:rPr sz="900" b="0">
+                          <a:solidFill>
+                            <a:srgbClr val="000000"/>
+                          </a:solidFill>
+                          <a:latin typeface="Arial"/>
+                        </a:rPr>
+                        <a:t>78</a:t>
+                      </a:r>
+                    </a:p>
+                  </a:txBody>
+                  <a:tcPr marL="54864" marR="54864" marT="18288" marB="18288" anchor="ctr">
+                    <a:solidFill>
+                      <a:srgbClr val="F2F2F2"/>
+                    </a:solidFill>
+                  </a:tcPr>
+                </a:tc>
+                <a:tc>
+                  <a:txBody>
+                    <a:bodyPr/>
+                    <a:lstStyle/>
+                    <a:p>
+                      <a:pPr algn="ctr"/>
+                      <a:r>
+                        <a:rPr sz="900" b="0">
+                          <a:solidFill>
+                            <a:srgbClr val="000000"/>
+                          </a:solidFill>
+                          <a:latin typeface="Arial"/>
+                        </a:rPr>
+                        <a:t>82</a:t>
+                      </a:r>
+                    </a:p>
+                  </a:txBody>
+                  <a:tcPr marL="54864" marR="54864" marT="18288" marB="18288" anchor="ctr">
+                    <a:solidFill>
+                      <a:srgbClr val="F2F2F2"/>
+                    </a:solidFill>
+                  </a:tcPr>
+                </a:tc>
+                <a:tc>
+                  <a:txBody>
+                    <a:bodyPr/>
+                    <a:lstStyle/>
+                    <a:p>
+                      <a:pPr algn="ctr"/>
+                      <a:r>
+                        <a:rPr sz="900" b="0">
+                          <a:solidFill>
+                            <a:srgbClr val="000000"/>
+                          </a:solidFill>
+                          <a:latin typeface="Arial"/>
+                        </a:rPr>
+                        <a:t>19</a:t>
+                      </a:r>
+                    </a:p>
+                  </a:txBody>
+                  <a:tcPr marL="54864" marR="54864" marT="18288" marB="18288" anchor="ctr">
+                    <a:solidFill>
+                      <a:srgbClr val="F2F2F2"/>
+                    </a:solidFill>
+                  </a:tcPr>
+                </a:tc>
+                <a:tc>
+                  <a:txBody>
+                    <a:bodyPr/>
+                    <a:lstStyle/>
+                    <a:p>
+                      <a:pPr algn="ctr"/>
+                      <a:r>
+                        <a:rPr sz="900" b="1">
+                          <a:solidFill>
+                            <a:srgbClr val="6B2D6B"/>
+                          </a:solidFill>
+                          <a:latin typeface="Arial"/>
+                        </a:rPr>
+                        <a:t>14</a:t>
+                      </a:r>
+                    </a:p>
+                  </a:txBody>
+                  <a:tcPr marL="54864" marR="54864" marT="18288" marB="18288" anchor="ctr">
+                    <a:solidFill>
+                      <a:srgbClr val="F2F2F2"/>
+                    </a:solidFill>
+                  </a:tcPr>
+                </a:tc>
+                <a:tc>
+                  <a:txBody>
+                    <a:bodyPr/>
+                    <a:lstStyle/>
+                    <a:p>
+                      <a:pPr algn="ctr"/>
+                      <a:r>
+                        <a:rPr sz="900" b="1">
+                          <a:solidFill>
+                            <a:srgbClr val="6B2D6B"/>
+                          </a:solidFill>
+                          <a:latin typeface="Arial"/>
+                        </a:rPr>
+                        <a:t>18%</a:t>
+                      </a:r>
+                    </a:p>
+                  </a:txBody>
+                  <a:tcPr marL="54864" marR="54864" marT="18288" marB="18288" anchor="ctr">
+                    <a:solidFill>
+                      <a:srgbClr val="F2F2F2"/>
+                    </a:solidFill>
+                  </a:tcPr>
+                </a:tc>
+                <a:extLst>
+                  <a:ext uri="{0D108BD9-81ED-4DB2-BD59-A6C34878D82A}">
+                    <a16:rowId xmlns:a16="http://schemas.microsoft.com/office/drawing/2014/main" val="10001"/>
+                  </a:ext>
+                </a:extLst>
               </a:tr>
-              <a:tr h="274320">
-                <a:tc>
-                  <a:txBody>
-                    <a:bodyPr wrap="square"/>
+              <a:tr h="246888">
+                <a:tc>
+                  <a:txBody>
+                    <a:bodyPr/>
                     <a:lstStyle/>
                     <a:p>
                       <a:pPr algn="l"/>
@@ -7623,7 +8154,175 @@
                           </a:solidFill>
                           <a:latin typeface="Arial"/>
                         </a:rPr>
-                        <a:t>Air Operations</a:t>
+                        <a:t>Ocean Operations (Natalia)</a:t>
+                      </a:r>
+                    </a:p>
+                  </a:txBody>
+                  <a:tcPr marL="54864" marR="54864" marT="18288" marB="18288" anchor="ctr">
+                    <a:solidFill>
+                      <a:srgbClr val="FFFFFF"/>
+                    </a:solidFill>
+                  </a:tcPr>
+                </a:tc>
+                <a:tc>
+                  <a:txBody>
+                    <a:bodyPr/>
+                    <a:lstStyle/>
+                    <a:p>
+                      <a:pPr algn="ctr"/>
+                      <a:r>
+                        <a:rPr sz="900" b="0">
+                          <a:solidFill>
+                            <a:srgbClr val="000000"/>
+                          </a:solidFill>
+                          <a:latin typeface="Arial"/>
+                        </a:rPr>
+                        <a:t>6</a:t>
+                      </a:r>
+                    </a:p>
+                  </a:txBody>
+                  <a:tcPr marL="54864" marR="54864" marT="18288" marB="18288" anchor="ctr">
+                    <a:solidFill>
+                      <a:srgbClr val="FFFFFF"/>
+                    </a:solidFill>
+                  </a:tcPr>
+                </a:tc>
+                <a:tc>
+                  <a:txBody>
+                    <a:bodyPr/>
+                    <a:lstStyle/>
+                    <a:p>
+                      <a:pPr algn="ctr"/>
+                      <a:r>
+                        <a:rPr sz="900" b="0">
+                          <a:solidFill>
+                            <a:srgbClr val="000000"/>
+                          </a:solidFill>
+                          <a:latin typeface="Arial"/>
+                        </a:rPr>
+                        <a:t>29</a:t>
+                      </a:r>
+                    </a:p>
+                  </a:txBody>
+                  <a:tcPr marL="54864" marR="54864" marT="18288" marB="18288" anchor="ctr">
+                    <a:solidFill>
+                      <a:srgbClr val="FFFFFF"/>
+                    </a:solidFill>
+                  </a:tcPr>
+                </a:tc>
+                <a:tc>
+                  <a:txBody>
+                    <a:bodyPr/>
+                    <a:lstStyle/>
+                    <a:p>
+                      <a:pPr algn="ctr"/>
+                      <a:r>
+                        <a:rPr sz="900" b="0">
+                          <a:solidFill>
+                            <a:srgbClr val="000000"/>
+                          </a:solidFill>
+                          <a:latin typeface="Arial"/>
+                        </a:rPr>
+                        <a:t>35</a:t>
+                      </a:r>
+                    </a:p>
+                  </a:txBody>
+                  <a:tcPr marL="54864" marR="54864" marT="18288" marB="18288" anchor="ctr">
+                    <a:solidFill>
+                      <a:srgbClr val="FFFFFF"/>
+                    </a:solidFill>
+                  </a:tcPr>
+                </a:tc>
+                <a:tc>
+                  <a:txBody>
+                    <a:bodyPr/>
+                    <a:lstStyle/>
+                    <a:p>
+                      <a:pPr algn="ctr"/>
+                      <a:r>
+                        <a:rPr sz="900" b="0">
+                          <a:solidFill>
+                            <a:srgbClr val="000000"/>
+                          </a:solidFill>
+                          <a:latin typeface="Arial"/>
+                        </a:rPr>
+                        <a:t>3</a:t>
+                      </a:r>
+                    </a:p>
+                  </a:txBody>
+                  <a:tcPr marL="54864" marR="54864" marT="18288" marB="18288" anchor="ctr">
+                    <a:solidFill>
+                      <a:srgbClr val="FFFFFF"/>
+                    </a:solidFill>
+                  </a:tcPr>
+                </a:tc>
+                <a:tc>
+                  <a:txBody>
+                    <a:bodyPr/>
+                    <a:lstStyle/>
+                    <a:p>
+                      <a:pPr algn="ctr"/>
+                      <a:r>
+                        <a:rPr sz="900" b="0">
+                          <a:solidFill>
+                            <a:srgbClr val="000000"/>
+                          </a:solidFill>
+                          <a:latin typeface="Arial"/>
+                        </a:rPr>
+                        <a:t>3</a:t>
+                      </a:r>
+                    </a:p>
+                  </a:txBody>
+                  <a:tcPr marL="54864" marR="54864" marT="18288" marB="18288" anchor="ctr">
+                    <a:solidFill>
+                      <a:srgbClr val="FFFFFF"/>
+                    </a:solidFill>
+                  </a:tcPr>
+                </a:tc>
+                <a:tc>
+                  <a:txBody>
+                    <a:bodyPr/>
+                    <a:lstStyle/>
+                    <a:p>
+                      <a:pPr algn="ctr"/>
+                      <a:r>
+                        <a:rPr sz="900" b="0">
+                          <a:solidFill>
+                            <a:srgbClr val="000000"/>
+                          </a:solidFill>
+                          <a:latin typeface="Arial"/>
+                        </a:rPr>
+                        <a:t>8%</a:t>
+                      </a:r>
+                    </a:p>
+                  </a:txBody>
+                  <a:tcPr marL="54864" marR="54864" marT="18288" marB="18288" anchor="ctr">
+                    <a:solidFill>
+                      <a:srgbClr val="FFFFFF"/>
+                    </a:solidFill>
+                  </a:tcPr>
+                </a:tc>
+                <a:extLst>
+                  <a:ext uri="{0D108BD9-81ED-4DB2-BD59-A6C34878D82A}">
+                    <a16:rowId xmlns:a16="http://schemas.microsoft.com/office/drawing/2014/main" val="10002"/>
+                  </a:ext>
+                </a:extLst>
+              </a:tr>
+              <a:tr h="246888">
+                <a:tc>
+                  <a:txBody>
+                    <a:bodyPr/>
+                    <a:lstStyle/>
+                    <a:p>
+                      <a:pPr algn="l"/>
+                      <a:r>
+                        <a:rPr sz="900" b="1">
+                          <a:solidFill>
+                            <a:srgbClr val="000000"/>
+                          </a:solidFill>
+                          <a:latin typeface="Arial"/>
+                        </a:rPr>
+                        <a:t>Air Product (Sampaio)</a:t>
                       </a:r>
                     </a:p>
                   </a:txBody>
@@ -7635,7 +8334,7 @@
                 </a:tc>
                 <a:tc>
                   <a:txBody>
-                    <a:bodyPr wrap="square"/>
+                    <a:bodyPr/>
                     <a:lstStyle/>
                     <a:p>
                       <a:pPr algn="ctr"/>
@@ -7646,19 +8345,332 @@
                           </a:solidFill>
                           <a:latin typeface="Arial"/>
                         </a:rPr>
+                        <a:t>2</a:t>
+                      </a:r>
+                    </a:p>
+                  </a:txBody>
+                  <a:tcPr marL="54864" marR="54864" marT="18288" marB="18288" anchor="ctr">
+                    <a:solidFill>
+                      <a:srgbClr val="F2F2F2"/>
+                    </a:solidFill>
+                  </a:tcPr>
+                </a:tc>
+                <a:tc>
+                  <a:txBody>
+                    <a:bodyPr/>
+                    <a:lstStyle/>
+                    <a:p>
+                      <a:pPr algn="ctr"/>
+                      <a:r>
+                        <a:rPr sz="900" b="0">
+                          <a:solidFill>
+                            <a:srgbClr val="000000"/>
+                          </a:solidFill>
+                          <a:latin typeface="Arial"/>
+                        </a:rPr>
+                        <a:t>26</a:t>
+                      </a:r>
+                    </a:p>
+                  </a:txBody>
+                  <a:tcPr marL="54864" marR="54864" marT="18288" marB="18288" anchor="ctr">
+                    <a:solidFill>
+                      <a:srgbClr val="F2F2F2"/>
+                    </a:solidFill>
+                  </a:tcPr>
+                </a:tc>
+                <a:tc>
+                  <a:txBody>
+                    <a:bodyPr/>
+                    <a:lstStyle/>
+                    <a:p>
+                      <a:pPr algn="ctr"/>
+                      <a:r>
+                        <a:rPr sz="900" b="0">
+                          <a:solidFill>
+                            <a:srgbClr val="000000"/>
+                          </a:solidFill>
+                          <a:latin typeface="Arial"/>
+                        </a:rPr>
+                        <a:t>28</a:t>
+                      </a:r>
+                    </a:p>
+                  </a:txBody>
+                  <a:tcPr marL="54864" marR="54864" marT="18288" marB="18288" anchor="ctr">
+                    <a:solidFill>
+                      <a:srgbClr val="F2F2F2"/>
+                    </a:solidFill>
+                  </a:tcPr>
+                </a:tc>
+                <a:tc>
+                  <a:txBody>
+                    <a:bodyPr/>
+                    <a:lstStyle/>
+                    <a:p>
+                      <a:pPr algn="ctr"/>
+                      <a:r>
+                        <a:rPr sz="900" b="0">
+                          <a:solidFill>
+                            <a:srgbClr val="000000"/>
+                          </a:solidFill>
+                          <a:latin typeface="Arial"/>
+                        </a:rPr>
+                        <a:t>7</a:t>
+                      </a:r>
+                    </a:p>
+                  </a:txBody>
+                  <a:tcPr marL="54864" marR="54864" marT="18288" marB="18288" anchor="ctr">
+                    <a:solidFill>
+                      <a:srgbClr val="F2F2F2"/>
+                    </a:solidFill>
+                  </a:tcPr>
+                </a:tc>
+                <a:tc>
+                  <a:txBody>
+                    <a:bodyPr/>
+                    <a:lstStyle/>
+                    <a:p>
+                      <a:pPr algn="ctr"/>
+                      <a:r>
+                        <a:rPr sz="900" b="1">
+                          <a:solidFill>
+                            <a:srgbClr val="6B2D6B"/>
+                          </a:solidFill>
+                          <a:latin typeface="Arial"/>
+                        </a:rPr>
+                        <a:t>7</a:t>
+                      </a:r>
+                    </a:p>
+                  </a:txBody>
+                  <a:tcPr marL="54864" marR="54864" marT="18288" marB="18288" anchor="ctr">
+                    <a:solidFill>
+                      <a:srgbClr val="F2F2F2"/>
+                    </a:solidFill>
+                  </a:tcPr>
+                </a:tc>
+                <a:tc>
+                  <a:txBody>
+                    <a:bodyPr/>
+                    <a:lstStyle/>
+                    <a:p>
+                      <a:pPr algn="ctr"/>
+                      <a:r>
+                        <a:rPr sz="900" b="1">
+                          <a:solidFill>
+                            <a:srgbClr val="6B2D6B"/>
+                          </a:solidFill>
+                          <a:latin typeface="Arial"/>
+                        </a:rPr>
+                        <a:t>19%</a:t>
+                      </a:r>
+                    </a:p>
+                  </a:txBody>
+                  <a:tcPr marL="54864" marR="54864" marT="18288" marB="18288" anchor="ctr">
+                    <a:solidFill>
+                      <a:srgbClr val="F2F2F2"/>
+                    </a:solidFill>
+                  </a:tcPr>
+                </a:tc>
+                <a:extLst>
+                  <a:ext uri="{0D108BD9-81ED-4DB2-BD59-A6C34878D82A}">
+                    <a16:rowId xmlns:a16="http://schemas.microsoft.com/office/drawing/2014/main" val="10003"/>
+                  </a:ext>
+                </a:extLst>
+              </a:tr>
+              <a:tr h="246888">
+                <a:tc>
+                  <a:txBody>
+                    <a:bodyPr/>
+                    <a:lstStyle/>
+                    <a:p>
+                      <a:pPr algn="l"/>
+                      <a:r>
+                        <a:rPr sz="900" b="1">
+                          <a:solidFill>
+                            <a:srgbClr val="000000"/>
+                          </a:solidFill>
+                          <a:latin typeface="Arial"/>
+                        </a:rPr>
+                        <a:t>Ocean Product (Filipe C.)</a:t>
+                      </a:r>
+                    </a:p>
+                  </a:txBody>
+                  <a:tcPr marL="54864" marR="54864" marT="18288" marB="18288" anchor="ctr">
+                    <a:solidFill>
+                      <a:srgbClr val="FFFFFF"/>
+                    </a:solidFill>
+                  </a:tcPr>
+                </a:tc>
+                <a:tc>
+                  <a:txBody>
+                    <a:bodyPr/>
+                    <a:lstStyle/>
+                    <a:p>
+                      <a:pPr algn="ctr"/>
+                      <a:r>
+                        <a:rPr sz="900" b="0">
+                          <a:solidFill>
+                            <a:srgbClr val="000000"/>
+                          </a:solidFill>
+                          <a:latin typeface="Arial"/>
+                        </a:rPr>
                         <a:t>4</a:t>
                       </a:r>
                     </a:p>
                   </a:txBody>
                   <a:tcPr marL="54864" marR="54864" marT="18288" marB="18288" anchor="ctr">
                     <a:solidFill>
+                      <a:srgbClr val="FFFFFF"/>
+                    </a:solidFill>
+                  </a:tcPr>
+                </a:tc>
+                <a:tc>
+                  <a:txBody>
+                    <a:bodyPr/>
+                    <a:lstStyle/>
+                    <a:p>
+                      <a:pPr algn="ctr"/>
+                      <a:r>
+                        <a:rPr sz="900" b="0">
+                          <a:solidFill>
+                            <a:srgbClr val="000000"/>
+                          </a:solidFill>
+                          <a:latin typeface="Arial"/>
+                        </a:rPr>
+                        <a:t>14</a:t>
+                      </a:r>
+                    </a:p>
+                  </a:txBody>
+                  <a:tcPr marL="54864" marR="54864" marT="18288" marB="18288" anchor="ctr">
+                    <a:solidFill>
+                      <a:srgbClr val="FFFFFF"/>
+                    </a:solidFill>
+                  </a:tcPr>
+                </a:tc>
+                <a:tc>
+                  <a:txBody>
+                    <a:bodyPr/>
+                    <a:lstStyle/>
+                    <a:p>
+                      <a:pPr algn="ctr"/>
+                      <a:r>
+                        <a:rPr sz="900" b="0">
+                          <a:solidFill>
+                            <a:srgbClr val="000000"/>
+                          </a:solidFill>
+                          <a:latin typeface="Arial"/>
+                        </a:rPr>
+                        <a:t>18</a:t>
+                      </a:r>
+                    </a:p>
+                  </a:txBody>
+                  <a:tcPr marL="54864" marR="54864" marT="18288" marB="18288" anchor="ctr">
+                    <a:solidFill>
+                      <a:srgbClr val="FFFFFF"/>
+                    </a:solidFill>
+                  </a:tcPr>
+                </a:tc>
+                <a:tc>
+                  <a:txBody>
+                    <a:bodyPr/>
+                    <a:lstStyle/>
+                    <a:p>
+                      <a:pPr algn="ctr"/>
+                      <a:r>
+                        <a:rPr sz="900" b="0">
+                          <a:solidFill>
+                            <a:srgbClr val="000000"/>
+                          </a:solidFill>
+                          <a:latin typeface="Arial"/>
+                        </a:rPr>
+                        <a:t>2</a:t>
+                      </a:r>
+                    </a:p>
+                  </a:txBody>
+                  <a:tcPr marL="54864" marR="54864" marT="18288" marB="18288" anchor="ctr">
+                    <a:solidFill>
+                      <a:srgbClr val="FFFFFF"/>
+                    </a:solidFill>
+                  </a:tcPr>
+                </a:tc>
+                <a:tc>
+                  <a:txBody>
+                    <a:bodyPr/>
+                    <a:lstStyle/>
+                    <a:p>
+                      <a:pPr algn="ctr"/>
+                      <a:r>
+                        <a:rPr sz="900" b="0">
+                          <a:solidFill>
+                            <a:srgbClr val="000000"/>
+                          </a:solidFill>
+                          <a:latin typeface="Arial"/>
+                        </a:rPr>
+                        <a:t>2</a:t>
+                      </a:r>
+                    </a:p>
+                  </a:txBody>
+                  <a:tcPr marL="54864" marR="54864" marT="18288" marB="18288" anchor="ctr">
+                    <a:solidFill>
+                      <a:srgbClr val="FFFFFF"/>
+                    </a:solidFill>
+                  </a:tcPr>
+                </a:tc>
+                <a:tc>
+                  <a:txBody>
+                    <a:bodyPr/>
+                    <a:lstStyle/>
+                    <a:p>
+                      <a:pPr algn="ctr"/>
+                      <a:r>
+                        <a:rPr sz="900" b="0">
+                          <a:solidFill>
+                            <a:srgbClr val="000000"/>
+                          </a:solidFill>
+                          <a:latin typeface="Arial"/>
+                        </a:rPr>
+                        <a:t>10%</a:t>
+                      </a:r>
+                    </a:p>
+                  </a:txBody>
+                  <a:tcPr marL="54864" marR="54864" marT="18288" marB="18288" anchor="ctr">
+                    <a:solidFill>
+                      <a:srgbClr val="FFFFFF"/>
+                    </a:solidFill>
+                  </a:tcPr>
+                </a:tc>
+                <a:extLst>
+                  <a:ext uri="{0D108BD9-81ED-4DB2-BD59-A6C34878D82A}">
+                    <a16:rowId xmlns:a16="http://schemas.microsoft.com/office/drawing/2014/main" val="10004"/>
+                  </a:ext>
+                </a:extLst>
+              </a:tr>
+              <a:tr h="246888">
+                <a:tc>
+                  <a:txBody>
+                    <a:bodyPr/>
+                    <a:lstStyle/>
+                    <a:p>
+                      <a:pPr algn="l"/>
+                      <a:r>
+                        <a:rPr sz="900" b="1">
+                          <a:solidFill>
+                            <a:srgbClr val="000000"/>
+                          </a:solidFill>
+                          <a:latin typeface="Arial"/>
+                        </a:rPr>
+                        <a:t>Quality &amp; Op. Intel. (Marco)</a:t>
+                      </a:r>
+                    </a:p>
+                  </a:txBody>
+                  <a:tcPr marL="54864" marR="54864" marT="18288" marB="18288" anchor="ctr">
+                    <a:solidFill>
                       <a:srgbClr val="F2F2F2"/>
                     </a:solidFill>
                   </a:tcPr>
                 </a:tc>
                 <a:tc>
                   <a:txBody>
-                    <a:bodyPr wrap="square"/>
+                    <a:bodyPr/>
                     <a:lstStyle/>
                     <a:p>
                       <a:pPr algn="ctr"/>
@@ -7669,7 +8681,7 @@
                           </a:solidFill>
                           <a:latin typeface="Arial"/>
                         </a:rPr>
-                        <a:t>81</a:t>
+                        <a:t>6</a:t>
                       </a:r>
                     </a:p>
                   </a:txBody>
@@ -7681,7 +8693,7 @@
                 </a:tc>
                 <a:tc>
                   <a:txBody>
-                    <a:bodyPr wrap="square"/>
+                    <a:bodyPr/>
                     <a:lstStyle/>
                     <a:p>
                       <a:pPr algn="ctr"/>
@@ -7692,7 +8704,7 @@
                           </a:solidFill>
                           <a:latin typeface="Arial"/>
                         </a:rPr>
-                        <a:t>15</a:t>
+                        <a:t>6</a:t>
                       </a:r>
                     </a:p>
                   </a:txBody>
@@ -7704,18 +8716,285 @@
                 </a:tc>
                 <a:tc>
                   <a:txBody>
-                    <a:bodyPr wrap="square"/>
-                    <a:lstStyle/>
-                    <a:p>
-                      <a:pPr algn="ctr"/>
+                    <a:bodyPr/>
+                    <a:lstStyle/>
+                    <a:p>
+                      <a:pPr algn="ctr"/>
+                      <a:r>
+                        <a:rPr sz="900" b="0">
+                          <a:solidFill>
+                            <a:srgbClr val="000000"/>
+                          </a:solidFill>
+                          <a:latin typeface="Arial"/>
+                        </a:rPr>
+                        <a:t>12</a:t>
+                      </a:r>
+                    </a:p>
+                  </a:txBody>
+                  <a:tcPr marL="54864" marR="54864" marT="18288" marB="18288" anchor="ctr">
+                    <a:solidFill>
+                      <a:srgbClr val="F2F2F2"/>
+                    </a:solidFill>
+                  </a:tcPr>
+                </a:tc>
+                <a:tc>
+                  <a:txBody>
+                    <a:bodyPr/>
+                    <a:lstStyle/>
+                    <a:p>
+                      <a:pPr algn="ctr"/>
+                      <a:r>
+                        <a:rPr sz="900" b="0">
+                          <a:solidFill>
+                            <a:srgbClr val="000000"/>
+                          </a:solidFill>
+                          <a:latin typeface="Arial"/>
+                        </a:rPr>
+                        <a:t>1</a:t>
+                      </a:r>
+                    </a:p>
+                  </a:txBody>
+                  <a:tcPr marL="54864" marR="54864" marT="18288" marB="18288" anchor="ctr">
+                    <a:solidFill>
+                      <a:srgbClr val="F2F2F2"/>
+                    </a:solidFill>
+                  </a:tcPr>
+                </a:tc>
+                <a:tc>
+                  <a:txBody>
+                    <a:bodyPr/>
+                    <a:lstStyle/>
+                    <a:p>
+                      <a:pPr algn="ctr"/>
+                      <a:r>
+                        <a:rPr sz="900" b="0">
+                          <a:solidFill>
+                            <a:srgbClr val="000000"/>
+                          </a:solidFill>
+                          <a:latin typeface="Arial"/>
+                        </a:rPr>
+                        <a:t>1</a:t>
+                      </a:r>
+                    </a:p>
+                  </a:txBody>
+                  <a:tcPr marL="54864" marR="54864" marT="18288" marB="18288" anchor="ctr">
+                    <a:solidFill>
+                      <a:srgbClr val="F2F2F2"/>
+                    </a:solidFill>
+                  </a:tcPr>
+                </a:tc>
+                <a:tc>
+                  <a:txBody>
+                    <a:bodyPr/>
+                    <a:lstStyle/>
+                    <a:p>
+                      <a:pPr algn="ctr"/>
+                      <a:r>
+                        <a:rPr sz="900" b="0">
+                          <a:solidFill>
+                            <a:srgbClr val="000000"/>
+                          </a:solidFill>
+                          <a:latin typeface="Arial"/>
+                        </a:rPr>
+                        <a:t>7%</a:t>
+                      </a:r>
+                    </a:p>
+                  </a:txBody>
+                  <a:tcPr marL="54864" marR="54864" marT="18288" marB="18288" anchor="ctr">
+                    <a:solidFill>
+                      <a:srgbClr val="F2F2F2"/>
+                    </a:solidFill>
+                  </a:tcPr>
+                </a:tc>
+                <a:extLst>
+                  <a:ext uri="{0D108BD9-81ED-4DB2-BD59-A6C34878D82A}">
+                    <a16:rowId xmlns:a16="http://schemas.microsoft.com/office/drawing/2014/main" val="10005"/>
+                  </a:ext>
+                </a:extLst>
+              </a:tr>
+              <a:tr h="246888">
+                <a:tc>
+                  <a:txBody>
+                    <a:bodyPr/>
+                    <a:lstStyle/>
+                    <a:p>
+                      <a:pPr algn="l"/>
                       <a:r>
                         <a:rPr sz="900" b="1">
                           <a:solidFill>
-                            <a:srgbClr val="6B2D6B"/>
-                          </a:solidFill>
-                          <a:latin typeface="Arial"/>
-                        </a:rPr>
-                        <a:t>4</a:t>
+                            <a:srgbClr val="000000"/>
+                          </a:solidFill>
+                          <a:latin typeface="Arial"/>
+                        </a:rPr>
+                        <a:t>Overland (Possidonio)</a:t>
+                      </a:r>
+                    </a:p>
+                  </a:txBody>
+                  <a:tcPr marL="54864" marR="54864" marT="18288" marB="18288" anchor="ctr">
+                    <a:solidFill>
+                      <a:srgbClr val="FFFFFF"/>
+                    </a:solidFill>
+                  </a:tcPr>
+                </a:tc>
+                <a:tc>
+                  <a:txBody>
+                    <a:bodyPr/>
+                    <a:lstStyle/>
+                    <a:p>
+                      <a:pPr algn="ctr"/>
+                      <a:r>
+                        <a:rPr sz="900" b="0">
+                          <a:solidFill>
+                            <a:srgbClr val="000000"/>
+                          </a:solidFill>
+                          <a:latin typeface="Arial"/>
+                        </a:rPr>
+                        <a:t>3</a:t>
+                      </a:r>
+                    </a:p>
+                  </a:txBody>
+                  <a:tcPr marL="54864" marR="54864" marT="18288" marB="18288" anchor="ctr">
+                    <a:solidFill>
+                      <a:srgbClr val="FFFFFF"/>
+                    </a:solidFill>
+                  </a:tcPr>
+                </a:tc>
+                <a:tc>
+                  <a:txBody>
+                    <a:bodyPr/>
+                    <a:lstStyle/>
+                    <a:p>
+                      <a:pPr algn="ctr"/>
+                      <a:r>
+                        <a:rPr sz="900" b="0">
+                          <a:solidFill>
+                            <a:srgbClr val="000000"/>
+                          </a:solidFill>
+                          <a:latin typeface="Arial"/>
+                        </a:rPr>
+                        <a:t>5</a:t>
+                      </a:r>
+                    </a:p>
+                  </a:txBody>
+                  <a:tcPr marL="54864" marR="54864" marT="18288" marB="18288" anchor="ctr">
+                    <a:solidFill>
+                      <a:srgbClr val="FFFFFF"/>
+                    </a:solidFill>
+                  </a:tcPr>
+                </a:tc>
+                <a:tc>
+                  <a:txBody>
+                    <a:bodyPr/>
+                    <a:lstStyle/>
+                    <a:p>
+                      <a:pPr algn="ctr"/>
+                      <a:r>
+                        <a:rPr sz="900" b="0">
+                          <a:solidFill>
+                            <a:srgbClr val="000000"/>
+                          </a:solidFill>
+                          <a:latin typeface="Arial"/>
+                        </a:rPr>
+                        <a:t>8</a:t>
+                      </a:r>
+                    </a:p>
+                  </a:txBody>
+                  <a:tcPr marL="54864" marR="54864" marT="18288" marB="18288" anchor="ctr">
+                    <a:solidFill>
+                      <a:srgbClr val="FFFFFF"/>
+                    </a:solidFill>
+                  </a:tcPr>
+                </a:tc>
+                <a:tc>
+                  <a:txBody>
+                    <a:bodyPr/>
+                    <a:lstStyle/>
+                    <a:p>
+                      <a:pPr algn="ctr"/>
+                      <a:r>
+                        <a:rPr sz="900" b="0">
+                          <a:solidFill>
+                            <a:srgbClr val="000000"/>
+                          </a:solidFill>
+                          <a:latin typeface="Arial"/>
+                        </a:rPr>
+                        <a:t>1</a:t>
+                      </a:r>
+                    </a:p>
+                  </a:txBody>
+                  <a:tcPr marL="54864" marR="54864" marT="18288" marB="18288" anchor="ctr">
+                    <a:solidFill>
+                      <a:srgbClr val="FFFFFF"/>
+                    </a:solidFill>
+                  </a:tcPr>
+                </a:tc>
+                <a:tc>
+                  <a:txBody>
+                    <a:bodyPr/>
+                    <a:lstStyle/>
+                    <a:p>
+                      <a:pPr algn="ctr"/>
+                      <a:r>
+                        <a:rPr sz="900" b="0">
+                          <a:solidFill>
+                            <a:srgbClr val="000000"/>
+                          </a:solidFill>
+                          <a:latin typeface="Arial"/>
+                        </a:rPr>
+                        <a:t>0</a:t>
+                      </a:r>
+                    </a:p>
+                  </a:txBody>
+                  <a:tcPr marL="54864" marR="54864" marT="18288" marB="18288" anchor="ctr">
+                    <a:solidFill>
+                      <a:srgbClr val="FFFFFF"/>
+                    </a:solidFill>
+                  </a:tcPr>
+                </a:tc>
+                <a:tc>
+                  <a:txBody>
+                    <a:bodyPr/>
+                    <a:lstStyle/>
+                    <a:p>
+                      <a:pPr algn="ctr"/>
+                      <a:r>
+                        <a:rPr sz="900" b="0">
+                          <a:solidFill>
+                            <a:srgbClr val="000000"/>
+                          </a:solidFill>
+                          <a:latin typeface="Arial"/>
+                        </a:rPr>
+                        <a:t>10%</a:t>
+                      </a:r>
+                    </a:p>
+                  </a:txBody>
+                  <a:tcPr marL="54864" marR="54864" marT="18288" marB="18288" anchor="ctr">
+                    <a:solidFill>
+                      <a:srgbClr val="FFFFFF"/>
+                    </a:solidFill>
+                  </a:tcPr>
+                </a:tc>
+                <a:extLst>
+                  <a:ext uri="{0D108BD9-81ED-4DB2-BD59-A6C34878D82A}">
+                    <a16:rowId xmlns:a16="http://schemas.microsoft.com/office/drawing/2014/main" val="10006"/>
+                  </a:ext>
+                </a:extLst>
+              </a:tr>
+              <a:tr h="246888">
+                <a:tc>
+                  <a:txBody>
+                    <a:bodyPr/>
+                    <a:lstStyle/>
+                    <a:p>
+                      <a:pPr algn="l"/>
+                      <a:r>
+                        <a:rPr sz="900" b="1">
+                          <a:solidFill>
+                            <a:srgbClr val="000000"/>
+                          </a:solidFill>
+                          <a:latin typeface="Arial"/>
+                        </a:rPr>
+                        <a:t>Op. Excellence (Jonathas)</a:t>
                       </a:r>
                     </a:p>
                   </a:txBody>
@@ -7727,7 +9006,7 @@
                 </a:tc>
                 <a:tc>
                   <a:txBody>
-                    <a:bodyPr wrap="square"/>
+                    <a:bodyPr/>
                     <a:lstStyle/>
                     <a:p>
                       <a:pPr algn="ctr"/>
@@ -7738,7 +9017,7 @@
                           </a:solidFill>
                           <a:latin typeface="Arial"/>
                         </a:rPr>
-                        <a:t>13</a:t>
+                        <a:t>6</a:t>
                       </a:r>
                     </a:p>
                   </a:txBody>
@@ -7750,7 +9029,7 @@
                 </a:tc>
                 <a:tc>
                   <a:txBody>
-                    <a:bodyPr wrap="square"/>
+                    <a:bodyPr/>
                     <a:lstStyle/>
                     <a:p>
                       <a:pPr algn="ctr"/>
@@ -7761,7 +9040,7 @@
                           </a:solidFill>
                           <a:latin typeface="Arial"/>
                         </a:rPr>
-                        <a:t>19</a:t>
+                        <a:t>0</a:t>
                       </a:r>
                     </a:p>
                   </a:txBody>
@@ -7773,18 +9052,285 @@
                 </a:tc>
                 <a:tc>
                   <a:txBody>
-                    <a:bodyPr wrap="square"/>
-                    <a:lstStyle/>
-                    <a:p>
-                      <a:pPr algn="ctr"/>
+                    <a:bodyPr/>
+                    <a:lstStyle/>
+                    <a:p>
+                      <a:pPr algn="ctr"/>
+                      <a:r>
+                        <a:rPr sz="900" b="0">
+                          <a:solidFill>
+                            <a:srgbClr val="000000"/>
+                          </a:solidFill>
+                          <a:latin typeface="Arial"/>
+                        </a:rPr>
+                        <a:t>6</a:t>
+                      </a:r>
+                    </a:p>
+                  </a:txBody>
+                  <a:tcPr marL="54864" marR="54864" marT="18288" marB="18288" anchor="ctr">
+                    <a:solidFill>
+                      <a:srgbClr val="F2F2F2"/>
+                    </a:solidFill>
+                  </a:tcPr>
+                </a:tc>
+                <a:tc>
+                  <a:txBody>
+                    <a:bodyPr/>
+                    <a:lstStyle/>
+                    <a:p>
+                      <a:pPr algn="ctr"/>
+                      <a:r>
+                        <a:rPr sz="900" b="0">
+                          <a:solidFill>
+                            <a:srgbClr val="000000"/>
+                          </a:solidFill>
+                          <a:latin typeface="Arial"/>
+                        </a:rPr>
+                        <a:t>0</a:t>
+                      </a:r>
+                    </a:p>
+                  </a:txBody>
+                  <a:tcPr marL="54864" marR="54864" marT="18288" marB="18288" anchor="ctr">
+                    <a:solidFill>
+                      <a:srgbClr val="F2F2F2"/>
+                    </a:solidFill>
+                  </a:tcPr>
+                </a:tc>
+                <a:tc>
+                  <a:txBody>
+                    <a:bodyPr/>
+                    <a:lstStyle/>
+                    <a:p>
+                      <a:pPr algn="ctr"/>
+                      <a:r>
+                        <a:rPr sz="900" b="0">
+                          <a:solidFill>
+                            <a:srgbClr val="000000"/>
+                          </a:solidFill>
+                          <a:latin typeface="Arial"/>
+                        </a:rPr>
+                        <a:t>0</a:t>
+                      </a:r>
+                    </a:p>
+                  </a:txBody>
+                  <a:tcPr marL="54864" marR="54864" marT="18288" marB="18288" anchor="ctr">
+                    <a:solidFill>
+                      <a:srgbClr val="F2F2F2"/>
+                    </a:solidFill>
+                  </a:tcPr>
+                </a:tc>
+                <a:tc>
+                  <a:txBody>
+                    <a:bodyPr/>
+                    <a:lstStyle/>
+                    <a:p>
+                      <a:pPr algn="ctr"/>
+                      <a:r>
+                        <a:rPr sz="900" b="0">
+                          <a:solidFill>
+                            <a:srgbClr val="000000"/>
+                          </a:solidFill>
+                          <a:latin typeface="Arial"/>
+                        </a:rPr>
+                        <a:t>0%</a:t>
+                      </a:r>
+                    </a:p>
+                  </a:txBody>
+                  <a:tcPr marL="54864" marR="54864" marT="18288" marB="18288" anchor="ctr">
+                    <a:solidFill>
+                      <a:srgbClr val="F2F2F2"/>
+                    </a:solidFill>
+                  </a:tcPr>
+                </a:tc>
+                <a:extLst>
+                  <a:ext uri="{0D108BD9-81ED-4DB2-BD59-A6C34878D82A}">
+                    <a16:rowId xmlns:a16="http://schemas.microsoft.com/office/drawing/2014/main" val="10007"/>
+                  </a:ext>
+                </a:extLst>
+              </a:tr>
+              <a:tr h="246888">
+                <a:tc>
+                  <a:txBody>
+                    <a:bodyPr/>
+                    <a:lstStyle/>
+                    <a:p>
+                      <a:pPr algn="l"/>
                       <a:r>
                         <a:rPr sz="900" b="1">
                           <a:solidFill>
-                            <a:srgbClr val="6B2D6B"/>
-                          </a:solidFill>
-                          <a:latin typeface="Arial"/>
-                        </a:rPr>
-                        <a:t>14</a:t>
+                            <a:srgbClr val="000000"/>
+                          </a:solidFill>
+                          <a:latin typeface="Arial"/>
+                        </a:rPr>
+                        <a:t>Cold Chain (Lucy)</a:t>
+                      </a:r>
+                    </a:p>
+                  </a:txBody>
+                  <a:tcPr marL="54864" marR="54864" marT="18288" marB="18288" anchor="ctr">
+                    <a:solidFill>
+                      <a:srgbClr val="FFFFFF"/>
+                    </a:solidFill>
+                  </a:tcPr>
+                </a:tc>
+                <a:tc>
+                  <a:txBody>
+                    <a:bodyPr/>
+                    <a:lstStyle/>
+                    <a:p>
+                      <a:pPr algn="ctr"/>
+                      <a:r>
+                        <a:rPr sz="900" b="0">
+                          <a:solidFill>
+                            <a:srgbClr val="000000"/>
+                          </a:solidFill>
+                          <a:latin typeface="Arial"/>
+                        </a:rPr>
+                        <a:t>2</a:t>
+                      </a:r>
+                    </a:p>
+                  </a:txBody>
+                  <a:tcPr marL="54864" marR="54864" marT="18288" marB="18288" anchor="ctr">
+                    <a:solidFill>
+                      <a:srgbClr val="FFFFFF"/>
+                    </a:solidFill>
+                  </a:tcPr>
+                </a:tc>
+                <a:tc>
+                  <a:txBody>
+                    <a:bodyPr/>
+                    <a:lstStyle/>
+                    <a:p>
+                      <a:pPr algn="ctr"/>
+                      <a:r>
+                        <a:rPr sz="900" b="0">
+                          <a:solidFill>
+                            <a:srgbClr val="000000"/>
+                          </a:solidFill>
+                          <a:latin typeface="Arial"/>
+                        </a:rPr>
+                        <a:t>0</a:t>
+                      </a:r>
+                    </a:p>
+                  </a:txBody>
+                  <a:tcPr marL="54864" marR="54864" marT="18288" marB="18288" anchor="ctr">
+                    <a:solidFill>
+                      <a:srgbClr val="FFFFFF"/>
+                    </a:solidFill>
+                  </a:tcPr>
+                </a:tc>
+                <a:tc>
+                  <a:txBody>
+                    <a:bodyPr/>
+                    <a:lstStyle/>
+                    <a:p>
+                      <a:pPr algn="ctr"/>
+                      <a:r>
+                        <a:rPr sz="900" b="0">
+                          <a:solidFill>
+                            <a:srgbClr val="000000"/>
+                          </a:solidFill>
+                          <a:latin typeface="Arial"/>
+                        </a:rPr>
+                        <a:t>2</a:t>
+                      </a:r>
+                    </a:p>
+                  </a:txBody>
+                  <a:tcPr marL="54864" marR="54864" marT="18288" marB="18288" anchor="ctr">
+                    <a:solidFill>
+                      <a:srgbClr val="FFFFFF"/>
+                    </a:solidFill>
+                  </a:tcPr>
+                </a:tc>
+                <a:tc>
+                  <a:txBody>
+                    <a:bodyPr/>
+                    <a:lstStyle/>
+                    <a:p>
+                      <a:pPr algn="ctr"/>
+                      <a:r>
+                        <a:rPr sz="900" b="0">
+                          <a:solidFill>
+                            <a:srgbClr val="000000"/>
+                          </a:solidFill>
+                          <a:latin typeface="Arial"/>
+                        </a:rPr>
+                        <a:t>0</a:t>
+                      </a:r>
+                    </a:p>
+                  </a:txBody>
+                  <a:tcPr marL="54864" marR="54864" marT="18288" marB="18288" anchor="ctr">
+                    <a:solidFill>
+                      <a:srgbClr val="FFFFFF"/>
+                    </a:solidFill>
+                  </a:tcPr>
+                </a:tc>
+                <a:tc>
+                  <a:txBody>
+                    <a:bodyPr/>
+                    <a:lstStyle/>
+                    <a:p>
+                      <a:pPr algn="ctr"/>
+                      <a:r>
+                        <a:rPr sz="900" b="0">
+                          <a:solidFill>
+                            <a:srgbClr val="000000"/>
+                          </a:solidFill>
+                          <a:latin typeface="Arial"/>
+                        </a:rPr>
+                        <a:t>0</a:t>
+                      </a:r>
+                    </a:p>
+                  </a:txBody>
+                  <a:tcPr marL="54864" marR="54864" marT="18288" marB="18288" anchor="ctr">
+                    <a:solidFill>
+                      <a:srgbClr val="FFFFFF"/>
+                    </a:solidFill>
+                  </a:tcPr>
+                </a:tc>
+                <a:tc>
+                  <a:txBody>
+                    <a:bodyPr/>
+                    <a:lstStyle/>
+                    <a:p>
+                      <a:pPr algn="ctr"/>
+                      <a:r>
+                        <a:rPr sz="900" b="0">
+                          <a:solidFill>
+                            <a:srgbClr val="000000"/>
+                          </a:solidFill>
+                          <a:latin typeface="Arial"/>
+                        </a:rPr>
+                        <a:t>0%</a:t>
+                      </a:r>
+                    </a:p>
+                  </a:txBody>
+                  <a:tcPr marL="54864" marR="54864" marT="18288" marB="18288" anchor="ctr">
+                    <a:solidFill>
+                      <a:srgbClr val="FFFFFF"/>
+                    </a:solidFill>
+                  </a:tcPr>
+                </a:tc>
+                <a:extLst>
+                  <a:ext uri="{0D108BD9-81ED-4DB2-BD59-A6C34878D82A}">
+                    <a16:rowId xmlns:a16="http://schemas.microsoft.com/office/drawing/2014/main" val="10008"/>
+                  </a:ext>
+                </a:extLst>
+              </a:tr>
+              <a:tr h="246888">
+                <a:tc>
+                  <a:txBody>
+                    <a:bodyPr/>
+                    <a:lstStyle/>
+                    <a:p>
+                      <a:pPr algn="l"/>
+                      <a:r>
+                        <a:rPr sz="900" b="1">
+                          <a:solidFill>
+                            <a:srgbClr val="000000"/>
+                          </a:solidFill>
+                          <a:latin typeface="Arial"/>
+                        </a:rPr>
+                        <a:t>Special Operations</a:t>
                       </a:r>
                     </a:p>
                   </a:txBody>
@@ -7794,1138 +9340,303 @@
                     </a:solidFill>
                   </a:tcPr>
                 </a:tc>
+                <a:tc>
+                  <a:txBody>
+                    <a:bodyPr/>
+                    <a:lstStyle/>
+                    <a:p>
+                      <a:pPr algn="ctr"/>
+                      <a:r>
+                        <a:rPr sz="900" b="0">
+                          <a:solidFill>
+                            <a:srgbClr val="000000"/>
+                          </a:solidFill>
+                          <a:latin typeface="Arial"/>
+                        </a:rPr>
+                        <a:t> </a:t>
+                      </a:r>
+                    </a:p>
+                  </a:txBody>
+                  <a:tcPr marL="54864" marR="54864" marT="18288" marB="18288" anchor="ctr">
+                    <a:solidFill>
+                      <a:srgbClr val="F2F2F2"/>
+                    </a:solidFill>
+                  </a:tcPr>
+                </a:tc>
+                <a:tc>
+                  <a:txBody>
+                    <a:bodyPr/>
+                    <a:lstStyle/>
+                    <a:p>
+                      <a:pPr algn="ctr"/>
+                      <a:r>
+                        <a:rPr sz="900" b="0">
+                          <a:solidFill>
+                            <a:srgbClr val="000000"/>
+                          </a:solidFill>
+                          <a:latin typeface="Arial"/>
+                        </a:rPr>
+                        <a:t> </a:t>
+                      </a:r>
+                    </a:p>
+                  </a:txBody>
+                  <a:tcPr marL="54864" marR="54864" marT="18288" marB="18288" anchor="ctr">
+                    <a:solidFill>
+                      <a:srgbClr val="F2F2F2"/>
+                    </a:solidFill>
+                  </a:tcPr>
+                </a:tc>
+                <a:tc>
+                  <a:txBody>
+                    <a:bodyPr/>
+                    <a:lstStyle/>
+                    <a:p>
+                      <a:pPr algn="ctr"/>
+                      <a:r>
+                        <a:rPr sz="900" b="0">
+                          <a:solidFill>
+                            <a:srgbClr val="000000"/>
+                          </a:solidFill>
+                          <a:latin typeface="Arial"/>
+                        </a:rPr>
+                        <a:t> </a:t>
+                      </a:r>
+                    </a:p>
+                  </a:txBody>
+                  <a:tcPr marL="54864" marR="54864" marT="18288" marB="18288" anchor="ctr">
+                    <a:solidFill>
+                      <a:srgbClr val="F2F2F2"/>
+                    </a:solidFill>
+                  </a:tcPr>
+                </a:tc>
+                <a:tc>
+                  <a:txBody>
+                    <a:bodyPr/>
+                    <a:lstStyle/>
+                    <a:p>
+                      <a:pPr algn="ctr"/>
+                      <a:r>
+                        <a:rPr sz="900" b="0">
+                          <a:solidFill>
+                            <a:srgbClr val="000000"/>
+                          </a:solidFill>
+                          <a:latin typeface="Arial"/>
+                        </a:rPr>
+                        <a:t>1</a:t>
+                      </a:r>
+                    </a:p>
+                  </a:txBody>
+                  <a:tcPr marL="54864" marR="54864" marT="18288" marB="18288" anchor="ctr">
+                    <a:solidFill>
+                      <a:srgbClr val="F2F2F2"/>
+                    </a:solidFill>
+                  </a:tcPr>
+                </a:tc>
+                <a:tc>
+                  <a:txBody>
+                    <a:bodyPr/>
+                    <a:lstStyle/>
+                    <a:p>
+                      <a:pPr algn="ctr"/>
+                      <a:r>
+                        <a:rPr sz="900" b="0">
+                          <a:solidFill>
+                            <a:srgbClr val="000000"/>
+                          </a:solidFill>
+                          <a:latin typeface="Arial"/>
+                        </a:rPr>
+                        <a:t>1</a:t>
+                      </a:r>
+                    </a:p>
+                  </a:txBody>
+                  <a:tcPr marL="54864" marR="54864" marT="18288" marB="18288" anchor="ctr">
+                    <a:solidFill>
+                      <a:srgbClr val="F2F2F2"/>
+                    </a:solidFill>
+                  </a:tcPr>
+                </a:tc>
+                <a:tc>
+                  <a:txBody>
+                    <a:bodyPr/>
+                    <a:lstStyle/>
+                    <a:p>
+                      <a:pPr algn="ctr"/>
+                      <a:r>
+                        <a:rPr sz="900" b="0">
+                          <a:solidFill>
+                            <a:srgbClr val="000000"/>
+                          </a:solidFill>
+                          <a:latin typeface="Arial"/>
+                        </a:rPr>
+                        <a:t> </a:t>
+                      </a:r>
+                    </a:p>
+                  </a:txBody>
+                  <a:tcPr marL="54864" marR="54864" marT="18288" marB="18288" anchor="ctr">
+                    <a:solidFill>
+                      <a:srgbClr val="F2F2F2"/>
+                    </a:solidFill>
+                  </a:tcPr>
+                </a:tc>
+                <a:extLst>
+                  <a:ext uri="{0D108BD9-81ED-4DB2-BD59-A6C34878D82A}">
+                    <a16:rowId xmlns:a16="http://schemas.microsoft.com/office/drawing/2014/main" val="10009"/>
+                  </a:ext>
+                </a:extLst>
               </a:tr>
-              <a:tr h="274320">
-                <a:tc>
-                  <a:txBody>
-                    <a:bodyPr wrap="square"/>
+              <a:tr h="246888">
+                <a:tc>
+                  <a:txBody>
+                    <a:bodyPr/>
                     <a:lstStyle/>
                     <a:p>
                       <a:pPr algn="l"/>
                       <a:r>
                         <a:rPr sz="900" b="1">
                           <a:solidFill>
-                            <a:srgbClr val="000000"/>
-                          </a:solidFill>
-                          <a:latin typeface="Arial"/>
-                        </a:rPr>
-                        <a:t>Ocean Operations</a:t>
-                      </a:r>
-                    </a:p>
-                  </a:txBody>
-                  <a:tcPr marL="54864" marR="54864" marT="18288" marB="18288" anchor="ctr">
-                    <a:solidFill>
-                      <a:srgbClr val="FFFFFF"/>
-                    </a:solidFill>
-                  </a:tcPr>
-                </a:tc>
-                <a:tc>
-                  <a:txBody>
-                    <a:bodyPr wrap="square"/>
-                    <a:lstStyle/>
-                    <a:p>
-                      <a:pPr algn="ctr"/>
-                      <a:r>
-                        <a:rPr sz="900" b="0">
-                          <a:solidFill>
-                            <a:srgbClr val="000000"/>
-                          </a:solidFill>
-                          <a:latin typeface="Arial"/>
-                        </a:rPr>
-                        <a:t>6</a:t>
-                      </a:r>
-                    </a:p>
-                  </a:txBody>
-                  <a:tcPr marL="54864" marR="54864" marT="18288" marB="18288" anchor="ctr">
-                    <a:solidFill>
-                      <a:srgbClr val="FFFFFF"/>
-                    </a:solidFill>
-                  </a:tcPr>
-                </a:tc>
-                <a:tc>
-                  <a:txBody>
-                    <a:bodyPr wrap="square"/>
-                    <a:lstStyle/>
-                    <a:p>
-                      <a:pPr algn="ctr"/>
-                      <a:r>
-                        <a:rPr sz="900" b="0">
-                          <a:solidFill>
-                            <a:srgbClr val="000000"/>
-                          </a:solidFill>
-                          <a:latin typeface="Arial"/>
-                        </a:rPr>
-                        <a:t>29</a:t>
-                      </a:r>
-                    </a:p>
-                  </a:txBody>
-                  <a:tcPr marL="54864" marR="54864" marT="18288" marB="18288" anchor="ctr">
-                    <a:solidFill>
-                      <a:srgbClr val="FFFFFF"/>
-                    </a:solidFill>
-                  </a:tcPr>
-                </a:tc>
-                <a:tc>
-                  <a:txBody>
-                    <a:bodyPr wrap="square"/>
-                    <a:lstStyle/>
-                    <a:p>
-                      <a:pPr algn="ctr"/>
-                      <a:r>
-                        <a:rPr sz="900" b="0">
-                          <a:solidFill>
-                            <a:srgbClr val="000000"/>
-                          </a:solidFill>
-                          <a:latin typeface="Arial"/>
-                        </a:rPr>
-                        <a:t>6</a:t>
-                      </a:r>
-                    </a:p>
-                  </a:txBody>
-                  <a:tcPr marL="54864" marR="54864" marT="18288" marB="18288" anchor="ctr">
-                    <a:solidFill>
-                      <a:srgbClr val="FFFFFF"/>
-                    </a:solidFill>
-                  </a:tcPr>
-                </a:tc>
-                <a:tc>
-                  <a:txBody>
-                    <a:bodyPr wrap="square"/>
-                    <a:lstStyle/>
-                    <a:p>
-                      <a:pPr algn="ctr"/>
-                      <a:r>
-                        <a:rPr sz="900" b="0">
-                          <a:solidFill>
-                            <a:srgbClr val="000000"/>
-                          </a:solidFill>
-                          <a:latin typeface="Arial"/>
-                        </a:rPr>
-                        <a:t>2</a:t>
-                      </a:r>
-                    </a:p>
-                  </a:txBody>
-                  <a:tcPr marL="54864" marR="54864" marT="18288" marB="18288" anchor="ctr">
-                    <a:solidFill>
-                      <a:srgbClr val="FFFFFF"/>
-                    </a:solidFill>
-                  </a:tcPr>
-                </a:tc>
-                <a:tc>
-                  <a:txBody>
-                    <a:bodyPr wrap="square"/>
-                    <a:lstStyle/>
-                    <a:p>
-                      <a:pPr algn="ctr"/>
-                      <a:r>
-                        <a:rPr sz="900" b="0">
-                          <a:solidFill>
-                            <a:srgbClr val="000000"/>
-                          </a:solidFill>
-                          <a:latin typeface="Arial"/>
-                        </a:rPr>
-                        <a:t>12</a:t>
-                      </a:r>
-                    </a:p>
-                  </a:txBody>
-                  <a:tcPr marL="54864" marR="54864" marT="18288" marB="18288" anchor="ctr">
-                    <a:solidFill>
-                      <a:srgbClr val="FFFFFF"/>
-                    </a:solidFill>
-                  </a:tcPr>
-                </a:tc>
-                <a:tc>
-                  <a:txBody>
-                    <a:bodyPr wrap="square"/>
-                    <a:lstStyle/>
-                    <a:p>
-                      <a:pPr algn="ctr"/>
-                      <a:r>
-                        <a:rPr sz="900" b="0">
-                          <a:solidFill>
-                            <a:srgbClr val="000000"/>
-                          </a:solidFill>
-                          <a:latin typeface="Arial"/>
-                        </a:rPr>
-                        <a:t>3</a:t>
-                      </a:r>
-                    </a:p>
-                  </a:txBody>
-                  <a:tcPr marL="54864" marR="54864" marT="18288" marB="18288" anchor="ctr">
-                    <a:solidFill>
-                      <a:srgbClr val="FFFFFF"/>
-                    </a:solidFill>
-                  </a:tcPr>
-                </a:tc>
-                <a:tc>
-                  <a:txBody>
-                    <a:bodyPr wrap="square"/>
+                            <a:srgbClr val="009796"/>
+                          </a:solidFill>
+                          <a:latin typeface="Arial"/>
+                        </a:rPr>
+                        <a:t>Total COO</a:t>
+                      </a:r>
+                    </a:p>
+                  </a:txBody>
+                  <a:tcPr marL="54864" marR="54864" marT="18288" marB="18288" anchor="ctr">
+                    <a:solidFill>
+                      <a:srgbClr val="E8F4F4"/>
+                    </a:solidFill>
+                  </a:tcPr>
+                </a:tc>
+                <a:tc>
+                  <a:txBody>
+                    <a:bodyPr/>
                     <a:lstStyle/>
                     <a:p>
                       <a:pPr algn="ctr"/>
                       <a:r>
                         <a:rPr sz="900" b="1">
                           <a:solidFill>
-                            <a:srgbClr val="6B2D6B"/>
-                          </a:solidFill>
-                          <a:latin typeface="Arial"/>
-                        </a:rPr>
-                        <a:t>3</a:t>
-                      </a:r>
-                    </a:p>
-                  </a:txBody>
-                  <a:tcPr marL="54864" marR="54864" marT="18288" marB="18288" anchor="ctr">
-                    <a:solidFill>
-                      <a:srgbClr val="FFFFFF"/>
-                    </a:solidFill>
-                  </a:tcPr>
-                </a:tc>
-              </a:tr>
-              <a:tr h="274320">
-                <a:tc>
-                  <a:txBody>
-                    <a:bodyPr wrap="square"/>
-                    <a:lstStyle/>
-                    <a:p>
-                      <a:pPr algn="l"/>
+                            <a:srgbClr val="009796"/>
+                          </a:solidFill>
+                          <a:latin typeface="Arial"/>
+                        </a:rPr>
+                        <a:t>8</a:t>
+                      </a:r>
+                    </a:p>
+                  </a:txBody>
+                  <a:tcPr marL="54864" marR="54864" marT="18288" marB="18288" anchor="ctr">
+                    <a:solidFill>
+                      <a:srgbClr val="E8F4F4"/>
+                    </a:solidFill>
+                  </a:tcPr>
+                </a:tc>
+                <a:tc>
+                  <a:txBody>
+                    <a:bodyPr/>
+                    <a:lstStyle/>
+                    <a:p>
+                      <a:pPr algn="ctr"/>
                       <a:r>
                         <a:rPr sz="900" b="1">
                           <a:solidFill>
-                            <a:srgbClr val="000000"/>
-                          </a:solidFill>
-                          <a:latin typeface="Arial"/>
-                        </a:rPr>
-                        <a:t>Quality &amp; Op. Intel.</a:t>
-                      </a:r>
-                    </a:p>
-                  </a:txBody>
-                  <a:tcPr marL="54864" marR="54864" marT="18288" marB="18288" anchor="ctr">
-                    <a:solidFill>
-                      <a:srgbClr val="F2F2F2"/>
-                    </a:solidFill>
-                  </a:tcPr>
-                </a:tc>
-                <a:tc>
-                  <a:txBody>
-                    <a:bodyPr wrap="square"/>
-                    <a:lstStyle/>
-                    <a:p>
-                      <a:pPr algn="ctr"/>
-                      <a:r>
-                        <a:rPr sz="900" b="0">
-                          <a:solidFill>
-                            <a:srgbClr val="000000"/>
-                          </a:solidFill>
-                          <a:latin typeface="Arial"/>
-                        </a:rPr>
-                        <a:t>6</a:t>
-                      </a:r>
-                    </a:p>
-                  </a:txBody>
-                  <a:tcPr marL="54864" marR="54864" marT="18288" marB="18288" anchor="ctr">
-                    <a:solidFill>
-                      <a:srgbClr val="F2F2F2"/>
-                    </a:solidFill>
-                  </a:tcPr>
-                </a:tc>
-                <a:tc>
-                  <a:txBody>
-                    <a:bodyPr wrap="square"/>
-                    <a:lstStyle/>
-                    <a:p>
-                      <a:pPr algn="ctr"/>
-                      <a:r>
-                        <a:rPr sz="900" b="0">
-                          <a:solidFill>
-                            <a:srgbClr val="000000"/>
-                          </a:solidFill>
-                          <a:latin typeface="Arial"/>
-                        </a:rPr>
-                        <a:t>6</a:t>
-                      </a:r>
-                    </a:p>
-                  </a:txBody>
-                  <a:tcPr marL="54864" marR="54864" marT="18288" marB="18288" anchor="ctr">
-                    <a:solidFill>
-                      <a:srgbClr val="F2F2F2"/>
-                    </a:solidFill>
-                  </a:tcPr>
-                </a:tc>
-                <a:tc>
-                  <a:txBody>
-                    <a:bodyPr wrap="square"/>
-                    <a:lstStyle/>
-                    <a:p>
-                      <a:pPr algn="ctr"/>
-                      <a:r>
-                        <a:rPr sz="900" b="0">
-                          <a:solidFill>
-                            <a:srgbClr val="000000"/>
-                          </a:solidFill>
-                          <a:latin typeface="Arial"/>
-                        </a:rPr>
-                        <a:t>3</a:t>
-                      </a:r>
-                    </a:p>
-                  </a:txBody>
-                  <a:tcPr marL="54864" marR="54864" marT="18288" marB="18288" anchor="ctr">
-                    <a:solidFill>
-                      <a:srgbClr val="F2F2F2"/>
-                    </a:solidFill>
-                  </a:tcPr>
-                </a:tc>
-                <a:tc>
-                  <a:txBody>
-                    <a:bodyPr wrap="square"/>
-                    <a:lstStyle/>
-                    <a:p>
-                      <a:pPr algn="ctr"/>
-                      <a:r>
-                        <a:rPr sz="900" b="0">
-                          <a:solidFill>
-                            <a:srgbClr val="000000"/>
-                          </a:solidFill>
-                          <a:latin typeface="Arial"/>
-                        </a:rPr>
-                        <a:t>2</a:t>
-                      </a:r>
-                    </a:p>
-                  </a:txBody>
-                  <a:tcPr marL="54864" marR="54864" marT="18288" marB="18288" anchor="ctr">
-                    <a:solidFill>
-                      <a:srgbClr val="F2F2F2"/>
-                    </a:solidFill>
-                  </a:tcPr>
-                </a:tc>
-                <a:tc>
-                  <a:txBody>
-                    <a:bodyPr wrap="square"/>
-                    <a:lstStyle/>
-                    <a:p>
-                      <a:pPr algn="ctr"/>
-                      <a:r>
-                        <a:rPr sz="900" b="0">
-                          <a:solidFill>
-                            <a:srgbClr val="000000"/>
-                          </a:solidFill>
-                          <a:latin typeface="Arial"/>
-                        </a:rPr>
-                        <a:t>6</a:t>
-                      </a:r>
-                    </a:p>
-                  </a:txBody>
-                  <a:tcPr marL="54864" marR="54864" marT="18288" marB="18288" anchor="ctr">
-                    <a:solidFill>
-                      <a:srgbClr val="F2F2F2"/>
-                    </a:solidFill>
-                  </a:tcPr>
-                </a:tc>
-                <a:tc>
-                  <a:txBody>
-                    <a:bodyPr wrap="square"/>
-                    <a:lstStyle/>
-                    <a:p>
-                      <a:pPr algn="ctr"/>
-                      <a:r>
-                        <a:rPr sz="900" b="0">
-                          <a:solidFill>
-                            <a:srgbClr val="000000"/>
-                          </a:solidFill>
-                          <a:latin typeface="Arial"/>
-                        </a:rPr>
-                        <a:t>1</a:t>
-                      </a:r>
-                    </a:p>
-                  </a:txBody>
-                  <a:tcPr marL="54864" marR="54864" marT="18288" marB="18288" anchor="ctr">
-                    <a:solidFill>
-                      <a:srgbClr val="F2F2F2"/>
-                    </a:solidFill>
-                  </a:tcPr>
-                </a:tc>
-                <a:tc>
-                  <a:txBody>
-                    <a:bodyPr wrap="square"/>
+                            <a:srgbClr val="009796"/>
+                          </a:solidFill>
+                          <a:latin typeface="Arial"/>
+                        </a:rPr>
+                        <a:t>191</a:t>
+                      </a:r>
+                    </a:p>
+                  </a:txBody>
+                  <a:tcPr marL="54864" marR="54864" marT="18288" marB="18288" anchor="ctr">
+                    <a:solidFill>
+                      <a:srgbClr val="E8F4F4"/>
+                    </a:solidFill>
+                  </a:tcPr>
+                </a:tc>
+                <a:tc>
+                  <a:txBody>
+                    <a:bodyPr/>
                     <a:lstStyle/>
                     <a:p>
                       <a:pPr algn="ctr"/>
                       <a:r>
                         <a:rPr sz="900" b="1">
                           <a:solidFill>
-                            <a:srgbClr val="6B2D6B"/>
-                          </a:solidFill>
-                          <a:latin typeface="Arial"/>
-                        </a:rPr>
-                        <a:t>1</a:t>
-                      </a:r>
-                    </a:p>
-                  </a:txBody>
-                  <a:tcPr marL="54864" marR="54864" marT="18288" marB="18288" anchor="ctr">
-                    <a:solidFill>
-                      <a:srgbClr val="F2F2F2"/>
-                    </a:solidFill>
-                  </a:tcPr>
-                </a:tc>
-              </a:tr>
-              <a:tr h="274320">
-                <a:tc>
-                  <a:txBody>
-                    <a:bodyPr wrap="square"/>
-                    <a:lstStyle/>
-                    <a:p>
-                      <a:pPr algn="l"/>
+                            <a:srgbClr val="009796"/>
+                          </a:solidFill>
+                          <a:latin typeface="Arial"/>
+                        </a:rPr>
+                        <a:t>199</a:t>
+                      </a:r>
+                    </a:p>
+                  </a:txBody>
+                  <a:tcPr marL="54864" marR="54864" marT="18288" marB="18288" anchor="ctr">
+                    <a:solidFill>
+                      <a:srgbClr val="E8F4F4"/>
+                    </a:solidFill>
+                  </a:tcPr>
+                </a:tc>
+                <a:tc>
+                  <a:txBody>
+                    <a:bodyPr/>
+                    <a:lstStyle/>
+                    <a:p>
+                      <a:pPr algn="ctr"/>
                       <a:r>
                         <a:rPr sz="900" b="1">
                           <a:solidFill>
-                            <a:srgbClr val="000000"/>
-                          </a:solidFill>
-                          <a:latin typeface="Arial"/>
-                        </a:rPr>
-                        <a:t>Overland</a:t>
-                      </a:r>
-                    </a:p>
-                  </a:txBody>
-                  <a:tcPr marL="54864" marR="54864" marT="18288" marB="18288" anchor="ctr">
-                    <a:solidFill>
-                      <a:srgbClr val="FFFFFF"/>
-                    </a:solidFill>
-                  </a:tcPr>
-                </a:tc>
-                <a:tc>
-                  <a:txBody>
-                    <a:bodyPr wrap="square"/>
-                    <a:lstStyle/>
-                    <a:p>
-                      <a:pPr algn="ctr"/>
-                      <a:r>
-                        <a:rPr sz="900" b="0">
-                          <a:solidFill>
-                            <a:srgbClr val="000000"/>
-                          </a:solidFill>
-                          <a:latin typeface="Arial"/>
-                        </a:rPr>
-                        <a:t>3</a:t>
-                      </a:r>
-                    </a:p>
-                  </a:txBody>
-                  <a:tcPr marL="54864" marR="54864" marT="18288" marB="18288" anchor="ctr">
-                    <a:solidFill>
-                      <a:srgbClr val="FFFFFF"/>
-                    </a:solidFill>
-                  </a:tcPr>
-                </a:tc>
-                <a:tc>
-                  <a:txBody>
-                    <a:bodyPr wrap="square"/>
-                    <a:lstStyle/>
-                    <a:p>
-                      <a:pPr algn="ctr"/>
-                      <a:r>
-                        <a:rPr sz="900" b="0">
-                          <a:solidFill>
-                            <a:srgbClr val="000000"/>
-                          </a:solidFill>
-                          <a:latin typeface="Arial"/>
-                        </a:rPr>
-                        <a:t>5</a:t>
-                      </a:r>
-                    </a:p>
-                  </a:txBody>
-                  <a:tcPr marL="54864" marR="54864" marT="18288" marB="18288" anchor="ctr">
-                    <a:solidFill>
-                      <a:srgbClr val="FFFFFF"/>
-                    </a:solidFill>
-                  </a:tcPr>
-                </a:tc>
-                <a:tc>
-                  <a:txBody>
-                    <a:bodyPr wrap="square"/>
-                    <a:lstStyle/>
-                    <a:p>
-                      <a:pPr algn="ctr"/>
-                      <a:r>
-                        <a:rPr sz="900" b="0">
-                          <a:solidFill>
-                            <a:srgbClr val="000000"/>
-                          </a:solidFill>
-                          <a:latin typeface="Arial"/>
-                        </a:rPr>
-                        <a:t>2</a:t>
-                      </a:r>
-                    </a:p>
-                  </a:txBody>
-                  <a:tcPr marL="54864" marR="54864" marT="18288" marB="18288" anchor="ctr">
-                    <a:solidFill>
-                      <a:srgbClr val="FFFFFF"/>
-                    </a:solidFill>
-                  </a:tcPr>
-                </a:tc>
-                <a:tc>
-                  <a:txBody>
-                    <a:bodyPr wrap="square"/>
-                    <a:lstStyle/>
-                    <a:p>
-                      <a:pPr algn="ctr"/>
-                      <a:r>
-                        <a:rPr sz="900" b="0">
-                          <a:solidFill>
-                            <a:srgbClr val="000000"/>
-                          </a:solidFill>
-                          <a:latin typeface="Arial"/>
-                        </a:rPr>
-                        <a:t>2</a:t>
-                      </a:r>
-                    </a:p>
-                  </a:txBody>
-                  <a:tcPr marL="54864" marR="54864" marT="18288" marB="18288" anchor="ctr">
-                    <a:solidFill>
-                      <a:srgbClr val="FFFFFF"/>
-                    </a:solidFill>
-                  </a:tcPr>
-                </a:tc>
-                <a:tc>
-                  <a:txBody>
-                    <a:bodyPr wrap="square"/>
-                    <a:lstStyle/>
-                    <a:p>
-                      <a:pPr algn="ctr"/>
-                      <a:r>
-                        <a:rPr sz="900" b="0">
-                          <a:solidFill>
-                            <a:srgbClr val="000000"/>
-                          </a:solidFill>
-                          <a:latin typeface="Arial"/>
-                        </a:rPr>
-                        <a:t>5</a:t>
-                      </a:r>
-                    </a:p>
-                  </a:txBody>
-                  <a:tcPr marL="54864" marR="54864" marT="18288" marB="18288" anchor="ctr">
-                    <a:solidFill>
-                      <a:srgbClr val="FFFFFF"/>
-                    </a:solidFill>
-                  </a:tcPr>
-                </a:tc>
-                <a:tc>
-                  <a:txBody>
-                    <a:bodyPr wrap="square"/>
-                    <a:lstStyle/>
-                    <a:p>
-                      <a:pPr algn="ctr"/>
-                      <a:r>
-                        <a:rPr sz="900" b="0">
-                          <a:solidFill>
-                            <a:srgbClr val="000000"/>
-                          </a:solidFill>
-                          <a:latin typeface="Arial"/>
-                        </a:rPr>
-                        <a:t>1</a:t>
-                      </a:r>
-                    </a:p>
-                  </a:txBody>
-                  <a:tcPr marL="54864" marR="54864" marT="18288" marB="18288" anchor="ctr">
-                    <a:solidFill>
-                      <a:srgbClr val="FFFFFF"/>
-                    </a:solidFill>
-                  </a:tcPr>
-                </a:tc>
-                <a:tc>
-                  <a:txBody>
-                    <a:bodyPr wrap="square"/>
-                    <a:lstStyle/>
-                    <a:p>
-                      <a:pPr algn="ctr"/>
-                      <a:r>
-                        <a:rPr sz="900" b="0">
-                          <a:solidFill>
-                            <a:srgbClr val="000000"/>
-                          </a:solidFill>
-                          <a:latin typeface="Arial"/>
-                        </a:rPr>
-                        <a:t>0</a:t>
-                      </a:r>
-                    </a:p>
-                  </a:txBody>
-                  <a:tcPr marL="54864" marR="54864" marT="18288" marB="18288" anchor="ctr">
-                    <a:solidFill>
-                      <a:srgbClr val="FFFFFF"/>
-                    </a:solidFill>
-                  </a:tcPr>
-                </a:tc>
-              </a:tr>
-              <a:tr h="274320">
-                <a:tc>
-                  <a:txBody>
-                    <a:bodyPr wrap="square"/>
-                    <a:lstStyle/>
-                    <a:p>
-                      <a:pPr algn="l"/>
+                            <a:srgbClr val="009796"/>
+                          </a:solidFill>
+                          <a:latin typeface="Arial"/>
+                        </a:rPr>
+                        <a:t>34</a:t>
+                      </a:r>
+                    </a:p>
+                  </a:txBody>
+                  <a:tcPr marL="54864" marR="54864" marT="18288" marB="18288" anchor="ctr">
+                    <a:solidFill>
+                      <a:srgbClr val="E8F4F4"/>
+                    </a:solidFill>
+                  </a:tcPr>
+                </a:tc>
+                <a:tc>
+                  <a:txBody>
+                    <a:bodyPr/>
+                    <a:lstStyle/>
+                    <a:p>
+                      <a:pPr algn="ctr"/>
                       <a:r>
                         <a:rPr sz="900" b="1">
                           <a:solidFill>
-                            <a:srgbClr val="000000"/>
-                          </a:solidFill>
-                          <a:latin typeface="Arial"/>
-                        </a:rPr>
-                        <a:t>Operational Excellence</a:t>
-                      </a:r>
-                    </a:p>
-                  </a:txBody>
-                  <a:tcPr marL="54864" marR="54864" marT="18288" marB="18288" anchor="ctr">
-                    <a:solidFill>
-                      <a:srgbClr val="F2F2F2"/>
-                    </a:solidFill>
-                  </a:tcPr>
-                </a:tc>
-                <a:tc>
-                  <a:txBody>
-                    <a:bodyPr wrap="square"/>
-                    <a:lstStyle/>
-                    <a:p>
-                      <a:pPr algn="ctr"/>
-                      <a:r>
-                        <a:rPr sz="900" b="0">
-                          <a:solidFill>
-                            <a:srgbClr val="000000"/>
-                          </a:solidFill>
-                          <a:latin typeface="Arial"/>
-                        </a:rPr>
-                        <a:t>6</a:t>
-                      </a:r>
-                    </a:p>
-                  </a:txBody>
-                  <a:tcPr marL="54864" marR="54864" marT="18288" marB="18288" anchor="ctr">
-                    <a:solidFill>
-                      <a:srgbClr val="F2F2F2"/>
-                    </a:solidFill>
-                  </a:tcPr>
-                </a:tc>
-                <a:tc>
-                  <a:txBody>
-                    <a:bodyPr wrap="square"/>
-                    <a:lstStyle/>
-                    <a:p>
-                      <a:pPr algn="ctr"/>
-                      <a:r>
-                        <a:rPr sz="900" b="0">
-                          <a:solidFill>
-                            <a:srgbClr val="000000"/>
-                          </a:solidFill>
-                          <a:latin typeface="Arial"/>
-                        </a:rPr>
-                        <a:t>0</a:t>
-                      </a:r>
-                    </a:p>
-                  </a:txBody>
-                  <a:tcPr marL="54864" marR="54864" marT="18288" marB="18288" anchor="ctr">
-                    <a:solidFill>
-                      <a:srgbClr val="F2F2F2"/>
-                    </a:solidFill>
-                  </a:tcPr>
-                </a:tc>
-                <a:tc>
-                  <a:txBody>
-                    <a:bodyPr wrap="square"/>
-                    <a:lstStyle/>
-                    <a:p>
-                      <a:pPr algn="ctr"/>
-                      <a:r>
-                        <a:rPr sz="900" b="0">
-                          <a:solidFill>
-                            <a:srgbClr val="000000"/>
-                          </a:solidFill>
-                          <a:latin typeface="Arial"/>
-                        </a:rPr>
-                        <a:t>1</a:t>
-                      </a:r>
-                    </a:p>
-                  </a:txBody>
-                  <a:tcPr marL="54864" marR="54864" marT="18288" marB="18288" anchor="ctr">
-                    <a:solidFill>
-                      <a:srgbClr val="F2F2F2"/>
-                    </a:solidFill>
-                  </a:tcPr>
-                </a:tc>
-                <a:tc>
-                  <a:txBody>
-                    <a:bodyPr wrap="square"/>
-                    <a:lstStyle/>
-                    <a:p>
-                      <a:pPr algn="ctr"/>
-                      <a:r>
-                        <a:rPr sz="900" b="0">
-                          <a:solidFill>
-                            <a:srgbClr val="000000"/>
-                          </a:solidFill>
-                          <a:latin typeface="Arial"/>
-                        </a:rPr>
-                        <a:t>1</a:t>
-                      </a:r>
-                    </a:p>
-                  </a:txBody>
-                  <a:tcPr marL="54864" marR="54864" marT="18288" marB="18288" anchor="ctr">
-                    <a:solidFill>
-                      <a:srgbClr val="F2F2F2"/>
-                    </a:solidFill>
-                  </a:tcPr>
-                </a:tc>
-                <a:tc>
-                  <a:txBody>
-                    <a:bodyPr wrap="square"/>
-                    <a:lstStyle/>
-                    <a:p>
-                      <a:pPr algn="ctr"/>
-                      <a:r>
-                        <a:rPr sz="900" b="0">
-                          <a:solidFill>
-                            <a:srgbClr val="000000"/>
-                          </a:solidFill>
-                          <a:latin typeface="Arial"/>
-                        </a:rPr>
-                        <a:t>6</a:t>
-                      </a:r>
-                    </a:p>
-                  </a:txBody>
-                  <a:tcPr marL="54864" marR="54864" marT="18288" marB="18288" anchor="ctr">
-                    <a:solidFill>
-                      <a:srgbClr val="F2F2F2"/>
-                    </a:solidFill>
-                  </a:tcPr>
-                </a:tc>
-                <a:tc>
-                  <a:txBody>
-                    <a:bodyPr wrap="square"/>
-                    <a:lstStyle/>
-                    <a:p>
-                      <a:pPr algn="ctr"/>
-                      <a:r>
-                        <a:rPr sz="900" b="0">
-                          <a:solidFill>
-                            <a:srgbClr val="000000"/>
-                          </a:solidFill>
-                          <a:latin typeface="Arial"/>
-                        </a:rPr>
-                        <a:t>0</a:t>
-                      </a:r>
-                    </a:p>
-                  </a:txBody>
-                  <a:tcPr marL="54864" marR="54864" marT="18288" marB="18288" anchor="ctr">
-                    <a:solidFill>
-                      <a:srgbClr val="F2F2F2"/>
-                    </a:solidFill>
-                  </a:tcPr>
-                </a:tc>
-                <a:tc>
-                  <a:txBody>
-                    <a:bodyPr wrap="square"/>
-                    <a:lstStyle/>
-                    <a:p>
-                      <a:pPr algn="ctr"/>
-                      <a:r>
-                        <a:rPr sz="900" b="0">
-                          <a:solidFill>
-                            <a:srgbClr val="000000"/>
-                          </a:solidFill>
-                          <a:latin typeface="Arial"/>
-                        </a:rPr>
-                        <a:t>0</a:t>
-                      </a:r>
-                    </a:p>
-                  </a:txBody>
-                  <a:tcPr marL="54864" marR="54864" marT="18288" marB="18288" anchor="ctr">
-                    <a:solidFill>
-                      <a:srgbClr val="F2F2F2"/>
-                    </a:solidFill>
-                  </a:tcPr>
-                </a:tc>
-              </a:tr>
-              <a:tr h="274320">
-                <a:tc>
-                  <a:txBody>
-                    <a:bodyPr wrap="square"/>
-                    <a:lstStyle/>
-                    <a:p>
-                      <a:pPr algn="l"/>
+                            <a:srgbClr val="009796"/>
+                          </a:solidFill>
+                          <a:latin typeface="Arial"/>
+                        </a:rPr>
+                        <a:t>28</a:t>
+                      </a:r>
+                    </a:p>
+                  </a:txBody>
+                  <a:tcPr marL="54864" marR="54864" marT="18288" marB="18288" anchor="ctr">
+                    <a:solidFill>
+                      <a:srgbClr val="E8F4F4"/>
+                    </a:solidFill>
+                  </a:tcPr>
+                </a:tc>
+                <a:tc>
+                  <a:txBody>
+                    <a:bodyPr/>
+                    <a:lstStyle/>
+                    <a:p>
+                      <a:pPr algn="ctr"/>
                       <a:r>
                         <a:rPr sz="900" b="1">
                           <a:solidFill>
-                            <a:srgbClr val="000000"/>
-                          </a:solidFill>
-                          <a:latin typeface="Arial"/>
-                        </a:rPr>
-                        <a:t>Cold Chain</a:t>
-                      </a:r>
-                    </a:p>
-                  </a:txBody>
-                  <a:tcPr marL="54864" marR="54864" marT="18288" marB="18288" anchor="ctr">
-                    <a:solidFill>
-                      <a:srgbClr val="FFFFFF"/>
-                    </a:solidFill>
-                  </a:tcPr>
-                </a:tc>
-                <a:tc>
-                  <a:txBody>
-                    <a:bodyPr wrap="square"/>
-                    <a:lstStyle/>
-                    <a:p>
-                      <a:pPr algn="ctr"/>
-                      <a:r>
-                        <a:rPr sz="900" b="0">
-                          <a:solidFill>
-                            <a:srgbClr val="000000"/>
-                          </a:solidFill>
-                          <a:latin typeface="Arial"/>
-                        </a:rPr>
-                        <a:t>2</a:t>
-                      </a:r>
-                    </a:p>
-                  </a:txBody>
-                  <a:tcPr marL="54864" marR="54864" marT="18288" marB="18288" anchor="ctr">
-                    <a:solidFill>
-                      <a:srgbClr val="FFFFFF"/>
-                    </a:solidFill>
-                  </a:tcPr>
-                </a:tc>
-                <a:tc>
-                  <a:txBody>
-                    <a:bodyPr wrap="square"/>
-                    <a:lstStyle/>
-                    <a:p>
-                      <a:pPr algn="ctr"/>
-                      <a:r>
-                        <a:rPr sz="900" b="0">
-                          <a:solidFill>
-                            <a:srgbClr val="000000"/>
-                          </a:solidFill>
-                          <a:latin typeface="Arial"/>
-                        </a:rPr>
-                        <a:t>0</a:t>
-                      </a:r>
-                    </a:p>
-                  </a:txBody>
-                  <a:tcPr marL="54864" marR="54864" marT="18288" marB="18288" anchor="ctr">
-                    <a:solidFill>
-                      <a:srgbClr val="FFFFFF"/>
-                    </a:solidFill>
-                  </a:tcPr>
-                </a:tc>
-                <a:tc>
-                  <a:txBody>
-                    <a:bodyPr wrap="square"/>
-                    <a:lstStyle/>
-                    <a:p>
-                      <a:pPr algn="ctr"/>
-                      <a:r>
-                        <a:rPr sz="900" b="0">
-                          <a:solidFill>
-                            <a:srgbClr val="000000"/>
-                          </a:solidFill>
-                          <a:latin typeface="Arial"/>
-                        </a:rPr>
-                        <a:t>1</a:t>
-                      </a:r>
-                    </a:p>
-                  </a:txBody>
-                  <a:tcPr marL="54864" marR="54864" marT="18288" marB="18288" anchor="ctr">
-                    <a:solidFill>
-                      <a:srgbClr val="FFFFFF"/>
-                    </a:solidFill>
-                  </a:tcPr>
-                </a:tc>
-                <a:tc>
-                  <a:txBody>
-                    <a:bodyPr wrap="square"/>
-                    <a:lstStyle/>
-                    <a:p>
-                      <a:pPr algn="ctr"/>
-                      <a:r>
-                        <a:rPr sz="900" b="0">
-                          <a:solidFill>
-                            <a:srgbClr val="000000"/>
-                          </a:solidFill>
-                          <a:latin typeface="Arial"/>
-                        </a:rPr>
-                        <a:t>1</a:t>
-                      </a:r>
-                    </a:p>
-                  </a:txBody>
-                  <a:tcPr marL="54864" marR="54864" marT="18288" marB="18288" anchor="ctr">
-                    <a:solidFill>
-                      <a:srgbClr val="FFFFFF"/>
-                    </a:solidFill>
-                  </a:tcPr>
-                </a:tc>
-                <a:tc>
-                  <a:txBody>
-                    <a:bodyPr wrap="square"/>
-                    <a:lstStyle/>
-                    <a:p>
-                      <a:pPr algn="ctr"/>
-                      <a:r>
-                        <a:rPr sz="900" b="0">
-                          <a:solidFill>
-                            <a:srgbClr val="000000"/>
-                          </a:solidFill>
-                          <a:latin typeface="Arial"/>
-                        </a:rPr>
-                        <a:t>2</a:t>
-                      </a:r>
-                    </a:p>
-                  </a:txBody>
-                  <a:tcPr marL="54864" marR="54864" marT="18288" marB="18288" anchor="ctr">
-                    <a:solidFill>
-                      <a:srgbClr val="FFFFFF"/>
-                    </a:solidFill>
-                  </a:tcPr>
-                </a:tc>
-                <a:tc>
-                  <a:txBody>
-                    <a:bodyPr wrap="square"/>
-                    <a:lstStyle/>
-                    <a:p>
-                      <a:pPr algn="ctr"/>
-                      <a:r>
-                        <a:rPr sz="900" b="0">
-                          <a:solidFill>
-                            <a:srgbClr val="000000"/>
-                          </a:solidFill>
-                          <a:latin typeface="Arial"/>
-                        </a:rPr>
-                        <a:t>0</a:t>
-                      </a:r>
-                    </a:p>
-                  </a:txBody>
-                  <a:tcPr marL="54864" marR="54864" marT="18288" marB="18288" anchor="ctr">
-                    <a:solidFill>
-                      <a:srgbClr val="FFFFFF"/>
-                    </a:solidFill>
-                  </a:tcPr>
-                </a:tc>
-                <a:tc>
-                  <a:txBody>
-                    <a:bodyPr wrap="square"/>
-                    <a:lstStyle/>
-                    <a:p>
-                      <a:pPr algn="ctr"/>
-                      <a:r>
-                        <a:rPr sz="900" b="0">
-                          <a:solidFill>
-                            <a:srgbClr val="000000"/>
-                          </a:solidFill>
-                          <a:latin typeface="Arial"/>
-                        </a:rPr>
-                        <a:t>0</a:t>
-                      </a:r>
-                    </a:p>
-                  </a:txBody>
-                  <a:tcPr marL="54864" marR="54864" marT="18288" marB="18288" anchor="ctr">
-                    <a:solidFill>
-                      <a:srgbClr val="FFFFFF"/>
-                    </a:solidFill>
-                  </a:tcPr>
-                </a:tc>
-              </a:tr>
-              <a:tr h="274320">
-                <a:tc>
-                  <a:txBody>
-                    <a:bodyPr wrap="square"/>
-                    <a:lstStyle/>
-                    <a:p>
-                      <a:pPr algn="l"/>
-                      <a:r>
-                        <a:rPr sz="900" b="1">
-                          <a:solidFill>
-                            <a:srgbClr val="000000"/>
-                          </a:solidFill>
-                          <a:latin typeface="Arial"/>
-                        </a:rPr>
-                        <a:t>Special Operations</a:t>
-                      </a:r>
-                    </a:p>
-                  </a:txBody>
-                  <a:tcPr marL="54864" marR="54864" marT="18288" marB="18288" anchor="ctr">
-                    <a:solidFill>
-                      <a:srgbClr val="F2F2F2"/>
-                    </a:solidFill>
-                  </a:tcPr>
-                </a:tc>
-                <a:tc>
-                  <a:txBody>
-                    <a:bodyPr wrap="square"/>
-                    <a:lstStyle/>
-                    <a:p>
-                      <a:pPr algn="ctr"/>
-                      <a:r>
-                        <a:rPr sz="900" b="0">
-                          <a:solidFill>
-                            <a:srgbClr val="000000"/>
-                          </a:solidFill>
-                          <a:latin typeface="Arial"/>
-                        </a:rPr>
-                        <a:t> </a:t>
-                      </a:r>
-                    </a:p>
-                  </a:txBody>
-                  <a:tcPr marL="54864" marR="54864" marT="18288" marB="18288" anchor="ctr">
-                    <a:solidFill>
-                      <a:srgbClr val="F2F2F2"/>
-                    </a:solidFill>
-                  </a:tcPr>
-                </a:tc>
-                <a:tc>
-                  <a:txBody>
-                    <a:bodyPr wrap="square"/>
-                    <a:lstStyle/>
-                    <a:p>
-                      <a:pPr algn="ctr"/>
-                      <a:r>
-                        <a:rPr sz="900" b="0">
-                          <a:solidFill>
-                            <a:srgbClr val="000000"/>
-                          </a:solidFill>
-                          <a:latin typeface="Arial"/>
-                        </a:rPr>
-                        <a:t> </a:t>
-                      </a:r>
-                    </a:p>
-                  </a:txBody>
-                  <a:tcPr marL="54864" marR="54864" marT="18288" marB="18288" anchor="ctr">
-                    <a:solidFill>
-                      <a:srgbClr val="F2F2F2"/>
-                    </a:solidFill>
-                  </a:tcPr>
-                </a:tc>
-                <a:tc>
-                  <a:txBody>
-                    <a:bodyPr wrap="square"/>
-                    <a:lstStyle/>
-                    <a:p>
-                      <a:pPr algn="ctr"/>
-                      <a:r>
-                        <a:rPr sz="900" b="0">
-                          <a:solidFill>
-                            <a:srgbClr val="000000"/>
-                          </a:solidFill>
-                          <a:latin typeface="Arial"/>
-                        </a:rPr>
-                        <a:t> </a:t>
-                      </a:r>
-                    </a:p>
-                  </a:txBody>
-                  <a:tcPr marL="54864" marR="54864" marT="18288" marB="18288" anchor="ctr">
-                    <a:solidFill>
-                      <a:srgbClr val="F2F2F2"/>
-                    </a:solidFill>
-                  </a:tcPr>
-                </a:tc>
-                <a:tc>
-                  <a:txBody>
-                    <a:bodyPr wrap="square"/>
-                    <a:lstStyle/>
-                    <a:p>
-                      <a:pPr algn="ctr"/>
-                      <a:r>
-                        <a:rPr sz="900" b="0">
-                          <a:solidFill>
-                            <a:srgbClr val="000000"/>
-                          </a:solidFill>
-                          <a:latin typeface="Arial"/>
-                        </a:rPr>
-                        <a:t> </a:t>
-                      </a:r>
-                    </a:p>
-                  </a:txBody>
-                  <a:tcPr marL="54864" marR="54864" marT="18288" marB="18288" anchor="ctr">
-                    <a:solidFill>
-                      <a:srgbClr val="F2F2F2"/>
-                    </a:solidFill>
-                  </a:tcPr>
-                </a:tc>
-                <a:tc>
-                  <a:txBody>
-                    <a:bodyPr wrap="square"/>
-                    <a:lstStyle/>
-                    <a:p>
-                      <a:pPr algn="ctr"/>
-                      <a:r>
-                        <a:rPr sz="900" b="0">
-                          <a:solidFill>
-                            <a:srgbClr val="000000"/>
-                          </a:solidFill>
-                          <a:latin typeface="Arial"/>
-                        </a:rPr>
-                        <a:t> </a:t>
-                      </a:r>
-                    </a:p>
-                  </a:txBody>
-                  <a:tcPr marL="54864" marR="54864" marT="18288" marB="18288" anchor="ctr">
-                    <a:solidFill>
-                      <a:srgbClr val="F2F2F2"/>
-                    </a:solidFill>
-                  </a:tcPr>
-                </a:tc>
-                <a:tc>
-                  <a:txBody>
-                    <a:bodyPr wrap="square"/>
-                    <a:lstStyle/>
-                    <a:p>
-                      <a:pPr algn="ctr"/>
-                      <a:r>
-                        <a:rPr sz="900" b="0">
-                          <a:solidFill>
-                            <a:srgbClr val="000000"/>
-                          </a:solidFill>
-                          <a:latin typeface="Arial"/>
-                        </a:rPr>
-                        <a:t>1</a:t>
-                      </a:r>
-                    </a:p>
-                  </a:txBody>
-                  <a:tcPr marL="54864" marR="54864" marT="18288" marB="18288" anchor="ctr">
-                    <a:solidFill>
-                      <a:srgbClr val="F2F2F2"/>
-                    </a:solidFill>
-                  </a:tcPr>
-                </a:tc>
-                <a:tc>
-                  <a:txBody>
-                    <a:bodyPr wrap="square"/>
-                    <a:lstStyle/>
-                    <a:p>
-                      <a:pPr algn="ctr"/>
-                      <a:r>
-                        <a:rPr sz="900" b="1">
-                          <a:solidFill>
-                            <a:srgbClr val="6B2D6B"/>
-                          </a:solidFill>
-                          <a:latin typeface="Arial"/>
-                        </a:rPr>
-                        <a:t>1</a:t>
-                      </a:r>
-                    </a:p>
-                  </a:txBody>
-                  <a:tcPr marL="54864" marR="54864" marT="18288" marB="18288" anchor="ctr">
-                    <a:solidFill>
-                      <a:srgbClr val="F2F2F2"/>
-                    </a:solidFill>
-                  </a:tcPr>
-                </a:tc>
-              </a:tr>
-              <a:tr h="274320">
-                <a:tc>
-                  <a:txBody>
-                    <a:bodyPr wrap="square"/>
-                    <a:lstStyle/>
-                    <a:p>
-                      <a:pPr algn="l"/>
-                      <a:r>
-                        <a:rPr sz="900" b="1">
-                          <a:solidFill>
                             <a:srgbClr val="009796"/>
                           </a:solidFill>
                           <a:latin typeface="Arial"/>
                         </a:rPr>
-                        <a:t>Total COO</a:t>
+                        <a:t>15%</a:t>
                       </a:r>
                     </a:p>
                   </a:txBody>
@@ -8935,167 +9646,11 @@
                     </a:solidFill>
                   </a:tcPr>
                 </a:tc>
-                <a:tc>
-                  <a:txBody>
-                    <a:bodyPr wrap="square"/>
-                    <a:lstStyle/>
-                    <a:p>
-                      <a:pPr algn="ctr"/>
-                      <a:r>
-                        <a:rPr sz="900" b="1">
-                          <a:solidFill>
-                            <a:srgbClr val="009796"/>
-                          </a:solidFill>
-                          <a:latin typeface="Arial"/>
-                        </a:rPr>
-                        <a:t>6</a:t>
-                      </a:r>
-                    </a:p>
-                  </a:txBody>
-                  <a:tcPr marL="54864" marR="54864" marT="18288" marB="18288" anchor="ctr">
-                    <a:solidFill>
-                      <a:srgbClr val="E8F4F4"/>
-                    </a:solidFill>
-                  </a:tcPr>
-                </a:tc>
-                <a:tc>
-                  <a:txBody>
-                    <a:bodyPr wrap="square"/>
-                    <a:lstStyle/>
-                    <a:p>
-                      <a:pPr algn="ctr"/>
-                      <a:r>
-                        <a:rPr sz="900" b="1">
-                          <a:solidFill>
-                            <a:srgbClr val="009796"/>
-                          </a:solidFill>
-                          <a:latin typeface="Arial"/>
-                        </a:rPr>
-                        <a:t>148</a:t>
-                      </a:r>
-                    </a:p>
-                  </a:txBody>
-                  <a:tcPr marL="54864" marR="54864" marT="18288" marB="18288" anchor="ctr">
-                    <a:solidFill>
-                      <a:srgbClr val="E8F4F4"/>
-                    </a:solidFill>
-                  </a:tcPr>
-                </a:tc>
-                <a:tc>
-                  <a:txBody>
-                    <a:bodyPr wrap="square"/>
-                    <a:lstStyle/>
-                    <a:p>
-                      <a:pPr algn="ctr"/>
-                      <a:r>
-                        <a:rPr sz="900" b="1">
-                          <a:solidFill>
-                            <a:srgbClr val="009796"/>
-                          </a:solidFill>
-                          <a:latin typeface="Arial"/>
-                        </a:rPr>
-                        <a:t>29</a:t>
-                      </a:r>
-                    </a:p>
-                  </a:txBody>
-                  <a:tcPr marL="54864" marR="54864" marT="18288" marB="18288" anchor="ctr">
-                    <a:solidFill>
-                      <a:srgbClr val="E8F4F4"/>
-                    </a:solidFill>
-                  </a:tcPr>
-                </a:tc>
-                <a:tc>
-                  <a:txBody>
-                    <a:bodyPr wrap="square"/>
-                    <a:lstStyle/>
-                    <a:p>
-                      <a:pPr algn="ctr"/>
-                      <a:r>
-                        <a:rPr sz="900" b="1">
-                          <a:solidFill>
-                            <a:srgbClr val="009796"/>
-                          </a:solidFill>
-                          <a:latin typeface="Arial"/>
-                        </a:rPr>
-                        <a:t> </a:t>
-                      </a:r>
-                    </a:p>
-                  </a:txBody>
-                  <a:tcPr marL="54864" marR="54864" marT="18288" marB="18288" anchor="ctr">
-                    <a:solidFill>
-                      <a:srgbClr val="E8F4F4"/>
-                    </a:solidFill>
-                  </a:tcPr>
-                </a:tc>
-                <a:tc>
-                  <a:txBody>
-                    <a:bodyPr wrap="square"/>
-                    <a:lstStyle/>
-                    <a:p>
-                      <a:pPr algn="ctr"/>
-                      <a:r>
-                        <a:rPr sz="900" b="1">
-                          <a:solidFill>
-                            <a:srgbClr val="009796"/>
-                          </a:solidFill>
-                          <a:latin typeface="Arial"/>
-                        </a:rPr>
-                        <a:t>13</a:t>
-                      </a:r>
-                    </a:p>
-                  </a:txBody>
-                  <a:tcPr marL="54864" marR="54864" marT="18288" marB="18288" anchor="ctr">
-                    <a:solidFill>
-                      <a:srgbClr val="E8F4F4"/>
-                    </a:solidFill>
-                  </a:tcPr>
-                </a:tc>
-                <a:tc>
-                  <a:txBody>
-                    <a:bodyPr wrap="square"/>
-                    <a:lstStyle/>
-                    <a:p>
-                      <a:pPr algn="ctr"/>
-                      <a:r>
-                        <a:rPr sz="900" b="1">
-                          <a:solidFill>
-                            <a:srgbClr val="009796"/>
-                          </a:solidFill>
-                          <a:latin typeface="Arial"/>
-                        </a:rPr>
-                        <a:t>25</a:t>
-                      </a:r>
-                    </a:p>
-                  </a:txBody>
-                  <a:tcPr marL="54864" marR="54864" marT="18288" marB="18288" anchor="ctr">
-                    <a:solidFill>
-                      <a:srgbClr val="E8F4F4"/>
-                    </a:solidFill>
-                  </a:tcPr>
-                </a:tc>
-                <a:tc>
-                  <a:txBody>
-                    <a:bodyPr wrap="square"/>
-                    <a:lstStyle/>
-                    <a:p>
-                      <a:pPr algn="ctr"/>
-                      <a:r>
-                        <a:rPr sz="900" b="1">
-                          <a:solidFill>
-                            <a:srgbClr val="009796"/>
-                          </a:solidFill>
-                          <a:latin typeface="Arial"/>
-                        </a:rPr>
-                        <a:t>19</a:t>
-                      </a:r>
-                    </a:p>
-                  </a:txBody>
-                  <a:tcPr marL="54864" marR="54864" marT="18288" marB="18288" anchor="ctr">
-                    <a:solidFill>
-                      <a:srgbClr val="E8F4F4"/>
-                    </a:solidFill>
-                  </a:tcPr>
-                </a:tc>
+                <a:extLst>
+                  <a:ext uri="{0D108BD9-81ED-4DB2-BD59-A6C34878D82A}">
+                    <a16:rowId xmlns:a16="http://schemas.microsoft.com/office/drawing/2014/main" val="10010"/>
+                  </a:ext>
+                </a:extLst>
               </a:tr>
             </a:tbl>
           </a:graphicData>
@@ -9109,8 +9664,8 @@
         </p:nvSpPr>
         <p:spPr>
           <a:xfrm>
-            <a:off x="6227064" y="4572000"/>
-            <a:ext cx="5623560" cy="292608"/>
+            <a:off x="6227064" y="4681728"/>
+            <a:ext cx="5623560" cy="182880"/>
           </a:xfrm>
           <a:prstGeom prst="rect">
             <a:avLst/>
@@ -9118,7 +9673,7 @@
           <a:noFill/>
         </p:spPr>
         <p:txBody>
-          <a:bodyPr wrap="square" lIns="18288" rIns="18288" tIns="0" bIns="0" anchor="t">
+          <a:bodyPr wrap="square" lIns="18288" tIns="0" rIns="18288" bIns="0" anchor="t">
             <a:spAutoFit/>
           </a:bodyPr>
           <a:lstStyle/>
@@ -9135,7 +9690,7 @@
                 </a:solidFill>
                 <a:latin typeface="Arial"/>
               </a:rPr>
-              <a:t>Camadas de gestão = níveis com gestor, da head até o último team leader. Special Operations não tem head no organograma.</a:t>
+              <a:t>Air Product e Ocean Product saem do COO na proposta do draft; Special Operations não tem head.</a:t>
             </a:r>
           </a:p>
         </p:txBody>
@@ -9148,8 +9703,8 @@
         </p:nvSpPr>
         <p:spPr>
           <a:xfrm>
-            <a:off x="6227064" y="4919472"/>
-            <a:ext cx="5623560" cy="1280160"/>
+            <a:off x="6227064" y="5010912"/>
+            <a:ext cx="5623560" cy="1207008"/>
           </a:xfrm>
           <a:prstGeom prst="roundRect">
             <a:avLst>
@@ -9167,97 +9722,190 @@
           <a:effectLst/>
         </p:spPr>
         <p:txBody>
-          <a:bodyPr rtlCol="0" anchor="ctr" wrap="square" lIns="137160" rIns="137160" tIns="73152" bIns="73152"/>
+          <a:bodyPr wrap="square" lIns="137160" tIns="73152" rIns="137160" bIns="73152" rtlCol="0" anchor="ctr"/>
           <a:lstStyle/>
           <a:p>
-            <a:pPr algn="l" marL="171450" indent="-171450">
+            <a:pPr marL="171450" indent="-171450">
               <a:spcAft>
                 <a:spcPts val="400"/>
               </a:spcAft>
               <a:buClr>
                 <a:srgbClr val="009796"/>
               </a:buClr>
-              <a:buFont typeface="Wingdings"/>
-              <a:buChar char="§"/>
+              <a:buFont typeface="Arial"/>
+              <a:buChar char="•"/>
             </a:pPr>
             <a:r>
-              <a:rPr sz="950" b="1">
+              <a:rPr lang="en-US" sz="900" b="1">
                 <a:solidFill>
                   <a:srgbClr val="262626"/>
                 </a:solidFill>
                 <a:latin typeface="Arial"/>
               </a:rPr>
-              <a:t>Air Operations: </a:t>
+              <a:t>Concentração: </a:t>
             </a:r>
             <a:r>
-              <a:rPr sz="950" b="0">
+              <a:rPr lang="en-US" sz="900">
                 <a:solidFill>
                   <a:srgbClr val="262626"/>
                 </a:solidFill>
                 <a:latin typeface="Arial"/>
               </a:rPr>
-              <a:t>TL que lidera TL; 4 team leaders em L7 respondem a team leaders em L6, e 3 gestores lideram até 2 pessoas</a:t>
+              <a:t>Daniela responde por 47 das 82 pessoas da Air Operations, mais que a metade da área</a:t>
             </a:r>
+            <a:endParaRPr lang="en-US">
+              <a:solidFill>
+                <a:srgbClr val="000000"/>
+              </a:solidFill>
+              <a:latin typeface="Arial"/>
+            </a:endParaRPr>
           </a:p>
           <a:p>
-            <a:pPr algn="l" marL="171450" indent="-171450">
+            <a:pPr marL="171450" indent="-171450">
               <a:spcAft>
                 <a:spcPts val="400"/>
               </a:spcAft>
               <a:buClr>
                 <a:srgbClr val="009796"/>
               </a:buClr>
-              <a:buFont typeface="Wingdings"/>
-              <a:buChar char="§"/>
+              <a:buFont typeface="Arial"/>
+              <a:buChar char="•"/>
             </a:pPr>
             <a:r>
-              <a:rPr sz="950" b="1">
+              <a:rPr lang="en-US" sz="900" b="1">
                 <a:solidFill>
                   <a:srgbClr val="262626"/>
                 </a:solidFill>
                 <a:latin typeface="Arial"/>
               </a:rPr>
-              <a:t>Blocos de Operações: </a:t>
+              <a:t>Liderança a contratar: </a:t>
             </a:r>
             <a:r>
-              <a:rPr sz="950" b="0">
+              <a:rPr lang="en-US" sz="900">
                 <a:solidFill>
                   <a:srgbClr val="262626"/>
                 </a:solidFill>
                 <a:latin typeface="Arial"/>
               </a:rPr>
-              <a:t>as 12 vagas paradas estão nos EUA (6) e na Europa (6), incluindo as 3 de team leader de Operações America</a:t>
+              <a:t>as 3 vagas de TL de Operações America estão sem processo</a:t>
             </a:r>
+            <a:endParaRPr lang="en-US"/>
           </a:p>
           <a:p>
-            <a:pPr algn="l" marL="171450" indent="-171450">
+            <a:pPr marL="171450" indent="-171450">
               <a:spcAft>
                 <a:spcPts val="400"/>
               </a:spcAft>
               <a:buClr>
                 <a:srgbClr val="009796"/>
               </a:buClr>
-              <a:buFont typeface="Wingdings"/>
-              <a:buChar char="§"/>
+              <a:buFont typeface="Arial"/>
+              <a:buChar char="•"/>
             </a:pPr>
             <a:r>
-              <a:rPr sz="950" b="1">
+              <a:rPr lang="en-US" sz="900" b="1">
                 <a:solidFill>
                   <a:srgbClr val="262626"/>
                 </a:solidFill>
                 <a:latin typeface="Arial"/>
               </a:rPr>
-              <a:t>Inland Freight Europa </a:t>
+              <a:t>Europa: </a:t>
             </a:r>
             <a:r>
-              <a:rPr sz="950" b="0">
+              <a:rPr lang="en-US" sz="900">
                 <a:solidFill>
                   <a:srgbClr val="262626"/>
                 </a:solidFill>
                 <a:latin typeface="Arial"/>
               </a:rPr>
-              <a:t>tem 4 vagas e nenhuma é de liderança</a:t>
+              <a:t>Pamela lidera 21 pessoas a partir de Portugal, </a:t>
             </a:r>
+            <a:r>
+              <a:rPr lang="en-US" sz="900" b="0">
+                <a:solidFill>
+                  <a:srgbClr val="262626"/>
+                </a:solidFill>
+                <a:latin typeface="Arial"/>
+              </a:rPr>
+              <a:t>e </a:t>
+            </a:r>
+            <a:r>
+              <a:rPr lang="en-US" sz="900">
+                <a:solidFill>
+                  <a:srgbClr val="262626"/>
+                </a:solidFill>
+                <a:latin typeface="Arial"/>
+              </a:rPr>
+              <a:t>Inland Freight Europa segue sem TL, com 4 vagas a abrir</a:t>
+            </a:r>
+            <a:endParaRPr lang="en-US"/>
+          </a:p>
+          <a:p>
+            <a:pPr marL="171450" indent="-171450">
+              <a:spcAft>
+                <a:spcPts val="400"/>
+              </a:spcAft>
+              <a:buClr>
+                <a:srgbClr val="009796"/>
+              </a:buClr>
+              <a:buFont typeface="Arial"/>
+              <a:buChar char="•"/>
+            </a:pPr>
+            <a:r>
+              <a:rPr lang="en-US" sz="900" b="1">
+                <a:solidFill>
+                  <a:srgbClr val="262626"/>
+                </a:solidFill>
+                <a:latin typeface="Arial"/>
+              </a:rPr>
+              <a:t>Air Product: </a:t>
+            </a:r>
+            <a:r>
+              <a:rPr lang="en-US" sz="900">
+                <a:solidFill>
+                  <a:srgbClr val="262626"/>
+                </a:solidFill>
+                <a:latin typeface="Arial"/>
+              </a:rPr>
+              <a:t>2 diretos sustentam 28 pessoas e </a:t>
+            </a:r>
+            <a:r>
+              <a:rPr lang="en-US" sz="900" b="0">
+                <a:solidFill>
+                  <a:srgbClr val="262626"/>
+                </a:solidFill>
+                <a:latin typeface="Arial"/>
+              </a:rPr>
+              <a:t>as </a:t>
+            </a:r>
+            <a:r>
+              <a:rPr lang="en-US" sz="900">
+                <a:solidFill>
+                  <a:srgbClr val="262626"/>
+                </a:solidFill>
+                <a:latin typeface="Arial"/>
+              </a:rPr>
+              <a:t>7 </a:t>
+            </a:r>
+            <a:r>
+              <a:rPr lang="en-US" sz="900" b="0">
+                <a:solidFill>
+                  <a:srgbClr val="262626"/>
+                </a:solidFill>
+                <a:latin typeface="Arial"/>
+              </a:rPr>
+              <a:t>vagas estão </a:t>
+            </a:r>
+            <a:r>
+              <a:rPr lang="en-US" sz="900">
+                <a:solidFill>
+                  <a:srgbClr val="262626"/>
+                </a:solidFill>
+                <a:latin typeface="Arial"/>
+              </a:rPr>
+              <a:t>sem processo</a:t>
+            </a:r>
+            <a:endParaRPr lang="en-US"/>
           </a:p>
         </p:txBody>
       </p:sp>
@@ -9342,12 +9990,12 @@
           <a:graphicData uri="http://schemas.openxmlformats.org/presentationml/2006/ole">
             <mc:AlternateContent xmlns:mc="http://schemas.openxmlformats.org/markup-compatibility/2006">
               <mc:Choice xmlns:v="urn:schemas-microsoft-com:vml" Requires="v">
-                <p:oleObj name="think-cell Slide" r:id="rId9" imgW="421" imgH="423" progId="TCLayout.ActiveDocument.1">
+                <p:oleObj name="think-cell Slide" r:id="rId8" imgW="421" imgH="423" progId="TCLayout.ActiveDocument.1">
                   <p:embed/>
                 </p:oleObj>
               </mc:Choice>
               <mc:Fallback>
-                <p:oleObj name="think-cell Slide" r:id="rId9" imgW="421" imgH="423" progId="TCLayout.ActiveDocument.1">
+                <p:oleObj name="think-cell Slide" r:id="rId8" imgW="421" imgH="423" progId="TCLayout.ActiveDocument.1">
                   <p:embed/>
                   <p:pic>
                     <p:nvPicPr>
@@ -9362,7 +10010,7 @@
                       <p:nvPr/>
                     </p:nvPicPr>
                     <p:blipFill>
-                      <a:blip r:embed="rId10"/>
+                      <a:blip r:embed="rId9"/>
                       <a:stretch>
                         <a:fillRect/>
                       </a:stretch>
@@ -9402,7 +10050,7 @@
           </p:nvPr>
         </p:nvPicPr>
         <p:blipFill>
-          <a:blip r:embed="rId11"/>
+          <a:blip r:embed="rId10"/>
           <a:stretch>
             <a:fillRect/>
           </a:stretch>
@@ -9641,12 +10289,12 @@
           </p:cNvPicPr>
           <p:nvPr>
             <p:custDataLst>
-              <p:tags r:id="rId6"/>
+              <p:tags r:id="rId5"/>
             </p:custDataLst>
           </p:nvPr>
         </p:nvPicPr>
         <p:blipFill>
-          <a:blip r:embed="rId12"/>
+          <a:blip r:embed="rId11"/>
           <a:srcRect b="428"/>
           <a:stretch>
             <a:fillRect/>
@@ -9671,7 +10319,7 @@
           <p:nvPr/>
         </p:nvPicPr>
         <p:blipFill>
-          <a:blip r:embed="rId13"/>
+          <a:blip r:embed="rId12"/>
           <a:stretch>
             <a:fillRect/>
           </a:stretch>
@@ -9743,13 +10391,13 @@
 <file path=ppt/tags/tag14.xml><?xml version="1.0" encoding="utf-8"?>
 <p:tagLst xmlns:a="http://schemas.openxmlformats.org/drawingml/2006/main" xmlns:r="http://schemas.openxmlformats.org/officeDocument/2006/relationships" xmlns:p="http://schemas.openxmlformats.org/presentationml/2006/main">
   <p:tag name="ALREADY-CHECKED" val="TRUE"/>
+  <p:tag name="THINKCELLSHAPEDONOTDELETE" val="thinkcellActiveDocDoNotDelete"/>
 </p:tagLst>
 </file>
 
 <file path=ppt/tags/tag15.xml><?xml version="1.0" encoding="utf-8"?>
 <p:tagLst xmlns:a="http://schemas.openxmlformats.org/drawingml/2006/main" xmlns:r="http://schemas.openxmlformats.org/officeDocument/2006/relationships" xmlns:p="http://schemas.openxmlformats.org/presentationml/2006/main">
   <p:tag name="ALREADY-CHECKED" val="TRUE"/>
-  <p:tag name="THINKCELLSHAPEDONOTDELETE" val="thinkcellActiveDocDoNotDelete"/>
 </p:tagLst>
 </file>
 
@@ -9771,21 +10419,9 @@
 </p:tagLst>
 </file>
 
-<file path=ppt/tags/tag19.xml><?xml version="1.0" encoding="utf-8"?>
-<p:tagLst xmlns:a="http://schemas.openxmlformats.org/drawingml/2006/main" xmlns:r="http://schemas.openxmlformats.org/officeDocument/2006/relationships" xmlns:p="http://schemas.openxmlformats.org/presentationml/2006/main">
-  <p:tag name="ALREADY-CHECKED" val="TRUE"/>
-</p:tagLst>
-</file>
-
 <file path=ppt/tags/tag2.xml><?xml version="1.0" encoding="utf-8"?>
 <p:tagLst xmlns:a="http://schemas.openxmlformats.org/drawingml/2006/main" xmlns:r="http://schemas.openxmlformats.org/officeDocument/2006/relationships" xmlns:p="http://schemas.openxmlformats.org/presentationml/2006/main">
   <p:tag name="THINKCELLSHAPEDONOTDELETE" val="thinkcellActiveDocDoNotDelete"/>
-</p:tagLst>
-</file>
-
-<file path=ppt/tags/tag20.xml><?xml version="1.0" encoding="utf-8"?>
-<p:tagLst xmlns:a="http://schemas.openxmlformats.org/drawingml/2006/main" xmlns:r="http://schemas.openxmlformats.org/officeDocument/2006/relationships" xmlns:p="http://schemas.openxmlformats.org/presentationml/2006/main">
-  <p:tag name="ALREADY-CHECKED" val="TRUE"/>
 </p:tagLst>
 </file>
 
@@ -10941,15 +11577,6 @@
 </file>
 
 <file path=customXml/item1.xml><?xml version="1.0" encoding="utf-8"?>
-<?mso-contentType ?>
-<FormTemplates xmlns="http://schemas.microsoft.com/sharepoint/v3/contenttype/forms">
-  <Display>DocumentLibraryForm</Display>
-  <Edit>DocumentLibraryForm</Edit>
-  <New>DocumentLibraryForm</New>
-</FormTemplates>
-</file>
-
-<file path=customXml/item2.xml><?xml version="1.0" encoding="utf-8"?>
 <p:properties xmlns:p="http://schemas.microsoft.com/office/2006/metadata/properties" xmlns:xsi="http://www.w3.org/2001/XMLSchema-instance" xmlns:pc="http://schemas.microsoft.com/office/infopath/2007/PartnerControls">
   <documentManagement>
     <_activity xmlns="0efc0232-82fe-4533-96a1-02510e00692b" xsi:nil="true"/>
@@ -10957,7 +11584,7 @@
 </p:properties>
 </file>
 
-<file path=customXml/item3.xml><?xml version="1.0" encoding="utf-8"?>
+<file path=customXml/item2.xml><?xml version="1.0" encoding="utf-8"?>
 <ct:contentTypeSchema xmlns:ct="http://schemas.microsoft.com/office/2006/metadata/contentType" xmlns:ma="http://schemas.microsoft.com/office/2006/metadata/properties/metaAttributes" ct:_="" ma:_="" ma:contentTypeName="Document" ma:contentTypeID="0x010100E17CCA89B0758541BF11A4EAA1F2ACAB" ma:contentTypeVersion="12" ma:contentTypeDescription="Create a new document." ma:contentTypeScope="" ma:versionID="74fdf47dae72a1d9d977c2df6cb144fc">
   <xsd:schema xmlns:xsd="http://www.w3.org/2001/XMLSchema" xmlns:xs="http://www.w3.org/2001/XMLSchema" xmlns:p="http://schemas.microsoft.com/office/2006/metadata/properties" xmlns:ns3="0efc0232-82fe-4533-96a1-02510e00692b" targetNamespace="http://schemas.microsoft.com/office/2006/metadata/properties" ma:root="true" ma:fieldsID="48afc7e2c1b0ec344d0cc8d0ef08b3c4" ns3:_="">
     <xsd:import namespace="0efc0232-82fe-4533-96a1-02510e00692b"/>
@@ -11151,15 +11778,16 @@
 </ct:contentTypeSchema>
 </file>
 
-<file path=customXml/itemProps1.xml><?xml version="1.0" encoding="utf-8"?>
-<ds:datastoreItem xmlns:ds="http://schemas.openxmlformats.org/officeDocument/2006/customXml" ds:itemID="{59D90352-7D0A-4C9E-B1C6-06644330B135}">
-  <ds:schemaRefs>
-    <ds:schemaRef ds:uri="http://schemas.microsoft.com/sharepoint/v3/contenttype/forms"/>
-  </ds:schemaRefs>
-</ds:datastoreItem>
+<file path=customXml/item3.xml><?xml version="1.0" encoding="utf-8"?>
+<?mso-contentType ?>
+<FormTemplates xmlns="http://schemas.microsoft.com/sharepoint/v3/contenttype/forms">
+  <Display>DocumentLibraryForm</Display>
+  <Edit>DocumentLibraryForm</Edit>
+  <New>DocumentLibraryForm</New>
+</FormTemplates>
 </file>
 
-<file path=customXml/itemProps2.xml><?xml version="1.0" encoding="utf-8"?>
+<file path=customXml/itemProps1.xml><?xml version="1.0" encoding="utf-8"?>
 <ds:datastoreItem xmlns:ds="http://schemas.openxmlformats.org/officeDocument/2006/customXml" ds:itemID="{220DB7E4-6410-4C32-99FA-1E1DB469B3CD}">
   <ds:schemaRefs>
     <ds:schemaRef ds:uri="0efc0232-82fe-4533-96a1-02510e00692b"/>
@@ -11175,7 +11803,7 @@
 </ds:datastoreItem>
 </file>
 
-<file path=customXml/itemProps3.xml><?xml version="1.0" encoding="utf-8"?>
+<file path=customXml/itemProps2.xml><?xml version="1.0" encoding="utf-8"?>
 <ds:datastoreItem xmlns:ds="http://schemas.openxmlformats.org/officeDocument/2006/customXml" ds:itemID="{53764D14-9DFA-4960-9EC4-E83D0D9FBD76}">
   <ds:schemaRefs>
     <ds:schemaRef ds:uri="0efc0232-82fe-4533-96a1-02510e00692b"/>
@@ -11192,4 +11820,12 @@
     <ds:schemaRef ds:uri="http://www.w3.org/2001/XMLSchema"/>
   </ds:schemaRefs>
 </ds:datastoreItem>
+</file>
+
+<file path=customXml/itemProps3.xml><?xml version="1.0" encoding="utf-8"?>
+<ds:datastoreItem xmlns:ds="http://schemas.openxmlformats.org/officeDocument/2006/customXml" ds:itemID="{59D90352-7D0A-4C9E-B1C6-06644330B135}">
+  <ds:schemaRefs>
+    <ds:schemaRef ds:uri="http://schemas.microsoft.com/sharepoint/v3/contenttype/forms"/>
+  </ds:schemaRefs>
+</ds:datastoreItem>
 </file>
--- a/20261023 - ATY - Estrutura x Vagas.pptx
+++ b/20261023 - ATY - Estrutura x Vagas.pptx
@@ -5,21 +5,21 @@
     <p:sldMasterId id="2147483787" r:id="rId4"/>
   </p:sldMasterIdLst>
   <p:notesMasterIdLst>
-    <p:notesMasterId r:id="rId33"/>
+    <p:notesMasterId r:id="rId9"/>
   </p:notesMasterIdLst>
   <p:handoutMasterIdLst>
-    <p:handoutMasterId r:id="rId34"/>
+    <p:handoutMasterId r:id="rId10"/>
   </p:handoutMasterIdLst>
   <p:sldIdLst>
     <p:sldId id="2147475257" r:id="rId5"/>
-    <p:sldId id="2147475470" r:id="rId16"/>
-    <p:sldId id="2147475471" r:id="rId17"/>
-    <p:sldId id="2147475469" r:id="rId32"/>
+    <p:sldId id="2147475470" r:id="rId6"/>
+    <p:sldId id="2147475471" r:id="rId7"/>
+    <p:sldId id="2147475469" r:id="rId8"/>
   </p:sldIdLst>
   <p:sldSz cx="12192000" cy="6858000"/>
   <p:notesSz cx="6797675" cy="9928225"/>
   <p:custDataLst>
-    <p:tags r:id="rId35"/>
+    <p:tags r:id="rId11"/>
   </p:custDataLst>
   <p:defaultTextStyle>
     <a:defPPr>
@@ -152,57 +152,27 @@
         <p14:section name="Seção Padrão" id="{956BDAC4-B98A-4B57-A8DB-23B54F0D1082}">
           <p14:sldIdLst>
             <p14:sldId id="2147475257"/>
-            <p14:sldId id="2147475518"/>
+            <p14:sldId id="2147475470"/>
+            <p14:sldId id="2147475471"/>
           </p14:sldIdLst>
         </p14:section>
         <p14:section name="Metodologia" id="{3D678D25-2541-45D6-B6BB-4B56A803BE73}">
-          <p14:sldIdLst>
-            <p14:sldId id="2147475519"/>
-            <p14:sldId id="2147475472"/>
-            <p14:sldId id="2147475616"/>
-          </p14:sldIdLst>
+          <p14:sldIdLst/>
         </p14:section>
         <p14:section name="Delivery" id="{8C5AC9BE-490F-4AC9-BA7A-82739033ABD7}">
-          <p14:sldIdLst>
-            <p14:sldId id="2147475633"/>
-            <p14:sldId id="2147475580"/>
-            <p14:sldId id="2147475588"/>
-            <p14:sldId id="2147475602"/>
-            <p14:sldId id="2147475600"/>
-            <p14:sldId id="2147475620"/>
-            <p14:sldId id="2147475624"/>
-            <p14:sldId id="2147475592"/>
-            <p14:sldId id="2147475593"/>
-            <p14:sldId id="2147475594"/>
-            <p14:sldId id="2147475597"/>
-            <p14:sldId id="2147475595"/>
-          </p14:sldIdLst>
+          <p14:sldIdLst/>
         </p14:section>
         <p14:section name="Desconsolidação" id="{44D6E2CF-3F8E-4B51-8792-9A2049612CC8}">
-          <p14:sldIdLst>
-            <p14:sldId id="2147475520"/>
-            <p14:sldId id="2147475626"/>
-          </p14:sldIdLst>
+          <p14:sldIdLst/>
         </p14:section>
         <p14:section name="Desconsolidação | Relevância" id="{F0F01AE5-3637-420D-B6DE-1415257202FA}">
-          <p14:sldIdLst>
-            <p14:sldId id="2147475627"/>
-          </p14:sldIdLst>
+          <p14:sldIdLst/>
         </p14:section>
         <p14:section name="Combinado" id="{E41362AF-1D6A-4543-8884-D1549D6501DA}">
-          <p14:sldIdLst>
-            <p14:sldId id="2147475634"/>
-            <p14:sldId id="2147475636"/>
-            <p14:sldId id="2147475635"/>
-            <p14:sldId id="2147475637"/>
-          </p14:sldIdLst>
+          <p14:sldIdLst/>
         </p14:section>
         <p14:section name="3 charges" id="{E78628E5-7BFA-4604-9148-1E2DDA4D7B83}">
-          <p14:sldIdLst>
-            <p14:sldId id="2147475638"/>
-            <p14:sldId id="2147475639"/>
-            <p14:sldId id="2147475641"/>
-          </p14:sldIdLst>
+          <p14:sldIdLst/>
         </p14:section>
         <p14:section name="Fim" id="{C1DC953D-9B49-46ED-98E8-011CE27E333B}">
           <p14:sldIdLst>
@@ -210,9 +180,6 @@
           </p14:sldIdLst>
         </p14:section>
       </p14:sectionLst>
-    </p:ext>
-    <p:ext uri="{EFAFB233-063F-42B5-8137-9DF3F51BA10A}">
-      <p15:sldGuideLst xmlns:p15="http://schemas.microsoft.com/office/powerpoint/2012/main"/>
     </p:ext>
   </p:extLst>
 </p:presentation>
@@ -227,20 +194,25 @@
 <file path=ppt/revisionInfo.xml><?xml version="1.0" encoding="utf-8"?>
 <p1510:revInfo xmlns:a="http://schemas.openxmlformats.org/drawingml/2006/main" xmlns:r="http://schemas.openxmlformats.org/officeDocument/2006/relationships" xmlns:p1510="http://schemas.microsoft.com/office/powerpoint/2015/10/main">
   <p1510:revLst>
-    <p1510:client id="{6DAF7378-E459-43EE-BB24-DF86A692652A}" v="31" dt="2026-10-19T16:33:28.710"/>
+    <p1510:client id="{D72EF2EF-A580-BB62-1BAE-F06225036B72}" v="17" dt="2026-10-23T21:35:42.480"/>
   </p1510:revLst>
 </p1510:revInfo>
 </file>
 
 <file path=ppt/charts/chart1.xml><?xml version="1.0" encoding="utf-8"?>
-<c:chartSpace xmlns:c="http://schemas.openxmlformats.org/drawingml/2006/chart" xmlns:a="http://schemas.openxmlformats.org/drawingml/2006/main" xmlns:r="http://schemas.openxmlformats.org/officeDocument/2006/relationships">
+<c:chartSpace xmlns:c="http://schemas.openxmlformats.org/drawingml/2006/chart" xmlns:a="http://schemas.openxmlformats.org/drawingml/2006/main" xmlns:r="http://schemas.openxmlformats.org/officeDocument/2006/relationships" xmlns:c16r2="http://schemas.microsoft.com/office/drawing/2015/06/chart">
   <c:date1904 val="0"/>
+  <c:lang val="pt-BR"/>
+  <c:roundedCorners val="1"/>
+  <c:style val="2"/>
   <c:chart>
     <c:autoTitleDeleted val="1"/>
     <c:plotArea>
+      <c:layout/>
       <c:barChart>
         <c:barDir val="bar"/>
         <c:grouping val="stacked"/>
+        <c:varyColors val="1"/>
         <c:ser>
           <c:idx val="0"/>
           <c:order val="0"/>
@@ -260,11 +232,47 @@
               <a:srgbClr val="6B2D6B"/>
             </a:solidFill>
           </c:spPr>
+          <c:invertIfNegative val="1"/>
+          <c:dLbls>
+            <c:spPr>
+              <a:noFill/>
+              <a:ln>
+                <a:noFill/>
+              </a:ln>
+              <a:effectLst/>
+            </c:spPr>
+            <c:txPr>
+              <a:bodyPr/>
+              <a:lstStyle/>
+              <a:p>
+                <a:pPr>
+                  <a:defRPr sz="1000">
+                    <a:solidFill>
+                      <a:srgbClr val="FFFFFF"/>
+                    </a:solidFill>
+                  </a:defRPr>
+                </a:pPr>
+                <a:endParaRPr lang="en-US"/>
+              </a:p>
+            </c:txPr>
+            <c:showLegendKey val="0"/>
+            <c:showVal val="1"/>
+            <c:showCatName val="0"/>
+            <c:showSerName val="0"/>
+            <c:showPercent val="0"/>
+            <c:showBubbleSize val="0"/>
+            <c:showLeaderLines val="0"/>
+            <c:extLst>
+              <c:ext xmlns:c15="http://schemas.microsoft.com/office/drawing/2012/chart" uri="{CE6537A1-D6FC-4f65-9D91-7224C49458BB}">
+                <c15:showLeaderLines val="0"/>
+              </c:ext>
+            </c:extLst>
+          </c:dLbls>
           <c:cat>
             <c:strRef>
-              <c:f>Sheet1!$A$2:$A$9</c:f>
+              <c:f>Sheet1!$A$2:$A$7</c:f>
               <c:strCache>
-                <c:ptCount val="8"/>
+                <c:ptCount val="6"/>
                 <c:pt idx="0">
                   <c:v>COO</c:v>
                 </c:pt>
@@ -275,18 +283,12 @@
                   <c:v>CFSO</c:v>
                 </c:pt>
                 <c:pt idx="3">
-                  <c:v>Air Product</c:v>
+                  <c:v>Talent</c:v>
                 </c:pt>
                 <c:pt idx="4">
-                  <c:v>Talent</c:v>
+                  <c:v>CCO</c:v>
                 </c:pt>
                 <c:pt idx="5">
-                  <c:v>CCO</c:v>
-                </c:pt>
-                <c:pt idx="6">
-                  <c:v>Ocean Prod.</c:v>
-                </c:pt>
-                <c:pt idx="7">
                   <c:v>Services</c:v>
                 </c:pt>
               </c:strCache>
@@ -294,12 +296,12 @@
           </c:cat>
           <c:val>
             <c:numRef>
-              <c:f>Sheet1!$B$2:$B$9</c:f>
+              <c:f>Sheet1!$B$2:$B$7</c:f>
               <c:numCache>
                 <c:formatCode>General</c:formatCode>
-                <c:ptCount val="8"/>
+                <c:ptCount val="6"/>
                 <c:pt idx="0">
-                  <c:v>6</c:v>
+                  <c:v>8</c:v>
                 </c:pt>
                 <c:pt idx="1">
                   <c:v>2</c:v>
@@ -308,23 +310,31 @@
                   <c:v>7</c:v>
                 </c:pt>
                 <c:pt idx="3">
-                  <c:v>2</c:v>
+                  <c:v>6</c:v>
                 </c:pt>
                 <c:pt idx="4">
-                  <c:v>6</c:v>
+                  <c:v>5</c:v>
                 </c:pt>
                 <c:pt idx="5">
-                  <c:v>5</c:v>
-                </c:pt>
-                <c:pt idx="6">
-                  <c:v>4</c:v>
-                </c:pt>
-                <c:pt idx="7">
                   <c:v>5</c:v>
                 </c:pt>
               </c:numCache>
             </c:numRef>
           </c:val>
+          <c:extLst>
+            <c:ext xmlns:c14="http://schemas.microsoft.com/office/drawing/2007/8/2/chart" uri="{6F2FDCE9-48DA-4B69-8628-5D25D57E5C99}">
+              <c14:invertSolidFillFmt>
+                <c14:spPr xmlns:c14="http://schemas.microsoft.com/office/drawing/2007/8/2/chart">
+                  <a:solidFill>
+                    <a:srgbClr val="FFFFFF"/>
+                  </a:solidFill>
+                </c14:spPr>
+              </c14:invertSolidFillFmt>
+            </c:ext>
+            <c:ext xmlns:c16="http://schemas.microsoft.com/office/drawing/2014/chart" uri="{C3380CC4-5D6E-409C-BE32-E72D297353CC}">
+              <c16:uniqueId val="{00000000-715D-444F-A5E7-9FC24C82F348}"/>
+            </c:ext>
+          </c:extLst>
         </c:ser>
         <c:ser>
           <c:idx val="1"/>
@@ -345,11 +355,47 @@
               <a:srgbClr val="66C1C0"/>
             </a:solidFill>
           </c:spPr>
+          <c:invertIfNegative val="1"/>
+          <c:dLbls>
+            <c:spPr>
+              <a:noFill/>
+              <a:ln>
+                <a:noFill/>
+              </a:ln>
+              <a:effectLst/>
+            </c:spPr>
+            <c:txPr>
+              <a:bodyPr/>
+              <a:lstStyle/>
+              <a:p>
+                <a:pPr>
+                  <a:defRPr sz="1000">
+                    <a:solidFill>
+                      <a:srgbClr val="FFFFFF"/>
+                    </a:solidFill>
+                  </a:defRPr>
+                </a:pPr>
+                <a:endParaRPr lang="en-US"/>
+              </a:p>
+            </c:txPr>
+            <c:showLegendKey val="0"/>
+            <c:showVal val="1"/>
+            <c:showCatName val="0"/>
+            <c:showSerName val="0"/>
+            <c:showPercent val="0"/>
+            <c:showBubbleSize val="0"/>
+            <c:showLeaderLines val="0"/>
+            <c:extLst>
+              <c:ext xmlns:c15="http://schemas.microsoft.com/office/drawing/2012/chart" uri="{CE6537A1-D6FC-4f65-9D91-7224C49458BB}">
+                <c15:showLeaderLines val="0"/>
+              </c:ext>
+            </c:extLst>
+          </c:dLbls>
           <c:cat>
             <c:strRef>
-              <c:f>Sheet1!$A$2:$A$9</c:f>
+              <c:f>Sheet1!$A$2:$A$7</c:f>
               <c:strCache>
-                <c:ptCount val="8"/>
+                <c:ptCount val="6"/>
                 <c:pt idx="0">
                   <c:v>COO</c:v>
                 </c:pt>
@@ -360,18 +406,12 @@
                   <c:v>CFSO</c:v>
                 </c:pt>
                 <c:pt idx="3">
-                  <c:v>Air Product</c:v>
+                  <c:v>Talent</c:v>
                 </c:pt>
                 <c:pt idx="4">
-                  <c:v>Talent</c:v>
+                  <c:v>CCO</c:v>
                 </c:pt>
                 <c:pt idx="5">
-                  <c:v>CCO</c:v>
-                </c:pt>
-                <c:pt idx="6">
-                  <c:v>Ocean Prod.</c:v>
-                </c:pt>
-                <c:pt idx="7">
                   <c:v>Services</c:v>
                 </c:pt>
               </c:strCache>
@@ -379,12 +419,12 @@
           </c:cat>
           <c:val>
             <c:numRef>
-              <c:f>Sheet1!$C$2:$C$9</c:f>
+              <c:f>Sheet1!$C$2:$C$7</c:f>
               <c:numCache>
                 <c:formatCode>General</c:formatCode>
-                <c:ptCount val="8"/>
+                <c:ptCount val="6"/>
                 <c:pt idx="0">
-                  <c:v>148</c:v>
+                  <c:v>191</c:v>
                 </c:pt>
                 <c:pt idx="1">
                   <c:v>45</c:v>
@@ -393,44 +433,38 @@
                   <c:v>26</c:v>
                 </c:pt>
                 <c:pt idx="3">
-                  <c:v>26</c:v>
+                  <c:v>17</c:v>
                 </c:pt>
                 <c:pt idx="4">
-                  <c:v>18</c:v>
-                </c:pt>
-                <c:pt idx="5">
-                  <c:v>13</c:v>
-                </c:pt>
-                <c:pt idx="6">
-                  <c:v>14</c:v>
+                  <c:v>12</c:v>
                 </c:pt>
               </c:numCache>
             </c:numRef>
           </c:val>
-        </c:ser>
-        <c:dLbls>
-          <c:txPr>
-            <a:bodyPr/>
-            <a:lstStyle/>
-            <a:p>
-              <a:pPr>
-                <a:defRPr sz="950">
+          <c:extLst>
+            <c:ext xmlns:c14="http://schemas.microsoft.com/office/drawing/2007/8/2/chart" uri="{6F2FDCE9-48DA-4B69-8628-5D25D57E5C99}">
+              <c14:invertSolidFillFmt>
+                <c14:spPr xmlns:c14="http://schemas.microsoft.com/office/drawing/2007/8/2/chart">
                   <a:solidFill>
                     <a:srgbClr val="FFFFFF"/>
                   </a:solidFill>
-                </a:defRPr>
-              </a:pPr>
-            </a:p>
-          </c:txPr>
+                </c14:spPr>
+              </c14:invertSolidFillFmt>
+            </c:ext>
+            <c:ext xmlns:c16="http://schemas.microsoft.com/office/drawing/2014/chart" uri="{C3380CC4-5D6E-409C-BE32-E72D297353CC}">
+              <c16:uniqueId val="{00000001-715D-444F-A5E7-9FC24C82F348}"/>
+            </c:ext>
+          </c:extLst>
+        </c:ser>
+        <c:dLbls>
           <c:showLegendKey val="0"/>
           <c:showVal val="1"/>
           <c:showCatName val="0"/>
           <c:showSerName val="0"/>
           <c:showPercent val="0"/>
           <c:showBubbleSize val="0"/>
-          <c:showLeaderLines val="1"/>
         </c:dLbls>
-        <c:gapWidth val="35"/>
+        <c:gapWidth val="40"/>
         <c:overlap val="100"/>
         <c:axId val="-2068027336"/>
         <c:axId val="-2113994440"/>
@@ -442,6 +476,7 @@
         </c:scaling>
         <c:delete val="0"/>
         <c:axPos val="l"/>
+        <c:numFmt formatCode="General" sourceLinked="0"/>
         <c:majorTickMark val="out"/>
         <c:minorTickMark val="none"/>
         <c:tickLblPos val="nextTo"/>
@@ -457,8 +492,9 @@
           <a:lstStyle/>
           <a:p>
             <a:pPr>
-              <a:defRPr sz="950"/>
+              <a:defRPr sz="1000"/>
             </a:pPr>
+            <a:endParaRPr lang="en-US"/>
           </a:p>
         </c:txPr>
         <c:crossAx val="-2113994440"/>
@@ -471,14 +507,18 @@
       </c:catAx>
       <c:valAx>
         <c:axId val="-2113994440"/>
-        <c:scaling/>
-        <c:delete/>
-        <c:axPos val="b"/>
+        <c:scaling>
+          <c:orientation val="minMax"/>
+        </c:scaling>
+        <c:delete val="1"/>
+        <c:axPos val="t"/>
+        <c:numFmt formatCode="General" sourceLinked="1"/>
         <c:majorTickMark val="out"/>
         <c:minorTickMark val="none"/>
         <c:tickLblPos val="nextTo"/>
         <c:crossAx val="-2068027336"/>
         <c:crosses val="autoZero"/>
+        <c:crossBetween val="between"/>
       </c:valAx>
     </c:plotArea>
     <c:legend>
@@ -489,19 +529,22 @@
         <a:lstStyle/>
         <a:p>
           <a:pPr>
-            <a:defRPr sz="900"/>
+            <a:defRPr sz="950"/>
           </a:pPr>
+          <a:endParaRPr lang="en-US"/>
         </a:p>
       </c:txPr>
     </c:legend>
+    <c:plotVisOnly val="1"/>
     <c:dispBlanksAs val="gap"/>
+    <c:showDLblsOverMax val="1"/>
   </c:chart>
   <c:txPr>
     <a:bodyPr/>
     <a:lstStyle/>
     <a:p>
       <a:pPr>
-        <a:defRPr sz="950">
+        <a:defRPr sz="1000">
           <a:solidFill>
             <a:srgbClr val="262626"/>
           </a:solidFill>
@@ -518,14 +561,19 @@
 </file>
 
 <file path=ppt/charts/chart2.xml><?xml version="1.0" encoding="utf-8"?>
-<c:chartSpace xmlns:c="http://schemas.openxmlformats.org/drawingml/2006/chart" xmlns:a="http://schemas.openxmlformats.org/drawingml/2006/main" xmlns:r="http://schemas.openxmlformats.org/officeDocument/2006/relationships">
+<c:chartSpace xmlns:c="http://schemas.openxmlformats.org/drawingml/2006/chart" xmlns:a="http://schemas.openxmlformats.org/drawingml/2006/main" xmlns:r="http://schemas.openxmlformats.org/officeDocument/2006/relationships" xmlns:c16r2="http://schemas.microsoft.com/office/drawing/2015/06/chart">
   <c:date1904 val="0"/>
+  <c:lang val="pt-BR"/>
+  <c:roundedCorners val="1"/>
+  <c:style val="2"/>
   <c:chart>
     <c:autoTitleDeleted val="1"/>
     <c:plotArea>
+      <c:layout/>
       <c:barChart>
         <c:barDir val="bar"/>
         <c:grouping val="stacked"/>
+        <c:varyColors val="1"/>
         <c:ser>
           <c:idx val="0"/>
           <c:order val="0"/>
@@ -535,63 +583,140 @@
               <c:strCache>
                 <c:ptCount val="1"/>
                 <c:pt idx="0">
-                  <c:v>Publicadas no Gupy</c:v>
+                  <c:v>Na planilha</c:v>
                 </c:pt>
               </c:strCache>
             </c:strRef>
           </c:tx>
           <c:spPr>
             <a:solidFill>
-              <a:srgbClr val="009796"/>
+              <a:srgbClr val="6B2D6B"/>
             </a:solidFill>
           </c:spPr>
+          <c:invertIfNegative val="1"/>
+          <c:dLbls>
+            <c:spPr>
+              <a:noFill/>
+              <a:ln>
+                <a:noFill/>
+              </a:ln>
+              <a:effectLst/>
+            </c:spPr>
+            <c:txPr>
+              <a:bodyPr/>
+              <a:lstStyle/>
+              <a:p>
+                <a:pPr>
+                  <a:defRPr sz="850">
+                    <a:solidFill>
+                      <a:srgbClr val="FFFFFF"/>
+                    </a:solidFill>
+                  </a:defRPr>
+                </a:pPr>
+                <a:endParaRPr lang="en-US"/>
+              </a:p>
+            </c:txPr>
+            <c:showLegendKey val="0"/>
+            <c:showVal val="1"/>
+            <c:showCatName val="0"/>
+            <c:showSerName val="0"/>
+            <c:showPercent val="0"/>
+            <c:showBubbleSize val="0"/>
+            <c:showLeaderLines val="0"/>
+            <c:extLst>
+              <c:ext xmlns:c15="http://schemas.microsoft.com/office/drawing/2012/chart" uri="{CE6537A1-D6FC-4f65-9D91-7224C49458BB}">
+                <c15:showLeaderLines val="0"/>
+              </c:ext>
+            </c:extLst>
+          </c:dLbls>
           <c:cat>
             <c:strRef>
-              <c:f>Sheet1!$A$2:$A$9</c:f>
+              <c:f>Sheet1!$A$2:$A$11</c:f>
               <c:strCache>
-                <c:ptCount val="8"/>
+                <c:ptCount val="10"/>
                 <c:pt idx="0">
-                  <c:v>COO</c:v>
+                  <c:v>Air Operations</c:v>
                 </c:pt>
                 <c:pt idx="1">
-                  <c:v>CITO</c:v>
+                  <c:v>Air Product</c:v>
                 </c:pt>
                 <c:pt idx="2">
-                  <c:v>CFSO</c:v>
+                  <c:v>Talent Mgmt</c:v>
                 </c:pt>
                 <c:pt idx="3">
-                  <c:v>Air Product</c:v>
+                  <c:v>Healthcare</c:v>
                 </c:pt>
                 <c:pt idx="4">
-                  <c:v>Talent</c:v>
+                  <c:v>Financial</c:v>
                 </c:pt>
                 <c:pt idx="5">
-                  <c:v>CCO</c:v>
+                  <c:v>Ocean Operations</c:v>
                 </c:pt>
                 <c:pt idx="6">
-                  <c:v>Ocean Prod.</c:v>
+                  <c:v>Technology</c:v>
                 </c:pt>
                 <c:pt idx="7">
-                  <c:v>Services</c:v>
+                  <c:v>Ocean Product</c:v>
+                </c:pt>
+                <c:pt idx="8">
+                  <c:v>High Tech (TL)</c:v>
+                </c:pt>
+                <c:pt idx="9">
+                  <c:v>Outros 3</c:v>
                 </c:pt>
               </c:strCache>
             </c:strRef>
           </c:cat>
           <c:val>
             <c:numRef>
-              <c:f>Sheet1!$B$2:$B$9</c:f>
+              <c:f>Sheet1!$B$2:$B$11</c:f>
               <c:numCache>
                 <c:formatCode>General</c:formatCode>
-                <c:ptCount val="8"/>
+                <c:ptCount val="10"/>
                 <c:pt idx="0">
-                  <c:v>6</c:v>
+                  <c:v>14</c:v>
+                </c:pt>
+                <c:pt idx="1">
+                  <c:v>7</c:v>
+                </c:pt>
+                <c:pt idx="2">
+                  <c:v>4</c:v>
+                </c:pt>
+                <c:pt idx="3">
+                  <c:v>3</c:v>
+                </c:pt>
+                <c:pt idx="4">
+                  <c:v>3</c:v>
                 </c:pt>
                 <c:pt idx="5">
+                  <c:v>3</c:v>
+                </c:pt>
+                <c:pt idx="6">
                   <c:v>2</c:v>
+                </c:pt>
+                <c:pt idx="7">
+                  <c:v>2</c:v>
+                </c:pt>
+                <c:pt idx="9">
+                  <c:v>3</c:v>
                 </c:pt>
               </c:numCache>
             </c:numRef>
           </c:val>
+          <c:extLst>
+            <c:ext xmlns:c14="http://schemas.microsoft.com/office/drawing/2007/8/2/chart" uri="{6F2FDCE9-48DA-4B69-8628-5D25D57E5C99}">
+              <c14:invertSolidFillFmt>
+                <c14:spPr xmlns:c14="http://schemas.microsoft.com/office/drawing/2007/8/2/chart">
+                  <a:solidFill>
+                    <a:srgbClr val="FFFFFF"/>
+                  </a:solidFill>
+                </c14:spPr>
+              </c14:invertSolidFillFmt>
+            </c:ext>
+            <c:ext xmlns:c16="http://schemas.microsoft.com/office/drawing/2014/chart" uri="{C3380CC4-5D6E-409C-BE32-E72D297353CC}">
+              <c16:uniqueId val="{00000000-4DB0-4A9A-8736-7DA5879002DA}"/>
+            </c:ext>
+          </c:extLst>
         </c:ser>
         <c:ser>
           <c:idx val="1"/>
@@ -602,105 +727,126 @@
               <c:strCache>
                 <c:ptCount val="1"/>
                 <c:pt idx="0">
-                  <c:v>Sem processo</c:v>
+                  <c:v>Só no draft</c:v>
                 </c:pt>
               </c:strCache>
             </c:strRef>
           </c:tx>
           <c:spPr>
             <a:solidFill>
-              <a:srgbClr val="6B2D6B"/>
+              <a:srgbClr val="F4A261"/>
             </a:solidFill>
           </c:spPr>
+          <c:invertIfNegative val="1"/>
+          <c:dLbls>
+            <c:spPr>
+              <a:noFill/>
+              <a:ln>
+                <a:noFill/>
+              </a:ln>
+              <a:effectLst/>
+            </c:spPr>
+            <c:txPr>
+              <a:bodyPr/>
+              <a:lstStyle/>
+              <a:p>
+                <a:pPr>
+                  <a:defRPr sz="850">
+                    <a:solidFill>
+                      <a:srgbClr val="FFFFFF"/>
+                    </a:solidFill>
+                  </a:defRPr>
+                </a:pPr>
+                <a:endParaRPr lang="en-US"/>
+              </a:p>
+            </c:txPr>
+            <c:showLegendKey val="0"/>
+            <c:showVal val="1"/>
+            <c:showCatName val="0"/>
+            <c:showSerName val="0"/>
+            <c:showPercent val="0"/>
+            <c:showBubbleSize val="0"/>
+            <c:showLeaderLines val="0"/>
+            <c:extLst>
+              <c:ext xmlns:c15="http://schemas.microsoft.com/office/drawing/2012/chart" uri="{CE6537A1-D6FC-4f65-9D91-7224C49458BB}">
+                <c15:showLeaderLines val="0"/>
+              </c:ext>
+            </c:extLst>
+          </c:dLbls>
           <c:cat>
             <c:strRef>
-              <c:f>Sheet1!$A$2:$A$9</c:f>
+              <c:f>Sheet1!$A$2:$A$11</c:f>
               <c:strCache>
-                <c:ptCount val="8"/>
+                <c:ptCount val="10"/>
                 <c:pt idx="0">
-                  <c:v>COO</c:v>
+                  <c:v>Air Operations</c:v>
                 </c:pt>
                 <c:pt idx="1">
-                  <c:v>CITO</c:v>
+                  <c:v>Air Product</c:v>
                 </c:pt>
                 <c:pt idx="2">
-                  <c:v>CFSO</c:v>
+                  <c:v>Talent Mgmt</c:v>
                 </c:pt>
                 <c:pt idx="3">
-                  <c:v>Air Product</c:v>
+                  <c:v>Healthcare</c:v>
                 </c:pt>
                 <c:pt idx="4">
-                  <c:v>Talent</c:v>
+                  <c:v>Financial</c:v>
                 </c:pt>
                 <c:pt idx="5">
-                  <c:v>CCO</c:v>
+                  <c:v>Ocean Operations</c:v>
                 </c:pt>
                 <c:pt idx="6">
-                  <c:v>Ocean Prod.</c:v>
+                  <c:v>Technology</c:v>
                 </c:pt>
                 <c:pt idx="7">
-                  <c:v>Services</c:v>
+                  <c:v>Ocean Product</c:v>
+                </c:pt>
+                <c:pt idx="8">
+                  <c:v>High Tech (TL)</c:v>
+                </c:pt>
+                <c:pt idx="9">
+                  <c:v>Outros 3</c:v>
                 </c:pt>
               </c:strCache>
             </c:strRef>
           </c:cat>
           <c:val>
             <c:numRef>
-              <c:f>Sheet1!$C$2:$C$9</c:f>
+              <c:f>Sheet1!$C$2:$C$11</c:f>
               <c:numCache>
                 <c:formatCode>General</c:formatCode>
-                <c:ptCount val="8"/>
-                <c:pt idx="0">
-                  <c:v>19</c:v>
-                </c:pt>
-                <c:pt idx="1">
-                  <c:v>2</c:v>
-                </c:pt>
-                <c:pt idx="2">
-                  <c:v>3</c:v>
-                </c:pt>
-                <c:pt idx="3">
-                  <c:v>7</c:v>
-                </c:pt>
-                <c:pt idx="4">
-                  <c:v>4</c:v>
-                </c:pt>
-                <c:pt idx="5">
-                  <c:v>3</c:v>
-                </c:pt>
-                <c:pt idx="6">
-                  <c:v>2</c:v>
-                </c:pt>
-                <c:pt idx="7">
+                <c:ptCount val="10"/>
+                <c:pt idx="8">
                   <c:v>1</c:v>
                 </c:pt>
               </c:numCache>
             </c:numRef>
           </c:val>
-        </c:ser>
-        <c:dLbls>
-          <c:txPr>
-            <a:bodyPr/>
-            <a:lstStyle/>
-            <a:p>
-              <a:pPr>
-                <a:defRPr sz="950">
+          <c:extLst>
+            <c:ext xmlns:c14="http://schemas.microsoft.com/office/drawing/2007/8/2/chart" uri="{6F2FDCE9-48DA-4B69-8628-5D25D57E5C99}">
+              <c14:invertSolidFillFmt>
+                <c14:spPr xmlns:c14="http://schemas.microsoft.com/office/drawing/2007/8/2/chart">
                   <a:solidFill>
                     <a:srgbClr val="FFFFFF"/>
                   </a:solidFill>
-                </a:defRPr>
-              </a:pPr>
-            </a:p>
-          </c:txPr>
+                </c14:spPr>
+              </c14:invertSolidFillFmt>
+            </c:ext>
+            <c:ext xmlns:c16="http://schemas.microsoft.com/office/drawing/2014/chart" uri="{C3380CC4-5D6E-409C-BE32-E72D297353CC}">
+              <c16:uniqueId val="{00000001-4DB0-4A9A-8736-7DA5879002DA}"/>
+            </c:ext>
+          </c:extLst>
+        </c:ser>
+        <c:dLbls>
           <c:showLegendKey val="0"/>
           <c:showVal val="1"/>
           <c:showCatName val="0"/>
           <c:showSerName val="0"/>
           <c:showPercent val="0"/>
           <c:showBubbleSize val="0"/>
-          <c:showLeaderLines val="1"/>
         </c:dLbls>
-        <c:gapWidth val="35"/>
+        <c:gapWidth val="30"/>
         <c:overlap val="100"/>
         <c:axId val="-2068027336"/>
         <c:axId val="-2113994440"/>
@@ -712,6 +858,7 @@
         </c:scaling>
         <c:delete val="0"/>
         <c:axPos val="l"/>
+        <c:numFmt formatCode="General" sourceLinked="0"/>
         <c:majorTickMark val="out"/>
         <c:minorTickMark val="none"/>
         <c:tickLblPos val="nextTo"/>
@@ -727,8 +874,9 @@
           <a:lstStyle/>
           <a:p>
             <a:pPr>
-              <a:defRPr sz="950"/>
+              <a:defRPr sz="850"/>
             </a:pPr>
+            <a:endParaRPr lang="en-US"/>
           </a:p>
         </c:txPr>
         <c:crossAx val="-2113994440"/>
@@ -741,14 +889,18 @@
       </c:catAx>
       <c:valAx>
         <c:axId val="-2113994440"/>
-        <c:scaling/>
-        <c:delete/>
-        <c:axPos val="b"/>
+        <c:scaling>
+          <c:orientation val="minMax"/>
+        </c:scaling>
+        <c:delete val="1"/>
+        <c:axPos val="t"/>
+        <c:numFmt formatCode="General" sourceLinked="1"/>
         <c:majorTickMark val="out"/>
         <c:minorTickMark val="none"/>
         <c:tickLblPos val="nextTo"/>
         <c:crossAx val="-2068027336"/>
         <c:crosses val="autoZero"/>
+        <c:crossBetween val="between"/>
       </c:valAx>
     </c:plotArea>
     <c:legend>
@@ -759,19 +911,22 @@
         <a:lstStyle/>
         <a:p>
           <a:pPr>
-            <a:defRPr sz="900"/>
+            <a:defRPr sz="800"/>
           </a:pPr>
+          <a:endParaRPr lang="en-US"/>
         </a:p>
       </c:txPr>
     </c:legend>
+    <c:plotVisOnly val="1"/>
     <c:dispBlanksAs val="gap"/>
+    <c:showDLblsOverMax val="1"/>
   </c:chart>
   <c:txPr>
     <a:bodyPr/>
     <a:lstStyle/>
     <a:p>
       <a:pPr>
-        <a:defRPr sz="950">
+        <a:defRPr sz="850">
           <a:solidFill>
             <a:srgbClr val="262626"/>
           </a:solidFill>
@@ -788,14 +943,19 @@
 </file>
 
 <file path=ppt/charts/chart3.xml><?xml version="1.0" encoding="utf-8"?>
-<c:chartSpace xmlns:c="http://schemas.openxmlformats.org/drawingml/2006/chart" xmlns:a="http://schemas.openxmlformats.org/drawingml/2006/main" xmlns:r="http://schemas.openxmlformats.org/officeDocument/2006/relationships">
+<c:chartSpace xmlns:c="http://schemas.openxmlformats.org/drawingml/2006/chart" xmlns:a="http://schemas.openxmlformats.org/drawingml/2006/main" xmlns:r="http://schemas.openxmlformats.org/officeDocument/2006/relationships" xmlns:c16r2="http://schemas.microsoft.com/office/drawing/2015/06/chart">
   <c:date1904 val="0"/>
+  <c:lang val="pt-BR"/>
+  <c:roundedCorners val="1"/>
+  <c:style val="2"/>
   <c:chart>
     <c:autoTitleDeleted val="1"/>
     <c:plotArea>
+      <c:layout/>
       <c:barChart>
-        <c:barDir val="col"/>
-        <c:grouping val="clustered"/>
+        <c:barDir val="bar"/>
+        <c:grouping val="stacked"/>
+        <c:varyColors val="1"/>
         <c:ser>
           <c:idx val="0"/>
           <c:order val="0"/>
@@ -805,35 +965,71 @@
               <c:strCache>
                 <c:ptCount val="1"/>
                 <c:pt idx="0">
-                  <c:v>Pessoas</c:v>
+                  <c:v>Diretos</c:v>
                 </c:pt>
               </c:strCache>
             </c:strRef>
           </c:tx>
           <c:spPr>
             <a:solidFill>
-              <a:srgbClr val="66C1C0"/>
+              <a:srgbClr val="6B2D6B"/>
             </a:solidFill>
           </c:spPr>
+          <c:invertIfNegative val="1"/>
+          <c:dLbls>
+            <c:spPr>
+              <a:noFill/>
+              <a:ln>
+                <a:noFill/>
+              </a:ln>
+              <a:effectLst/>
+            </c:spPr>
+            <c:txPr>
+              <a:bodyPr/>
+              <a:lstStyle/>
+              <a:p>
+                <a:pPr>
+                  <a:defRPr sz="950">
+                    <a:solidFill>
+                      <a:srgbClr val="FFFFFF"/>
+                    </a:solidFill>
+                  </a:defRPr>
+                </a:pPr>
+                <a:endParaRPr lang="en-US"/>
+              </a:p>
+            </c:txPr>
+            <c:showLegendKey val="0"/>
+            <c:showVal val="1"/>
+            <c:showCatName val="0"/>
+            <c:showSerName val="0"/>
+            <c:showPercent val="0"/>
+            <c:showBubbleSize val="0"/>
+            <c:showLeaderLines val="0"/>
+            <c:extLst>
+              <c:ext xmlns:c15="http://schemas.microsoft.com/office/drawing/2012/chart" uri="{CE6537A1-D6FC-4f65-9D91-7224C49458BB}">
+                <c15:showLeaderLines val="0"/>
+              </c:ext>
+            </c:extLst>
+          </c:dLbls>
           <c:cat>
             <c:strRef>
               <c:f>Sheet1!$A$2:$A$6</c:f>
               <c:strCache>
                 <c:ptCount val="5"/>
                 <c:pt idx="0">
-                  <c:v>L4 · head</c:v>
+                  <c:v>Carol Mendoza (head)</c:v>
                 </c:pt>
                 <c:pt idx="1">
-                  <c:v>L5</c:v>
+                  <c:v>Daniela Bueno (lead coord.)</c:v>
                 </c:pt>
                 <c:pt idx="2">
-                  <c:v>L6</c:v>
+                  <c:v>Thais Cosenza (Sr. TL CC)</c:v>
                 </c:pt>
                 <c:pt idx="3">
-                  <c:v>L7</c:v>
+                  <c:v>Pamela Ibarra (TL)</c:v>
                 </c:pt>
                 <c:pt idx="4">
-                  <c:v>L8</c:v>
+                  <c:v>Gabriella Pereira (TL)</c:v>
                 </c:pt>
               </c:strCache>
             </c:strRef>
@@ -845,23 +1041,37 @@
                 <c:formatCode>General</c:formatCode>
                 <c:ptCount val="5"/>
                 <c:pt idx="0">
-                  <c:v>1</c:v>
+                  <c:v>4</c:v>
                 </c:pt>
                 <c:pt idx="1">
                   <c:v>4</c:v>
                 </c:pt>
                 <c:pt idx="2">
+                  <c:v>4</c:v>
+                </c:pt>
+                <c:pt idx="3">
                   <c:v>12</c:v>
                 </c:pt>
-                <c:pt idx="3">
-                  <c:v>52</c:v>
-                </c:pt>
                 <c:pt idx="4">
-                  <c:v>17</c:v>
+                  <c:v>9</c:v>
                 </c:pt>
               </c:numCache>
             </c:numRef>
           </c:val>
+          <c:extLst>
+            <c:ext xmlns:c14="http://schemas.microsoft.com/office/drawing/2007/8/2/chart" uri="{6F2FDCE9-48DA-4B69-8628-5D25D57E5C99}">
+              <c14:invertSolidFillFmt>
+                <c14:spPr xmlns:c14="http://schemas.microsoft.com/office/drawing/2007/8/2/chart">
+                  <a:solidFill>
+                    <a:srgbClr val="FFFFFF"/>
+                  </a:solidFill>
+                </c14:spPr>
+              </c14:invertSolidFillFmt>
+            </c:ext>
+            <c:ext xmlns:c16="http://schemas.microsoft.com/office/drawing/2014/chart" uri="{C3380CC4-5D6E-409C-BE32-E72D297353CC}">
+              <c16:uniqueId val="{00000000-77D7-445C-8899-73759AF0F55A}"/>
+            </c:ext>
+          </c:extLst>
         </c:ser>
         <c:ser>
           <c:idx val="1"/>
@@ -872,35 +1082,71 @@
               <c:strCache>
                 <c:ptCount val="1"/>
                 <c:pt idx="0">
-                  <c:v>Gestores</c:v>
+                  <c:v>Indiretos</c:v>
                 </c:pt>
               </c:strCache>
             </c:strRef>
           </c:tx>
           <c:spPr>
             <a:solidFill>
-              <a:srgbClr val="6B2D6B"/>
+              <a:srgbClr val="66C1C0"/>
             </a:solidFill>
           </c:spPr>
+          <c:invertIfNegative val="1"/>
+          <c:dLbls>
+            <c:spPr>
+              <a:noFill/>
+              <a:ln>
+                <a:noFill/>
+              </a:ln>
+              <a:effectLst/>
+            </c:spPr>
+            <c:txPr>
+              <a:bodyPr/>
+              <a:lstStyle/>
+              <a:p>
+                <a:pPr>
+                  <a:defRPr sz="950">
+                    <a:solidFill>
+                      <a:srgbClr val="FFFFFF"/>
+                    </a:solidFill>
+                  </a:defRPr>
+                </a:pPr>
+                <a:endParaRPr lang="en-US"/>
+              </a:p>
+            </c:txPr>
+            <c:showLegendKey val="0"/>
+            <c:showVal val="1"/>
+            <c:showCatName val="0"/>
+            <c:showSerName val="0"/>
+            <c:showPercent val="0"/>
+            <c:showBubbleSize val="0"/>
+            <c:showLeaderLines val="0"/>
+            <c:extLst>
+              <c:ext xmlns:c15="http://schemas.microsoft.com/office/drawing/2012/chart" uri="{CE6537A1-D6FC-4f65-9D91-7224C49458BB}">
+                <c15:showLeaderLines val="0"/>
+              </c:ext>
+            </c:extLst>
+          </c:dLbls>
           <c:cat>
             <c:strRef>
               <c:f>Sheet1!$A$2:$A$6</c:f>
               <c:strCache>
                 <c:ptCount val="5"/>
                 <c:pt idx="0">
-                  <c:v>L4 · head</c:v>
+                  <c:v>Carol Mendoza (head)</c:v>
                 </c:pt>
                 <c:pt idx="1">
-                  <c:v>L5</c:v>
+                  <c:v>Daniela Bueno (lead coord.)</c:v>
                 </c:pt>
                 <c:pt idx="2">
-                  <c:v>L6</c:v>
+                  <c:v>Thais Cosenza (Sr. TL CC)</c:v>
                 </c:pt>
                 <c:pt idx="3">
-                  <c:v>L7</c:v>
+                  <c:v>Pamela Ibarra (TL)</c:v>
                 </c:pt>
                 <c:pt idx="4">
-                  <c:v>L8</c:v>
+                  <c:v>Gabriella Pereira (TL)</c:v>
                 </c:pt>
               </c:strCache>
             </c:strRef>
@@ -912,55 +1158,59 @@
                 <c:formatCode>General</c:formatCode>
                 <c:ptCount val="5"/>
                 <c:pt idx="0">
-                  <c:v>1</c:v>
+                  <c:v>78</c:v>
                 </c:pt>
                 <c:pt idx="1">
-                  <c:v>3</c:v>
+                  <c:v>43</c:v>
                 </c:pt>
                 <c:pt idx="2">
-                  <c:v>7</c:v>
+                  <c:v>23</c:v>
                 </c:pt>
                 <c:pt idx="3">
-                  <c:v>4</c:v>
+                  <c:v>9</c:v>
+                </c:pt>
+                <c:pt idx="4">
+                  <c:v>7</c:v>
                 </c:pt>
               </c:numCache>
             </c:numRef>
           </c:val>
+          <c:extLst>
+            <c:ext xmlns:c14="http://schemas.microsoft.com/office/drawing/2007/8/2/chart" uri="{6F2FDCE9-48DA-4B69-8628-5D25D57E5C99}">
+              <c14:invertSolidFillFmt>
+                <c14:spPr xmlns:c14="http://schemas.microsoft.com/office/drawing/2007/8/2/chart">
+                  <a:solidFill>
+                    <a:srgbClr val="FFFFFF"/>
+                  </a:solidFill>
+                </c14:spPr>
+              </c14:invertSolidFillFmt>
+            </c:ext>
+            <c:ext xmlns:c16="http://schemas.microsoft.com/office/drawing/2014/chart" uri="{C3380CC4-5D6E-409C-BE32-E72D297353CC}">
+              <c16:uniqueId val="{00000001-77D7-445C-8899-73759AF0F55A}"/>
+            </c:ext>
+          </c:extLst>
         </c:ser>
         <c:dLbls>
-          <c:txPr>
-            <a:bodyPr/>
-            <a:lstStyle/>
-            <a:p>
-              <a:pPr>
-                <a:defRPr sz="950">
-                  <a:solidFill>
-                    <a:srgbClr val="262626"/>
-                  </a:solidFill>
-                </a:defRPr>
-              </a:pPr>
-            </a:p>
-          </c:txPr>
-          <c:dLblPos val="outEnd"/>
           <c:showLegendKey val="0"/>
           <c:showVal val="1"/>
           <c:showCatName val="0"/>
           <c:showSerName val="0"/>
           <c:showPercent val="0"/>
           <c:showBubbleSize val="0"/>
-          <c:showLeaderLines val="1"/>
         </c:dLbls>
-        <c:gapWidth val="60"/>
+        <c:gapWidth val="40"/>
+        <c:overlap val="100"/>
         <c:axId val="-2068027336"/>
         <c:axId val="-2113994440"/>
       </c:barChart>
       <c:catAx>
         <c:axId val="-2068027336"/>
         <c:scaling>
-          <c:orientation val="minMax"/>
+          <c:orientation val="maxMin"/>
         </c:scaling>
         <c:delete val="0"/>
-        <c:axPos val="b"/>
+        <c:axPos val="l"/>
+        <c:numFmt formatCode="General" sourceLinked="0"/>
         <c:majorTickMark val="out"/>
         <c:minorTickMark val="none"/>
         <c:tickLblPos val="nextTo"/>
@@ -978,6 +1228,7 @@
             <a:pPr>
               <a:defRPr sz="950"/>
             </a:pPr>
+            <a:endParaRPr lang="en-US"/>
           </a:p>
         </c:txPr>
         <c:crossAx val="-2113994440"/>
@@ -990,14 +1241,18 @@
       </c:catAx>
       <c:valAx>
         <c:axId val="-2113994440"/>
-        <c:scaling/>
-        <c:delete/>
-        <c:axPos val="l"/>
+        <c:scaling>
+          <c:orientation val="minMax"/>
+        </c:scaling>
+        <c:delete val="1"/>
+        <c:axPos val="t"/>
+        <c:numFmt formatCode="General" sourceLinked="1"/>
         <c:majorTickMark val="out"/>
         <c:minorTickMark val="none"/>
         <c:tickLblPos val="nextTo"/>
         <c:crossAx val="-2068027336"/>
         <c:crosses val="autoZero"/>
+        <c:crossBetween val="between"/>
       </c:valAx>
     </c:plotArea>
     <c:legend>
@@ -1010,10 +1265,13 @@
           <a:pPr>
             <a:defRPr sz="900"/>
           </a:pPr>
+          <a:endParaRPr lang="en-US"/>
         </a:p>
       </c:txPr>
     </c:legend>
+    <c:plotVisOnly val="1"/>
     <c:dispBlanksAs val="gap"/>
+    <c:showDLblsOverMax val="1"/>
   </c:chart>
   <c:txPr>
     <a:bodyPr/>
@@ -1037,14 +1295,19 @@
 </file>
 
 <file path=ppt/charts/chart4.xml><?xml version="1.0" encoding="utf-8"?>
-<c:chartSpace xmlns:c="http://schemas.openxmlformats.org/drawingml/2006/chart" xmlns:a="http://schemas.openxmlformats.org/drawingml/2006/main" xmlns:r="http://schemas.openxmlformats.org/officeDocument/2006/relationships">
+<c:chartSpace xmlns:c="http://schemas.openxmlformats.org/drawingml/2006/chart" xmlns:a="http://schemas.openxmlformats.org/drawingml/2006/main" xmlns:r="http://schemas.openxmlformats.org/officeDocument/2006/relationships" xmlns:c16r2="http://schemas.microsoft.com/office/drawing/2015/06/chart">
   <c:date1904 val="0"/>
+  <c:lang val="pt-BR"/>
+  <c:roundedCorners val="1"/>
+  <c:style val="2"/>
   <c:chart>
     <c:autoTitleDeleted val="1"/>
     <c:plotArea>
+      <c:layout/>
       <c:barChart>
         <c:barDir val="bar"/>
         <c:grouping val="stacked"/>
+        <c:varyColors val="1"/>
         <c:ser>
           <c:idx val="0"/>
           <c:order val="0"/>
@@ -1064,6 +1327,42 @@
               <a:srgbClr val="009796"/>
             </a:solidFill>
           </c:spPr>
+          <c:invertIfNegative val="1"/>
+          <c:dLbls>
+            <c:spPr>
+              <a:noFill/>
+              <a:ln>
+                <a:noFill/>
+              </a:ln>
+              <a:effectLst/>
+            </c:spPr>
+            <c:txPr>
+              <a:bodyPr/>
+              <a:lstStyle/>
+              <a:p>
+                <a:pPr>
+                  <a:defRPr sz="1000">
+                    <a:solidFill>
+                      <a:srgbClr val="FFFFFF"/>
+                    </a:solidFill>
+                  </a:defRPr>
+                </a:pPr>
+                <a:endParaRPr lang="en-US"/>
+              </a:p>
+            </c:txPr>
+            <c:showLegendKey val="0"/>
+            <c:showVal val="1"/>
+            <c:showCatName val="0"/>
+            <c:showSerName val="0"/>
+            <c:showPercent val="0"/>
+            <c:showBubbleSize val="0"/>
+            <c:showLeaderLines val="0"/>
+            <c:extLst>
+              <c:ext xmlns:c15="http://schemas.microsoft.com/office/drawing/2012/chart" uri="{CE6537A1-D6FC-4f65-9D91-7224C49458BB}">
+                <c15:showLeaderLines val="0"/>
+              </c:ext>
+            </c:extLst>
+          </c:dLbls>
           <c:cat>
             <c:strRef>
               <c:f>Sheet1!$A$2:$A$4</c:f>
@@ -1096,6 +1395,20 @@
               </c:numCache>
             </c:numRef>
           </c:val>
+          <c:extLst>
+            <c:ext xmlns:c14="http://schemas.microsoft.com/office/drawing/2007/8/2/chart" uri="{6F2FDCE9-48DA-4B69-8628-5D25D57E5C99}">
+              <c14:invertSolidFillFmt>
+                <c14:spPr xmlns:c14="http://schemas.microsoft.com/office/drawing/2007/8/2/chart">
+                  <a:solidFill>
+                    <a:srgbClr val="FFFFFF"/>
+                  </a:solidFill>
+                </c14:spPr>
+              </c14:invertSolidFillFmt>
+            </c:ext>
+            <c:ext xmlns:c16="http://schemas.microsoft.com/office/drawing/2014/chart" uri="{C3380CC4-5D6E-409C-BE32-E72D297353CC}">
+              <c16:uniqueId val="{00000000-3938-4E81-BF19-71A447943072}"/>
+            </c:ext>
+          </c:extLst>
         </c:ser>
         <c:ser>
           <c:idx val="1"/>
@@ -1116,6 +1429,42 @@
               <a:srgbClr val="6B2D6B"/>
             </a:solidFill>
           </c:spPr>
+          <c:invertIfNegative val="1"/>
+          <c:dLbls>
+            <c:spPr>
+              <a:noFill/>
+              <a:ln>
+                <a:noFill/>
+              </a:ln>
+              <a:effectLst/>
+            </c:spPr>
+            <c:txPr>
+              <a:bodyPr/>
+              <a:lstStyle/>
+              <a:p>
+                <a:pPr>
+                  <a:defRPr sz="1000">
+                    <a:solidFill>
+                      <a:srgbClr val="FFFFFF"/>
+                    </a:solidFill>
+                  </a:defRPr>
+                </a:pPr>
+                <a:endParaRPr lang="en-US"/>
+              </a:p>
+            </c:txPr>
+            <c:showLegendKey val="0"/>
+            <c:showVal val="1"/>
+            <c:showCatName val="0"/>
+            <c:showSerName val="0"/>
+            <c:showPercent val="0"/>
+            <c:showBubbleSize val="0"/>
+            <c:showLeaderLines val="0"/>
+            <c:extLst>
+              <c:ext xmlns:c15="http://schemas.microsoft.com/office/drawing/2012/chart" uri="{CE6537A1-D6FC-4f65-9D91-7224C49458BB}">
+                <c15:showLeaderLines val="0"/>
+              </c:ext>
+            </c:extLst>
+          </c:dLbls>
           <c:cat>
             <c:strRef>
               <c:f>Sheet1!$A$2:$A$4</c:f>
@@ -1148,28 +1497,28 @@
               </c:numCache>
             </c:numRef>
           </c:val>
-        </c:ser>
-        <c:dLbls>
-          <c:txPr>
-            <a:bodyPr/>
-            <a:lstStyle/>
-            <a:p>
-              <a:pPr>
-                <a:defRPr sz="1000">
+          <c:extLst>
+            <c:ext xmlns:c14="http://schemas.microsoft.com/office/drawing/2007/8/2/chart" uri="{6F2FDCE9-48DA-4B69-8628-5D25D57E5C99}">
+              <c14:invertSolidFillFmt>
+                <c14:spPr xmlns:c14="http://schemas.microsoft.com/office/drawing/2007/8/2/chart">
                   <a:solidFill>
                     <a:srgbClr val="FFFFFF"/>
                   </a:solidFill>
-                </a:defRPr>
-              </a:pPr>
-            </a:p>
-          </c:txPr>
+                </c14:spPr>
+              </c14:invertSolidFillFmt>
+            </c:ext>
+            <c:ext xmlns:c16="http://schemas.microsoft.com/office/drawing/2014/chart" uri="{C3380CC4-5D6E-409C-BE32-E72D297353CC}">
+              <c16:uniqueId val="{00000001-3938-4E81-BF19-71A447943072}"/>
+            </c:ext>
+          </c:extLst>
+        </c:ser>
+        <c:dLbls>
           <c:showLegendKey val="0"/>
           <c:showVal val="1"/>
           <c:showCatName val="0"/>
           <c:showSerName val="0"/>
           <c:showPercent val="0"/>
           <c:showBubbleSize val="0"/>
-          <c:showLeaderLines val="1"/>
         </c:dLbls>
         <c:gapWidth val="45"/>
         <c:overlap val="100"/>
@@ -1183,6 +1532,7 @@
         </c:scaling>
         <c:delete val="0"/>
         <c:axPos val="l"/>
+        <c:numFmt formatCode="General" sourceLinked="0"/>
         <c:majorTickMark val="out"/>
         <c:minorTickMark val="none"/>
         <c:tickLblPos val="nextTo"/>
@@ -1200,6 +1550,7 @@
             <a:pPr>
               <a:defRPr sz="1000"/>
             </a:pPr>
+            <a:endParaRPr lang="en-US"/>
           </a:p>
         </c:txPr>
         <c:crossAx val="-2113994440"/>
@@ -1212,14 +1563,18 @@
       </c:catAx>
       <c:valAx>
         <c:axId val="-2113994440"/>
-        <c:scaling/>
-        <c:delete/>
-        <c:axPos val="b"/>
+        <c:scaling>
+          <c:orientation val="minMax"/>
+        </c:scaling>
+        <c:delete val="1"/>
+        <c:axPos val="t"/>
+        <c:numFmt formatCode="General" sourceLinked="1"/>
         <c:majorTickMark val="out"/>
         <c:minorTickMark val="none"/>
         <c:tickLblPos val="nextTo"/>
         <c:crossAx val="-2068027336"/>
         <c:crosses val="autoZero"/>
+        <c:crossBetween val="between"/>
       </c:valAx>
     </c:plotArea>
     <c:legend>
@@ -1232,10 +1587,13 @@
           <a:pPr>
             <a:defRPr sz="950"/>
           </a:pPr>
+          <a:endParaRPr lang="en-US"/>
         </a:p>
       </c:txPr>
     </c:legend>
+    <c:plotVisOnly val="1"/>
     <c:dispBlanksAs val="gap"/>
+    <c:showDLblsOverMax val="1"/>
   </c:chart>
   <c:txPr>
     <a:bodyPr/>
@@ -1388,7 +1746,7 @@
               <a:pPr>
                 <a:defRPr/>
               </a:pPr>
-              <a:t>23/10/2026</a:t>
+              <a:t>26/10/2026</a:t>
             </a:fld>
             <a:endParaRPr lang="en-GB"/>
           </a:p>
@@ -1499,7 +1857,7 @@
               <a:pPr>
                 <a:defRPr/>
               </a:pPr>
-              <a:t>‹#›</a:t>
+              <a:t>‹nº›</a:t>
             </a:fld>
             <a:endParaRPr lang="en-GB"/>
           </a:p>
@@ -1644,7 +2002,7 @@
               <a:pPr>
                 <a:defRPr/>
               </a:pPr>
-              <a:t>23/10/2026</a:t>
+              <a:t>26/10/2026</a:t>
             </a:fld>
             <a:endParaRPr lang="pt-BR"/>
           </a:p>
@@ -1860,7 +2218,7 @@
               <a:pPr>
                 <a:defRPr/>
               </a:pPr>
-              <a:t>‹#›</a:t>
+              <a:t>‹nº›</a:t>
             </a:fld>
             <a:endParaRPr lang="pt-BR"/>
           </a:p>
@@ -2078,7 +2436,7 @@
               <a:pPr>
                 <a:defRPr/>
               </a:pPr>
-              <a:t>23/10/2026</a:t>
+              <a:t>26/10/2026</a:t>
             </a:fld>
             <a:endParaRPr lang="pt-BR"/>
           </a:p>
@@ -2126,7 +2484,7 @@
 </p:notes>
 </file>
 
-<file path=ppt/notesSlides/notesSlide4.xml><?xml version="1.0" encoding="utf-8"?>
+<file path=ppt/notesSlides/notesSlide2.xml><?xml version="1.0" encoding="utf-8"?>
 <p:notes xmlns:a="http://schemas.openxmlformats.org/drawingml/2006/main" xmlns:r="http://schemas.openxmlformats.org/officeDocument/2006/relationships" xmlns:p="http://schemas.openxmlformats.org/presentationml/2006/main">
   <p:cSld>
     <p:spTree>
@@ -2228,7 +2586,7 @@
               <a:pPr>
                 <a:defRPr/>
               </a:pPr>
-              <a:t>23/10/2026</a:t>
+              <a:t>26/10/2026</a:t>
             </a:fld>
             <a:endParaRPr lang="pt-BR"/>
           </a:p>
@@ -2263,7 +2621,7 @@
               <a:pPr>
                 <a:defRPr/>
               </a:pPr>
-              <a:t>28</a:t>
+              <a:t>4</a:t>
             </a:fld>
             <a:endParaRPr lang="pt-BR"/>
           </a:p>
@@ -3015,7 +3373,7 @@
           <a:p>
             <a:fld id="{1EC99A45-0693-4E08-8AE4-0362204955FE}" type="datetimeFigureOut">
               <a:rPr lang="pt-BR" smtClean="0"/>
-              <a:t>23/10/2026</a:t>
+              <a:t>26/10/2026</a:t>
             </a:fld>
             <a:endParaRPr lang="pt-BR"/>
           </a:p>
@@ -3069,7 +3427,7 @@
           <a:p>
             <a:fld id="{17F306FA-AAEB-4883-ABC4-766D94449B75}" type="slidenum">
               <a:rPr lang="pt-BR" smtClean="0"/>
-              <a:t>‹#›</a:t>
+              <a:t>‹nº›</a:t>
             </a:fld>
             <a:endParaRPr lang="pt-BR"/>
           </a:p>
@@ -3486,7 +3844,7 @@
                 <a:cs typeface="Arial"/>
               </a:rPr>
               <a:pPr lvl="0" algn="r" rtl="0"/>
-              <a:t>‹#›</a:t>
+              <a:t>‹nº›</a:t>
             </a:fld>
             <a:endParaRPr lang="pt-BR" sz="700" noProof="0">
               <a:solidFill>
@@ -3756,16 +4114,7 @@
           <a:lstStyle/>
           <a:p>
             <a:pPr rtl="0"/>
-            <a:r>
-              <a:rPr lang="pt-BR" sz="600" noProof="0">
-                <a:solidFill>
-                  <a:srgbClr val="000000"/>
-                </a:solidFill>
-                <a:latin typeface="Bradley Hand ITC" panose="03070402050302030203" pitchFamily="66" charset="0"/>
-                <a:cs typeface="Arial" panose="020B0604020202020204" pitchFamily="34" charset="0"/>
-              </a:rPr>
-              <a:t/>
-            </a:r>
+            <a:endParaRPr/>
           </a:p>
         </p:txBody>
       </p:sp>
@@ -4142,12 +4491,12 @@
           <a:graphicData uri="http://schemas.openxmlformats.org/presentationml/2006/ole">
             <mc:AlternateContent xmlns:mc="http://schemas.openxmlformats.org/markup-compatibility/2006">
               <mc:Choice xmlns:v="urn:schemas-microsoft-com:vml" Requires="v">
-                <p:oleObj name="think-cell Slide" r:id="rId13" imgW="421" imgH="423" progId="TCLayout.ActiveDocument.1">
+                <p:oleObj name="think-cell Slide" r:id="rId12" imgW="421" imgH="423" progId="TCLayout.ActiveDocument.1">
                   <p:embed/>
                 </p:oleObj>
               </mc:Choice>
               <mc:Fallback>
-                <p:oleObj name="think-cell Slide" r:id="rId13" imgW="421" imgH="423" progId="TCLayout.ActiveDocument.1">
+                <p:oleObj name="think-cell Slide" r:id="rId12" imgW="421" imgH="423" progId="TCLayout.ActiveDocument.1">
                   <p:embed/>
                   <p:pic>
                     <p:nvPicPr>
@@ -4162,7 +4511,7 @@
                       <p:nvPr/>
                     </p:nvPicPr>
                     <p:blipFill>
-                      <a:blip r:embed="rId14"/>
+                      <a:blip r:embed="rId13"/>
                       <a:stretch>
                         <a:fillRect/>
                       </a:stretch>
@@ -4202,7 +4551,7 @@
           </p:nvPr>
         </p:nvPicPr>
         <p:blipFill>
-          <a:blip r:embed="rId15"/>
+          <a:blip r:embed="rId14"/>
           <a:stretch>
             <a:fillRect/>
           </a:stretch>
@@ -4251,7 +4600,7 @@
           <a:p>
             <a:pPr algn="l"/>
             <a:r>
-              <a:rPr lang="pt-BR" sz="1200" dirty="0">
+              <a:rPr lang="pt-BR" sz="1200">
                 <a:solidFill>
                   <a:srgbClr val="FFFFFF"/>
                 </a:solidFill>
@@ -4779,12 +5128,12 @@
           </p:cNvPicPr>
           <p:nvPr>
             <p:custDataLst>
-              <p:tags r:id="rId10"/>
+              <p:tags r:id="rId9"/>
             </p:custDataLst>
           </p:nvPr>
         </p:nvPicPr>
         <p:blipFill>
-          <a:blip r:embed="rId16"/>
+          <a:blip r:embed="rId15"/>
           <a:srcRect b="428"/>
           <a:stretch>
             <a:fillRect/>
@@ -4809,7 +5158,7 @@
           <p:nvPr/>
         </p:nvPicPr>
         <p:blipFill>
-          <a:blip r:embed="rId17"/>
+          <a:blip r:embed="rId16"/>
           <a:stretch>
             <a:fillRect/>
           </a:stretch>
@@ -4838,7 +5187,7 @@
 </file>
 
 <file path=ppt/slides/slide2.xml><?xml version="1.0" encoding="utf-8"?>
-<p:sld xmlns:a="http://schemas.openxmlformats.org/drawingml/2006/main" xmlns:p="http://schemas.openxmlformats.org/presentationml/2006/main" xmlns:r="http://schemas.openxmlformats.org/officeDocument/2006/relationships">
+<p:sld xmlns:a="http://schemas.openxmlformats.org/drawingml/2006/main" xmlns:r="http://schemas.openxmlformats.org/officeDocument/2006/relationships" xmlns:p="http://schemas.openxmlformats.org/presentationml/2006/main">
   <p:cSld>
     <p:spTree>
       <p:nvGrpSpPr>
@@ -4846,7 +5195,14 @@
         <p:cNvGrpSpPr/>
         <p:nvPr/>
       </p:nvGrpSpPr>
-      <p:grpSpPr/>
+      <p:grpSpPr>
+        <a:xfrm>
+          <a:off x="0" y="0"/>
+          <a:ext cx="0" cy="0"/>
+          <a:chOff x="0" y="0"/>
+          <a:chExt cx="0" cy="0"/>
+        </a:xfrm>
+      </p:grpSpPr>
       <p:sp>
         <p:nvSpPr>
           <p:cNvPr id="2" name="Title 1"/>
@@ -4863,7 +5219,7 @@
           <a:lstStyle/>
           <a:p>
             <a:r>
-              <a:t>O COO concentra 25 das 49 vagas e a estrutura mais longa da casa; no CCO, 7 dos 8 gestores lideram até 2 pessoas e a vaga de TL de High-Tech existe no organograma, mas não na planilha de vagas</a:t>
+              <a:t>O Co-CEO tem 330 liderados em 6 diretorias e 49 vagas em aberto, mas 41 delas nunca foram abertas — e duas posições de chefia existem só no organograma, sem vaga na planilha</a:t>
             </a:r>
           </a:p>
         </p:txBody>
@@ -4875,7 +5231,7 @@
             <a:spLocks noGrp="1"/>
           </p:cNvSpPr>
           <p:nvPr>
-            <p:ph type="body" idx="10" sz="quarter"/>
+            <p:ph type="body" sz="quarter" idx="10"/>
           </p:nvPr>
         </p:nvSpPr>
         <p:spPr/>
@@ -4884,7 +5240,7 @@
           <a:lstStyle/>
           <a:p>
             <a:r>
-              <a:t>Estrutura × Vagas | Visão da casa</a:t>
+              <a:t>Estrutura × Vagas | Visão geral</a:t>
             </a:r>
           </a:p>
         </p:txBody>
@@ -4896,7 +5252,7 @@
             <a:spLocks noGrp="1"/>
           </p:cNvSpPr>
           <p:nvPr>
-            <p:ph type="body" idx="11" sz="quarter"/>
+            <p:ph type="body" sz="quarter" idx="11"/>
           </p:nvPr>
         </p:nvSpPr>
         <p:spPr>
@@ -4910,7 +5266,7 @@
           <a:lstStyle/>
           <a:p>
             <a:r>
-              <a:t>336 pessoas em 7 níveis · 66 gestores · 18 deles lideram até 2 pessoas · 49 vagas, 8 publicadas no Gupy</a:t>
+              <a:t>331 pessoas · 66 gestores · 49 vagas, 8 publicadas no Gupy · 2 posições de chefia sem vaga</a:t>
             </a:r>
           </a:p>
         </p:txBody>
@@ -4922,7 +5278,7 @@
             <a:spLocks noGrp="1"/>
           </p:cNvSpPr>
           <p:nvPr>
-            <p:ph type="body" idx="13" sz="quarter"/>
+            <p:ph type="body" sz="quarter" idx="13"/>
           </p:nvPr>
         </p:nvSpPr>
         <p:spPr/>
@@ -4931,7 +5287,7 @@
           <a:lstStyle/>
           <a:p>
             <a:r>
-              <a:t>Fonte: ATY | Gestores por Level (organograma out/26, diretos e indiretos) · planilha de vagas (21/10/26) · Gupy · Draft 23 Out 26 · Base Setembro/26 (RH)</a:t>
+              <a:t>Fonte: ATY | Colaboradores Factorial (organograma out/26, sem as 5 admissões de novembro) · planilha de vagas (21/10/26) · Gupy · Draft 23 Out 26</a:t>
             </a:r>
           </a:p>
         </p:txBody>
@@ -4944,8 +5300,8 @@
         </p:nvSpPr>
         <p:spPr>
           <a:xfrm>
-            <a:off x="356616" y="1472184"/>
-            <a:ext cx="5669280" cy="365760"/>
+            <a:off x="352425" y="1447800"/>
+            <a:ext cx="11496675" cy="361950"/>
           </a:xfrm>
           <a:prstGeom prst="rect">
             <a:avLst/>
@@ -4953,16 +5309,12 @@
           <a:noFill/>
         </p:spPr>
         <p:txBody>
-          <a:bodyPr wrap="square" lIns="18288" rIns="18288" tIns="0" bIns="0" anchor="t">
+          <a:bodyPr wrap="square" lIns="0" rIns="0" tIns="0" bIns="0">
             <a:spAutoFit/>
           </a:bodyPr>
           <a:lstStyle/>
           <a:p>
-            <a:pPr algn="l">
-              <a:spcAft>
-                <a:spcPts val="0"/>
-              </a:spcAft>
-            </a:pPr>
+            <a:pPr algn="l"/>
             <a:r>
               <a:rPr sz="1050" b="1">
                 <a:solidFill>
@@ -4970,64 +5322,200 @@
                 </a:solidFill>
                 <a:latin typeface="Arial"/>
               </a:rPr>
-              <a:t>Diretos e indiretos por diretoria (L3)</a:t>
-            </a:r>
-          </a:p>
-          <a:p>
-            <a:pPr algn="l">
-              <a:spcAft>
-                <a:spcPts val="0"/>
-              </a:spcAft>
-            </a:pPr>
-            <a:r>
-              <a:rPr sz="1000" b="0" i="1">
+              <a:t>Organograma por cargo</a:t>
+            </a:r>
+          </a:p>
+        </p:txBody>
+      </p:sp>
+      <p:sp>
+        <p:nvSpPr>
+          <p:cNvPr id="8" name="TextBox 7"/>
+          <p:cNvSpPr txBox="1"/>
+          <p:nvPr/>
+        </p:nvSpPr>
+        <p:spPr>
+          <a:xfrm>
+            <a:off x="352425" y="1590675"/>
+            <a:ext cx="11496675" cy="190500"/>
+          </a:xfrm>
+          <a:prstGeom prst="rect">
+            <a:avLst/>
+          </a:prstGeom>
+          <a:noFill/>
+        </p:spPr>
+        <p:txBody>
+          <a:bodyPr wrap="square" lIns="0" rIns="0" tIns="0" bIns="0">
+            <a:spAutoFit/>
+          </a:bodyPr>
+          <a:lstStyle/>
+          <a:p>
+            <a:pPr algn="l"/>
+            <a:r>
+              <a:rPr sz="1000" b="0">
                 <a:solidFill>
                   <a:srgbClr val="262626"/>
                 </a:solidFill>
                 <a:latin typeface="Arial"/>
               </a:rPr>
-              <a:t>nº de pessoas abaixo de cada reporte do Co-CEO</a:t>
+              <a:t>cada caixa é um cargo, com o quadro atual e as vagas em aberto; em laranja, o que falta</a:t>
             </a:r>
           </a:p>
         </p:txBody>
       </p:sp>
-      <p:graphicFrame>
-        <p:nvGraphicFramePr>
-          <p:cNvPr id="8" name="Chart 7"/>
-          <p:cNvGraphicFramePr>
-            <a:graphicFrameLocks noGrp="1"/>
-          </p:cNvGraphicFramePr>
+      <p:sp>
+        <p:nvSpPr>
+          <p:cNvPr id="9" name="Rounded Rectangle 8"/>
+          <p:cNvSpPr/>
           <p:nvPr/>
-        </p:nvGraphicFramePr>
-        <p:xfrm>
-          <a:off x="310896" y="1828800"/>
-          <a:ext cx="5715000" cy="2148840"/>
-        </p:xfrm>
-        <a:graphic>
-          <a:graphicData uri="http://schemas.openxmlformats.org/drawingml/2006/chart">
-            <c:chart xmlns:c="http://schemas.openxmlformats.org/drawingml/2006/chart" r:id="rId2"/>
-          </a:graphicData>
-        </a:graphic>
-      </p:graphicFrame>
+        </p:nvSpPr>
+        <p:spPr>
+          <a:xfrm>
+            <a:off x="4857750" y="1866900"/>
+            <a:ext cx="2476500" cy="381000"/>
+          </a:xfrm>
+          <a:prstGeom prst="roundRect">
+            <a:avLst>
+              <a:gd name="adj" fmla="val 8000"/>
+            </a:avLst>
+          </a:prstGeom>
+          <a:solidFill>
+            <a:srgbClr val="1D368E"/>
+          </a:solidFill>
+          <a:ln>
+            <a:noFill/>
+          </a:ln>
+        </p:spPr>
+        <p:style>
+          <a:lnRef idx="1">
+            <a:schemeClr val="accent1"/>
+          </a:lnRef>
+          <a:fillRef idx="3">
+            <a:schemeClr val="accent1"/>
+          </a:fillRef>
+          <a:effectRef idx="2">
+            <a:schemeClr val="accent1"/>
+          </a:effectRef>
+          <a:fontRef idx="minor">
+            <a:schemeClr val="lt1"/>
+          </a:fontRef>
+        </p:style>
+        <p:txBody>
+          <a:bodyPr rtlCol="0" anchor="ctr" wrap="square" lIns="57150" rIns="57150" tIns="19050" bIns="19050"/>
+          <a:lstStyle/>
+          <a:p>
+            <a:pPr algn="ctr"/>
+            <a:r>
+              <a:rPr sz="1100" b="1">
+                <a:solidFill>
+                  <a:srgbClr val="FFFFFF"/>
+                </a:solidFill>
+                <a:latin typeface="Arial"/>
+              </a:rPr>
+              <a:t>Co-CEO</a:t>
+            </a:r>
+          </a:p>
+          <a:p>
+            <a:pPr algn="ctr"/>
+            <a:r>
+              <a:rPr sz="850" b="0">
+                <a:solidFill>
+                  <a:srgbClr val="FFFFFF"/>
+                </a:solidFill>
+                <a:latin typeface="Arial"/>
+              </a:rPr>
+              <a:t>330 liderados · 49 vagas</a:t>
+            </a:r>
+          </a:p>
+        </p:txBody>
+      </p:sp>
       <p:cxnSp>
         <p:nvCxnSpPr>
-          <p:cNvPr id="9" name="Connector 8"/>
+          <p:cNvPr id="10" name="Connector 9"/>
           <p:cNvCxnSpPr/>
           <p:nvPr/>
         </p:nvCxnSpPr>
         <p:spPr>
           <a:xfrm>
-            <a:off x="320040" y="3995928"/>
-            <a:ext cx="5715000" cy="0"/>
+            <a:off x="6096000" y="2247900"/>
+            <a:ext cx="0" cy="114300"/>
           </a:xfrm>
-          <a:prstGeom prst="line">
+          <a:prstGeom prst="bentConnector3">
             <a:avLst/>
           </a:prstGeom>
-          <a:ln w="9525">
+          <a:ln w="12700">
             <a:solidFill>
               <a:srgbClr val="BFBFBF"/>
             </a:solidFill>
-            <a:prstDash val="dash"/>
+          </a:ln>
+        </p:spPr>
+        <p:style>
+          <a:lnRef idx="2">
+            <a:schemeClr val="accent1"/>
+          </a:lnRef>
+          <a:fillRef idx="0">
+            <a:schemeClr val="accent1"/>
+          </a:fillRef>
+          <a:effectRef idx="1">
+            <a:schemeClr val="accent1"/>
+          </a:effectRef>
+          <a:fontRef idx="minor">
+            <a:schemeClr val="tx1"/>
+          </a:fontRef>
+        </p:style>
+      </p:cxnSp>
+      <p:cxnSp>
+        <p:nvCxnSpPr>
+          <p:cNvPr id="11" name="Connector 10"/>
+          <p:cNvCxnSpPr/>
+          <p:nvPr/>
+        </p:nvCxnSpPr>
+        <p:spPr>
+          <a:xfrm>
+            <a:off x="1209675" y="2362200"/>
+            <a:ext cx="9572625" cy="0"/>
+          </a:xfrm>
+          <a:prstGeom prst="bentConnector3">
+            <a:avLst/>
+          </a:prstGeom>
+          <a:ln w="12700">
+            <a:solidFill>
+              <a:srgbClr val="BFBFBF"/>
+            </a:solidFill>
+          </a:ln>
+        </p:spPr>
+        <p:style>
+          <a:lnRef idx="2">
+            <a:schemeClr val="accent1"/>
+          </a:lnRef>
+          <a:fillRef idx="0">
+            <a:schemeClr val="accent1"/>
+          </a:fillRef>
+          <a:effectRef idx="1">
+            <a:schemeClr val="accent1"/>
+          </a:effectRef>
+          <a:fontRef idx="minor">
+            <a:schemeClr val="tx1"/>
+          </a:fontRef>
+        </p:style>
+      </p:cxnSp>
+      <p:cxnSp>
+        <p:nvCxnSpPr>
+          <p:cNvPr id="12" name="Connector 11"/>
+          <p:cNvCxnSpPr/>
+          <p:nvPr/>
+        </p:nvCxnSpPr>
+        <p:spPr>
+          <a:xfrm>
+            <a:off x="1209675" y="2362200"/>
+            <a:ext cx="0" cy="114300"/>
+          </a:xfrm>
+          <a:prstGeom prst="bentConnector3">
+            <a:avLst/>
+          </a:prstGeom>
+          <a:ln w="12700">
+            <a:solidFill>
+              <a:srgbClr val="BFBFBF"/>
+            </a:solidFill>
           </a:ln>
         </p:spPr>
         <p:style>
@@ -5047,96 +5535,88 @@
       </p:cxnSp>
       <p:sp>
         <p:nvSpPr>
-          <p:cNvPr id="10" name="TextBox 9"/>
-          <p:cNvSpPr txBox="1"/>
+          <p:cNvPr id="13" name="Rounded Rectangle 12"/>
+          <p:cNvSpPr/>
           <p:nvPr/>
         </p:nvSpPr>
         <p:spPr>
           <a:xfrm>
-            <a:off x="356616" y="4069080"/>
-            <a:ext cx="5669280" cy="365760"/>
+            <a:off x="352425" y="2476500"/>
+            <a:ext cx="1714500" cy="495300"/>
           </a:xfrm>
-          <a:prstGeom prst="rect">
-            <a:avLst/>
+          <a:prstGeom prst="roundRect">
+            <a:avLst>
+              <a:gd name="adj" fmla="val 8000"/>
+            </a:avLst>
           </a:prstGeom>
-          <a:noFill/>
+          <a:solidFill>
+            <a:srgbClr val="009796"/>
+          </a:solidFill>
+          <a:ln>
+            <a:noFill/>
+          </a:ln>
         </p:spPr>
+        <p:style>
+          <a:lnRef idx="1">
+            <a:schemeClr val="accent1"/>
+          </a:lnRef>
+          <a:fillRef idx="3">
+            <a:schemeClr val="accent1"/>
+          </a:fillRef>
+          <a:effectRef idx="2">
+            <a:schemeClr val="accent1"/>
+          </a:effectRef>
+          <a:fontRef idx="minor">
+            <a:schemeClr val="lt1"/>
+          </a:fontRef>
+        </p:style>
         <p:txBody>
-          <a:bodyPr wrap="square" lIns="18288" rIns="18288" tIns="0" bIns="0" anchor="t">
-            <a:spAutoFit/>
-          </a:bodyPr>
+          <a:bodyPr rtlCol="0" anchor="ctr" wrap="square" lIns="57150" rIns="57150" tIns="19050" bIns="19050"/>
           <a:lstStyle/>
           <a:p>
-            <a:pPr algn="l">
-              <a:spcAft>
-                <a:spcPts val="0"/>
-              </a:spcAft>
-            </a:pPr>
-            <a:r>
-              <a:rPr sz="1050" b="1">
-                <a:solidFill>
-                  <a:srgbClr val="262626"/>
+            <a:pPr algn="ctr"/>
+            <a:r>
+              <a:rPr sz="950" b="1">
+                <a:solidFill>
+                  <a:srgbClr val="FFFFFF"/>
                 </a:solidFill>
                 <a:latin typeface="Arial"/>
               </a:rPr>
-              <a:t>Vagas em aberto por diretoria</a:t>
-            </a:r>
-          </a:p>
-          <a:p>
-            <a:pPr algn="l">
-              <a:spcAft>
-                <a:spcPts val="0"/>
-              </a:spcAft>
-            </a:pPr>
-            <a:r>
-              <a:rPr sz="1000" b="0" i="1">
-                <a:solidFill>
-                  <a:srgbClr val="262626"/>
+              <a:t>COO</a:t>
+            </a:r>
+          </a:p>
+          <a:p>
+            <a:pPr algn="ctr"/>
+            <a:r>
+              <a:rPr sz="800" b="0">
+                <a:solidFill>
+                  <a:srgbClr val="FFFFFF"/>
                 </a:solidFill>
                 <a:latin typeface="Arial"/>
               </a:rPr>
-              <a:t>publicadas no Gupy × ainda sem processo</a:t>
+              <a:t>200 pessoas · 34 vagas</a:t>
             </a:r>
           </a:p>
         </p:txBody>
       </p:sp>
-      <p:graphicFrame>
-        <p:nvGraphicFramePr>
-          <p:cNvPr id="11" name="Chart 10"/>
-          <p:cNvGraphicFramePr>
-            <a:graphicFrameLocks noGrp="1"/>
-          </p:cNvGraphicFramePr>
-          <p:nvPr/>
-        </p:nvGraphicFramePr>
-        <p:xfrm>
-          <a:off x="310896" y="4407408"/>
-          <a:ext cx="5715000" cy="1874519"/>
-        </p:xfrm>
-        <a:graphic>
-          <a:graphicData uri="http://schemas.openxmlformats.org/drawingml/2006/chart">
-            <c:chart xmlns:c="http://schemas.openxmlformats.org/drawingml/2006/chart" r:id="rId3"/>
-          </a:graphicData>
-        </a:graphic>
-      </p:graphicFrame>
       <p:cxnSp>
         <p:nvCxnSpPr>
-          <p:cNvPr id="12" name="Connector 11"/>
+          <p:cNvPr id="14" name="Connector 13"/>
           <p:cNvCxnSpPr/>
           <p:nvPr/>
         </p:nvCxnSpPr>
         <p:spPr>
           <a:xfrm>
-            <a:off x="6099048" y="1472184"/>
-            <a:ext cx="0" cy="4745736"/>
+            <a:off x="3124200" y="2362200"/>
+            <a:ext cx="0" cy="114300"/>
           </a:xfrm>
-          <a:prstGeom prst="line">
+          <a:prstGeom prst="bentConnector3">
             <a:avLst/>
           </a:prstGeom>
-          <a:ln w="9525">
+          <a:ln w="12700">
             <a:solidFill>
               <a:srgbClr val="BFBFBF"/>
             </a:solidFill>
-            <a:prstDash val="dash"/>
           </a:ln>
         </p:spPr>
         <p:style>
@@ -5156,1734 +5636,957 @@
       </p:cxnSp>
       <p:sp>
         <p:nvSpPr>
-          <p:cNvPr id="13" name="TextBox 12"/>
-          <p:cNvSpPr txBox="1"/>
-          <p:nvPr/>
-        </p:nvSpPr>
-        <p:spPr>
-          <a:xfrm>
-            <a:off x="6227064" y="1472184"/>
-            <a:ext cx="5623560" cy="365760"/>
-          </a:xfrm>
-          <a:prstGeom prst="rect">
-            <a:avLst/>
-          </a:prstGeom>
-          <a:noFill/>
-        </p:spPr>
-        <p:txBody>
-          <a:bodyPr wrap="square" lIns="18288" rIns="18288" tIns="0" bIns="0" anchor="t">
-            <a:spAutoFit/>
-          </a:bodyPr>
-          <a:lstStyle/>
-          <a:p>
-            <a:pPr algn="l">
-              <a:spcAft>
-                <a:spcPts val="0"/>
-              </a:spcAft>
-            </a:pPr>
-            <a:r>
-              <a:rPr sz="1050" b="1">
-                <a:solidFill>
-                  <a:srgbClr val="262626"/>
-                </a:solidFill>
-                <a:latin typeface="Arial"/>
-              </a:rPr>
-              <a:t>Estrutura de gestão × vagas por diretoria</a:t>
-            </a:r>
-          </a:p>
-          <a:p>
-            <a:pPr algn="l">
-              <a:spcAft>
-                <a:spcPts val="0"/>
-              </a:spcAft>
-            </a:pPr>
-            <a:r>
-              <a:rPr sz="1000" b="0" i="1">
-                <a:solidFill>
-                  <a:srgbClr val="262626"/>
-                </a:solidFill>
-                <a:latin typeface="Arial"/>
-              </a:rPr>
-              <a:t>gestor = quem lidera ao menos uma pessoa</a:t>
-            </a:r>
-          </a:p>
-        </p:txBody>
-      </p:sp>
-      <p:graphicFrame>
-        <p:nvGraphicFramePr>
-          <p:cNvPr id="14" name="Table 13"/>
-          <p:cNvGraphicFramePr>
-            <a:graphicFrameLocks noGrp="1"/>
-          </p:cNvGraphicFramePr>
-          <p:nvPr/>
-        </p:nvGraphicFramePr>
-        <p:xfrm>
-          <a:off x="6227064" y="1874519"/>
-          <a:ext cx="5623560" cy="2228850"/>
-        </p:xfrm>
-        <a:graphic>
-          <a:graphicData uri="http://schemas.openxmlformats.org/drawingml/2006/table">
-            <a:tbl>
-              <a:tblPr firstRow="0" bandRow="0">
-                <a:tableStyleId>{5940675A-B579-460E-94D1-54222C63F5DA}</a:tableStyleId>
-              </a:tblPr>
-              <a:tblGrid>
-                <a:gridCol w="1188720"/>
-                <a:gridCol w="640080"/>
-                <a:gridCol w="777240"/>
-                <a:gridCol w="731520"/>
-                <a:gridCol w="1051560"/>
-                <a:gridCol w="594360"/>
-                <a:gridCol w="640080"/>
-              </a:tblGrid>
-              <a:tr h="222885">
-                <a:tc>
-                  <a:txBody>
-                    <a:bodyPr wrap="square"/>
-                    <a:lstStyle/>
-                    <a:p>
-                      <a:pPr algn="l"/>
-                      <a:r>
-                        <a:rPr sz="950" b="1">
-                          <a:solidFill>
-                            <a:srgbClr val="FFFFFF"/>
-                          </a:solidFill>
-                          <a:latin typeface="Arial"/>
-                        </a:rPr>
-                        <a:t>Diretoria</a:t>
-                      </a:r>
-                    </a:p>
-                  </a:txBody>
-                  <a:tcPr marL="54864" marR="54864" marT="18288" marB="18288" anchor="ctr">
-                    <a:solidFill>
-                      <a:srgbClr val="009796"/>
-                    </a:solidFill>
-                  </a:tcPr>
-                </a:tc>
-                <a:tc>
-                  <a:txBody>
-                    <a:bodyPr wrap="square"/>
-                    <a:lstStyle/>
-                    <a:p>
-                      <a:pPr algn="ctr"/>
-                      <a:r>
-                        <a:rPr sz="950" b="1">
-                          <a:solidFill>
-                            <a:srgbClr val="FFFFFF"/>
-                          </a:solidFill>
-                          <a:latin typeface="Arial"/>
-                        </a:rPr>
-                        <a:t>Diretos</a:t>
-                      </a:r>
-                    </a:p>
-                  </a:txBody>
-                  <a:tcPr marL="54864" marR="54864" marT="18288" marB="18288" anchor="ctr">
-                    <a:solidFill>
-                      <a:srgbClr val="009796"/>
-                    </a:solidFill>
-                  </a:tcPr>
-                </a:tc>
-                <a:tc>
-                  <a:txBody>
-                    <a:bodyPr wrap="square"/>
-                    <a:lstStyle/>
-                    <a:p>
-                      <a:pPr algn="ctr"/>
-                      <a:r>
-                        <a:rPr sz="950" b="1">
-                          <a:solidFill>
-                            <a:srgbClr val="FFFFFF"/>
-                          </a:solidFill>
-                          <a:latin typeface="Arial"/>
-                        </a:rPr>
-                        <a:t>Indiretos</a:t>
-                      </a:r>
-                    </a:p>
-                  </a:txBody>
-                  <a:tcPr marL="54864" marR="54864" marT="18288" marB="18288" anchor="ctr">
-                    <a:solidFill>
-                      <a:srgbClr val="009796"/>
-                    </a:solidFill>
-                  </a:tcPr>
-                </a:tc>
-                <a:tc>
-                  <a:txBody>
-                    <a:bodyPr wrap="square"/>
-                    <a:lstStyle/>
-                    <a:p>
-                      <a:pPr algn="ctr"/>
-                      <a:r>
-                        <a:rPr sz="950" b="1">
-                          <a:solidFill>
-                            <a:srgbClr val="FFFFFF"/>
-                          </a:solidFill>
-                          <a:latin typeface="Arial"/>
-                        </a:rPr>
-                        <a:t>Gestores</a:t>
-                      </a:r>
-                    </a:p>
-                  </a:txBody>
-                  <a:tcPr marL="54864" marR="54864" marT="18288" marB="18288" anchor="ctr">
-                    <a:solidFill>
-                      <a:srgbClr val="009796"/>
-                    </a:solidFill>
-                  </a:tcPr>
-                </a:tc>
-                <a:tc>
-                  <a:txBody>
-                    <a:bodyPr wrap="square"/>
-                    <a:lstStyle/>
-                    <a:p>
-                      <a:pPr algn="ctr"/>
-                      <a:r>
-                        <a:rPr sz="950" b="1">
-                          <a:solidFill>
-                            <a:srgbClr val="FFFFFF"/>
-                          </a:solidFill>
-                          <a:latin typeface="Arial"/>
-                        </a:rPr>
-                        <a:t>Gestores com até 2 diretos</a:t>
-                      </a:r>
-                    </a:p>
-                  </a:txBody>
-                  <a:tcPr marL="54864" marR="54864" marT="18288" marB="18288" anchor="ctr">
-                    <a:solidFill>
-                      <a:srgbClr val="009796"/>
-                    </a:solidFill>
-                  </a:tcPr>
-                </a:tc>
-                <a:tc>
-                  <a:txBody>
-                    <a:bodyPr wrap="square"/>
-                    <a:lstStyle/>
-                    <a:p>
-                      <a:pPr algn="ctr"/>
-                      <a:r>
-                        <a:rPr sz="950" b="1">
-                          <a:solidFill>
-                            <a:srgbClr val="FFFFFF"/>
-                          </a:solidFill>
-                          <a:latin typeface="Arial"/>
-                        </a:rPr>
-                        <a:t>Vagas</a:t>
-                      </a:r>
-                    </a:p>
-                  </a:txBody>
-                  <a:tcPr marL="54864" marR="54864" marT="18288" marB="18288" anchor="ctr">
-                    <a:solidFill>
-                      <a:srgbClr val="009796"/>
-                    </a:solidFill>
-                  </a:tcPr>
-                </a:tc>
-                <a:tc>
-                  <a:txBody>
-                    <a:bodyPr wrap="square"/>
-                    <a:lstStyle/>
-                    <a:p>
-                      <a:pPr algn="ctr"/>
-                      <a:r>
-                        <a:rPr sz="950" b="1">
-                          <a:solidFill>
-                            <a:srgbClr val="FFFFFF"/>
-                          </a:solidFill>
-                          <a:latin typeface="Arial"/>
-                        </a:rPr>
-                        <a:t>% aberto</a:t>
-                      </a:r>
-                    </a:p>
-                  </a:txBody>
-                  <a:tcPr marL="54864" marR="54864" marT="18288" marB="18288" anchor="ctr">
-                    <a:solidFill>
-                      <a:srgbClr val="009796"/>
-                    </a:solidFill>
-                  </a:tcPr>
-                </a:tc>
-              </a:tr>
-              <a:tr h="222885">
-                <a:tc>
-                  <a:txBody>
-                    <a:bodyPr wrap="square"/>
-                    <a:lstStyle/>
-                    <a:p>
-                      <a:pPr algn="l"/>
-                      <a:r>
-                        <a:rPr sz="950" b="1">
-                          <a:solidFill>
-                            <a:srgbClr val="000000"/>
-                          </a:solidFill>
-                          <a:latin typeface="Arial"/>
-                        </a:rPr>
-                        <a:t>COO</a:t>
-                      </a:r>
-                    </a:p>
-                  </a:txBody>
-                  <a:tcPr marL="54864" marR="54864" marT="18288" marB="18288" anchor="ctr">
-                    <a:solidFill>
-                      <a:srgbClr val="F2F2F2"/>
-                    </a:solidFill>
-                  </a:tcPr>
-                </a:tc>
-                <a:tc>
-                  <a:txBody>
-                    <a:bodyPr wrap="square"/>
-                    <a:lstStyle/>
-                    <a:p>
-                      <a:pPr algn="ctr"/>
-                      <a:r>
-                        <a:rPr sz="950" b="0">
-                          <a:solidFill>
-                            <a:srgbClr val="000000"/>
-                          </a:solidFill>
-                          <a:latin typeface="Arial"/>
-                        </a:rPr>
-                        <a:t>6</a:t>
-                      </a:r>
-                    </a:p>
-                  </a:txBody>
-                  <a:tcPr marL="54864" marR="54864" marT="18288" marB="18288" anchor="ctr">
-                    <a:solidFill>
-                      <a:srgbClr val="F2F2F2"/>
-                    </a:solidFill>
-                  </a:tcPr>
-                </a:tc>
-                <a:tc>
-                  <a:txBody>
-                    <a:bodyPr wrap="square"/>
-                    <a:lstStyle/>
-                    <a:p>
-                      <a:pPr algn="ctr"/>
-                      <a:r>
-                        <a:rPr sz="950" b="0">
-                          <a:solidFill>
-                            <a:srgbClr val="000000"/>
-                          </a:solidFill>
-                          <a:latin typeface="Arial"/>
-                        </a:rPr>
-                        <a:t>148</a:t>
-                      </a:r>
-                    </a:p>
-                  </a:txBody>
-                  <a:tcPr marL="54864" marR="54864" marT="18288" marB="18288" anchor="ctr">
-                    <a:solidFill>
-                      <a:srgbClr val="F2F2F2"/>
-                    </a:solidFill>
-                  </a:tcPr>
-                </a:tc>
-                <a:tc>
-                  <a:txBody>
-                    <a:bodyPr wrap="square"/>
-                    <a:lstStyle/>
-                    <a:p>
-                      <a:pPr algn="ctr"/>
-                      <a:r>
-                        <a:rPr sz="950" b="0">
-                          <a:solidFill>
-                            <a:srgbClr val="000000"/>
-                          </a:solidFill>
-                          <a:latin typeface="Arial"/>
-                        </a:rPr>
-                        <a:t>29</a:t>
-                      </a:r>
-                    </a:p>
-                  </a:txBody>
-                  <a:tcPr marL="54864" marR="54864" marT="18288" marB="18288" anchor="ctr">
-                    <a:solidFill>
-                      <a:srgbClr val="F2F2F2"/>
-                    </a:solidFill>
-                  </a:tcPr>
-                </a:tc>
-                <a:tc>
-                  <a:txBody>
-                    <a:bodyPr wrap="square"/>
-                    <a:lstStyle/>
-                    <a:p>
-                      <a:pPr algn="ctr"/>
-                      <a:r>
-                        <a:rPr sz="950" b="0">
-                          <a:solidFill>
-                            <a:srgbClr val="000000"/>
-                          </a:solidFill>
-                          <a:latin typeface="Arial"/>
-                        </a:rPr>
-                        <a:t>6</a:t>
-                      </a:r>
-                    </a:p>
-                  </a:txBody>
-                  <a:tcPr marL="54864" marR="54864" marT="18288" marB="18288" anchor="ctr">
-                    <a:solidFill>
-                      <a:srgbClr val="F2F2F2"/>
-                    </a:solidFill>
-                  </a:tcPr>
-                </a:tc>
-                <a:tc>
-                  <a:txBody>
-                    <a:bodyPr wrap="square"/>
-                    <a:lstStyle/>
-                    <a:p>
-                      <a:pPr algn="ctr"/>
-                      <a:r>
-                        <a:rPr sz="950" b="0">
-                          <a:solidFill>
-                            <a:srgbClr val="000000"/>
-                          </a:solidFill>
-                          <a:latin typeface="Arial"/>
-                        </a:rPr>
-                        <a:t>25</a:t>
-                      </a:r>
-                    </a:p>
-                  </a:txBody>
-                  <a:tcPr marL="54864" marR="54864" marT="18288" marB="18288" anchor="ctr">
-                    <a:solidFill>
-                      <a:srgbClr val="F2F2F2"/>
-                    </a:solidFill>
-                  </a:tcPr>
-                </a:tc>
-                <a:tc>
-                  <a:txBody>
-                    <a:bodyPr wrap="square"/>
-                    <a:lstStyle/>
-                    <a:p>
-                      <a:pPr algn="ctr"/>
-                      <a:r>
-                        <a:rPr sz="950" b="0">
-                          <a:solidFill>
-                            <a:srgbClr val="000000"/>
-                          </a:solidFill>
-                          <a:latin typeface="Arial"/>
-                        </a:rPr>
-                        <a:t>14%</a:t>
-                      </a:r>
-                    </a:p>
-                  </a:txBody>
-                  <a:tcPr marL="54864" marR="54864" marT="18288" marB="18288" anchor="ctr">
-                    <a:solidFill>
-                      <a:srgbClr val="F2F2F2"/>
-                    </a:solidFill>
-                  </a:tcPr>
-                </a:tc>
-              </a:tr>
-              <a:tr h="222885">
-                <a:tc>
-                  <a:txBody>
-                    <a:bodyPr wrap="square"/>
-                    <a:lstStyle/>
-                    <a:p>
-                      <a:pPr algn="l"/>
-                      <a:r>
-                        <a:rPr sz="950" b="1">
-                          <a:solidFill>
-                            <a:srgbClr val="000000"/>
-                          </a:solidFill>
-                          <a:latin typeface="Arial"/>
-                        </a:rPr>
-                        <a:t>CITO</a:t>
-                      </a:r>
-                    </a:p>
-                  </a:txBody>
-                  <a:tcPr marL="54864" marR="54864" marT="18288" marB="18288" anchor="ctr">
-                    <a:solidFill>
-                      <a:srgbClr val="FFFFFF"/>
-                    </a:solidFill>
-                  </a:tcPr>
-                </a:tc>
-                <a:tc>
-                  <a:txBody>
-                    <a:bodyPr wrap="square"/>
-                    <a:lstStyle/>
-                    <a:p>
-                      <a:pPr algn="ctr"/>
-                      <a:r>
-                        <a:rPr sz="950" b="0">
-                          <a:solidFill>
-                            <a:srgbClr val="000000"/>
-                          </a:solidFill>
-                          <a:latin typeface="Arial"/>
-                        </a:rPr>
-                        <a:t>2</a:t>
-                      </a:r>
-                    </a:p>
-                  </a:txBody>
-                  <a:tcPr marL="54864" marR="54864" marT="18288" marB="18288" anchor="ctr">
-                    <a:solidFill>
-                      <a:srgbClr val="FFFFFF"/>
-                    </a:solidFill>
-                  </a:tcPr>
-                </a:tc>
-                <a:tc>
-                  <a:txBody>
-                    <a:bodyPr wrap="square"/>
-                    <a:lstStyle/>
-                    <a:p>
-                      <a:pPr algn="ctr"/>
-                      <a:r>
-                        <a:rPr sz="950" b="0">
-                          <a:solidFill>
-                            <a:srgbClr val="000000"/>
-                          </a:solidFill>
-                          <a:latin typeface="Arial"/>
-                        </a:rPr>
-                        <a:t>45</a:t>
-                      </a:r>
-                    </a:p>
-                  </a:txBody>
-                  <a:tcPr marL="54864" marR="54864" marT="18288" marB="18288" anchor="ctr">
-                    <a:solidFill>
-                      <a:srgbClr val="FFFFFF"/>
-                    </a:solidFill>
-                  </a:tcPr>
-                </a:tc>
-                <a:tc>
-                  <a:txBody>
-                    <a:bodyPr wrap="square"/>
-                    <a:lstStyle/>
-                    <a:p>
-                      <a:pPr algn="ctr"/>
-                      <a:r>
-                        <a:rPr sz="950" b="0">
-                          <a:solidFill>
-                            <a:srgbClr val="000000"/>
-                          </a:solidFill>
-                          <a:latin typeface="Arial"/>
-                        </a:rPr>
-                        <a:t>5</a:t>
-                      </a:r>
-                    </a:p>
-                  </a:txBody>
-                  <a:tcPr marL="54864" marR="54864" marT="18288" marB="18288" anchor="ctr">
-                    <a:solidFill>
-                      <a:srgbClr val="FFFFFF"/>
-                    </a:solidFill>
-                  </a:tcPr>
-                </a:tc>
-                <a:tc>
-                  <a:txBody>
-                    <a:bodyPr wrap="square"/>
-                    <a:lstStyle/>
-                    <a:p>
-                      <a:pPr algn="ctr"/>
-                      <a:r>
-                        <a:rPr sz="950" b="0">
-                          <a:solidFill>
-                            <a:srgbClr val="000000"/>
-                          </a:solidFill>
-                          <a:latin typeface="Arial"/>
-                        </a:rPr>
-                        <a:t>1</a:t>
-                      </a:r>
-                    </a:p>
-                  </a:txBody>
-                  <a:tcPr marL="54864" marR="54864" marT="18288" marB="18288" anchor="ctr">
-                    <a:solidFill>
-                      <a:srgbClr val="FFFFFF"/>
-                    </a:solidFill>
-                  </a:tcPr>
-                </a:tc>
-                <a:tc>
-                  <a:txBody>
-                    <a:bodyPr wrap="square"/>
-                    <a:lstStyle/>
-                    <a:p>
-                      <a:pPr algn="ctr"/>
-                      <a:r>
-                        <a:rPr sz="950" b="0">
-                          <a:solidFill>
-                            <a:srgbClr val="000000"/>
-                          </a:solidFill>
-                          <a:latin typeface="Arial"/>
-                        </a:rPr>
-                        <a:t>2</a:t>
-                      </a:r>
-                    </a:p>
-                  </a:txBody>
-                  <a:tcPr marL="54864" marR="54864" marT="18288" marB="18288" anchor="ctr">
-                    <a:solidFill>
-                      <a:srgbClr val="FFFFFF"/>
-                    </a:solidFill>
-                  </a:tcPr>
-                </a:tc>
-                <a:tc>
-                  <a:txBody>
-                    <a:bodyPr wrap="square"/>
-                    <a:lstStyle/>
-                    <a:p>
-                      <a:pPr algn="ctr"/>
-                      <a:r>
-                        <a:rPr sz="950" b="0">
-                          <a:solidFill>
-                            <a:srgbClr val="000000"/>
-                          </a:solidFill>
-                          <a:latin typeface="Arial"/>
-                        </a:rPr>
-                        <a:t>4%</a:t>
-                      </a:r>
-                    </a:p>
-                  </a:txBody>
-                  <a:tcPr marL="54864" marR="54864" marT="18288" marB="18288" anchor="ctr">
-                    <a:solidFill>
-                      <a:srgbClr val="FFFFFF"/>
-                    </a:solidFill>
-                  </a:tcPr>
-                </a:tc>
-              </a:tr>
-              <a:tr h="222885">
-                <a:tc>
-                  <a:txBody>
-                    <a:bodyPr wrap="square"/>
-                    <a:lstStyle/>
-                    <a:p>
-                      <a:pPr algn="l"/>
-                      <a:r>
-                        <a:rPr sz="950" b="1">
-                          <a:solidFill>
-                            <a:srgbClr val="000000"/>
-                          </a:solidFill>
-                          <a:latin typeface="Arial"/>
-                        </a:rPr>
-                        <a:t>CFSO</a:t>
-                      </a:r>
-                    </a:p>
-                  </a:txBody>
-                  <a:tcPr marL="54864" marR="54864" marT="18288" marB="18288" anchor="ctr">
-                    <a:solidFill>
-                      <a:srgbClr val="F2F2F2"/>
-                    </a:solidFill>
-                  </a:tcPr>
-                </a:tc>
-                <a:tc>
-                  <a:txBody>
-                    <a:bodyPr wrap="square"/>
-                    <a:lstStyle/>
-                    <a:p>
-                      <a:pPr algn="ctr"/>
-                      <a:r>
-                        <a:rPr sz="950" b="0">
-                          <a:solidFill>
-                            <a:srgbClr val="000000"/>
-                          </a:solidFill>
-                          <a:latin typeface="Arial"/>
-                        </a:rPr>
-                        <a:t>7</a:t>
-                      </a:r>
-                    </a:p>
-                  </a:txBody>
-                  <a:tcPr marL="54864" marR="54864" marT="18288" marB="18288" anchor="ctr">
-                    <a:solidFill>
-                      <a:srgbClr val="F2F2F2"/>
-                    </a:solidFill>
-                  </a:tcPr>
-                </a:tc>
-                <a:tc>
-                  <a:txBody>
-                    <a:bodyPr wrap="square"/>
-                    <a:lstStyle/>
-                    <a:p>
-                      <a:pPr algn="ctr"/>
-                      <a:r>
-                        <a:rPr sz="950" b="0">
-                          <a:solidFill>
-                            <a:srgbClr val="000000"/>
-                          </a:solidFill>
-                          <a:latin typeface="Arial"/>
-                        </a:rPr>
-                        <a:t>26</a:t>
-                      </a:r>
-                    </a:p>
-                  </a:txBody>
-                  <a:tcPr marL="54864" marR="54864" marT="18288" marB="18288" anchor="ctr">
-                    <a:solidFill>
-                      <a:srgbClr val="F2F2F2"/>
-                    </a:solidFill>
-                  </a:tcPr>
-                </a:tc>
-                <a:tc>
-                  <a:txBody>
-                    <a:bodyPr wrap="square"/>
-                    <a:lstStyle/>
-                    <a:p>
-                      <a:pPr algn="ctr"/>
-                      <a:r>
-                        <a:rPr sz="950" b="0">
-                          <a:solidFill>
-                            <a:srgbClr val="000000"/>
-                          </a:solidFill>
-                          <a:latin typeface="Arial"/>
-                        </a:rPr>
-                        <a:t>6</a:t>
-                      </a:r>
-                    </a:p>
-                  </a:txBody>
-                  <a:tcPr marL="54864" marR="54864" marT="18288" marB="18288" anchor="ctr">
-                    <a:solidFill>
-                      <a:srgbClr val="F2F2F2"/>
-                    </a:solidFill>
-                  </a:tcPr>
-                </a:tc>
-                <a:tc>
-                  <a:txBody>
-                    <a:bodyPr wrap="square"/>
-                    <a:lstStyle/>
-                    <a:p>
-                      <a:pPr algn="ctr"/>
-                      <a:r>
-                        <a:rPr sz="950" b="0">
-                          <a:solidFill>
-                            <a:srgbClr val="000000"/>
-                          </a:solidFill>
-                          <a:latin typeface="Arial"/>
-                        </a:rPr>
-                        <a:t>1</a:t>
-                      </a:r>
-                    </a:p>
-                  </a:txBody>
-                  <a:tcPr marL="54864" marR="54864" marT="18288" marB="18288" anchor="ctr">
-                    <a:solidFill>
-                      <a:srgbClr val="F2F2F2"/>
-                    </a:solidFill>
-                  </a:tcPr>
-                </a:tc>
-                <a:tc>
-                  <a:txBody>
-                    <a:bodyPr wrap="square"/>
-                    <a:lstStyle/>
-                    <a:p>
-                      <a:pPr algn="ctr"/>
-                      <a:r>
-                        <a:rPr sz="950" b="0">
-                          <a:solidFill>
-                            <a:srgbClr val="000000"/>
-                          </a:solidFill>
-                          <a:latin typeface="Arial"/>
-                        </a:rPr>
-                        <a:t>3</a:t>
-                      </a:r>
-                    </a:p>
-                  </a:txBody>
-                  <a:tcPr marL="54864" marR="54864" marT="18288" marB="18288" anchor="ctr">
-                    <a:solidFill>
-                      <a:srgbClr val="F2F2F2"/>
-                    </a:solidFill>
-                  </a:tcPr>
-                </a:tc>
-                <a:tc>
-                  <a:txBody>
-                    <a:bodyPr wrap="square"/>
-                    <a:lstStyle/>
-                    <a:p>
-                      <a:pPr algn="ctr"/>
-                      <a:r>
-                        <a:rPr sz="950" b="0">
-                          <a:solidFill>
-                            <a:srgbClr val="000000"/>
-                          </a:solidFill>
-                          <a:latin typeface="Arial"/>
-                        </a:rPr>
-                        <a:t>8%</a:t>
-                      </a:r>
-                    </a:p>
-                  </a:txBody>
-                  <a:tcPr marL="54864" marR="54864" marT="18288" marB="18288" anchor="ctr">
-                    <a:solidFill>
-                      <a:srgbClr val="F2F2F2"/>
-                    </a:solidFill>
-                  </a:tcPr>
-                </a:tc>
-              </a:tr>
-              <a:tr h="222885">
-                <a:tc>
-                  <a:txBody>
-                    <a:bodyPr wrap="square"/>
-                    <a:lstStyle/>
-                    <a:p>
-                      <a:pPr algn="l"/>
-                      <a:r>
-                        <a:rPr sz="950" b="1">
-                          <a:solidFill>
-                            <a:srgbClr val="000000"/>
-                          </a:solidFill>
-                          <a:latin typeface="Arial"/>
-                        </a:rPr>
-                        <a:t>Air Product</a:t>
-                      </a:r>
-                    </a:p>
-                  </a:txBody>
-                  <a:tcPr marL="54864" marR="54864" marT="18288" marB="18288" anchor="ctr">
-                    <a:solidFill>
-                      <a:srgbClr val="FFFFFF"/>
-                    </a:solidFill>
-                  </a:tcPr>
-                </a:tc>
-                <a:tc>
-                  <a:txBody>
-                    <a:bodyPr wrap="square"/>
-                    <a:lstStyle/>
-                    <a:p>
-                      <a:pPr algn="ctr"/>
-                      <a:r>
-                        <a:rPr sz="950" b="0">
-                          <a:solidFill>
-                            <a:srgbClr val="000000"/>
-                          </a:solidFill>
-                          <a:latin typeface="Arial"/>
-                        </a:rPr>
-                        <a:t>2</a:t>
-                      </a:r>
-                    </a:p>
-                  </a:txBody>
-                  <a:tcPr marL="54864" marR="54864" marT="18288" marB="18288" anchor="ctr">
-                    <a:solidFill>
-                      <a:srgbClr val="FFFFFF"/>
-                    </a:solidFill>
-                  </a:tcPr>
-                </a:tc>
-                <a:tc>
-                  <a:txBody>
-                    <a:bodyPr wrap="square"/>
-                    <a:lstStyle/>
-                    <a:p>
-                      <a:pPr algn="ctr"/>
-                      <a:r>
-                        <a:rPr sz="950" b="0">
-                          <a:solidFill>
-                            <a:srgbClr val="000000"/>
-                          </a:solidFill>
-                          <a:latin typeface="Arial"/>
-                        </a:rPr>
-                        <a:t>26</a:t>
-                      </a:r>
-                    </a:p>
-                  </a:txBody>
-                  <a:tcPr marL="54864" marR="54864" marT="18288" marB="18288" anchor="ctr">
-                    <a:solidFill>
-                      <a:srgbClr val="FFFFFF"/>
-                    </a:solidFill>
-                  </a:tcPr>
-                </a:tc>
-                <a:tc>
-                  <a:txBody>
-                    <a:bodyPr wrap="square"/>
-                    <a:lstStyle/>
-                    <a:p>
-                      <a:pPr algn="ctr"/>
-                      <a:r>
-                        <a:rPr sz="950" b="0">
-                          <a:solidFill>
-                            <a:srgbClr val="000000"/>
-                          </a:solidFill>
-                          <a:latin typeface="Arial"/>
-                        </a:rPr>
-                        <a:t>6</a:t>
-                      </a:r>
-                    </a:p>
-                  </a:txBody>
-                  <a:tcPr marL="54864" marR="54864" marT="18288" marB="18288" anchor="ctr">
-                    <a:solidFill>
-                      <a:srgbClr val="FFFFFF"/>
-                    </a:solidFill>
-                  </a:tcPr>
-                </a:tc>
-                <a:tc>
-                  <a:txBody>
-                    <a:bodyPr wrap="square"/>
-                    <a:lstStyle/>
-                    <a:p>
-                      <a:pPr algn="ctr"/>
-                      <a:r>
-                        <a:rPr sz="950" b="0">
-                          <a:solidFill>
-                            <a:srgbClr val="000000"/>
-                          </a:solidFill>
-                          <a:latin typeface="Arial"/>
-                        </a:rPr>
-                        <a:t>1</a:t>
-                      </a:r>
-                    </a:p>
-                  </a:txBody>
-                  <a:tcPr marL="54864" marR="54864" marT="18288" marB="18288" anchor="ctr">
-                    <a:solidFill>
-                      <a:srgbClr val="FFFFFF"/>
-                    </a:solidFill>
-                  </a:tcPr>
-                </a:tc>
-                <a:tc>
-                  <a:txBody>
-                    <a:bodyPr wrap="square"/>
-                    <a:lstStyle/>
-                    <a:p>
-                      <a:pPr algn="ctr"/>
-                      <a:r>
-                        <a:rPr sz="950" b="0">
-                          <a:solidFill>
-                            <a:srgbClr val="000000"/>
-                          </a:solidFill>
-                          <a:latin typeface="Arial"/>
-                        </a:rPr>
-                        <a:t>7</a:t>
-                      </a:r>
-                    </a:p>
-                  </a:txBody>
-                  <a:tcPr marL="54864" marR="54864" marT="18288" marB="18288" anchor="ctr">
-                    <a:solidFill>
-                      <a:srgbClr val="FFFFFF"/>
-                    </a:solidFill>
-                  </a:tcPr>
-                </a:tc>
-                <a:tc>
-                  <a:txBody>
-                    <a:bodyPr wrap="square"/>
-                    <a:lstStyle/>
-                    <a:p>
-                      <a:pPr algn="ctr"/>
-                      <a:r>
-                        <a:rPr sz="950" b="1">
-                          <a:solidFill>
-                            <a:srgbClr val="6B2D6B"/>
-                          </a:solidFill>
-                          <a:latin typeface="Arial"/>
-                        </a:rPr>
-                        <a:t>19%</a:t>
-                      </a:r>
-                    </a:p>
-                  </a:txBody>
-                  <a:tcPr marL="54864" marR="54864" marT="18288" marB="18288" anchor="ctr">
-                    <a:solidFill>
-                      <a:srgbClr val="FFFFFF"/>
-                    </a:solidFill>
-                  </a:tcPr>
-                </a:tc>
-              </a:tr>
-              <a:tr h="222885">
-                <a:tc>
-                  <a:txBody>
-                    <a:bodyPr wrap="square"/>
-                    <a:lstStyle/>
-                    <a:p>
-                      <a:pPr algn="l"/>
-                      <a:r>
-                        <a:rPr sz="950" b="1">
-                          <a:solidFill>
-                            <a:srgbClr val="000000"/>
-                          </a:solidFill>
-                          <a:latin typeface="Arial"/>
-                        </a:rPr>
-                        <a:t>Talent</a:t>
-                      </a:r>
-                    </a:p>
-                  </a:txBody>
-                  <a:tcPr marL="54864" marR="54864" marT="18288" marB="18288" anchor="ctr">
-                    <a:solidFill>
-                      <a:srgbClr val="F2F2F2"/>
-                    </a:solidFill>
-                  </a:tcPr>
-                </a:tc>
-                <a:tc>
-                  <a:txBody>
-                    <a:bodyPr wrap="square"/>
-                    <a:lstStyle/>
-                    <a:p>
-                      <a:pPr algn="ctr"/>
-                      <a:r>
-                        <a:rPr sz="950" b="0">
-                          <a:solidFill>
-                            <a:srgbClr val="000000"/>
-                          </a:solidFill>
-                          <a:latin typeface="Arial"/>
-                        </a:rPr>
-                        <a:t>6</a:t>
-                      </a:r>
-                    </a:p>
-                  </a:txBody>
-                  <a:tcPr marL="54864" marR="54864" marT="18288" marB="18288" anchor="ctr">
-                    <a:solidFill>
-                      <a:srgbClr val="F2F2F2"/>
-                    </a:solidFill>
-                  </a:tcPr>
-                </a:tc>
-                <a:tc>
-                  <a:txBody>
-                    <a:bodyPr wrap="square"/>
-                    <a:lstStyle/>
-                    <a:p>
-                      <a:pPr algn="ctr"/>
-                      <a:r>
-                        <a:rPr sz="950" b="0">
-                          <a:solidFill>
-                            <a:srgbClr val="000000"/>
-                          </a:solidFill>
-                          <a:latin typeface="Arial"/>
-                        </a:rPr>
-                        <a:t>18</a:t>
-                      </a:r>
-                    </a:p>
-                  </a:txBody>
-                  <a:tcPr marL="54864" marR="54864" marT="18288" marB="18288" anchor="ctr">
-                    <a:solidFill>
-                      <a:srgbClr val="F2F2F2"/>
-                    </a:solidFill>
-                  </a:tcPr>
-                </a:tc>
-                <a:tc>
-                  <a:txBody>
-                    <a:bodyPr wrap="square"/>
-                    <a:lstStyle/>
-                    <a:p>
-                      <a:pPr algn="ctr"/>
-                      <a:r>
-                        <a:rPr sz="950" b="0">
-                          <a:solidFill>
-                            <a:srgbClr val="000000"/>
-                          </a:solidFill>
-                          <a:latin typeface="Arial"/>
-                        </a:rPr>
-                        <a:t>6</a:t>
-                      </a:r>
-                    </a:p>
-                  </a:txBody>
-                  <a:tcPr marL="54864" marR="54864" marT="18288" marB="18288" anchor="ctr">
-                    <a:solidFill>
-                      <a:srgbClr val="F2F2F2"/>
-                    </a:solidFill>
-                  </a:tcPr>
-                </a:tc>
-                <a:tc>
-                  <a:txBody>
-                    <a:bodyPr wrap="square"/>
-                    <a:lstStyle/>
-                    <a:p>
-                      <a:pPr algn="ctr"/>
-                      <a:r>
-                        <a:rPr sz="950" b="0">
-                          <a:solidFill>
-                            <a:srgbClr val="000000"/>
-                          </a:solidFill>
-                          <a:latin typeface="Arial"/>
-                        </a:rPr>
-                        <a:t>2</a:t>
-                      </a:r>
-                    </a:p>
-                  </a:txBody>
-                  <a:tcPr marL="54864" marR="54864" marT="18288" marB="18288" anchor="ctr">
-                    <a:solidFill>
-                      <a:srgbClr val="F2F2F2"/>
-                    </a:solidFill>
-                  </a:tcPr>
-                </a:tc>
-                <a:tc>
-                  <a:txBody>
-                    <a:bodyPr wrap="square"/>
-                    <a:lstStyle/>
-                    <a:p>
-                      <a:pPr algn="ctr"/>
-                      <a:r>
-                        <a:rPr sz="950" b="0">
-                          <a:solidFill>
-                            <a:srgbClr val="000000"/>
-                          </a:solidFill>
-                          <a:latin typeface="Arial"/>
-                        </a:rPr>
-                        <a:t>4</a:t>
-                      </a:r>
-                    </a:p>
-                  </a:txBody>
-                  <a:tcPr marL="54864" marR="54864" marT="18288" marB="18288" anchor="ctr">
-                    <a:solidFill>
-                      <a:srgbClr val="F2F2F2"/>
-                    </a:solidFill>
-                  </a:tcPr>
-                </a:tc>
-                <a:tc>
-                  <a:txBody>
-                    <a:bodyPr wrap="square"/>
-                    <a:lstStyle/>
-                    <a:p>
-                      <a:pPr algn="ctr"/>
-                      <a:r>
-                        <a:rPr sz="950" b="0">
-                          <a:solidFill>
-                            <a:srgbClr val="000000"/>
-                          </a:solidFill>
-                          <a:latin typeface="Arial"/>
-                        </a:rPr>
-                        <a:t>14%</a:t>
-                      </a:r>
-                    </a:p>
-                  </a:txBody>
-                  <a:tcPr marL="54864" marR="54864" marT="18288" marB="18288" anchor="ctr">
-                    <a:solidFill>
-                      <a:srgbClr val="F2F2F2"/>
-                    </a:solidFill>
-                  </a:tcPr>
-                </a:tc>
-              </a:tr>
-              <a:tr h="222885">
-                <a:tc>
-                  <a:txBody>
-                    <a:bodyPr wrap="square"/>
-                    <a:lstStyle/>
-                    <a:p>
-                      <a:pPr algn="l"/>
-                      <a:r>
-                        <a:rPr sz="950" b="1">
-                          <a:solidFill>
-                            <a:srgbClr val="000000"/>
-                          </a:solidFill>
-                          <a:latin typeface="Arial"/>
-                        </a:rPr>
-                        <a:t>CCO</a:t>
-                      </a:r>
-                    </a:p>
-                  </a:txBody>
-                  <a:tcPr marL="54864" marR="54864" marT="18288" marB="18288" anchor="ctr">
-                    <a:solidFill>
-                      <a:srgbClr val="FFFFFF"/>
-                    </a:solidFill>
-                  </a:tcPr>
-                </a:tc>
-                <a:tc>
-                  <a:txBody>
-                    <a:bodyPr wrap="square"/>
-                    <a:lstStyle/>
-                    <a:p>
-                      <a:pPr algn="ctr"/>
-                      <a:r>
-                        <a:rPr sz="950" b="0">
-                          <a:solidFill>
-                            <a:srgbClr val="000000"/>
-                          </a:solidFill>
-                          <a:latin typeface="Arial"/>
-                        </a:rPr>
-                        <a:t>5</a:t>
-                      </a:r>
-                    </a:p>
-                  </a:txBody>
-                  <a:tcPr marL="54864" marR="54864" marT="18288" marB="18288" anchor="ctr">
-                    <a:solidFill>
-                      <a:srgbClr val="FFFFFF"/>
-                    </a:solidFill>
-                  </a:tcPr>
-                </a:tc>
-                <a:tc>
-                  <a:txBody>
-                    <a:bodyPr wrap="square"/>
-                    <a:lstStyle/>
-                    <a:p>
-                      <a:pPr algn="ctr"/>
-                      <a:r>
-                        <a:rPr sz="950" b="0">
-                          <a:solidFill>
-                            <a:srgbClr val="000000"/>
-                          </a:solidFill>
-                          <a:latin typeface="Arial"/>
-                        </a:rPr>
-                        <a:t>13</a:t>
-                      </a:r>
-                    </a:p>
-                  </a:txBody>
-                  <a:tcPr marL="54864" marR="54864" marT="18288" marB="18288" anchor="ctr">
-                    <a:solidFill>
-                      <a:srgbClr val="FFFFFF"/>
-                    </a:solidFill>
-                  </a:tcPr>
-                </a:tc>
-                <a:tc>
-                  <a:txBody>
-                    <a:bodyPr wrap="square"/>
-                    <a:lstStyle/>
-                    <a:p>
-                      <a:pPr algn="ctr"/>
-                      <a:r>
-                        <a:rPr sz="950" b="0">
-                          <a:solidFill>
-                            <a:srgbClr val="000000"/>
-                          </a:solidFill>
-                          <a:latin typeface="Arial"/>
-                        </a:rPr>
-                        <a:t>8</a:t>
-                      </a:r>
-                    </a:p>
-                  </a:txBody>
-                  <a:tcPr marL="54864" marR="54864" marT="18288" marB="18288" anchor="ctr">
-                    <a:solidFill>
-                      <a:srgbClr val="FFFFFF"/>
-                    </a:solidFill>
-                  </a:tcPr>
-                </a:tc>
-                <a:tc>
-                  <a:txBody>
-                    <a:bodyPr wrap="square"/>
-                    <a:lstStyle/>
-                    <a:p>
-                      <a:pPr algn="ctr"/>
-                      <a:r>
-                        <a:rPr sz="950" b="1">
-                          <a:solidFill>
-                            <a:srgbClr val="6B2D6B"/>
-                          </a:solidFill>
-                          <a:latin typeface="Arial"/>
-                        </a:rPr>
-                        <a:t>7</a:t>
-                      </a:r>
-                    </a:p>
-                  </a:txBody>
-                  <a:tcPr marL="54864" marR="54864" marT="18288" marB="18288" anchor="ctr">
-                    <a:solidFill>
-                      <a:srgbClr val="FFFFFF"/>
-                    </a:solidFill>
-                  </a:tcPr>
-                </a:tc>
-                <a:tc>
-                  <a:txBody>
-                    <a:bodyPr wrap="square"/>
-                    <a:lstStyle/>
-                    <a:p>
-                      <a:pPr algn="ctr"/>
-                      <a:r>
-                        <a:rPr sz="950" b="0">
-                          <a:solidFill>
-                            <a:srgbClr val="000000"/>
-                          </a:solidFill>
-                          <a:latin typeface="Arial"/>
-                        </a:rPr>
-                        <a:t>5</a:t>
-                      </a:r>
-                    </a:p>
-                  </a:txBody>
-                  <a:tcPr marL="54864" marR="54864" marT="18288" marB="18288" anchor="ctr">
-                    <a:solidFill>
-                      <a:srgbClr val="FFFFFF"/>
-                    </a:solidFill>
-                  </a:tcPr>
-                </a:tc>
-                <a:tc>
-                  <a:txBody>
-                    <a:bodyPr wrap="square"/>
-                    <a:lstStyle/>
-                    <a:p>
-                      <a:pPr algn="ctr"/>
-                      <a:r>
-                        <a:rPr sz="950" b="1">
-                          <a:solidFill>
-                            <a:srgbClr val="6B2D6B"/>
-                          </a:solidFill>
-                          <a:latin typeface="Arial"/>
-                        </a:rPr>
-                        <a:t>21%</a:t>
-                      </a:r>
-                    </a:p>
-                  </a:txBody>
-                  <a:tcPr marL="54864" marR="54864" marT="18288" marB="18288" anchor="ctr">
-                    <a:solidFill>
-                      <a:srgbClr val="FFFFFF"/>
-                    </a:solidFill>
-                  </a:tcPr>
-                </a:tc>
-              </a:tr>
-              <a:tr h="222885">
-                <a:tc>
-                  <a:txBody>
-                    <a:bodyPr wrap="square"/>
-                    <a:lstStyle/>
-                    <a:p>
-                      <a:pPr algn="l"/>
-                      <a:r>
-                        <a:rPr sz="950" b="1">
-                          <a:solidFill>
-                            <a:srgbClr val="000000"/>
-                          </a:solidFill>
-                          <a:latin typeface="Arial"/>
-                        </a:rPr>
-                        <a:t>Ocean Product</a:t>
-                      </a:r>
-                    </a:p>
-                  </a:txBody>
-                  <a:tcPr marL="54864" marR="54864" marT="18288" marB="18288" anchor="ctr">
-                    <a:solidFill>
-                      <a:srgbClr val="F2F2F2"/>
-                    </a:solidFill>
-                  </a:tcPr>
-                </a:tc>
-                <a:tc>
-                  <a:txBody>
-                    <a:bodyPr wrap="square"/>
-                    <a:lstStyle/>
-                    <a:p>
-                      <a:pPr algn="ctr"/>
-                      <a:r>
-                        <a:rPr sz="950" b="0">
-                          <a:solidFill>
-                            <a:srgbClr val="000000"/>
-                          </a:solidFill>
-                          <a:latin typeface="Arial"/>
-                        </a:rPr>
-                        <a:t>4</a:t>
-                      </a:r>
-                    </a:p>
-                  </a:txBody>
-                  <a:tcPr marL="54864" marR="54864" marT="18288" marB="18288" anchor="ctr">
-                    <a:solidFill>
-                      <a:srgbClr val="F2F2F2"/>
-                    </a:solidFill>
-                  </a:tcPr>
-                </a:tc>
-                <a:tc>
-                  <a:txBody>
-                    <a:bodyPr wrap="square"/>
-                    <a:lstStyle/>
-                    <a:p>
-                      <a:pPr algn="ctr"/>
-                      <a:r>
-                        <a:rPr sz="950" b="0">
-                          <a:solidFill>
-                            <a:srgbClr val="000000"/>
-                          </a:solidFill>
-                          <a:latin typeface="Arial"/>
-                        </a:rPr>
-                        <a:t>14</a:t>
-                      </a:r>
-                    </a:p>
-                  </a:txBody>
-                  <a:tcPr marL="54864" marR="54864" marT="18288" marB="18288" anchor="ctr">
-                    <a:solidFill>
-                      <a:srgbClr val="F2F2F2"/>
-                    </a:solidFill>
-                  </a:tcPr>
-                </a:tc>
-                <a:tc>
-                  <a:txBody>
-                    <a:bodyPr wrap="square"/>
-                    <a:lstStyle/>
-                    <a:p>
-                      <a:pPr algn="ctr"/>
-                      <a:r>
-                        <a:rPr sz="950" b="0">
-                          <a:solidFill>
-                            <a:srgbClr val="000000"/>
-                          </a:solidFill>
-                          <a:latin typeface="Arial"/>
-                        </a:rPr>
-                        <a:t>4</a:t>
-                      </a:r>
-                    </a:p>
-                  </a:txBody>
-                  <a:tcPr marL="54864" marR="54864" marT="18288" marB="18288" anchor="ctr">
-                    <a:solidFill>
-                      <a:srgbClr val="F2F2F2"/>
-                    </a:solidFill>
-                  </a:tcPr>
-                </a:tc>
-                <a:tc>
-                  <a:txBody>
-                    <a:bodyPr wrap="square"/>
-                    <a:lstStyle/>
-                    <a:p>
-                      <a:pPr algn="ctr"/>
-                      <a:r>
-                        <a:rPr sz="950" b="0">
-                          <a:solidFill>
-                            <a:srgbClr val="000000"/>
-                          </a:solidFill>
-                          <a:latin typeface="Arial"/>
-                        </a:rPr>
-                        <a:t>0</a:t>
-                      </a:r>
-                    </a:p>
-                  </a:txBody>
-                  <a:tcPr marL="54864" marR="54864" marT="18288" marB="18288" anchor="ctr">
-                    <a:solidFill>
-                      <a:srgbClr val="F2F2F2"/>
-                    </a:solidFill>
-                  </a:tcPr>
-                </a:tc>
-                <a:tc>
-                  <a:txBody>
-                    <a:bodyPr wrap="square"/>
-                    <a:lstStyle/>
-                    <a:p>
-                      <a:pPr algn="ctr"/>
-                      <a:r>
-                        <a:rPr sz="950" b="0">
-                          <a:solidFill>
-                            <a:srgbClr val="000000"/>
-                          </a:solidFill>
-                          <a:latin typeface="Arial"/>
-                        </a:rPr>
-                        <a:t>2</a:t>
-                      </a:r>
-                    </a:p>
-                  </a:txBody>
-                  <a:tcPr marL="54864" marR="54864" marT="18288" marB="18288" anchor="ctr">
-                    <a:solidFill>
-                      <a:srgbClr val="F2F2F2"/>
-                    </a:solidFill>
-                  </a:tcPr>
-                </a:tc>
-                <a:tc>
-                  <a:txBody>
-                    <a:bodyPr wrap="square"/>
-                    <a:lstStyle/>
-                    <a:p>
-                      <a:pPr algn="ctr"/>
-                      <a:r>
-                        <a:rPr sz="950" b="0">
-                          <a:solidFill>
-                            <a:srgbClr val="000000"/>
-                          </a:solidFill>
-                          <a:latin typeface="Arial"/>
-                        </a:rPr>
-                        <a:t>10%</a:t>
-                      </a:r>
-                    </a:p>
-                  </a:txBody>
-                  <a:tcPr marL="54864" marR="54864" marT="18288" marB="18288" anchor="ctr">
-                    <a:solidFill>
-                      <a:srgbClr val="F2F2F2"/>
-                    </a:solidFill>
-                  </a:tcPr>
-                </a:tc>
-              </a:tr>
-              <a:tr h="222885">
-                <a:tc>
-                  <a:txBody>
-                    <a:bodyPr wrap="square"/>
-                    <a:lstStyle/>
-                    <a:p>
-                      <a:pPr algn="l"/>
-                      <a:r>
-                        <a:rPr sz="950" b="1">
-                          <a:solidFill>
-                            <a:srgbClr val="000000"/>
-                          </a:solidFill>
-                          <a:latin typeface="Arial"/>
-                        </a:rPr>
-                        <a:t>Services</a:t>
-                      </a:r>
-                    </a:p>
-                  </a:txBody>
-                  <a:tcPr marL="54864" marR="54864" marT="18288" marB="18288" anchor="ctr">
-                    <a:solidFill>
-                      <a:srgbClr val="FFFFFF"/>
-                    </a:solidFill>
-                  </a:tcPr>
-                </a:tc>
-                <a:tc>
-                  <a:txBody>
-                    <a:bodyPr wrap="square"/>
-                    <a:lstStyle/>
-                    <a:p>
-                      <a:pPr algn="ctr"/>
-                      <a:r>
-                        <a:rPr sz="950" b="0">
-                          <a:solidFill>
-                            <a:srgbClr val="000000"/>
-                          </a:solidFill>
-                          <a:latin typeface="Arial"/>
-                        </a:rPr>
-                        <a:t>5</a:t>
-                      </a:r>
-                    </a:p>
-                  </a:txBody>
-                  <a:tcPr marL="54864" marR="54864" marT="18288" marB="18288" anchor="ctr">
-                    <a:solidFill>
-                      <a:srgbClr val="FFFFFF"/>
-                    </a:solidFill>
-                  </a:tcPr>
-                </a:tc>
-                <a:tc>
-                  <a:txBody>
-                    <a:bodyPr wrap="square"/>
-                    <a:lstStyle/>
-                    <a:p>
-                      <a:pPr algn="ctr"/>
-                      <a:r>
-                        <a:rPr sz="950" b="0">
-                          <a:solidFill>
-                            <a:srgbClr val="000000"/>
-                          </a:solidFill>
-                          <a:latin typeface="Arial"/>
-                        </a:rPr>
-                        <a:t>0</a:t>
-                      </a:r>
-                    </a:p>
-                  </a:txBody>
-                  <a:tcPr marL="54864" marR="54864" marT="18288" marB="18288" anchor="ctr">
-                    <a:solidFill>
-                      <a:srgbClr val="FFFFFF"/>
-                    </a:solidFill>
-                  </a:tcPr>
-                </a:tc>
-                <a:tc>
-                  <a:txBody>
-                    <a:bodyPr wrap="square"/>
-                    <a:lstStyle/>
-                    <a:p>
-                      <a:pPr algn="ctr"/>
-                      <a:r>
-                        <a:rPr sz="950" b="0">
-                          <a:solidFill>
-                            <a:srgbClr val="000000"/>
-                          </a:solidFill>
-                          <a:latin typeface="Arial"/>
-                        </a:rPr>
-                        <a:t>1</a:t>
-                      </a:r>
-                    </a:p>
-                  </a:txBody>
-                  <a:tcPr marL="54864" marR="54864" marT="18288" marB="18288" anchor="ctr">
-                    <a:solidFill>
-                      <a:srgbClr val="FFFFFF"/>
-                    </a:solidFill>
-                  </a:tcPr>
-                </a:tc>
-                <a:tc>
-                  <a:txBody>
-                    <a:bodyPr wrap="square"/>
-                    <a:lstStyle/>
-                    <a:p>
-                      <a:pPr algn="ctr"/>
-                      <a:r>
-                        <a:rPr sz="950" b="0">
-                          <a:solidFill>
-                            <a:srgbClr val="000000"/>
-                          </a:solidFill>
-                          <a:latin typeface="Arial"/>
-                        </a:rPr>
-                        <a:t>0</a:t>
-                      </a:r>
-                    </a:p>
-                  </a:txBody>
-                  <a:tcPr marL="54864" marR="54864" marT="18288" marB="18288" anchor="ctr">
-                    <a:solidFill>
-                      <a:srgbClr val="FFFFFF"/>
-                    </a:solidFill>
-                  </a:tcPr>
-                </a:tc>
-                <a:tc>
-                  <a:txBody>
-                    <a:bodyPr wrap="square"/>
-                    <a:lstStyle/>
-                    <a:p>
-                      <a:pPr algn="ctr"/>
-                      <a:r>
-                        <a:rPr sz="950" b="0">
-                          <a:solidFill>
-                            <a:srgbClr val="000000"/>
-                          </a:solidFill>
-                          <a:latin typeface="Arial"/>
-                        </a:rPr>
-                        <a:t>1</a:t>
-                      </a:r>
-                    </a:p>
-                  </a:txBody>
-                  <a:tcPr marL="54864" marR="54864" marT="18288" marB="18288" anchor="ctr">
-                    <a:solidFill>
-                      <a:srgbClr val="FFFFFF"/>
-                    </a:solidFill>
-                  </a:tcPr>
-                </a:tc>
-                <a:tc>
-                  <a:txBody>
-                    <a:bodyPr wrap="square"/>
-                    <a:lstStyle/>
-                    <a:p>
-                      <a:pPr algn="ctr"/>
-                      <a:r>
-                        <a:rPr sz="950" b="0">
-                          <a:solidFill>
-                            <a:srgbClr val="000000"/>
-                          </a:solidFill>
-                          <a:latin typeface="Arial"/>
-                        </a:rPr>
-                        <a:t>14%</a:t>
-                      </a:r>
-                    </a:p>
-                  </a:txBody>
-                  <a:tcPr marL="54864" marR="54864" marT="18288" marB="18288" anchor="ctr">
-                    <a:solidFill>
-                      <a:srgbClr val="FFFFFF"/>
-                    </a:solidFill>
-                  </a:tcPr>
-                </a:tc>
-              </a:tr>
-              <a:tr h="222885">
-                <a:tc>
-                  <a:txBody>
-                    <a:bodyPr wrap="square"/>
-                    <a:lstStyle/>
-                    <a:p>
-                      <a:pPr algn="l"/>
-                      <a:r>
-                        <a:rPr sz="950" b="1">
-                          <a:solidFill>
-                            <a:srgbClr val="009796"/>
-                          </a:solidFill>
-                          <a:latin typeface="Arial"/>
-                        </a:rPr>
-                        <a:t>Total (Co-CEO)</a:t>
-                      </a:r>
-                    </a:p>
-                  </a:txBody>
-                  <a:tcPr marL="54864" marR="54864" marT="18288" marB="18288" anchor="ctr">
-                    <a:solidFill>
-                      <a:srgbClr val="E8F4F4"/>
-                    </a:solidFill>
-                  </a:tcPr>
-                </a:tc>
-                <a:tc>
-                  <a:txBody>
-                    <a:bodyPr wrap="square"/>
-                    <a:lstStyle/>
-                    <a:p>
-                      <a:pPr algn="ctr"/>
-                      <a:r>
-                        <a:rPr sz="950" b="1">
-                          <a:solidFill>
-                            <a:srgbClr val="009796"/>
-                          </a:solidFill>
-                          <a:latin typeface="Arial"/>
-                        </a:rPr>
-                        <a:t>8</a:t>
-                      </a:r>
-                    </a:p>
-                  </a:txBody>
-                  <a:tcPr marL="54864" marR="54864" marT="18288" marB="18288" anchor="ctr">
-                    <a:solidFill>
-                      <a:srgbClr val="E8F4F4"/>
-                    </a:solidFill>
-                  </a:tcPr>
-                </a:tc>
-                <a:tc>
-                  <a:txBody>
-                    <a:bodyPr wrap="square"/>
-                    <a:lstStyle/>
-                    <a:p>
-                      <a:pPr algn="ctr"/>
-                      <a:r>
-                        <a:rPr sz="950" b="1">
-                          <a:solidFill>
-                            <a:srgbClr val="009796"/>
-                          </a:solidFill>
-                          <a:latin typeface="Arial"/>
-                        </a:rPr>
-                        <a:t>327</a:t>
-                      </a:r>
-                    </a:p>
-                  </a:txBody>
-                  <a:tcPr marL="54864" marR="54864" marT="18288" marB="18288" anchor="ctr">
-                    <a:solidFill>
-                      <a:srgbClr val="E8F4F4"/>
-                    </a:solidFill>
-                  </a:tcPr>
-                </a:tc>
-                <a:tc>
-                  <a:txBody>
-                    <a:bodyPr wrap="square"/>
-                    <a:lstStyle/>
-                    <a:p>
-                      <a:pPr algn="ctr"/>
-                      <a:r>
-                        <a:rPr sz="950" b="1">
-                          <a:solidFill>
-                            <a:srgbClr val="009796"/>
-                          </a:solidFill>
-                          <a:latin typeface="Arial"/>
-                        </a:rPr>
-                        <a:t>66</a:t>
-                      </a:r>
-                    </a:p>
-                  </a:txBody>
-                  <a:tcPr marL="54864" marR="54864" marT="18288" marB="18288" anchor="ctr">
-                    <a:solidFill>
-                      <a:srgbClr val="E8F4F4"/>
-                    </a:solidFill>
-                  </a:tcPr>
-                </a:tc>
-                <a:tc>
-                  <a:txBody>
-                    <a:bodyPr wrap="square"/>
-                    <a:lstStyle/>
-                    <a:p>
-                      <a:pPr algn="ctr"/>
-                      <a:r>
-                        <a:rPr sz="950" b="1">
-                          <a:solidFill>
-                            <a:srgbClr val="009796"/>
-                          </a:solidFill>
-                          <a:latin typeface="Arial"/>
-                        </a:rPr>
-                        <a:t>18</a:t>
-                      </a:r>
-                    </a:p>
-                  </a:txBody>
-                  <a:tcPr marL="54864" marR="54864" marT="18288" marB="18288" anchor="ctr">
-                    <a:solidFill>
-                      <a:srgbClr val="E8F4F4"/>
-                    </a:solidFill>
-                  </a:tcPr>
-                </a:tc>
-                <a:tc>
-                  <a:txBody>
-                    <a:bodyPr wrap="square"/>
-                    <a:lstStyle/>
-                    <a:p>
-                      <a:pPr algn="ctr"/>
-                      <a:r>
-                        <a:rPr sz="950" b="1">
-                          <a:solidFill>
-                            <a:srgbClr val="009796"/>
-                          </a:solidFill>
-                          <a:latin typeface="Arial"/>
-                        </a:rPr>
-                        <a:t>49</a:t>
-                      </a:r>
-                    </a:p>
-                  </a:txBody>
-                  <a:tcPr marL="54864" marR="54864" marT="18288" marB="18288" anchor="ctr">
-                    <a:solidFill>
-                      <a:srgbClr val="E8F4F4"/>
-                    </a:solidFill>
-                  </a:tcPr>
-                </a:tc>
-                <a:tc>
-                  <a:txBody>
-                    <a:bodyPr wrap="square"/>
-                    <a:lstStyle/>
-                    <a:p>
-                      <a:pPr algn="ctr"/>
-                      <a:r>
-                        <a:rPr sz="950" b="1">
-                          <a:solidFill>
-                            <a:srgbClr val="009796"/>
-                          </a:solidFill>
-                          <a:latin typeface="Arial"/>
-                        </a:rPr>
-                        <a:t>13%</a:t>
-                      </a:r>
-                    </a:p>
-                  </a:txBody>
-                  <a:tcPr marL="54864" marR="54864" marT="18288" marB="18288" anchor="ctr">
-                    <a:solidFill>
-                      <a:srgbClr val="E8F4F4"/>
-                    </a:solidFill>
-                  </a:tcPr>
-                </a:tc>
-              </a:tr>
-            </a:tbl>
-          </a:graphicData>
-        </a:graphic>
-      </p:graphicFrame>
-      <p:sp>
-        <p:nvSpPr>
           <p:cNvPr id="15" name="Rounded Rectangle 14"/>
           <p:cNvSpPr/>
           <p:nvPr/>
         </p:nvSpPr>
         <p:spPr>
           <a:xfrm>
-            <a:off x="6227064" y="4229100"/>
-            <a:ext cx="5623560" cy="1933575"/>
+            <a:off x="2266950" y="2476500"/>
+            <a:ext cx="1714500" cy="495300"/>
           </a:xfrm>
           <a:prstGeom prst="roundRect">
             <a:avLst>
-              <a:gd name="adj" fmla="val 12000"/>
+              <a:gd name="adj" fmla="val 8000"/>
+            </a:avLst>
+          </a:prstGeom>
+          <a:solidFill>
+            <a:srgbClr val="009796"/>
+          </a:solidFill>
+          <a:ln>
+            <a:noFill/>
+          </a:ln>
+        </p:spPr>
+        <p:style>
+          <a:lnRef idx="1">
+            <a:schemeClr val="accent1"/>
+          </a:lnRef>
+          <a:fillRef idx="3">
+            <a:schemeClr val="accent1"/>
+          </a:fillRef>
+          <a:effectRef idx="2">
+            <a:schemeClr val="accent1"/>
+          </a:effectRef>
+          <a:fontRef idx="minor">
+            <a:schemeClr val="lt1"/>
+          </a:fontRef>
+        </p:style>
+        <p:txBody>
+          <a:bodyPr rtlCol="0" anchor="ctr" wrap="square" lIns="57150" rIns="57150" tIns="19050" bIns="19050"/>
+          <a:lstStyle/>
+          <a:p>
+            <a:pPr algn="ctr"/>
+            <a:r>
+              <a:rPr sz="950" b="1">
+                <a:solidFill>
+                  <a:srgbClr val="FFFFFF"/>
+                </a:solidFill>
+                <a:latin typeface="Arial"/>
+              </a:rPr>
+              <a:t>CITO</a:t>
+            </a:r>
+          </a:p>
+          <a:p>
+            <a:pPr algn="ctr"/>
+            <a:r>
+              <a:rPr sz="800" b="0">
+                <a:solidFill>
+                  <a:srgbClr val="FFFFFF"/>
+                </a:solidFill>
+                <a:latin typeface="Arial"/>
+              </a:rPr>
+              <a:t>48 pessoas · 2 vagas</a:t>
+            </a:r>
+          </a:p>
+        </p:txBody>
+      </p:sp>
+      <p:cxnSp>
+        <p:nvCxnSpPr>
+          <p:cNvPr id="16" name="Connector 15"/>
+          <p:cNvCxnSpPr/>
+          <p:nvPr/>
+        </p:nvCxnSpPr>
+        <p:spPr>
+          <a:xfrm>
+            <a:off x="5038725" y="2362200"/>
+            <a:ext cx="0" cy="114300"/>
+          </a:xfrm>
+          <a:prstGeom prst="bentConnector3">
+            <a:avLst/>
+          </a:prstGeom>
+          <a:ln w="12700">
+            <a:solidFill>
+              <a:srgbClr val="BFBFBF"/>
+            </a:solidFill>
+          </a:ln>
+        </p:spPr>
+        <p:style>
+          <a:lnRef idx="2">
+            <a:schemeClr val="accent1"/>
+          </a:lnRef>
+          <a:fillRef idx="0">
+            <a:schemeClr val="accent1"/>
+          </a:fillRef>
+          <a:effectRef idx="1">
+            <a:schemeClr val="accent1"/>
+          </a:effectRef>
+          <a:fontRef idx="minor">
+            <a:schemeClr val="tx1"/>
+          </a:fontRef>
+        </p:style>
+      </p:cxnSp>
+      <p:sp>
+        <p:nvSpPr>
+          <p:cNvPr id="17" name="Rounded Rectangle 16"/>
+          <p:cNvSpPr/>
+          <p:nvPr/>
+        </p:nvSpPr>
+        <p:spPr>
+          <a:xfrm>
+            <a:off x="4181475" y="2476500"/>
+            <a:ext cx="1714500" cy="495300"/>
+          </a:xfrm>
+          <a:prstGeom prst="roundRect">
+            <a:avLst>
+              <a:gd name="adj" fmla="val 8000"/>
+            </a:avLst>
+          </a:prstGeom>
+          <a:solidFill>
+            <a:srgbClr val="009796"/>
+          </a:solidFill>
+          <a:ln>
+            <a:noFill/>
+          </a:ln>
+        </p:spPr>
+        <p:style>
+          <a:lnRef idx="1">
+            <a:schemeClr val="accent1"/>
+          </a:lnRef>
+          <a:fillRef idx="3">
+            <a:schemeClr val="accent1"/>
+          </a:fillRef>
+          <a:effectRef idx="2">
+            <a:schemeClr val="accent1"/>
+          </a:effectRef>
+          <a:fontRef idx="minor">
+            <a:schemeClr val="lt1"/>
+          </a:fontRef>
+        </p:style>
+        <p:txBody>
+          <a:bodyPr rtlCol="0" anchor="ctr" wrap="square" lIns="57150" rIns="57150" tIns="19050" bIns="19050"/>
+          <a:lstStyle/>
+          <a:p>
+            <a:pPr algn="ctr"/>
+            <a:r>
+              <a:rPr sz="950" b="1">
+                <a:solidFill>
+                  <a:srgbClr val="FFFFFF"/>
+                </a:solidFill>
+                <a:latin typeface="Arial"/>
+              </a:rPr>
+              <a:t>CFSO</a:t>
+            </a:r>
+          </a:p>
+          <a:p>
+            <a:pPr algn="ctr"/>
+            <a:r>
+              <a:rPr sz="800" b="0">
+                <a:solidFill>
+                  <a:srgbClr val="FFFFFF"/>
+                </a:solidFill>
+                <a:latin typeface="Arial"/>
+              </a:rPr>
+              <a:t>34 pessoas · 3 vagas</a:t>
+            </a:r>
+          </a:p>
+        </p:txBody>
+      </p:sp>
+      <p:cxnSp>
+        <p:nvCxnSpPr>
+          <p:cNvPr id="18" name="Connector 17"/>
+          <p:cNvCxnSpPr/>
+          <p:nvPr/>
+        </p:nvCxnSpPr>
+        <p:spPr>
+          <a:xfrm>
+            <a:off x="6953250" y="2362200"/>
+            <a:ext cx="0" cy="114300"/>
+          </a:xfrm>
+          <a:prstGeom prst="bentConnector3">
+            <a:avLst/>
+          </a:prstGeom>
+          <a:ln w="12700">
+            <a:solidFill>
+              <a:srgbClr val="BFBFBF"/>
+            </a:solidFill>
+          </a:ln>
+        </p:spPr>
+        <p:style>
+          <a:lnRef idx="2">
+            <a:schemeClr val="accent1"/>
+          </a:lnRef>
+          <a:fillRef idx="0">
+            <a:schemeClr val="accent1"/>
+          </a:fillRef>
+          <a:effectRef idx="1">
+            <a:schemeClr val="accent1"/>
+          </a:effectRef>
+          <a:fontRef idx="minor">
+            <a:schemeClr val="tx1"/>
+          </a:fontRef>
+        </p:style>
+      </p:cxnSp>
+      <p:sp>
+        <p:nvSpPr>
+          <p:cNvPr id="19" name="Rounded Rectangle 18"/>
+          <p:cNvSpPr/>
+          <p:nvPr/>
+        </p:nvSpPr>
+        <p:spPr>
+          <a:xfrm>
+            <a:off x="6096000" y="2476500"/>
+            <a:ext cx="1714500" cy="495300"/>
+          </a:xfrm>
+          <a:prstGeom prst="roundRect">
+            <a:avLst>
+              <a:gd name="adj" fmla="val 8000"/>
+            </a:avLst>
+          </a:prstGeom>
+          <a:solidFill>
+            <a:srgbClr val="009796"/>
+          </a:solidFill>
+          <a:ln>
+            <a:noFill/>
+          </a:ln>
+        </p:spPr>
+        <p:style>
+          <a:lnRef idx="1">
+            <a:schemeClr val="accent1"/>
+          </a:lnRef>
+          <a:fillRef idx="3">
+            <a:schemeClr val="accent1"/>
+          </a:fillRef>
+          <a:effectRef idx="2">
+            <a:schemeClr val="accent1"/>
+          </a:effectRef>
+          <a:fontRef idx="minor">
+            <a:schemeClr val="lt1"/>
+          </a:fontRef>
+        </p:style>
+        <p:txBody>
+          <a:bodyPr rtlCol="0" anchor="ctr" wrap="square" lIns="57150" rIns="57150" tIns="19050" bIns="19050"/>
+          <a:lstStyle/>
+          <a:p>
+            <a:pPr algn="ctr"/>
+            <a:r>
+              <a:rPr sz="950" b="1">
+                <a:solidFill>
+                  <a:srgbClr val="FFFFFF"/>
+                </a:solidFill>
+                <a:latin typeface="Arial"/>
+              </a:rPr>
+              <a:t>Head of Talent</a:t>
+            </a:r>
+          </a:p>
+          <a:p>
+            <a:pPr algn="ctr"/>
+            <a:r>
+              <a:rPr sz="800" b="0">
+                <a:solidFill>
+                  <a:srgbClr val="FFFFFF"/>
+                </a:solidFill>
+                <a:latin typeface="Arial"/>
+              </a:rPr>
+              <a:t>24 pessoas · 4 vagas</a:t>
+            </a:r>
+          </a:p>
+        </p:txBody>
+      </p:sp>
+      <p:cxnSp>
+        <p:nvCxnSpPr>
+          <p:cNvPr id="20" name="Connector 19"/>
+          <p:cNvCxnSpPr/>
+          <p:nvPr/>
+        </p:nvCxnSpPr>
+        <p:spPr>
+          <a:xfrm>
+            <a:off x="8867775" y="2362200"/>
+            <a:ext cx="0" cy="114300"/>
+          </a:xfrm>
+          <a:prstGeom prst="bentConnector3">
+            <a:avLst/>
+          </a:prstGeom>
+          <a:ln w="12700">
+            <a:solidFill>
+              <a:srgbClr val="BFBFBF"/>
+            </a:solidFill>
+          </a:ln>
+        </p:spPr>
+        <p:style>
+          <a:lnRef idx="2">
+            <a:schemeClr val="accent1"/>
+          </a:lnRef>
+          <a:fillRef idx="0">
+            <a:schemeClr val="accent1"/>
+          </a:fillRef>
+          <a:effectRef idx="1">
+            <a:schemeClr val="accent1"/>
+          </a:effectRef>
+          <a:fontRef idx="minor">
+            <a:schemeClr val="tx1"/>
+          </a:fontRef>
+        </p:style>
+      </p:cxnSp>
+      <p:sp>
+        <p:nvSpPr>
+          <p:cNvPr id="21" name="Rounded Rectangle 20"/>
+          <p:cNvSpPr/>
+          <p:nvPr/>
+        </p:nvSpPr>
+        <p:spPr>
+          <a:xfrm>
+            <a:off x="8010525" y="2476500"/>
+            <a:ext cx="1714500" cy="495300"/>
+          </a:xfrm>
+          <a:prstGeom prst="roundRect">
+            <a:avLst>
+              <a:gd name="adj" fmla="val 8000"/>
+            </a:avLst>
+          </a:prstGeom>
+          <a:solidFill>
+            <a:srgbClr val="009796"/>
+          </a:solidFill>
+          <a:ln>
+            <a:noFill/>
+          </a:ln>
+        </p:spPr>
+        <p:style>
+          <a:lnRef idx="1">
+            <a:schemeClr val="accent1"/>
+          </a:lnRef>
+          <a:fillRef idx="3">
+            <a:schemeClr val="accent1"/>
+          </a:fillRef>
+          <a:effectRef idx="2">
+            <a:schemeClr val="accent1"/>
+          </a:effectRef>
+          <a:fontRef idx="minor">
+            <a:schemeClr val="lt1"/>
+          </a:fontRef>
+        </p:style>
+        <p:txBody>
+          <a:bodyPr rtlCol="0" anchor="ctr" wrap="square" lIns="57150" rIns="57150" tIns="19050" bIns="19050"/>
+          <a:lstStyle/>
+          <a:p>
+            <a:pPr algn="ctr"/>
+            <a:r>
+              <a:rPr sz="950" b="1">
+                <a:solidFill>
+                  <a:srgbClr val="FFFFFF"/>
+                </a:solidFill>
+                <a:latin typeface="Arial"/>
+              </a:rPr>
+              <a:t>CCO</a:t>
+            </a:r>
+          </a:p>
+          <a:p>
+            <a:pPr algn="ctr"/>
+            <a:r>
+              <a:rPr sz="800" b="0">
+                <a:solidFill>
+                  <a:srgbClr val="FFFFFF"/>
+                </a:solidFill>
+                <a:latin typeface="Arial"/>
+              </a:rPr>
+              <a:t>18 pessoas · 5 vagas</a:t>
+            </a:r>
+          </a:p>
+        </p:txBody>
+      </p:sp>
+      <p:cxnSp>
+        <p:nvCxnSpPr>
+          <p:cNvPr id="22" name="Connector 21"/>
+          <p:cNvCxnSpPr/>
+          <p:nvPr/>
+        </p:nvCxnSpPr>
+        <p:spPr>
+          <a:xfrm>
+            <a:off x="10782300" y="2362200"/>
+            <a:ext cx="0" cy="114300"/>
+          </a:xfrm>
+          <a:prstGeom prst="bentConnector3">
+            <a:avLst/>
+          </a:prstGeom>
+          <a:ln w="12700">
+            <a:solidFill>
+              <a:srgbClr val="BFBFBF"/>
+            </a:solidFill>
+          </a:ln>
+        </p:spPr>
+        <p:style>
+          <a:lnRef idx="2">
+            <a:schemeClr val="accent1"/>
+          </a:lnRef>
+          <a:fillRef idx="0">
+            <a:schemeClr val="accent1"/>
+          </a:fillRef>
+          <a:effectRef idx="1">
+            <a:schemeClr val="accent1"/>
+          </a:effectRef>
+          <a:fontRef idx="minor">
+            <a:schemeClr val="tx1"/>
+          </a:fontRef>
+        </p:style>
+      </p:cxnSp>
+      <p:sp>
+        <p:nvSpPr>
+          <p:cNvPr id="23" name="Rounded Rectangle 22"/>
+          <p:cNvSpPr/>
+          <p:nvPr/>
+        </p:nvSpPr>
+        <p:spPr>
+          <a:xfrm>
+            <a:off x="9925050" y="2476500"/>
+            <a:ext cx="1714500" cy="495300"/>
+          </a:xfrm>
+          <a:prstGeom prst="roundRect">
+            <a:avLst>
+              <a:gd name="adj" fmla="val 8000"/>
+            </a:avLst>
+          </a:prstGeom>
+          <a:solidFill>
+            <a:srgbClr val="009796"/>
+          </a:solidFill>
+          <a:ln>
+            <a:noFill/>
+          </a:ln>
+        </p:spPr>
+        <p:style>
+          <a:lnRef idx="1">
+            <a:schemeClr val="accent1"/>
+          </a:lnRef>
+          <a:fillRef idx="3">
+            <a:schemeClr val="accent1"/>
+          </a:fillRef>
+          <a:effectRef idx="2">
+            <a:schemeClr val="accent1"/>
+          </a:effectRef>
+          <a:fontRef idx="minor">
+            <a:schemeClr val="lt1"/>
+          </a:fontRef>
+        </p:style>
+        <p:txBody>
+          <a:bodyPr rtlCol="0" anchor="ctr" wrap="square" lIns="57150" rIns="57150" tIns="19050" bIns="19050"/>
+          <a:lstStyle/>
+          <a:p>
+            <a:pPr algn="ctr"/>
+            <a:r>
+              <a:rPr sz="950" b="1">
+                <a:solidFill>
+                  <a:srgbClr val="FFFFFF"/>
+                </a:solidFill>
+                <a:latin typeface="Arial"/>
+              </a:rPr>
+              <a:t>Head of Services</a:t>
+            </a:r>
+          </a:p>
+          <a:p>
+            <a:pPr algn="ctr"/>
+            <a:r>
+              <a:rPr sz="800" b="0">
+                <a:solidFill>
+                  <a:srgbClr val="FFFFFF"/>
+                </a:solidFill>
+                <a:latin typeface="Arial"/>
+              </a:rPr>
+              <a:t>6 pessoas · 1 vaga</a:t>
+            </a:r>
+          </a:p>
+        </p:txBody>
+      </p:sp>
+      <p:cxnSp>
+        <p:nvCxnSpPr>
+          <p:cNvPr id="24" name="Connector 23"/>
+          <p:cNvCxnSpPr/>
+          <p:nvPr/>
+        </p:nvCxnSpPr>
+        <p:spPr>
+          <a:xfrm>
+            <a:off x="1209675" y="2971800"/>
+            <a:ext cx="0" cy="114300"/>
+          </a:xfrm>
+          <a:prstGeom prst="bentConnector3">
+            <a:avLst/>
+          </a:prstGeom>
+          <a:ln w="12700">
+            <a:solidFill>
+              <a:srgbClr val="FF8E2E"/>
+            </a:solidFill>
+          </a:ln>
+        </p:spPr>
+        <p:style>
+          <a:lnRef idx="2">
+            <a:schemeClr val="accent1"/>
+          </a:lnRef>
+          <a:fillRef idx="0">
+            <a:schemeClr val="accent1"/>
+          </a:fillRef>
+          <a:effectRef idx="1">
+            <a:schemeClr val="accent1"/>
+          </a:effectRef>
+          <a:fontRef idx="minor">
+            <a:schemeClr val="tx1"/>
+          </a:fontRef>
+        </p:style>
+      </p:cxnSp>
+      <p:sp>
+        <p:nvSpPr>
+          <p:cNvPr id="25" name="Rounded Rectangle 24"/>
+          <p:cNvSpPr/>
+          <p:nvPr/>
+        </p:nvSpPr>
+        <p:spPr>
+          <a:xfrm>
+            <a:off x="352425" y="3086100"/>
+            <a:ext cx="1714500" cy="438150"/>
+          </a:xfrm>
+          <a:prstGeom prst="roundRect">
+            <a:avLst>
+              <a:gd name="adj" fmla="val 8000"/>
+            </a:avLst>
+          </a:prstGeom>
+          <a:solidFill>
+            <a:srgbClr val="FDF0E4"/>
+          </a:solidFill>
+          <a:ln w="19050">
+            <a:solidFill>
+              <a:srgbClr val="FF8E2E"/>
+            </a:solidFill>
+            <a:prstDash val="dash"/>
+          </a:ln>
+        </p:spPr>
+        <p:style>
+          <a:lnRef idx="1">
+            <a:schemeClr val="accent1"/>
+          </a:lnRef>
+          <a:fillRef idx="3">
+            <a:schemeClr val="accent1"/>
+          </a:fillRef>
+          <a:effectRef idx="2">
+            <a:schemeClr val="accent1"/>
+          </a:effectRef>
+          <a:fontRef idx="minor">
+            <a:schemeClr val="lt1"/>
+          </a:fontRef>
+        </p:style>
+        <p:txBody>
+          <a:bodyPr rtlCol="0" anchor="ctr" wrap="square" lIns="57150" rIns="57150" tIns="19050" bIns="19050"/>
+          <a:lstStyle/>
+          <a:p>
+            <a:pPr algn="ctr"/>
+            <a:r>
+              <a:rPr sz="850" b="1">
+                <a:solidFill>
+                  <a:srgbClr val="262626"/>
+                </a:solidFill>
+                <a:latin typeface="Arial"/>
+              </a:rPr>
+              <a:t>VAGA · Head de Europa</a:t>
+            </a:r>
+          </a:p>
+          <a:p>
+            <a:pPr algn="ctr"/>
+            <a:r>
+              <a:rPr sz="750" b="0">
+                <a:solidFill>
+                  <a:srgbClr val="262626"/>
+                </a:solidFill>
+                <a:latin typeface="Arial"/>
+              </a:rPr>
+              <a:t>publicada no Gupy · AMS, FRA, LIS</a:t>
+            </a:r>
+          </a:p>
+        </p:txBody>
+      </p:sp>
+      <p:cxnSp>
+        <p:nvCxnSpPr>
+          <p:cNvPr id="26" name="Connector 25"/>
+          <p:cNvCxnSpPr/>
+          <p:nvPr/>
+        </p:nvCxnSpPr>
+        <p:spPr>
+          <a:xfrm>
+            <a:off x="8867775" y="2971800"/>
+            <a:ext cx="0" cy="114300"/>
+          </a:xfrm>
+          <a:prstGeom prst="bentConnector3">
+            <a:avLst/>
+          </a:prstGeom>
+          <a:ln w="12700">
+            <a:solidFill>
+              <a:srgbClr val="FF8E2E"/>
+            </a:solidFill>
+          </a:ln>
+        </p:spPr>
+        <p:style>
+          <a:lnRef idx="2">
+            <a:schemeClr val="accent1"/>
+          </a:lnRef>
+          <a:fillRef idx="0">
+            <a:schemeClr val="accent1"/>
+          </a:fillRef>
+          <a:effectRef idx="1">
+            <a:schemeClr val="accent1"/>
+          </a:effectRef>
+          <a:fontRef idx="minor">
+            <a:schemeClr val="tx1"/>
+          </a:fontRef>
+        </p:style>
+      </p:cxnSp>
+      <p:sp>
+        <p:nvSpPr>
+          <p:cNvPr id="27" name="Rounded Rectangle 26"/>
+          <p:cNvSpPr/>
+          <p:nvPr/>
+        </p:nvSpPr>
+        <p:spPr>
+          <a:xfrm>
+            <a:off x="8010525" y="3086100"/>
+            <a:ext cx="1714500" cy="438150"/>
+          </a:xfrm>
+          <a:prstGeom prst="roundRect">
+            <a:avLst>
+              <a:gd name="adj" fmla="val 8000"/>
+            </a:avLst>
+          </a:prstGeom>
+          <a:solidFill>
+            <a:srgbClr val="FDF0E4"/>
+          </a:solidFill>
+          <a:ln w="19050">
+            <a:solidFill>
+              <a:srgbClr val="FF8E2E"/>
+            </a:solidFill>
+            <a:prstDash val="dash"/>
+          </a:ln>
+        </p:spPr>
+        <p:style>
+          <a:lnRef idx="1">
+            <a:schemeClr val="accent1"/>
+          </a:lnRef>
+          <a:fillRef idx="3">
+            <a:schemeClr val="accent1"/>
+          </a:fillRef>
+          <a:effectRef idx="2">
+            <a:schemeClr val="accent1"/>
+          </a:effectRef>
+          <a:fontRef idx="minor">
+            <a:schemeClr val="lt1"/>
+          </a:fontRef>
+        </p:style>
+        <p:txBody>
+          <a:bodyPr rtlCol="0" anchor="ctr" wrap="square" lIns="57150" rIns="57150" tIns="19050" bIns="19050"/>
+          <a:lstStyle/>
+          <a:p>
+            <a:pPr algn="ctr"/>
+            <a:r>
+              <a:rPr sz="850" b="1">
+                <a:solidFill>
+                  <a:srgbClr val="262626"/>
+                </a:solidFill>
+                <a:latin typeface="Arial"/>
+              </a:rPr>
+              <a:t>VAGA · TL de High-Tech</a:t>
+            </a:r>
+          </a:p>
+          <a:p>
+            <a:pPr algn="ctr"/>
+            <a:r>
+              <a:rPr sz="750" b="0">
+                <a:solidFill>
+                  <a:srgbClr val="262626"/>
+                </a:solidFill>
+                <a:latin typeface="Arial"/>
+              </a:rPr>
+              <a:t>está no draft, não está na planilha</a:t>
+            </a:r>
+          </a:p>
+        </p:txBody>
+      </p:sp>
+      <p:sp>
+        <p:nvSpPr>
+          <p:cNvPr id="28" name="Rounded Rectangle 27"/>
+          <p:cNvSpPr/>
+          <p:nvPr/>
+        </p:nvSpPr>
+        <p:spPr>
+          <a:xfrm>
+            <a:off x="342900" y="3771900"/>
+            <a:ext cx="5676900" cy="228600"/>
+          </a:xfrm>
+          <a:prstGeom prst="roundRect">
+            <a:avLst>
+              <a:gd name="adj" fmla="val 8000"/>
+            </a:avLst>
+          </a:prstGeom>
+          <a:solidFill>
+            <a:srgbClr val="FF8E2E"/>
+          </a:solidFill>
+          <a:ln>
+            <a:noFill/>
+          </a:ln>
+        </p:spPr>
+        <p:style>
+          <a:lnRef idx="1">
+            <a:schemeClr val="accent1"/>
+          </a:lnRef>
+          <a:fillRef idx="3">
+            <a:schemeClr val="accent1"/>
+          </a:fillRef>
+          <a:effectRef idx="2">
+            <a:schemeClr val="accent1"/>
+          </a:effectRef>
+          <a:fontRef idx="minor">
+            <a:schemeClr val="lt1"/>
+          </a:fontRef>
+        </p:style>
+        <p:txBody>
+          <a:bodyPr rtlCol="0" anchor="ctr" wrap="square" lIns="57150" rIns="57150" tIns="19050" bIns="19050"/>
+          <a:lstStyle/>
+          <a:p>
+            <a:pPr algn="ctr"/>
+            <a:r>
+              <a:rPr sz="1000" b="1">
+                <a:solidFill>
+                  <a:srgbClr val="FFFFFF"/>
+                </a:solidFill>
+                <a:latin typeface="Arial"/>
+              </a:rPr>
+              <a:t>Onde falta gente</a:t>
+            </a:r>
+          </a:p>
+        </p:txBody>
+      </p:sp>
+      <p:sp>
+        <p:nvSpPr>
+          <p:cNvPr id="29" name="Rounded Rectangle 28"/>
+          <p:cNvSpPr/>
+          <p:nvPr/>
+        </p:nvSpPr>
+        <p:spPr>
+          <a:xfrm>
+            <a:off x="342900" y="4029075"/>
+            <a:ext cx="5676900" cy="2181225"/>
+          </a:xfrm>
+          <a:prstGeom prst="roundRect">
+            <a:avLst>
+              <a:gd name="adj" fmla="val 8000"/>
+            </a:avLst>
+          </a:prstGeom>
+          <a:solidFill>
+            <a:srgbClr val="FDF0E4"/>
+          </a:solidFill>
+          <a:ln w="12700">
+            <a:solidFill>
+              <a:srgbClr val="FF8E2E"/>
+            </a:solidFill>
+          </a:ln>
+        </p:spPr>
+        <p:style>
+          <a:lnRef idx="1">
+            <a:schemeClr val="accent1"/>
+          </a:lnRef>
+          <a:fillRef idx="3">
+            <a:schemeClr val="accent1"/>
+          </a:fillRef>
+          <a:effectRef idx="2">
+            <a:schemeClr val="accent1"/>
+          </a:effectRef>
+          <a:fontRef idx="minor">
+            <a:schemeClr val="lt1"/>
+          </a:fontRef>
+        </p:style>
+        <p:txBody>
+          <a:bodyPr rtlCol="0" anchor="t" wrap="square" lIns="95250" rIns="95250" tIns="19050" bIns="19050"/>
+          <a:lstStyle/>
+          <a:p>
+            <a:pPr algn="l">
+              <a:spcAft>
+                <a:spcPts val="375"/>
+              </a:spcAft>
+            </a:pPr>
+            <a:r>
+              <a:rPr sz="1000" b="1">
+                <a:solidFill>
+                  <a:srgbClr val="262626"/>
+                </a:solidFill>
+                <a:latin typeface="Arial"/>
+              </a:rPr>
+              <a:t/>
+            </a:r>
+            <a:r>
+              <a:rPr b="1" sz="900">
+                <a:solidFill>
+                  <a:srgbClr val="262626"/>
+                </a:solidFill>
+                <a:latin typeface="Arial"/>
+              </a:rPr>
+              <a:t>Europa: </a:t>
+            </a:r>
+            <a:r>
+              <a:rPr sz="900">
+                <a:solidFill>
+                  <a:srgbClr val="262626"/>
+                </a:solidFill>
+                <a:latin typeface="Arial"/>
+              </a:rPr>
+              <a:t>5 pessoas e 7 vagas — mais vaga que gente. Nenhum head: a vaga de Head de Europa está publicada e as outras 6 ainda não foram abertas</a:t>
+            </a:r>
+          </a:p>
+          <a:p>
+            <a:pPr algn="l">
+              <a:spcAft>
+                <a:spcPts val="375"/>
+              </a:spcAft>
+            </a:pPr>
+            <a:r>
+              <a:rPr b="1" sz="900">
+                <a:solidFill>
+                  <a:srgbClr val="262626"/>
+                </a:solidFill>
+                <a:latin typeface="Arial"/>
+              </a:rPr>
+              <a:t>EUA: </a:t>
+            </a:r>
+            <a:r>
+              <a:rPr sz="900">
+                <a:solidFill>
+                  <a:srgbClr val="262626"/>
+                </a:solidFill>
+                <a:latin typeface="Arial"/>
+              </a:rPr>
+              <a:t>10 pessoas e 9 vagas, 6 delas ainda a abrir. O Head of Overland comanda de São Paulo</a:t>
+            </a:r>
+          </a:p>
+          <a:p>
+            <a:pPr algn="l">
+              <a:spcAft>
+                <a:spcPts val="375"/>
+              </a:spcAft>
+            </a:pPr>
+            <a:r>
+              <a:rPr b="1" sz="900">
+                <a:solidFill>
+                  <a:srgbClr val="262626"/>
+                </a:solidFill>
+                <a:latin typeface="Arial"/>
+              </a:rPr>
+              <a:t>High-Tech: </a:t>
+            </a:r>
+            <a:r>
+              <a:rPr sz="900">
+                <a:solidFill>
+                  <a:srgbClr val="262626"/>
+                </a:solidFill>
+                <a:latin typeface="Arial"/>
+              </a:rPr>
+              <a:t>o draft desenha uma vaga de TL que não existe na planilha; são 2 team leaders para 3 frentes (Vertical, Auto e High-Tech)</a:t>
+            </a:r>
+          </a:p>
+          <a:p>
+            <a:pPr algn="l">
+              <a:spcAft>
+                <a:spcPts val="375"/>
+              </a:spcAft>
+            </a:pPr>
+            <a:r>
+              <a:rPr b="1" sz="900">
+                <a:solidFill>
+                  <a:srgbClr val="262626"/>
+                </a:solidFill>
+                <a:latin typeface="Arial"/>
+              </a:rPr>
+              <a:t>Brasil: </a:t>
+            </a:r>
+            <a:r>
+              <a:rPr sz="900">
+                <a:solidFill>
+                  <a:srgbClr val="262626"/>
+                </a:solidFill>
+                <a:latin typeface="Arial"/>
+              </a:rPr>
+              <a:t>321 das 331 pessoas e 33 vagas, 29 sem processo</a:t>
+            </a:r>
+          </a:p>
+        </p:txBody>
+      </p:sp>
+      <p:sp>
+        <p:nvSpPr>
+          <p:cNvPr id="30" name="Rounded Rectangle 29"/>
+          <p:cNvSpPr/>
+          <p:nvPr/>
+        </p:nvSpPr>
+        <p:spPr>
+          <a:xfrm>
+            <a:off x="6172200" y="3771900"/>
+            <a:ext cx="5676900" cy="228600"/>
+          </a:xfrm>
+          <a:prstGeom prst="roundRect">
+            <a:avLst>
+              <a:gd name="adj" fmla="val 8000"/>
+            </a:avLst>
+          </a:prstGeom>
+          <a:solidFill>
+            <a:srgbClr val="009796"/>
+          </a:solidFill>
+          <a:ln>
+            <a:noFill/>
+          </a:ln>
+        </p:spPr>
+        <p:style>
+          <a:lnRef idx="1">
+            <a:schemeClr val="accent1"/>
+          </a:lnRef>
+          <a:fillRef idx="3">
+            <a:schemeClr val="accent1"/>
+          </a:fillRef>
+          <a:effectRef idx="2">
+            <a:schemeClr val="accent1"/>
+          </a:effectRef>
+          <a:fontRef idx="minor">
+            <a:schemeClr val="lt1"/>
+          </a:fontRef>
+        </p:style>
+        <p:txBody>
+          <a:bodyPr rtlCol="0" anchor="ctr" wrap="square" lIns="57150" rIns="57150" tIns="19050" bIns="19050"/>
+          <a:lstStyle/>
+          <a:p>
+            <a:pPr algn="ctr"/>
+            <a:r>
+              <a:rPr sz="1000" b="1">
+                <a:solidFill>
+                  <a:srgbClr val="FFFFFF"/>
+                </a:solidFill>
+                <a:latin typeface="Arial"/>
+              </a:rPr>
+              <a:t>Onde dá para preencher lacuna sem contratar</a:t>
+            </a:r>
+          </a:p>
+        </p:txBody>
+      </p:sp>
+      <p:sp>
+        <p:nvSpPr>
+          <p:cNvPr id="31" name="Rounded Rectangle 30"/>
+          <p:cNvSpPr/>
+          <p:nvPr/>
+        </p:nvSpPr>
+        <p:spPr>
+          <a:xfrm>
+            <a:off x="6172200" y="4029075"/>
+            <a:ext cx="5676900" cy="2181225"/>
+          </a:xfrm>
+          <a:prstGeom prst="roundRect">
+            <a:avLst>
+              <a:gd name="adj" fmla="val 8000"/>
             </a:avLst>
           </a:prstGeom>
           <a:solidFill>
@@ -6894,187 +6597,135 @@
               <a:srgbClr val="009796"/>
             </a:solidFill>
           </a:ln>
-          <a:effectLst/>
         </p:spPr>
+        <p:style>
+          <a:lnRef idx="1">
+            <a:schemeClr val="accent1"/>
+          </a:lnRef>
+          <a:fillRef idx="3">
+            <a:schemeClr val="accent1"/>
+          </a:fillRef>
+          <a:effectRef idx="2">
+            <a:schemeClr val="accent1"/>
+          </a:effectRef>
+          <a:fontRef idx="minor">
+            <a:schemeClr val="lt1"/>
+          </a:fontRef>
+        </p:style>
         <p:txBody>
-          <a:bodyPr rtlCol="0" anchor="ctr" wrap="square" lIns="137160" rIns="137160" tIns="73152" bIns="73152"/>
+          <a:bodyPr rtlCol="0" anchor="t" wrap="square" lIns="95250" rIns="95250" tIns="19050" bIns="19050"/>
           <a:lstStyle/>
           <a:p>
-            <a:pPr algn="l" marL="171450" indent="-171450">
+            <a:pPr algn="l">
               <a:spcAft>
-                <a:spcPts val="400"/>
+                <a:spcPts val="375"/>
               </a:spcAft>
-              <a:buClr>
-                <a:srgbClr val="009796"/>
-              </a:buClr>
-              <a:buFont typeface="Wingdings"/>
-              <a:buChar char="§"/>
             </a:pPr>
             <a:r>
-              <a:rPr sz="950" b="1">
+              <a:rPr sz="1000" b="1">
                 <a:solidFill>
                   <a:srgbClr val="262626"/>
                 </a:solidFill>
                 <a:latin typeface="Arial"/>
               </a:rPr>
-              <a:t>High-Tech: </a:t>
-            </a:r>
-            <a:r>
-              <a:rPr sz="950" b="0">
+              <a:t/>
+            </a:r>
+            <a:r>
+              <a:rPr b="1" sz="900">
                 <a:solidFill>
                   <a:srgbClr val="262626"/>
                 </a:solidFill>
                 <a:latin typeface="Arial"/>
               </a:rPr>
-              <a:t>a vaga de TL está desenhada no organograma do draft e não existe na planilha de vagas; Ricardo Jakowatz tem 2 team leaders para 3 frentes (Vertical, Auto e High-Tech)</a:t>
-            </a:r>
-          </a:p>
-          <a:p>
-            <a:pPr algn="l" marL="171450" indent="-171450">
-              <a:spcAft>
-                <a:spcPts val="400"/>
-              </a:spcAft>
-              <a:buClr>
-                <a:srgbClr val="009796"/>
-              </a:buClr>
-              <a:buFont typeface="Wingdings"/>
-              <a:buChar char="§"/>
-            </a:pPr>
-            <a:r>
-              <a:rPr sz="950" b="1">
+              <a:t>6 cargos de chefia sem equipe: </a:t>
+            </a:r>
+            <a:r>
+              <a:rPr sz="900">
                 <a:solidFill>
                   <a:srgbClr val="262626"/>
                 </a:solidFill>
                 <a:latin typeface="Arial"/>
               </a:rPr>
-              <a:t>COO: </a:t>
-            </a:r>
-            <a:r>
-              <a:rPr sz="950" b="0">
+              <a:t>Head Of Revenue Management, BD Manager, BI &amp; Data Science TL, Airport Operations Manager, Warehouse TL e Air Freight CC TL — nenhum deles lidera ninguém hoje</a:t>
+            </a:r>
+          </a:p>
+          <a:p>
+            <a:pPr algn="l">
+              <a:spcAft>
+                <a:spcPts val="375"/>
+              </a:spcAft>
+            </a:pPr>
+            <a:r>
+              <a:rPr b="1" sz="900">
                 <a:solidFill>
                   <a:srgbClr val="262626"/>
                 </a:solidFill>
                 <a:latin typeface="Arial"/>
               </a:rPr>
-              <a:t>6 diretos sustentam 148 indiretos em 6 níveis; é a única diretoria que chega ao L8</a:t>
-            </a:r>
-          </a:p>
-          <a:p>
-            <a:pPr algn="l" marL="171450" indent="-171450">
-              <a:spcAft>
-                <a:spcPts val="400"/>
-              </a:spcAft>
-              <a:buClr>
-                <a:srgbClr val="009796"/>
-              </a:buClr>
-              <a:buFont typeface="Wingdings"/>
-              <a:buChar char="§"/>
-            </a:pPr>
-            <a:r>
-              <a:rPr sz="950" b="1">
+              <a:t>18 gestores lideram até 2 pessoas: </a:t>
+            </a:r>
+            <a:r>
+              <a:rPr sz="900">
                 <a:solidFill>
                   <a:srgbClr val="262626"/>
                 </a:solidFill>
                 <a:latin typeface="Arial"/>
               </a:rPr>
-              <a:t>CCO: </a:t>
-            </a:r>
-            <a:r>
-              <a:rPr sz="950" b="0">
+              <a:t>7 deles no CCO, que tem 8 gestores para 19 pessoas</a:t>
+            </a:r>
+          </a:p>
+          <a:p>
+            <a:pPr algn="l">
+              <a:spcAft>
+                <a:spcPts val="375"/>
+              </a:spcAft>
+            </a:pPr>
+            <a:r>
+              <a:rPr b="1" sz="900">
                 <a:solidFill>
                   <a:srgbClr val="262626"/>
                 </a:solidFill>
                 <a:latin typeface="Arial"/>
               </a:rPr>
-              <a:t>8 gestores para 19 pessoas, 7 deles com até 2 diretos, e 21% do quadro em aberto</a:t>
-            </a:r>
-          </a:p>
-          <a:p>
-            <a:pPr algn="l" marL="171450" indent="-171450">
-              <a:spcAft>
-                <a:spcPts val="400"/>
-              </a:spcAft>
-              <a:buClr>
-                <a:srgbClr val="009796"/>
-              </a:buClr>
-              <a:buFont typeface="Wingdings"/>
-              <a:buChar char="§"/>
-            </a:pPr>
-            <a:r>
-              <a:rPr sz="950" b="1">
+              <a:t>4 camadas de team leader em Air Operations: </a:t>
+            </a:r>
+            <a:r>
+              <a:rPr sz="900">
                 <a:solidFill>
                   <a:srgbClr val="262626"/>
                 </a:solidFill>
                 <a:latin typeface="Arial"/>
               </a:rPr>
-              <a:t>CITO e Air Product: </a:t>
-            </a:r>
-            <a:r>
-              <a:rPr sz="950" b="0">
+              <a:t>team leaders respondendo a team leaders com o mesmo título</a:t>
+            </a:r>
+          </a:p>
+          <a:p>
+            <a:pPr algn="l">
+              <a:spcAft>
+                <a:spcPts val="375"/>
+              </a:spcAft>
+            </a:pPr>
+            <a:r>
+              <a:rPr b="1" sz="900">
                 <a:solidFill>
                   <a:srgbClr val="262626"/>
                 </a:solidFill>
                 <a:latin typeface="Arial"/>
               </a:rPr>
-              <a:t>2 diretos cada; no CITO, o Head of Operation tem 27 diretos, o maior time da casa</a:t>
-            </a:r>
-          </a:p>
-          <a:p>
-            <a:pPr algn="l" marL="171450" indent="-171450">
-              <a:spcAft>
-                <a:spcPts val="400"/>
-              </a:spcAft>
-              <a:buClr>
-                <a:srgbClr val="009796"/>
-              </a:buClr>
-              <a:buFont typeface="Wingdings"/>
-              <a:buChar char="§"/>
-            </a:pPr>
-            <a:r>
-              <a:rPr sz="950" b="1">
+              <a:t>Especialistas já na praça: </a:t>
+            </a:r>
+            <a:r>
+              <a:rPr sz="900">
                 <a:solidFill>
                   <a:srgbClr val="262626"/>
                 </a:solidFill>
                 <a:latin typeface="Arial"/>
               </a:rPr>
-              <a:t>Fora do organograma: </a:t>
-            </a:r>
-            <a:r>
-              <a:rPr sz="950" b="0">
-                <a:solidFill>
-                  <a:srgbClr val="262626"/>
-                </a:solidFill>
-                <a:latin typeface="Arial"/>
-              </a:rPr>
-              <a:t>6 pessoas têm título de chefia e nenhum liderado, e 3 ativos da folha de setembro não têm posição no organograma</a:t>
+              <a:t>a Europa tem 1 team leader sediada em Portugal liderando 13 pessoas, das quais 11 estão no Brasil</a:t>
             </a:r>
           </a:p>
         </p:txBody>
       </p:sp>
-      <p:pic>
-        <p:nvPicPr>
-          <p:cNvPr id="16" name="Logo ATY rodape" descr="aty_footer_black.png"/>
-          <p:cNvPicPr>
-            <a:picLocks noChangeAspect="1"/>
-          </p:cNvPicPr>
-          <p:nvPr/>
-        </p:nvPicPr>
-        <p:blipFill>
-          <a:blip r:embed="rId4"/>
-          <a:stretch>
-            <a:fillRect/>
-          </a:stretch>
-        </p:blipFill>
-        <p:spPr>
-          <a:xfrm>
-            <a:off x="11646408" y="6420612"/>
-            <a:ext cx="198120" cy="94488"/>
-          </a:xfrm>
-          <a:prstGeom prst="rect">
-            <a:avLst/>
-          </a:prstGeom>
-        </p:spPr>
-      </p:pic>
     </p:spTree>
   </p:cSld>
   <p:clrMapOvr>
@@ -7084,7 +6735,7 @@
 </file>
 
 <file path=ppt/slides/slide3.xml><?xml version="1.0" encoding="utf-8"?>
-<p:sld xmlns:a="http://schemas.openxmlformats.org/drawingml/2006/main" xmlns:p="http://schemas.openxmlformats.org/presentationml/2006/main" xmlns:r="http://schemas.openxmlformats.org/officeDocument/2006/relationships">
+<p:sld xmlns:a="http://schemas.openxmlformats.org/drawingml/2006/main" xmlns:r="http://schemas.openxmlformats.org/officeDocument/2006/relationships" xmlns:p="http://schemas.openxmlformats.org/presentationml/2006/main">
   <p:cSld>
     <p:spTree>
       <p:nvGrpSpPr>
@@ -7092,7 +6743,14 @@
         <p:cNvGrpSpPr/>
         <p:nvPr/>
       </p:nvGrpSpPr>
-      <p:grpSpPr/>
+      <p:grpSpPr>
+        <a:xfrm>
+          <a:off x="0" y="0"/>
+          <a:ext cx="0" cy="0"/>
+          <a:chOff x="0" y="0"/>
+          <a:chExt cx="0" cy="0"/>
+        </a:xfrm>
+      </p:grpSpPr>
       <p:sp>
         <p:nvSpPr>
           <p:cNvPr id="2" name="Title 1"/>
@@ -7109,7 +6767,7 @@
           <a:lstStyle/>
           <a:p>
             <a:r>
-              <a:t>No COO, Air Operations tem 4 níveis de gestão, da head ao TL que lidera TL, e concentra 19 das 25 vagas; o draft já risca cinco caixas dessa cadeia sem que a planilha registre</a:t>
+              <a:t>EUA e Europa originam 1.951 dos 3.413 embarques por mês com 15 pessoas e 16 vagas em aberto; 12 dessas vagas nunca foram abertas e a Europa não tem head</a:t>
             </a:r>
           </a:p>
         </p:txBody>
@@ -7121,7 +6779,7 @@
             <a:spLocks noGrp="1"/>
           </p:cNvSpPr>
           <p:nvPr>
-            <p:ph type="body" idx="10" sz="quarter"/>
+            <p:ph type="body" sz="quarter" idx="10"/>
           </p:nvPr>
         </p:nvSpPr>
         <p:spPr/>
@@ -7130,7 +6788,7 @@
           <a:lstStyle/>
           <a:p>
             <a:r>
-              <a:t>Estrutura × Vagas | Operações (COO)</a:t>
+              <a:t>Estrutura × Vagas | Operações por praça</a:t>
             </a:r>
           </a:p>
         </p:txBody>
@@ -7142,7 +6800,7 @@
             <a:spLocks noGrp="1"/>
           </p:cNvSpPr>
           <p:nvPr>
-            <p:ph type="body" idx="11" sz="quarter"/>
+            <p:ph type="body" sz="quarter" idx="11"/>
           </p:nvPr>
         </p:nvSpPr>
         <p:spPr>
@@ -7156,7 +6814,7 @@
           <a:lstStyle/>
           <a:p>
             <a:r>
-              <a:t>COO: 155 pessoas · 29 gestores · 25 vagas, 6 publicadas · blocos de Operações: 12 das 17 vagas a abrir</a:t>
+              <a:t>Embarques originados por mês (média abr–set/26, CIS) · 161 agentes terceiros originam 1.173 · praça = entidade no organograma e escritório de origem no CIS</a:t>
             </a:r>
           </a:p>
         </p:txBody>
@@ -7168,7 +6826,7 @@
             <a:spLocks noGrp="1"/>
           </p:cNvSpPr>
           <p:nvPr>
-            <p:ph type="body" idx="13" sz="quarter"/>
+            <p:ph type="body" sz="quarter" idx="13"/>
           </p:nvPr>
         </p:nvSpPr>
         <p:spPr/>
@@ -7177,7 +6835,7 @@
           <a:lstStyle/>
           <a:p>
             <a:r>
-              <a:t>Fonte: ATY | Gestores por Level (organograma out/26) · Base Setembro/26 (RH) para os blocos de Operações · planilha de vagas (21/10/26) · Gupy · Draft 23 Out 26</a:t>
+              <a:t>Fonte: ATY | CIS ORDERS (13/10/26, campo off, média mensal abr–set/26) · Colaboradores Factorial (organograma out/26) · planilha de vagas (21/10/26) · Gupy</a:t>
             </a:r>
           </a:p>
         </p:txBody>
@@ -7190,8 +6848,8 @@
         </p:nvSpPr>
         <p:spPr>
           <a:xfrm>
-            <a:off x="356616" y="1472184"/>
-            <a:ext cx="5669280" cy="365760"/>
+            <a:off x="352425" y="1447800"/>
+            <a:ext cx="11496675" cy="361950"/>
           </a:xfrm>
           <a:prstGeom prst="rect">
             <a:avLst/>
@@ -7199,16 +6857,12 @@
           <a:noFill/>
         </p:spPr>
         <p:txBody>
-          <a:bodyPr wrap="square" lIns="18288" rIns="18288" tIns="0" bIns="0" anchor="t">
+          <a:bodyPr wrap="square" lIns="0" rIns="0" tIns="0" bIns="0">
             <a:spAutoFit/>
           </a:bodyPr>
           <a:lstStyle/>
           <a:p>
-            <a:pPr algn="l">
-              <a:spcAft>
-                <a:spcPts val="0"/>
-              </a:spcAft>
-            </a:pPr>
+            <a:pPr algn="l"/>
             <a:r>
               <a:rPr sz="1050" b="1">
                 <a:solidFill>
@@ -7216,64 +6870,200 @@
                 </a:solidFill>
                 <a:latin typeface="Arial"/>
               </a:rPr>
-              <a:t>Air Operations por nível</a:t>
-            </a:r>
-          </a:p>
-          <a:p>
-            <a:pPr algn="l">
-              <a:spcAft>
-                <a:spcPts val="0"/>
-              </a:spcAft>
-            </a:pPr>
-            <a:r>
-              <a:rPr sz="1000" b="0" i="1">
+              <a:t>A cadeia de Operações, por praça</a:t>
+            </a:r>
+          </a:p>
+        </p:txBody>
+      </p:sp>
+      <p:sp>
+        <p:nvSpPr>
+          <p:cNvPr id="8" name="TextBox 7"/>
+          <p:cNvSpPr txBox="1"/>
+          <p:nvPr/>
+        </p:nvSpPr>
+        <p:spPr>
+          <a:xfrm>
+            <a:off x="352425" y="1590675"/>
+            <a:ext cx="11496675" cy="190500"/>
+          </a:xfrm>
+          <a:prstGeom prst="rect">
+            <a:avLst/>
+          </a:prstGeom>
+          <a:noFill/>
+        </p:spPr>
+        <p:txBody>
+          <a:bodyPr wrap="square" lIns="0" rIns="0" tIns="0" bIns="0">
+            <a:spAutoFit/>
+          </a:bodyPr>
+          <a:lstStyle/>
+          <a:p>
+            <a:pPr algn="l"/>
+            <a:r>
+              <a:rPr sz="1000" b="0">
                 <a:solidFill>
                   <a:srgbClr val="262626"/>
                 </a:solidFill>
                 <a:latin typeface="Arial"/>
               </a:rPr>
-              <a:t>pessoas e gestores em cada nível, da head (L4) à execução (L8)</a:t>
+              <a:t>cargo, quadro atual, vagas em aberto e embarques originados por mês</a:t>
             </a:r>
           </a:p>
         </p:txBody>
       </p:sp>
-      <p:graphicFrame>
-        <p:nvGraphicFramePr>
-          <p:cNvPr id="8" name="Chart 7"/>
-          <p:cNvGraphicFramePr>
-            <a:graphicFrameLocks noGrp="1"/>
-          </p:cNvGraphicFramePr>
+      <p:sp>
+        <p:nvSpPr>
+          <p:cNvPr id="9" name="Rounded Rectangle 8"/>
+          <p:cNvSpPr/>
           <p:nvPr/>
-        </p:nvGraphicFramePr>
-        <p:xfrm>
-          <a:off x="310896" y="1828800"/>
-          <a:ext cx="5715000" cy="2103120"/>
-        </p:xfrm>
-        <a:graphic>
-          <a:graphicData uri="http://schemas.openxmlformats.org/drawingml/2006/chart">
-            <c:chart xmlns:c="http://schemas.openxmlformats.org/drawingml/2006/chart" r:id="rId2"/>
-          </a:graphicData>
-        </a:graphic>
-      </p:graphicFrame>
+        </p:nvSpPr>
+        <p:spPr>
+          <a:xfrm>
+            <a:off x="5143500" y="1847850"/>
+            <a:ext cx="1905000" cy="342900"/>
+          </a:xfrm>
+          <a:prstGeom prst="roundRect">
+            <a:avLst>
+              <a:gd name="adj" fmla="val 8000"/>
+            </a:avLst>
+          </a:prstGeom>
+          <a:solidFill>
+            <a:srgbClr val="1D368E"/>
+          </a:solidFill>
+          <a:ln>
+            <a:noFill/>
+          </a:ln>
+        </p:spPr>
+        <p:style>
+          <a:lnRef idx="1">
+            <a:schemeClr val="accent1"/>
+          </a:lnRef>
+          <a:fillRef idx="3">
+            <a:schemeClr val="accent1"/>
+          </a:fillRef>
+          <a:effectRef idx="2">
+            <a:schemeClr val="accent1"/>
+          </a:effectRef>
+          <a:fontRef idx="minor">
+            <a:schemeClr val="lt1"/>
+          </a:fontRef>
+        </p:style>
+        <p:txBody>
+          <a:bodyPr rtlCol="0" anchor="ctr" wrap="square" lIns="57150" rIns="57150" tIns="19050" bIns="19050"/>
+          <a:lstStyle/>
+          <a:p>
+            <a:pPr algn="ctr"/>
+            <a:r>
+              <a:rPr sz="1100" b="1">
+                <a:solidFill>
+                  <a:srgbClr val="FFFFFF"/>
+                </a:solidFill>
+                <a:latin typeface="Arial"/>
+              </a:rPr>
+              <a:t>COO</a:t>
+            </a:r>
+          </a:p>
+          <a:p>
+            <a:pPr algn="ctr"/>
+            <a:r>
+              <a:rPr sz="850" b="0">
+                <a:solidFill>
+                  <a:srgbClr val="FFFFFF"/>
+                </a:solidFill>
+                <a:latin typeface="Arial"/>
+              </a:rPr>
+              <a:t>200 pessoas</a:t>
+            </a:r>
+          </a:p>
+        </p:txBody>
+      </p:sp>
       <p:cxnSp>
         <p:nvCxnSpPr>
-          <p:cNvPr id="9" name="Connector 8"/>
+          <p:cNvPr id="10" name="Connector 9"/>
           <p:cNvCxnSpPr/>
           <p:nvPr/>
         </p:nvCxnSpPr>
         <p:spPr>
           <a:xfrm>
-            <a:off x="320040" y="3995928"/>
-            <a:ext cx="5715000" cy="0"/>
+            <a:off x="6096000" y="2190750"/>
+            <a:ext cx="0" cy="114300"/>
           </a:xfrm>
-          <a:prstGeom prst="line">
+          <a:prstGeom prst="bentConnector3">
             <a:avLst/>
           </a:prstGeom>
-          <a:ln w="9525">
+          <a:ln w="12700">
             <a:solidFill>
               <a:srgbClr val="BFBFBF"/>
             </a:solidFill>
-            <a:prstDash val="dash"/>
+          </a:ln>
+        </p:spPr>
+        <p:style>
+          <a:lnRef idx="2">
+            <a:schemeClr val="accent1"/>
+          </a:lnRef>
+          <a:fillRef idx="0">
+            <a:schemeClr val="accent1"/>
+          </a:fillRef>
+          <a:effectRef idx="1">
+            <a:schemeClr val="accent1"/>
+          </a:effectRef>
+          <a:fontRef idx="minor">
+            <a:schemeClr val="tx1"/>
+          </a:fontRef>
+        </p:style>
+      </p:cxnSp>
+      <p:cxnSp>
+        <p:nvCxnSpPr>
+          <p:cNvPr id="11" name="Connector 10"/>
+          <p:cNvCxnSpPr/>
+          <p:nvPr/>
+        </p:nvCxnSpPr>
+        <p:spPr>
+          <a:xfrm>
+            <a:off x="1771650" y="2305050"/>
+            <a:ext cx="8648700" cy="0"/>
+          </a:xfrm>
+          <a:prstGeom prst="bentConnector3">
+            <a:avLst/>
+          </a:prstGeom>
+          <a:ln w="12700">
+            <a:solidFill>
+              <a:srgbClr val="BFBFBF"/>
+            </a:solidFill>
+          </a:ln>
+        </p:spPr>
+        <p:style>
+          <a:lnRef idx="2">
+            <a:schemeClr val="accent1"/>
+          </a:lnRef>
+          <a:fillRef idx="0">
+            <a:schemeClr val="accent1"/>
+          </a:fillRef>
+          <a:effectRef idx="1">
+            <a:schemeClr val="accent1"/>
+          </a:effectRef>
+          <a:fontRef idx="minor">
+            <a:schemeClr val="tx1"/>
+          </a:fontRef>
+        </p:style>
+      </p:cxnSp>
+      <p:cxnSp>
+        <p:nvCxnSpPr>
+          <p:cNvPr id="12" name="Connector 11"/>
+          <p:cNvCxnSpPr/>
+          <p:nvPr/>
+        </p:nvCxnSpPr>
+        <p:spPr>
+          <a:xfrm>
+            <a:off x="1638300" y="2305050"/>
+            <a:ext cx="0" cy="114300"/>
+          </a:xfrm>
+          <a:prstGeom prst="bentConnector3">
+            <a:avLst/>
+          </a:prstGeom>
+          <a:ln w="12700">
+            <a:solidFill>
+              <a:srgbClr val="009796"/>
+            </a:solidFill>
           </a:ln>
         </p:spPr>
         <p:style>
@@ -7293,1927 +7083,96 @@
       </p:cxnSp>
       <p:sp>
         <p:nvSpPr>
-          <p:cNvPr id="10" name="TextBox 9"/>
-          <p:cNvSpPr txBox="1"/>
-          <p:nvPr/>
-        </p:nvSpPr>
-        <p:spPr>
-          <a:xfrm>
-            <a:off x="356616" y="4069080"/>
-            <a:ext cx="5669280" cy="365760"/>
-          </a:xfrm>
-          <a:prstGeom prst="rect">
-            <a:avLst/>
-          </a:prstGeom>
-          <a:noFill/>
-        </p:spPr>
-        <p:txBody>
-          <a:bodyPr wrap="square" lIns="18288" rIns="18288" tIns="0" bIns="0" anchor="t">
-            <a:spAutoFit/>
-          </a:bodyPr>
-          <a:lstStyle/>
-          <a:p>
-            <a:pPr algn="l">
-              <a:spcAft>
-                <a:spcPts val="0"/>
-              </a:spcAft>
-            </a:pPr>
-            <a:r>
-              <a:rPr sz="1050" b="1">
-                <a:solidFill>
-                  <a:srgbClr val="262626"/>
-                </a:solidFill>
-                <a:latin typeface="Arial"/>
-              </a:rPr>
-              <a:t>Vagas dos blocos de Operações por local</a:t>
-            </a:r>
-          </a:p>
-          <a:p>
-            <a:pPr algn="l">
-              <a:spcAft>
-                <a:spcPts val="0"/>
-              </a:spcAft>
-            </a:pPr>
-            <a:r>
-              <a:rPr sz="1000" b="0" i="1">
-                <a:solidFill>
-                  <a:srgbClr val="262626"/>
-                </a:solidFill>
-                <a:latin typeface="Arial"/>
-              </a:rPr>
-              <a:t>publicadas no Gupy × ainda a abrir</a:t>
-            </a:r>
-          </a:p>
-        </p:txBody>
-      </p:sp>
-      <p:graphicFrame>
-        <p:nvGraphicFramePr>
-          <p:cNvPr id="11" name="Chart 10"/>
-          <p:cNvGraphicFramePr>
-            <a:graphicFrameLocks noGrp="1"/>
-          </p:cNvGraphicFramePr>
-          <p:nvPr/>
-        </p:nvGraphicFramePr>
-        <p:xfrm>
-          <a:off x="310896" y="4434840"/>
-          <a:ext cx="5715000" cy="1737360"/>
-        </p:xfrm>
-        <a:graphic>
-          <a:graphicData uri="http://schemas.openxmlformats.org/drawingml/2006/chart">
-            <c:chart xmlns:c="http://schemas.openxmlformats.org/drawingml/2006/chart" r:id="rId3"/>
-          </a:graphicData>
-        </a:graphic>
-      </p:graphicFrame>
-      <p:cxnSp>
-        <p:nvCxnSpPr>
-          <p:cNvPr id="12" name="Connector 11"/>
-          <p:cNvCxnSpPr/>
-          <p:nvPr/>
-        </p:nvCxnSpPr>
-        <p:spPr>
-          <a:xfrm>
-            <a:off x="6099048" y="1472184"/>
-            <a:ext cx="0" cy="4745736"/>
-          </a:xfrm>
-          <a:prstGeom prst="line">
-            <a:avLst/>
-          </a:prstGeom>
-          <a:ln w="9525">
-            <a:solidFill>
-              <a:srgbClr val="BFBFBF"/>
-            </a:solidFill>
-            <a:prstDash val="dash"/>
-          </a:ln>
-        </p:spPr>
-        <p:style>
-          <a:lnRef idx="2">
-            <a:schemeClr val="accent1"/>
-          </a:lnRef>
-          <a:fillRef idx="0">
-            <a:schemeClr val="accent1"/>
-          </a:fillRef>
-          <a:effectRef idx="1">
-            <a:schemeClr val="accent1"/>
-          </a:effectRef>
-          <a:fontRef idx="minor">
-            <a:schemeClr val="tx1"/>
-          </a:fontRef>
-        </p:style>
-      </p:cxnSp>
-      <p:sp>
-        <p:nvSpPr>
-          <p:cNvPr id="13" name="TextBox 12"/>
-          <p:cNvSpPr txBox="1"/>
-          <p:nvPr/>
-        </p:nvSpPr>
-        <p:spPr>
-          <a:xfrm>
-            <a:off x="6227064" y="1472184"/>
-            <a:ext cx="5623560" cy="365760"/>
-          </a:xfrm>
-          <a:prstGeom prst="rect">
-            <a:avLst/>
-          </a:prstGeom>
-          <a:noFill/>
-        </p:spPr>
-        <p:txBody>
-          <a:bodyPr wrap="square" lIns="18288" rIns="18288" tIns="0" bIns="0" anchor="t">
-            <a:spAutoFit/>
-          </a:bodyPr>
-          <a:lstStyle/>
-          <a:p>
-            <a:pPr algn="l">
-              <a:spcAft>
-                <a:spcPts val="0"/>
-              </a:spcAft>
-            </a:pPr>
-            <a:r>
-              <a:rPr sz="1050" b="1">
-                <a:solidFill>
-                  <a:srgbClr val="262626"/>
-                </a:solidFill>
-                <a:latin typeface="Arial"/>
-              </a:rPr>
-              <a:t>Cadeia de gestão × vagas por área do COO</a:t>
-            </a:r>
-          </a:p>
-          <a:p>
-            <a:pPr algn="l">
-              <a:spcAft>
-                <a:spcPts val="0"/>
-              </a:spcAft>
-            </a:pPr>
-            <a:r>
-              <a:rPr sz="1000" b="0" i="1">
-                <a:solidFill>
-                  <a:srgbClr val="262626"/>
-                </a:solidFill>
-                <a:latin typeface="Arial"/>
-              </a:rPr>
-              <a:t>diretos e indiretos de cada head</a:t>
-            </a:r>
-          </a:p>
-        </p:txBody>
-      </p:sp>
-      <p:graphicFrame>
-        <p:nvGraphicFramePr>
-          <p:cNvPr id="14" name="Table 13"/>
-          <p:cNvGraphicFramePr>
-            <a:graphicFrameLocks noGrp="1"/>
-          </p:cNvGraphicFramePr>
-          <p:nvPr/>
-        </p:nvGraphicFramePr>
-        <p:xfrm>
-          <a:off x="6227064" y="1874519"/>
-          <a:ext cx="5623560" cy="2057400"/>
-        </p:xfrm>
-        <a:graphic>
-          <a:graphicData uri="http://schemas.openxmlformats.org/drawingml/2006/table">
-            <a:tbl>
-              <a:tblPr firstRow="0" bandRow="0">
-                <a:tableStyleId>{5940675A-B579-460E-94D1-54222C63F5DA}</a:tableStyleId>
-              </a:tblPr>
-              <a:tblGrid>
-                <a:gridCol w="1417320"/>
-                <a:gridCol w="548640"/>
-                <a:gridCol w="658368"/>
-                <a:gridCol w="658368"/>
-                <a:gridCol w="777240"/>
-                <a:gridCol w="548640"/>
-                <a:gridCol w="484632"/>
-                <a:gridCol w="530352"/>
-              </a:tblGrid>
-              <a:tr h="228600">
-                <a:tc>
-                  <a:txBody>
-                    <a:bodyPr wrap="square"/>
-                    <a:lstStyle/>
-                    <a:p>
-                      <a:pPr algn="l"/>
-                      <a:r>
-                        <a:rPr sz="900" b="1">
-                          <a:solidFill>
-                            <a:srgbClr val="FFFFFF"/>
-                          </a:solidFill>
-                          <a:latin typeface="Arial"/>
-                        </a:rPr>
-                        <a:t>Área</a:t>
-                      </a:r>
-                    </a:p>
-                  </a:txBody>
-                  <a:tcPr marL="54864" marR="54864" marT="18288" marB="18288" anchor="ctr">
-                    <a:solidFill>
-                      <a:srgbClr val="009796"/>
-                    </a:solidFill>
-                  </a:tcPr>
-                </a:tc>
-                <a:tc>
-                  <a:txBody>
-                    <a:bodyPr wrap="square"/>
-                    <a:lstStyle/>
-                    <a:p>
-                      <a:pPr algn="ctr"/>
-                      <a:r>
-                        <a:rPr sz="900" b="1">
-                          <a:solidFill>
-                            <a:srgbClr val="FFFFFF"/>
-                          </a:solidFill>
-                          <a:latin typeface="Arial"/>
-                        </a:rPr>
-                        <a:t>Diretos</a:t>
-                      </a:r>
-                    </a:p>
-                  </a:txBody>
-                  <a:tcPr marL="54864" marR="54864" marT="18288" marB="18288" anchor="ctr">
-                    <a:solidFill>
-                      <a:srgbClr val="009796"/>
-                    </a:solidFill>
-                  </a:tcPr>
-                </a:tc>
-                <a:tc>
-                  <a:txBody>
-                    <a:bodyPr wrap="square"/>
-                    <a:lstStyle/>
-                    <a:p>
-                      <a:pPr algn="ctr"/>
-                      <a:r>
-                        <a:rPr sz="900" b="1">
-                          <a:solidFill>
-                            <a:srgbClr val="FFFFFF"/>
-                          </a:solidFill>
-                          <a:latin typeface="Arial"/>
-                        </a:rPr>
-                        <a:t>Indiretos</a:t>
-                      </a:r>
-                    </a:p>
-                  </a:txBody>
-                  <a:tcPr marL="54864" marR="54864" marT="18288" marB="18288" anchor="ctr">
-                    <a:solidFill>
-                      <a:srgbClr val="009796"/>
-                    </a:solidFill>
-                  </a:tcPr>
-                </a:tc>
-                <a:tc>
-                  <a:txBody>
-                    <a:bodyPr wrap="square"/>
-                    <a:lstStyle/>
-                    <a:p>
-                      <a:pPr algn="ctr"/>
-                      <a:r>
-                        <a:rPr sz="900" b="1">
-                          <a:solidFill>
-                            <a:srgbClr val="FFFFFF"/>
-                          </a:solidFill>
-                          <a:latin typeface="Arial"/>
-                        </a:rPr>
-                        <a:t>Gestores</a:t>
-                      </a:r>
-                    </a:p>
-                  </a:txBody>
-                  <a:tcPr marL="54864" marR="54864" marT="18288" marB="18288" anchor="ctr">
-                    <a:solidFill>
-                      <a:srgbClr val="009796"/>
-                    </a:solidFill>
-                  </a:tcPr>
-                </a:tc>
-                <a:tc>
-                  <a:txBody>
-                    <a:bodyPr wrap="square"/>
-                    <a:lstStyle/>
-                    <a:p>
-                      <a:pPr algn="ctr"/>
-                      <a:r>
-                        <a:rPr sz="900" b="1">
-                          <a:solidFill>
-                            <a:srgbClr val="FFFFFF"/>
-                          </a:solidFill>
-                          <a:latin typeface="Arial"/>
-                        </a:rPr>
-                        <a:t>Camadas de gestão</a:t>
-                      </a:r>
-                    </a:p>
-                  </a:txBody>
-                  <a:tcPr marL="54864" marR="54864" marT="18288" marB="18288" anchor="ctr">
-                    <a:solidFill>
-                      <a:srgbClr val="009796"/>
-                    </a:solidFill>
-                  </a:tcPr>
-                </a:tc>
-                <a:tc>
-                  <a:txBody>
-                    <a:bodyPr wrap="square"/>
-                    <a:lstStyle/>
-                    <a:p>
-                      <a:pPr algn="ctr"/>
-                      <a:r>
-                        <a:rPr sz="900" b="1">
-                          <a:solidFill>
-                            <a:srgbClr val="FFFFFF"/>
-                          </a:solidFill>
-                          <a:latin typeface="Arial"/>
-                        </a:rPr>
-                        <a:t>Maior time</a:t>
-                      </a:r>
-                    </a:p>
-                  </a:txBody>
-                  <a:tcPr marL="54864" marR="54864" marT="18288" marB="18288" anchor="ctr">
-                    <a:solidFill>
-                      <a:srgbClr val="009796"/>
-                    </a:solidFill>
-                  </a:tcPr>
-                </a:tc>
-                <a:tc>
-                  <a:txBody>
-                    <a:bodyPr wrap="square"/>
-                    <a:lstStyle/>
-                    <a:p>
-                      <a:pPr algn="ctr"/>
-                      <a:r>
-                        <a:rPr sz="900" b="1">
-                          <a:solidFill>
-                            <a:srgbClr val="FFFFFF"/>
-                          </a:solidFill>
-                          <a:latin typeface="Arial"/>
-                        </a:rPr>
-                        <a:t>Vagas</a:t>
-                      </a:r>
-                    </a:p>
-                  </a:txBody>
-                  <a:tcPr marL="54864" marR="54864" marT="18288" marB="18288" anchor="ctr">
-                    <a:solidFill>
-                      <a:srgbClr val="009796"/>
-                    </a:solidFill>
-                  </a:tcPr>
-                </a:tc>
-                <a:tc>
-                  <a:txBody>
-                    <a:bodyPr wrap="square"/>
-                    <a:lstStyle/>
-                    <a:p>
-                      <a:pPr algn="ctr"/>
-                      <a:r>
-                        <a:rPr sz="900" b="1">
-                          <a:solidFill>
-                            <a:srgbClr val="FFFFFF"/>
-                          </a:solidFill>
-                          <a:latin typeface="Arial"/>
-                        </a:rPr>
-                        <a:t>Sem proc.</a:t>
-                      </a:r>
-                    </a:p>
-                  </a:txBody>
-                  <a:tcPr marL="54864" marR="54864" marT="18288" marB="18288" anchor="ctr">
-                    <a:solidFill>
-                      <a:srgbClr val="009796"/>
-                    </a:solidFill>
-                  </a:tcPr>
-                </a:tc>
-              </a:tr>
-              <a:tr h="228600">
-                <a:tc>
-                  <a:txBody>
-                    <a:bodyPr wrap="square"/>
-                    <a:lstStyle/>
-                    <a:p>
-                      <a:pPr algn="l"/>
-                      <a:r>
-                        <a:rPr sz="900" b="1">
-                          <a:solidFill>
-                            <a:srgbClr val="000000"/>
-                          </a:solidFill>
-                          <a:latin typeface="Arial"/>
-                        </a:rPr>
-                        <a:t>Air Operations</a:t>
-                      </a:r>
-                    </a:p>
-                  </a:txBody>
-                  <a:tcPr marL="54864" marR="54864" marT="18288" marB="18288" anchor="ctr">
-                    <a:solidFill>
-                      <a:srgbClr val="F2F2F2"/>
-                    </a:solidFill>
-                  </a:tcPr>
-                </a:tc>
-                <a:tc>
-                  <a:txBody>
-                    <a:bodyPr wrap="square"/>
-                    <a:lstStyle/>
-                    <a:p>
-                      <a:pPr algn="ctr"/>
-                      <a:r>
-                        <a:rPr sz="900" b="0">
-                          <a:solidFill>
-                            <a:srgbClr val="000000"/>
-                          </a:solidFill>
-                          <a:latin typeface="Arial"/>
-                        </a:rPr>
-                        <a:t>4</a:t>
-                      </a:r>
-                    </a:p>
-                  </a:txBody>
-                  <a:tcPr marL="54864" marR="54864" marT="18288" marB="18288" anchor="ctr">
-                    <a:solidFill>
-                      <a:srgbClr val="F2F2F2"/>
-                    </a:solidFill>
-                  </a:tcPr>
-                </a:tc>
-                <a:tc>
-                  <a:txBody>
-                    <a:bodyPr wrap="square"/>
-                    <a:lstStyle/>
-                    <a:p>
-                      <a:pPr algn="ctr"/>
-                      <a:r>
-                        <a:rPr sz="900" b="0">
-                          <a:solidFill>
-                            <a:srgbClr val="000000"/>
-                          </a:solidFill>
-                          <a:latin typeface="Arial"/>
-                        </a:rPr>
-                        <a:t>81</a:t>
-                      </a:r>
-                    </a:p>
-                  </a:txBody>
-                  <a:tcPr marL="54864" marR="54864" marT="18288" marB="18288" anchor="ctr">
-                    <a:solidFill>
-                      <a:srgbClr val="F2F2F2"/>
-                    </a:solidFill>
-                  </a:tcPr>
-                </a:tc>
-                <a:tc>
-                  <a:txBody>
-                    <a:bodyPr wrap="square"/>
-                    <a:lstStyle/>
-                    <a:p>
-                      <a:pPr algn="ctr"/>
-                      <a:r>
-                        <a:rPr sz="900" b="0">
-                          <a:solidFill>
-                            <a:srgbClr val="000000"/>
-                          </a:solidFill>
-                          <a:latin typeface="Arial"/>
-                        </a:rPr>
-                        <a:t>15</a:t>
-                      </a:r>
-                    </a:p>
-                  </a:txBody>
-                  <a:tcPr marL="54864" marR="54864" marT="18288" marB="18288" anchor="ctr">
-                    <a:solidFill>
-                      <a:srgbClr val="F2F2F2"/>
-                    </a:solidFill>
-                  </a:tcPr>
-                </a:tc>
-                <a:tc>
-                  <a:txBody>
-                    <a:bodyPr wrap="square"/>
-                    <a:lstStyle/>
-                    <a:p>
-                      <a:pPr algn="ctr"/>
-                      <a:r>
-                        <a:rPr sz="900" b="1">
-                          <a:solidFill>
-                            <a:srgbClr val="6B2D6B"/>
-                          </a:solidFill>
-                          <a:latin typeface="Arial"/>
-                        </a:rPr>
-                        <a:t>4</a:t>
-                      </a:r>
-                    </a:p>
-                  </a:txBody>
-                  <a:tcPr marL="54864" marR="54864" marT="18288" marB="18288" anchor="ctr">
-                    <a:solidFill>
-                      <a:srgbClr val="F2F2F2"/>
-                    </a:solidFill>
-                  </a:tcPr>
-                </a:tc>
-                <a:tc>
-                  <a:txBody>
-                    <a:bodyPr wrap="square"/>
-                    <a:lstStyle/>
-                    <a:p>
-                      <a:pPr algn="ctr"/>
-                      <a:r>
-                        <a:rPr sz="900" b="0">
-                          <a:solidFill>
-                            <a:srgbClr val="000000"/>
-                          </a:solidFill>
-                          <a:latin typeface="Arial"/>
-                        </a:rPr>
-                        <a:t>13</a:t>
-                      </a:r>
-                    </a:p>
-                  </a:txBody>
-                  <a:tcPr marL="54864" marR="54864" marT="18288" marB="18288" anchor="ctr">
-                    <a:solidFill>
-                      <a:srgbClr val="F2F2F2"/>
-                    </a:solidFill>
-                  </a:tcPr>
-                </a:tc>
-                <a:tc>
-                  <a:txBody>
-                    <a:bodyPr wrap="square"/>
-                    <a:lstStyle/>
-                    <a:p>
-                      <a:pPr algn="ctr"/>
-                      <a:r>
-                        <a:rPr sz="900" b="0">
-                          <a:solidFill>
-                            <a:srgbClr val="000000"/>
-                          </a:solidFill>
-                          <a:latin typeface="Arial"/>
-                        </a:rPr>
-                        <a:t>19</a:t>
-                      </a:r>
-                    </a:p>
-                  </a:txBody>
-                  <a:tcPr marL="54864" marR="54864" marT="18288" marB="18288" anchor="ctr">
-                    <a:solidFill>
-                      <a:srgbClr val="F2F2F2"/>
-                    </a:solidFill>
-                  </a:tcPr>
-                </a:tc>
-                <a:tc>
-                  <a:txBody>
-                    <a:bodyPr wrap="square"/>
-                    <a:lstStyle/>
-                    <a:p>
-                      <a:pPr algn="ctr"/>
-                      <a:r>
-                        <a:rPr sz="900" b="1">
-                          <a:solidFill>
-                            <a:srgbClr val="6B2D6B"/>
-                          </a:solidFill>
-                          <a:latin typeface="Arial"/>
-                        </a:rPr>
-                        <a:t>14</a:t>
-                      </a:r>
-                    </a:p>
-                  </a:txBody>
-                  <a:tcPr marL="54864" marR="54864" marT="18288" marB="18288" anchor="ctr">
-                    <a:solidFill>
-                      <a:srgbClr val="F2F2F2"/>
-                    </a:solidFill>
-                  </a:tcPr>
-                </a:tc>
-              </a:tr>
-              <a:tr h="228600">
-                <a:tc>
-                  <a:txBody>
-                    <a:bodyPr wrap="square"/>
-                    <a:lstStyle/>
-                    <a:p>
-                      <a:pPr algn="l"/>
-                      <a:r>
-                        <a:rPr sz="900" b="1">
-                          <a:solidFill>
-                            <a:srgbClr val="000000"/>
-                          </a:solidFill>
-                          <a:latin typeface="Arial"/>
-                        </a:rPr>
-                        <a:t>Ocean Operations</a:t>
-                      </a:r>
-                    </a:p>
-                  </a:txBody>
-                  <a:tcPr marL="54864" marR="54864" marT="18288" marB="18288" anchor="ctr">
-                    <a:solidFill>
-                      <a:srgbClr val="FFFFFF"/>
-                    </a:solidFill>
-                  </a:tcPr>
-                </a:tc>
-                <a:tc>
-                  <a:txBody>
-                    <a:bodyPr wrap="square"/>
-                    <a:lstStyle/>
-                    <a:p>
-                      <a:pPr algn="ctr"/>
-                      <a:r>
-                        <a:rPr sz="900" b="0">
-                          <a:solidFill>
-                            <a:srgbClr val="000000"/>
-                          </a:solidFill>
-                          <a:latin typeface="Arial"/>
-                        </a:rPr>
-                        <a:t>6</a:t>
-                      </a:r>
-                    </a:p>
-                  </a:txBody>
-                  <a:tcPr marL="54864" marR="54864" marT="18288" marB="18288" anchor="ctr">
-                    <a:solidFill>
-                      <a:srgbClr val="FFFFFF"/>
-                    </a:solidFill>
-                  </a:tcPr>
-                </a:tc>
-                <a:tc>
-                  <a:txBody>
-                    <a:bodyPr wrap="square"/>
-                    <a:lstStyle/>
-                    <a:p>
-                      <a:pPr algn="ctr"/>
-                      <a:r>
-                        <a:rPr sz="900" b="0">
-                          <a:solidFill>
-                            <a:srgbClr val="000000"/>
-                          </a:solidFill>
-                          <a:latin typeface="Arial"/>
-                        </a:rPr>
-                        <a:t>29</a:t>
-                      </a:r>
-                    </a:p>
-                  </a:txBody>
-                  <a:tcPr marL="54864" marR="54864" marT="18288" marB="18288" anchor="ctr">
-                    <a:solidFill>
-                      <a:srgbClr val="FFFFFF"/>
-                    </a:solidFill>
-                  </a:tcPr>
-                </a:tc>
-                <a:tc>
-                  <a:txBody>
-                    <a:bodyPr wrap="square"/>
-                    <a:lstStyle/>
-                    <a:p>
-                      <a:pPr algn="ctr"/>
-                      <a:r>
-                        <a:rPr sz="900" b="0">
-                          <a:solidFill>
-                            <a:srgbClr val="000000"/>
-                          </a:solidFill>
-                          <a:latin typeface="Arial"/>
-                        </a:rPr>
-                        <a:t>6</a:t>
-                      </a:r>
-                    </a:p>
-                  </a:txBody>
-                  <a:tcPr marL="54864" marR="54864" marT="18288" marB="18288" anchor="ctr">
-                    <a:solidFill>
-                      <a:srgbClr val="FFFFFF"/>
-                    </a:solidFill>
-                  </a:tcPr>
-                </a:tc>
-                <a:tc>
-                  <a:txBody>
-                    <a:bodyPr wrap="square"/>
-                    <a:lstStyle/>
-                    <a:p>
-                      <a:pPr algn="ctr"/>
-                      <a:r>
-                        <a:rPr sz="900" b="0">
-                          <a:solidFill>
-                            <a:srgbClr val="000000"/>
-                          </a:solidFill>
-                          <a:latin typeface="Arial"/>
-                        </a:rPr>
-                        <a:t>2</a:t>
-                      </a:r>
-                    </a:p>
-                  </a:txBody>
-                  <a:tcPr marL="54864" marR="54864" marT="18288" marB="18288" anchor="ctr">
-                    <a:solidFill>
-                      <a:srgbClr val="FFFFFF"/>
-                    </a:solidFill>
-                  </a:tcPr>
-                </a:tc>
-                <a:tc>
-                  <a:txBody>
-                    <a:bodyPr wrap="square"/>
-                    <a:lstStyle/>
-                    <a:p>
-                      <a:pPr algn="ctr"/>
-                      <a:r>
-                        <a:rPr sz="900" b="0">
-                          <a:solidFill>
-                            <a:srgbClr val="000000"/>
-                          </a:solidFill>
-                          <a:latin typeface="Arial"/>
-                        </a:rPr>
-                        <a:t>12</a:t>
-                      </a:r>
-                    </a:p>
-                  </a:txBody>
-                  <a:tcPr marL="54864" marR="54864" marT="18288" marB="18288" anchor="ctr">
-                    <a:solidFill>
-                      <a:srgbClr val="FFFFFF"/>
-                    </a:solidFill>
-                  </a:tcPr>
-                </a:tc>
-                <a:tc>
-                  <a:txBody>
-                    <a:bodyPr wrap="square"/>
-                    <a:lstStyle/>
-                    <a:p>
-                      <a:pPr algn="ctr"/>
-                      <a:r>
-                        <a:rPr sz="900" b="0">
-                          <a:solidFill>
-                            <a:srgbClr val="000000"/>
-                          </a:solidFill>
-                          <a:latin typeface="Arial"/>
-                        </a:rPr>
-                        <a:t>3</a:t>
-                      </a:r>
-                    </a:p>
-                  </a:txBody>
-                  <a:tcPr marL="54864" marR="54864" marT="18288" marB="18288" anchor="ctr">
-                    <a:solidFill>
-                      <a:srgbClr val="FFFFFF"/>
-                    </a:solidFill>
-                  </a:tcPr>
-                </a:tc>
-                <a:tc>
-                  <a:txBody>
-                    <a:bodyPr wrap="square"/>
-                    <a:lstStyle/>
-                    <a:p>
-                      <a:pPr algn="ctr"/>
-                      <a:r>
-                        <a:rPr sz="900" b="1">
-                          <a:solidFill>
-                            <a:srgbClr val="6B2D6B"/>
-                          </a:solidFill>
-                          <a:latin typeface="Arial"/>
-                        </a:rPr>
-                        <a:t>3</a:t>
-                      </a:r>
-                    </a:p>
-                  </a:txBody>
-                  <a:tcPr marL="54864" marR="54864" marT="18288" marB="18288" anchor="ctr">
-                    <a:solidFill>
-                      <a:srgbClr val="FFFFFF"/>
-                    </a:solidFill>
-                  </a:tcPr>
-                </a:tc>
-              </a:tr>
-              <a:tr h="228600">
-                <a:tc>
-                  <a:txBody>
-                    <a:bodyPr wrap="square"/>
-                    <a:lstStyle/>
-                    <a:p>
-                      <a:pPr algn="l"/>
-                      <a:r>
-                        <a:rPr sz="900" b="1">
-                          <a:solidFill>
-                            <a:srgbClr val="000000"/>
-                          </a:solidFill>
-                          <a:latin typeface="Arial"/>
-                        </a:rPr>
-                        <a:t>Quality &amp; Op. Intel.</a:t>
-                      </a:r>
-                    </a:p>
-                  </a:txBody>
-                  <a:tcPr marL="54864" marR="54864" marT="18288" marB="18288" anchor="ctr">
-                    <a:solidFill>
-                      <a:srgbClr val="F2F2F2"/>
-                    </a:solidFill>
-                  </a:tcPr>
-                </a:tc>
-                <a:tc>
-                  <a:txBody>
-                    <a:bodyPr wrap="square"/>
-                    <a:lstStyle/>
-                    <a:p>
-                      <a:pPr algn="ctr"/>
-                      <a:r>
-                        <a:rPr sz="900" b="0">
-                          <a:solidFill>
-                            <a:srgbClr val="000000"/>
-                          </a:solidFill>
-                          <a:latin typeface="Arial"/>
-                        </a:rPr>
-                        <a:t>6</a:t>
-                      </a:r>
-                    </a:p>
-                  </a:txBody>
-                  <a:tcPr marL="54864" marR="54864" marT="18288" marB="18288" anchor="ctr">
-                    <a:solidFill>
-                      <a:srgbClr val="F2F2F2"/>
-                    </a:solidFill>
-                  </a:tcPr>
-                </a:tc>
-                <a:tc>
-                  <a:txBody>
-                    <a:bodyPr wrap="square"/>
-                    <a:lstStyle/>
-                    <a:p>
-                      <a:pPr algn="ctr"/>
-                      <a:r>
-                        <a:rPr sz="900" b="0">
-                          <a:solidFill>
-                            <a:srgbClr val="000000"/>
-                          </a:solidFill>
-                          <a:latin typeface="Arial"/>
-                        </a:rPr>
-                        <a:t>6</a:t>
-                      </a:r>
-                    </a:p>
-                  </a:txBody>
-                  <a:tcPr marL="54864" marR="54864" marT="18288" marB="18288" anchor="ctr">
-                    <a:solidFill>
-                      <a:srgbClr val="F2F2F2"/>
-                    </a:solidFill>
-                  </a:tcPr>
-                </a:tc>
-                <a:tc>
-                  <a:txBody>
-                    <a:bodyPr wrap="square"/>
-                    <a:lstStyle/>
-                    <a:p>
-                      <a:pPr algn="ctr"/>
-                      <a:r>
-                        <a:rPr sz="900" b="0">
-                          <a:solidFill>
-                            <a:srgbClr val="000000"/>
-                          </a:solidFill>
-                          <a:latin typeface="Arial"/>
-                        </a:rPr>
-                        <a:t>3</a:t>
-                      </a:r>
-                    </a:p>
-                  </a:txBody>
-                  <a:tcPr marL="54864" marR="54864" marT="18288" marB="18288" anchor="ctr">
-                    <a:solidFill>
-                      <a:srgbClr val="F2F2F2"/>
-                    </a:solidFill>
-                  </a:tcPr>
-                </a:tc>
-                <a:tc>
-                  <a:txBody>
-                    <a:bodyPr wrap="square"/>
-                    <a:lstStyle/>
-                    <a:p>
-                      <a:pPr algn="ctr"/>
-                      <a:r>
-                        <a:rPr sz="900" b="0">
-                          <a:solidFill>
-                            <a:srgbClr val="000000"/>
-                          </a:solidFill>
-                          <a:latin typeface="Arial"/>
-                        </a:rPr>
-                        <a:t>2</a:t>
-                      </a:r>
-                    </a:p>
-                  </a:txBody>
-                  <a:tcPr marL="54864" marR="54864" marT="18288" marB="18288" anchor="ctr">
-                    <a:solidFill>
-                      <a:srgbClr val="F2F2F2"/>
-                    </a:solidFill>
-                  </a:tcPr>
-                </a:tc>
-                <a:tc>
-                  <a:txBody>
-                    <a:bodyPr wrap="square"/>
-                    <a:lstStyle/>
-                    <a:p>
-                      <a:pPr algn="ctr"/>
-                      <a:r>
-                        <a:rPr sz="900" b="0">
-                          <a:solidFill>
-                            <a:srgbClr val="000000"/>
-                          </a:solidFill>
-                          <a:latin typeface="Arial"/>
-                        </a:rPr>
-                        <a:t>6</a:t>
-                      </a:r>
-                    </a:p>
-                  </a:txBody>
-                  <a:tcPr marL="54864" marR="54864" marT="18288" marB="18288" anchor="ctr">
-                    <a:solidFill>
-                      <a:srgbClr val="F2F2F2"/>
-                    </a:solidFill>
-                  </a:tcPr>
-                </a:tc>
-                <a:tc>
-                  <a:txBody>
-                    <a:bodyPr wrap="square"/>
-                    <a:lstStyle/>
-                    <a:p>
-                      <a:pPr algn="ctr"/>
-                      <a:r>
-                        <a:rPr sz="900" b="0">
-                          <a:solidFill>
-                            <a:srgbClr val="000000"/>
-                          </a:solidFill>
-                          <a:latin typeface="Arial"/>
-                        </a:rPr>
-                        <a:t>1</a:t>
-                      </a:r>
-                    </a:p>
-                  </a:txBody>
-                  <a:tcPr marL="54864" marR="54864" marT="18288" marB="18288" anchor="ctr">
-                    <a:solidFill>
-                      <a:srgbClr val="F2F2F2"/>
-                    </a:solidFill>
-                  </a:tcPr>
-                </a:tc>
-                <a:tc>
-                  <a:txBody>
-                    <a:bodyPr wrap="square"/>
-                    <a:lstStyle/>
-                    <a:p>
-                      <a:pPr algn="ctr"/>
-                      <a:r>
-                        <a:rPr sz="900" b="1">
-                          <a:solidFill>
-                            <a:srgbClr val="6B2D6B"/>
-                          </a:solidFill>
-                          <a:latin typeface="Arial"/>
-                        </a:rPr>
-                        <a:t>1</a:t>
-                      </a:r>
-                    </a:p>
-                  </a:txBody>
-                  <a:tcPr marL="54864" marR="54864" marT="18288" marB="18288" anchor="ctr">
-                    <a:solidFill>
-                      <a:srgbClr val="F2F2F2"/>
-                    </a:solidFill>
-                  </a:tcPr>
-                </a:tc>
-              </a:tr>
-              <a:tr h="228600">
-                <a:tc>
-                  <a:txBody>
-                    <a:bodyPr wrap="square"/>
-                    <a:lstStyle/>
-                    <a:p>
-                      <a:pPr algn="l"/>
-                      <a:r>
-                        <a:rPr sz="900" b="1">
-                          <a:solidFill>
-                            <a:srgbClr val="000000"/>
-                          </a:solidFill>
-                          <a:latin typeface="Arial"/>
-                        </a:rPr>
-                        <a:t>Overland</a:t>
-                      </a:r>
-                    </a:p>
-                  </a:txBody>
-                  <a:tcPr marL="54864" marR="54864" marT="18288" marB="18288" anchor="ctr">
-                    <a:solidFill>
-                      <a:srgbClr val="FFFFFF"/>
-                    </a:solidFill>
-                  </a:tcPr>
-                </a:tc>
-                <a:tc>
-                  <a:txBody>
-                    <a:bodyPr wrap="square"/>
-                    <a:lstStyle/>
-                    <a:p>
-                      <a:pPr algn="ctr"/>
-                      <a:r>
-                        <a:rPr sz="900" b="0">
-                          <a:solidFill>
-                            <a:srgbClr val="000000"/>
-                          </a:solidFill>
-                          <a:latin typeface="Arial"/>
-                        </a:rPr>
-                        <a:t>3</a:t>
-                      </a:r>
-                    </a:p>
-                  </a:txBody>
-                  <a:tcPr marL="54864" marR="54864" marT="18288" marB="18288" anchor="ctr">
-                    <a:solidFill>
-                      <a:srgbClr val="FFFFFF"/>
-                    </a:solidFill>
-                  </a:tcPr>
-                </a:tc>
-                <a:tc>
-                  <a:txBody>
-                    <a:bodyPr wrap="square"/>
-                    <a:lstStyle/>
-                    <a:p>
-                      <a:pPr algn="ctr"/>
-                      <a:r>
-                        <a:rPr sz="900" b="0">
-                          <a:solidFill>
-                            <a:srgbClr val="000000"/>
-                          </a:solidFill>
-                          <a:latin typeface="Arial"/>
-                        </a:rPr>
-                        <a:t>5</a:t>
-                      </a:r>
-                    </a:p>
-                  </a:txBody>
-                  <a:tcPr marL="54864" marR="54864" marT="18288" marB="18288" anchor="ctr">
-                    <a:solidFill>
-                      <a:srgbClr val="FFFFFF"/>
-                    </a:solidFill>
-                  </a:tcPr>
-                </a:tc>
-                <a:tc>
-                  <a:txBody>
-                    <a:bodyPr wrap="square"/>
-                    <a:lstStyle/>
-                    <a:p>
-                      <a:pPr algn="ctr"/>
-                      <a:r>
-                        <a:rPr sz="900" b="0">
-                          <a:solidFill>
-                            <a:srgbClr val="000000"/>
-                          </a:solidFill>
-                          <a:latin typeface="Arial"/>
-                        </a:rPr>
-                        <a:t>2</a:t>
-                      </a:r>
-                    </a:p>
-                  </a:txBody>
-                  <a:tcPr marL="54864" marR="54864" marT="18288" marB="18288" anchor="ctr">
-                    <a:solidFill>
-                      <a:srgbClr val="FFFFFF"/>
-                    </a:solidFill>
-                  </a:tcPr>
-                </a:tc>
-                <a:tc>
-                  <a:txBody>
-                    <a:bodyPr wrap="square"/>
-                    <a:lstStyle/>
-                    <a:p>
-                      <a:pPr algn="ctr"/>
-                      <a:r>
-                        <a:rPr sz="900" b="0">
-                          <a:solidFill>
-                            <a:srgbClr val="000000"/>
-                          </a:solidFill>
-                          <a:latin typeface="Arial"/>
-                        </a:rPr>
-                        <a:t>2</a:t>
-                      </a:r>
-                    </a:p>
-                  </a:txBody>
-                  <a:tcPr marL="54864" marR="54864" marT="18288" marB="18288" anchor="ctr">
-                    <a:solidFill>
-                      <a:srgbClr val="FFFFFF"/>
-                    </a:solidFill>
-                  </a:tcPr>
-                </a:tc>
-                <a:tc>
-                  <a:txBody>
-                    <a:bodyPr wrap="square"/>
-                    <a:lstStyle/>
-                    <a:p>
-                      <a:pPr algn="ctr"/>
-                      <a:r>
-                        <a:rPr sz="900" b="0">
-                          <a:solidFill>
-                            <a:srgbClr val="000000"/>
-                          </a:solidFill>
-                          <a:latin typeface="Arial"/>
-                        </a:rPr>
-                        <a:t>5</a:t>
-                      </a:r>
-                    </a:p>
-                  </a:txBody>
-                  <a:tcPr marL="54864" marR="54864" marT="18288" marB="18288" anchor="ctr">
-                    <a:solidFill>
-                      <a:srgbClr val="FFFFFF"/>
-                    </a:solidFill>
-                  </a:tcPr>
-                </a:tc>
-                <a:tc>
-                  <a:txBody>
-                    <a:bodyPr wrap="square"/>
-                    <a:lstStyle/>
-                    <a:p>
-                      <a:pPr algn="ctr"/>
-                      <a:r>
-                        <a:rPr sz="900" b="0">
-                          <a:solidFill>
-                            <a:srgbClr val="000000"/>
-                          </a:solidFill>
-                          <a:latin typeface="Arial"/>
-                        </a:rPr>
-                        <a:t>1</a:t>
-                      </a:r>
-                    </a:p>
-                  </a:txBody>
-                  <a:tcPr marL="54864" marR="54864" marT="18288" marB="18288" anchor="ctr">
-                    <a:solidFill>
-                      <a:srgbClr val="FFFFFF"/>
-                    </a:solidFill>
-                  </a:tcPr>
-                </a:tc>
-                <a:tc>
-                  <a:txBody>
-                    <a:bodyPr wrap="square"/>
-                    <a:lstStyle/>
-                    <a:p>
-                      <a:pPr algn="ctr"/>
-                      <a:r>
-                        <a:rPr sz="900" b="0">
-                          <a:solidFill>
-                            <a:srgbClr val="000000"/>
-                          </a:solidFill>
-                          <a:latin typeface="Arial"/>
-                        </a:rPr>
-                        <a:t>0</a:t>
-                      </a:r>
-                    </a:p>
-                  </a:txBody>
-                  <a:tcPr marL="54864" marR="54864" marT="18288" marB="18288" anchor="ctr">
-                    <a:solidFill>
-                      <a:srgbClr val="FFFFFF"/>
-                    </a:solidFill>
-                  </a:tcPr>
-                </a:tc>
-              </a:tr>
-              <a:tr h="228600">
-                <a:tc>
-                  <a:txBody>
-                    <a:bodyPr wrap="square"/>
-                    <a:lstStyle/>
-                    <a:p>
-                      <a:pPr algn="l"/>
-                      <a:r>
-                        <a:rPr sz="900" b="1">
-                          <a:solidFill>
-                            <a:srgbClr val="000000"/>
-                          </a:solidFill>
-                          <a:latin typeface="Arial"/>
-                        </a:rPr>
-                        <a:t>Operational Excellence</a:t>
-                      </a:r>
-                    </a:p>
-                  </a:txBody>
-                  <a:tcPr marL="54864" marR="54864" marT="18288" marB="18288" anchor="ctr">
-                    <a:solidFill>
-                      <a:srgbClr val="F2F2F2"/>
-                    </a:solidFill>
-                  </a:tcPr>
-                </a:tc>
-                <a:tc>
-                  <a:txBody>
-                    <a:bodyPr wrap="square"/>
-                    <a:lstStyle/>
-                    <a:p>
-                      <a:pPr algn="ctr"/>
-                      <a:r>
-                        <a:rPr sz="900" b="0">
-                          <a:solidFill>
-                            <a:srgbClr val="000000"/>
-                          </a:solidFill>
-                          <a:latin typeface="Arial"/>
-                        </a:rPr>
-                        <a:t>6</a:t>
-                      </a:r>
-                    </a:p>
-                  </a:txBody>
-                  <a:tcPr marL="54864" marR="54864" marT="18288" marB="18288" anchor="ctr">
-                    <a:solidFill>
-                      <a:srgbClr val="F2F2F2"/>
-                    </a:solidFill>
-                  </a:tcPr>
-                </a:tc>
-                <a:tc>
-                  <a:txBody>
-                    <a:bodyPr wrap="square"/>
-                    <a:lstStyle/>
-                    <a:p>
-                      <a:pPr algn="ctr"/>
-                      <a:r>
-                        <a:rPr sz="900" b="0">
-                          <a:solidFill>
-                            <a:srgbClr val="000000"/>
-                          </a:solidFill>
-                          <a:latin typeface="Arial"/>
-                        </a:rPr>
-                        <a:t>0</a:t>
-                      </a:r>
-                    </a:p>
-                  </a:txBody>
-                  <a:tcPr marL="54864" marR="54864" marT="18288" marB="18288" anchor="ctr">
-                    <a:solidFill>
-                      <a:srgbClr val="F2F2F2"/>
-                    </a:solidFill>
-                  </a:tcPr>
-                </a:tc>
-                <a:tc>
-                  <a:txBody>
-                    <a:bodyPr wrap="square"/>
-                    <a:lstStyle/>
-                    <a:p>
-                      <a:pPr algn="ctr"/>
-                      <a:r>
-                        <a:rPr sz="900" b="0">
-                          <a:solidFill>
-                            <a:srgbClr val="000000"/>
-                          </a:solidFill>
-                          <a:latin typeface="Arial"/>
-                        </a:rPr>
-                        <a:t>1</a:t>
-                      </a:r>
-                    </a:p>
-                  </a:txBody>
-                  <a:tcPr marL="54864" marR="54864" marT="18288" marB="18288" anchor="ctr">
-                    <a:solidFill>
-                      <a:srgbClr val="F2F2F2"/>
-                    </a:solidFill>
-                  </a:tcPr>
-                </a:tc>
-                <a:tc>
-                  <a:txBody>
-                    <a:bodyPr wrap="square"/>
-                    <a:lstStyle/>
-                    <a:p>
-                      <a:pPr algn="ctr"/>
-                      <a:r>
-                        <a:rPr sz="900" b="0">
-                          <a:solidFill>
-                            <a:srgbClr val="000000"/>
-                          </a:solidFill>
-                          <a:latin typeface="Arial"/>
-                        </a:rPr>
-                        <a:t>1</a:t>
-                      </a:r>
-                    </a:p>
-                  </a:txBody>
-                  <a:tcPr marL="54864" marR="54864" marT="18288" marB="18288" anchor="ctr">
-                    <a:solidFill>
-                      <a:srgbClr val="F2F2F2"/>
-                    </a:solidFill>
-                  </a:tcPr>
-                </a:tc>
-                <a:tc>
-                  <a:txBody>
-                    <a:bodyPr wrap="square"/>
-                    <a:lstStyle/>
-                    <a:p>
-                      <a:pPr algn="ctr"/>
-                      <a:r>
-                        <a:rPr sz="900" b="0">
-                          <a:solidFill>
-                            <a:srgbClr val="000000"/>
-                          </a:solidFill>
-                          <a:latin typeface="Arial"/>
-                        </a:rPr>
-                        <a:t>6</a:t>
-                      </a:r>
-                    </a:p>
-                  </a:txBody>
-                  <a:tcPr marL="54864" marR="54864" marT="18288" marB="18288" anchor="ctr">
-                    <a:solidFill>
-                      <a:srgbClr val="F2F2F2"/>
-                    </a:solidFill>
-                  </a:tcPr>
-                </a:tc>
-                <a:tc>
-                  <a:txBody>
-                    <a:bodyPr wrap="square"/>
-                    <a:lstStyle/>
-                    <a:p>
-                      <a:pPr algn="ctr"/>
-                      <a:r>
-                        <a:rPr sz="900" b="0">
-                          <a:solidFill>
-                            <a:srgbClr val="000000"/>
-                          </a:solidFill>
-                          <a:latin typeface="Arial"/>
-                        </a:rPr>
-                        <a:t>0</a:t>
-                      </a:r>
-                    </a:p>
-                  </a:txBody>
-                  <a:tcPr marL="54864" marR="54864" marT="18288" marB="18288" anchor="ctr">
-                    <a:solidFill>
-                      <a:srgbClr val="F2F2F2"/>
-                    </a:solidFill>
-                  </a:tcPr>
-                </a:tc>
-                <a:tc>
-                  <a:txBody>
-                    <a:bodyPr wrap="square"/>
-                    <a:lstStyle/>
-                    <a:p>
-                      <a:pPr algn="ctr"/>
-                      <a:r>
-                        <a:rPr sz="900" b="0">
-                          <a:solidFill>
-                            <a:srgbClr val="000000"/>
-                          </a:solidFill>
-                          <a:latin typeface="Arial"/>
-                        </a:rPr>
-                        <a:t>0</a:t>
-                      </a:r>
-                    </a:p>
-                  </a:txBody>
-                  <a:tcPr marL="54864" marR="54864" marT="18288" marB="18288" anchor="ctr">
-                    <a:solidFill>
-                      <a:srgbClr val="F2F2F2"/>
-                    </a:solidFill>
-                  </a:tcPr>
-                </a:tc>
-              </a:tr>
-              <a:tr h="228600">
-                <a:tc>
-                  <a:txBody>
-                    <a:bodyPr wrap="square"/>
-                    <a:lstStyle/>
-                    <a:p>
-                      <a:pPr algn="l"/>
-                      <a:r>
-                        <a:rPr sz="900" b="1">
-                          <a:solidFill>
-                            <a:srgbClr val="000000"/>
-                          </a:solidFill>
-                          <a:latin typeface="Arial"/>
-                        </a:rPr>
-                        <a:t>Cold Chain</a:t>
-                      </a:r>
-                    </a:p>
-                  </a:txBody>
-                  <a:tcPr marL="54864" marR="54864" marT="18288" marB="18288" anchor="ctr">
-                    <a:solidFill>
-                      <a:srgbClr val="FFFFFF"/>
-                    </a:solidFill>
-                  </a:tcPr>
-                </a:tc>
-                <a:tc>
-                  <a:txBody>
-                    <a:bodyPr wrap="square"/>
-                    <a:lstStyle/>
-                    <a:p>
-                      <a:pPr algn="ctr"/>
-                      <a:r>
-                        <a:rPr sz="900" b="0">
-                          <a:solidFill>
-                            <a:srgbClr val="000000"/>
-                          </a:solidFill>
-                          <a:latin typeface="Arial"/>
-                        </a:rPr>
-                        <a:t>2</a:t>
-                      </a:r>
-                    </a:p>
-                  </a:txBody>
-                  <a:tcPr marL="54864" marR="54864" marT="18288" marB="18288" anchor="ctr">
-                    <a:solidFill>
-                      <a:srgbClr val="FFFFFF"/>
-                    </a:solidFill>
-                  </a:tcPr>
-                </a:tc>
-                <a:tc>
-                  <a:txBody>
-                    <a:bodyPr wrap="square"/>
-                    <a:lstStyle/>
-                    <a:p>
-                      <a:pPr algn="ctr"/>
-                      <a:r>
-                        <a:rPr sz="900" b="0">
-                          <a:solidFill>
-                            <a:srgbClr val="000000"/>
-                          </a:solidFill>
-                          <a:latin typeface="Arial"/>
-                        </a:rPr>
-                        <a:t>0</a:t>
-                      </a:r>
-                    </a:p>
-                  </a:txBody>
-                  <a:tcPr marL="54864" marR="54864" marT="18288" marB="18288" anchor="ctr">
-                    <a:solidFill>
-                      <a:srgbClr val="FFFFFF"/>
-                    </a:solidFill>
-                  </a:tcPr>
-                </a:tc>
-                <a:tc>
-                  <a:txBody>
-                    <a:bodyPr wrap="square"/>
-                    <a:lstStyle/>
-                    <a:p>
-                      <a:pPr algn="ctr"/>
-                      <a:r>
-                        <a:rPr sz="900" b="0">
-                          <a:solidFill>
-                            <a:srgbClr val="000000"/>
-                          </a:solidFill>
-                          <a:latin typeface="Arial"/>
-                        </a:rPr>
-                        <a:t>1</a:t>
-                      </a:r>
-                    </a:p>
-                  </a:txBody>
-                  <a:tcPr marL="54864" marR="54864" marT="18288" marB="18288" anchor="ctr">
-                    <a:solidFill>
-                      <a:srgbClr val="FFFFFF"/>
-                    </a:solidFill>
-                  </a:tcPr>
-                </a:tc>
-                <a:tc>
-                  <a:txBody>
-                    <a:bodyPr wrap="square"/>
-                    <a:lstStyle/>
-                    <a:p>
-                      <a:pPr algn="ctr"/>
-                      <a:r>
-                        <a:rPr sz="900" b="0">
-                          <a:solidFill>
-                            <a:srgbClr val="000000"/>
-                          </a:solidFill>
-                          <a:latin typeface="Arial"/>
-                        </a:rPr>
-                        <a:t>1</a:t>
-                      </a:r>
-                    </a:p>
-                  </a:txBody>
-                  <a:tcPr marL="54864" marR="54864" marT="18288" marB="18288" anchor="ctr">
-                    <a:solidFill>
-                      <a:srgbClr val="FFFFFF"/>
-                    </a:solidFill>
-                  </a:tcPr>
-                </a:tc>
-                <a:tc>
-                  <a:txBody>
-                    <a:bodyPr wrap="square"/>
-                    <a:lstStyle/>
-                    <a:p>
-                      <a:pPr algn="ctr"/>
-                      <a:r>
-                        <a:rPr sz="900" b="0">
-                          <a:solidFill>
-                            <a:srgbClr val="000000"/>
-                          </a:solidFill>
-                          <a:latin typeface="Arial"/>
-                        </a:rPr>
-                        <a:t>2</a:t>
-                      </a:r>
-                    </a:p>
-                  </a:txBody>
-                  <a:tcPr marL="54864" marR="54864" marT="18288" marB="18288" anchor="ctr">
-                    <a:solidFill>
-                      <a:srgbClr val="FFFFFF"/>
-                    </a:solidFill>
-                  </a:tcPr>
-                </a:tc>
-                <a:tc>
-                  <a:txBody>
-                    <a:bodyPr wrap="square"/>
-                    <a:lstStyle/>
-                    <a:p>
-                      <a:pPr algn="ctr"/>
-                      <a:r>
-                        <a:rPr sz="900" b="0">
-                          <a:solidFill>
-                            <a:srgbClr val="000000"/>
-                          </a:solidFill>
-                          <a:latin typeface="Arial"/>
-                        </a:rPr>
-                        <a:t>0</a:t>
-                      </a:r>
-                    </a:p>
-                  </a:txBody>
-                  <a:tcPr marL="54864" marR="54864" marT="18288" marB="18288" anchor="ctr">
-                    <a:solidFill>
-                      <a:srgbClr val="FFFFFF"/>
-                    </a:solidFill>
-                  </a:tcPr>
-                </a:tc>
-                <a:tc>
-                  <a:txBody>
-                    <a:bodyPr wrap="square"/>
-                    <a:lstStyle/>
-                    <a:p>
-                      <a:pPr algn="ctr"/>
-                      <a:r>
-                        <a:rPr sz="900" b="0">
-                          <a:solidFill>
-                            <a:srgbClr val="000000"/>
-                          </a:solidFill>
-                          <a:latin typeface="Arial"/>
-                        </a:rPr>
-                        <a:t>0</a:t>
-                      </a:r>
-                    </a:p>
-                  </a:txBody>
-                  <a:tcPr marL="54864" marR="54864" marT="18288" marB="18288" anchor="ctr">
-                    <a:solidFill>
-                      <a:srgbClr val="FFFFFF"/>
-                    </a:solidFill>
-                  </a:tcPr>
-                </a:tc>
-              </a:tr>
-              <a:tr h="228600">
-                <a:tc>
-                  <a:txBody>
-                    <a:bodyPr wrap="square"/>
-                    <a:lstStyle/>
-                    <a:p>
-                      <a:pPr algn="l"/>
-                      <a:r>
-                        <a:rPr sz="900" b="1">
-                          <a:solidFill>
-                            <a:srgbClr val="000000"/>
-                          </a:solidFill>
-                          <a:latin typeface="Arial"/>
-                        </a:rPr>
-                        <a:t>Special Operations</a:t>
-                      </a:r>
-                    </a:p>
-                  </a:txBody>
-                  <a:tcPr marL="54864" marR="54864" marT="18288" marB="18288" anchor="ctr">
-                    <a:solidFill>
-                      <a:srgbClr val="F2F2F2"/>
-                    </a:solidFill>
-                  </a:tcPr>
-                </a:tc>
-                <a:tc>
-                  <a:txBody>
-                    <a:bodyPr wrap="square"/>
-                    <a:lstStyle/>
-                    <a:p>
-                      <a:pPr algn="ctr"/>
-                      <a:r>
-                        <a:rPr sz="900" b="0">
-                          <a:solidFill>
-                            <a:srgbClr val="000000"/>
-                          </a:solidFill>
-                          <a:latin typeface="Arial"/>
-                        </a:rPr>
-                        <a:t> </a:t>
-                      </a:r>
-                    </a:p>
-                  </a:txBody>
-                  <a:tcPr marL="54864" marR="54864" marT="18288" marB="18288" anchor="ctr">
-                    <a:solidFill>
-                      <a:srgbClr val="F2F2F2"/>
-                    </a:solidFill>
-                  </a:tcPr>
-                </a:tc>
-                <a:tc>
-                  <a:txBody>
-                    <a:bodyPr wrap="square"/>
-                    <a:lstStyle/>
-                    <a:p>
-                      <a:pPr algn="ctr"/>
-                      <a:r>
-                        <a:rPr sz="900" b="0">
-                          <a:solidFill>
-                            <a:srgbClr val="000000"/>
-                          </a:solidFill>
-                          <a:latin typeface="Arial"/>
-                        </a:rPr>
-                        <a:t> </a:t>
-                      </a:r>
-                    </a:p>
-                  </a:txBody>
-                  <a:tcPr marL="54864" marR="54864" marT="18288" marB="18288" anchor="ctr">
-                    <a:solidFill>
-                      <a:srgbClr val="F2F2F2"/>
-                    </a:solidFill>
-                  </a:tcPr>
-                </a:tc>
-                <a:tc>
-                  <a:txBody>
-                    <a:bodyPr wrap="square"/>
-                    <a:lstStyle/>
-                    <a:p>
-                      <a:pPr algn="ctr"/>
-                      <a:r>
-                        <a:rPr sz="900" b="0">
-                          <a:solidFill>
-                            <a:srgbClr val="000000"/>
-                          </a:solidFill>
-                          <a:latin typeface="Arial"/>
-                        </a:rPr>
-                        <a:t> </a:t>
-                      </a:r>
-                    </a:p>
-                  </a:txBody>
-                  <a:tcPr marL="54864" marR="54864" marT="18288" marB="18288" anchor="ctr">
-                    <a:solidFill>
-                      <a:srgbClr val="F2F2F2"/>
-                    </a:solidFill>
-                  </a:tcPr>
-                </a:tc>
-                <a:tc>
-                  <a:txBody>
-                    <a:bodyPr wrap="square"/>
-                    <a:lstStyle/>
-                    <a:p>
-                      <a:pPr algn="ctr"/>
-                      <a:r>
-                        <a:rPr sz="900" b="0">
-                          <a:solidFill>
-                            <a:srgbClr val="000000"/>
-                          </a:solidFill>
-                          <a:latin typeface="Arial"/>
-                        </a:rPr>
-                        <a:t> </a:t>
-                      </a:r>
-                    </a:p>
-                  </a:txBody>
-                  <a:tcPr marL="54864" marR="54864" marT="18288" marB="18288" anchor="ctr">
-                    <a:solidFill>
-                      <a:srgbClr val="F2F2F2"/>
-                    </a:solidFill>
-                  </a:tcPr>
-                </a:tc>
-                <a:tc>
-                  <a:txBody>
-                    <a:bodyPr wrap="square"/>
-                    <a:lstStyle/>
-                    <a:p>
-                      <a:pPr algn="ctr"/>
-                      <a:r>
-                        <a:rPr sz="900" b="0">
-                          <a:solidFill>
-                            <a:srgbClr val="000000"/>
-                          </a:solidFill>
-                          <a:latin typeface="Arial"/>
-                        </a:rPr>
-                        <a:t> </a:t>
-                      </a:r>
-                    </a:p>
-                  </a:txBody>
-                  <a:tcPr marL="54864" marR="54864" marT="18288" marB="18288" anchor="ctr">
-                    <a:solidFill>
-                      <a:srgbClr val="F2F2F2"/>
-                    </a:solidFill>
-                  </a:tcPr>
-                </a:tc>
-                <a:tc>
-                  <a:txBody>
-                    <a:bodyPr wrap="square"/>
-                    <a:lstStyle/>
-                    <a:p>
-                      <a:pPr algn="ctr"/>
-                      <a:r>
-                        <a:rPr sz="900" b="0">
-                          <a:solidFill>
-                            <a:srgbClr val="000000"/>
-                          </a:solidFill>
-                          <a:latin typeface="Arial"/>
-                        </a:rPr>
-                        <a:t>1</a:t>
-                      </a:r>
-                    </a:p>
-                  </a:txBody>
-                  <a:tcPr marL="54864" marR="54864" marT="18288" marB="18288" anchor="ctr">
-                    <a:solidFill>
-                      <a:srgbClr val="F2F2F2"/>
-                    </a:solidFill>
-                  </a:tcPr>
-                </a:tc>
-                <a:tc>
-                  <a:txBody>
-                    <a:bodyPr wrap="square"/>
-                    <a:lstStyle/>
-                    <a:p>
-                      <a:pPr algn="ctr"/>
-                      <a:r>
-                        <a:rPr sz="900" b="1">
-                          <a:solidFill>
-                            <a:srgbClr val="6B2D6B"/>
-                          </a:solidFill>
-                          <a:latin typeface="Arial"/>
-                        </a:rPr>
-                        <a:t>1</a:t>
-                      </a:r>
-                    </a:p>
-                  </a:txBody>
-                  <a:tcPr marL="54864" marR="54864" marT="18288" marB="18288" anchor="ctr">
-                    <a:solidFill>
-                      <a:srgbClr val="F2F2F2"/>
-                    </a:solidFill>
-                  </a:tcPr>
-                </a:tc>
-              </a:tr>
-              <a:tr h="228600">
-                <a:tc>
-                  <a:txBody>
-                    <a:bodyPr wrap="square"/>
-                    <a:lstStyle/>
-                    <a:p>
-                      <a:pPr algn="l"/>
-                      <a:r>
-                        <a:rPr sz="900" b="1">
-                          <a:solidFill>
-                            <a:srgbClr val="009796"/>
-                          </a:solidFill>
-                          <a:latin typeface="Arial"/>
-                        </a:rPr>
-                        <a:t>Total COO</a:t>
-                      </a:r>
-                    </a:p>
-                  </a:txBody>
-                  <a:tcPr marL="54864" marR="54864" marT="18288" marB="18288" anchor="ctr">
-                    <a:solidFill>
-                      <a:srgbClr val="E8F4F4"/>
-                    </a:solidFill>
-                  </a:tcPr>
-                </a:tc>
-                <a:tc>
-                  <a:txBody>
-                    <a:bodyPr wrap="square"/>
-                    <a:lstStyle/>
-                    <a:p>
-                      <a:pPr algn="ctr"/>
-                      <a:r>
-                        <a:rPr sz="900" b="1">
-                          <a:solidFill>
-                            <a:srgbClr val="009796"/>
-                          </a:solidFill>
-                          <a:latin typeface="Arial"/>
-                        </a:rPr>
-                        <a:t>6</a:t>
-                      </a:r>
-                    </a:p>
-                  </a:txBody>
-                  <a:tcPr marL="54864" marR="54864" marT="18288" marB="18288" anchor="ctr">
-                    <a:solidFill>
-                      <a:srgbClr val="E8F4F4"/>
-                    </a:solidFill>
-                  </a:tcPr>
-                </a:tc>
-                <a:tc>
-                  <a:txBody>
-                    <a:bodyPr wrap="square"/>
-                    <a:lstStyle/>
-                    <a:p>
-                      <a:pPr algn="ctr"/>
-                      <a:r>
-                        <a:rPr sz="900" b="1">
-                          <a:solidFill>
-                            <a:srgbClr val="009796"/>
-                          </a:solidFill>
-                          <a:latin typeface="Arial"/>
-                        </a:rPr>
-                        <a:t>148</a:t>
-                      </a:r>
-                    </a:p>
-                  </a:txBody>
-                  <a:tcPr marL="54864" marR="54864" marT="18288" marB="18288" anchor="ctr">
-                    <a:solidFill>
-                      <a:srgbClr val="E8F4F4"/>
-                    </a:solidFill>
-                  </a:tcPr>
-                </a:tc>
-                <a:tc>
-                  <a:txBody>
-                    <a:bodyPr wrap="square"/>
-                    <a:lstStyle/>
-                    <a:p>
-                      <a:pPr algn="ctr"/>
-                      <a:r>
-                        <a:rPr sz="900" b="1">
-                          <a:solidFill>
-                            <a:srgbClr val="009796"/>
-                          </a:solidFill>
-                          <a:latin typeface="Arial"/>
-                        </a:rPr>
-                        <a:t>29</a:t>
-                      </a:r>
-                    </a:p>
-                  </a:txBody>
-                  <a:tcPr marL="54864" marR="54864" marT="18288" marB="18288" anchor="ctr">
-                    <a:solidFill>
-                      <a:srgbClr val="E8F4F4"/>
-                    </a:solidFill>
-                  </a:tcPr>
-                </a:tc>
-                <a:tc>
-                  <a:txBody>
-                    <a:bodyPr wrap="square"/>
-                    <a:lstStyle/>
-                    <a:p>
-                      <a:pPr algn="ctr"/>
-                      <a:r>
-                        <a:rPr sz="900" b="1">
-                          <a:solidFill>
-                            <a:srgbClr val="009796"/>
-                          </a:solidFill>
-                          <a:latin typeface="Arial"/>
-                        </a:rPr>
-                        <a:t> </a:t>
-                      </a:r>
-                    </a:p>
-                  </a:txBody>
-                  <a:tcPr marL="54864" marR="54864" marT="18288" marB="18288" anchor="ctr">
-                    <a:solidFill>
-                      <a:srgbClr val="E8F4F4"/>
-                    </a:solidFill>
-                  </a:tcPr>
-                </a:tc>
-                <a:tc>
-                  <a:txBody>
-                    <a:bodyPr wrap="square"/>
-                    <a:lstStyle/>
-                    <a:p>
-                      <a:pPr algn="ctr"/>
-                      <a:r>
-                        <a:rPr sz="900" b="1">
-                          <a:solidFill>
-                            <a:srgbClr val="009796"/>
-                          </a:solidFill>
-                          <a:latin typeface="Arial"/>
-                        </a:rPr>
-                        <a:t>13</a:t>
-                      </a:r>
-                    </a:p>
-                  </a:txBody>
-                  <a:tcPr marL="54864" marR="54864" marT="18288" marB="18288" anchor="ctr">
-                    <a:solidFill>
-                      <a:srgbClr val="E8F4F4"/>
-                    </a:solidFill>
-                  </a:tcPr>
-                </a:tc>
-                <a:tc>
-                  <a:txBody>
-                    <a:bodyPr wrap="square"/>
-                    <a:lstStyle/>
-                    <a:p>
-                      <a:pPr algn="ctr"/>
-                      <a:r>
-                        <a:rPr sz="900" b="1">
-                          <a:solidFill>
-                            <a:srgbClr val="009796"/>
-                          </a:solidFill>
-                          <a:latin typeface="Arial"/>
-                        </a:rPr>
-                        <a:t>25</a:t>
-                      </a:r>
-                    </a:p>
-                  </a:txBody>
-                  <a:tcPr marL="54864" marR="54864" marT="18288" marB="18288" anchor="ctr">
-                    <a:solidFill>
-                      <a:srgbClr val="E8F4F4"/>
-                    </a:solidFill>
-                  </a:tcPr>
-                </a:tc>
-                <a:tc>
-                  <a:txBody>
-                    <a:bodyPr wrap="square"/>
-                    <a:lstStyle/>
-                    <a:p>
-                      <a:pPr algn="ctr"/>
-                      <a:r>
-                        <a:rPr sz="900" b="1">
-                          <a:solidFill>
-                            <a:srgbClr val="009796"/>
-                          </a:solidFill>
-                          <a:latin typeface="Arial"/>
-                        </a:rPr>
-                        <a:t>19</a:t>
-                      </a:r>
-                    </a:p>
-                  </a:txBody>
-                  <a:tcPr marL="54864" marR="54864" marT="18288" marB="18288" anchor="ctr">
-                    <a:solidFill>
-                      <a:srgbClr val="E8F4F4"/>
-                    </a:solidFill>
-                  </a:tcPr>
-                </a:tc>
-              </a:tr>
-            </a:tbl>
-          </a:graphicData>
-        </a:graphic>
-      </p:graphicFrame>
-      <p:sp>
-        <p:nvSpPr>
-          <p:cNvPr id="15" name="TextBox 14"/>
-          <p:cNvSpPr txBox="1"/>
-          <p:nvPr/>
-        </p:nvSpPr>
-        <p:spPr>
-          <a:xfrm>
-            <a:off x="6227064" y="4000500"/>
-            <a:ext cx="5623560" cy="292608"/>
-          </a:xfrm>
-          <a:prstGeom prst="rect">
-            <a:avLst/>
-          </a:prstGeom>
-          <a:noFill/>
-        </p:spPr>
-        <p:txBody>
-          <a:bodyPr wrap="square" lIns="18288" rIns="18288" tIns="0" bIns="0" anchor="t">
-            <a:spAutoFit/>
-          </a:bodyPr>
-          <a:lstStyle/>
-          <a:p>
-            <a:pPr algn="l">
-              <a:spcAft>
-                <a:spcPts val="200"/>
-              </a:spcAft>
-            </a:pPr>
-            <a:r>
-              <a:rPr sz="800" b="0" i="1">
-                <a:solidFill>
-                  <a:srgbClr val="7F7F7F"/>
-                </a:solidFill>
-                <a:latin typeface="Arial"/>
-              </a:rPr>
-              <a:t>Camadas de gestão = níveis com gestor, da head até o último team leader. Special Operations tem vaga e não tem head no organograma.</a:t>
-            </a:r>
-          </a:p>
-        </p:txBody>
-      </p:sp>
-      <p:sp>
-        <p:nvSpPr>
-          <p:cNvPr id="16" name="Rounded Rectangle 15"/>
+          <p:cNvPr id="13" name="Rounded Rectangle 12"/>
           <p:cNvSpPr/>
           <p:nvPr/>
         </p:nvSpPr>
         <p:spPr>
           <a:xfrm>
-            <a:off x="6227064" y="4343400"/>
-            <a:ext cx="5623560" cy="1847850"/>
+            <a:off x="342900" y="2419350"/>
+            <a:ext cx="2590800" cy="590550"/>
           </a:xfrm>
           <a:prstGeom prst="roundRect">
             <a:avLst>
-              <a:gd name="adj" fmla="val 12000"/>
+              <a:gd name="adj" fmla="val 8000"/>
+            </a:avLst>
+          </a:prstGeom>
+          <a:solidFill>
+            <a:srgbClr val="009796"/>
+          </a:solidFill>
+          <a:ln>
+            <a:noFill/>
+          </a:ln>
+        </p:spPr>
+        <p:style>
+          <a:lnRef idx="1">
+            <a:schemeClr val="accent1"/>
+          </a:lnRef>
+          <a:fillRef idx="3">
+            <a:schemeClr val="accent1"/>
+          </a:fillRef>
+          <a:effectRef idx="2">
+            <a:schemeClr val="accent1"/>
+          </a:effectRef>
+          <a:fontRef idx="minor">
+            <a:schemeClr val="lt1"/>
+          </a:fontRef>
+        </p:style>
+        <p:txBody>
+          <a:bodyPr rtlCol="0" anchor="ctr" wrap="square" lIns="57150" rIns="57150" tIns="19050" bIns="19050"/>
+          <a:lstStyle/>
+          <a:p>
+            <a:pPr algn="ctr"/>
+            <a:r>
+              <a:rPr sz="950" b="1">
+                <a:solidFill>
+                  <a:srgbClr val="FFFFFF"/>
+                </a:solidFill>
+                <a:latin typeface="Arial"/>
+              </a:rPr>
+              <a:t>Head of Air Operations</a:t>
+            </a:r>
+          </a:p>
+          <a:p>
+            <a:pPr algn="ctr"/>
+            <a:r>
+              <a:rPr sz="750" b="0">
+                <a:solidFill>
+                  <a:srgbClr val="FFFFFF"/>
+                </a:solidFill>
+                <a:latin typeface="Arial"/>
+              </a:rPr>
+              <a:t>Customer Care e Exportação · Brasil</a:t>
+            </a:r>
+          </a:p>
+          <a:p>
+            <a:pPr algn="ctr"/>
+            <a:r>
+              <a:rPr sz="750" b="0">
+                <a:solidFill>
+                  <a:srgbClr val="FFFFFF"/>
+                </a:solidFill>
+                <a:latin typeface="Arial"/>
+              </a:rPr>
+              <a:t>316 pessoas · 33 vagas · 29 a abrir</a:t>
+            </a:r>
+          </a:p>
+        </p:txBody>
+      </p:sp>
+      <p:sp>
+        <p:nvSpPr>
+          <p:cNvPr id="14" name="Rounded Rectangle 13"/>
+          <p:cNvSpPr/>
+          <p:nvPr/>
+        </p:nvSpPr>
+        <p:spPr>
+          <a:xfrm>
+            <a:off x="342900" y="3048000"/>
+            <a:ext cx="2590800" cy="247650"/>
+          </a:xfrm>
+          <a:prstGeom prst="roundRect">
+            <a:avLst>
+              <a:gd name="adj" fmla="val 8000"/>
             </a:avLst>
           </a:prstGeom>
           <a:solidFill>
@@ -9224,187 +7183,962 @@
               <a:srgbClr val="009796"/>
             </a:solidFill>
           </a:ln>
-          <a:effectLst/>
         </p:spPr>
+        <p:style>
+          <a:lnRef idx="1">
+            <a:schemeClr val="accent1"/>
+          </a:lnRef>
+          <a:fillRef idx="3">
+            <a:schemeClr val="accent1"/>
+          </a:fillRef>
+          <a:effectRef idx="2">
+            <a:schemeClr val="accent1"/>
+          </a:effectRef>
+          <a:fontRef idx="minor">
+            <a:schemeClr val="lt1"/>
+          </a:fontRef>
+        </p:style>
         <p:txBody>
-          <a:bodyPr rtlCol="0" anchor="ctr" wrap="square" lIns="137160" rIns="137160" tIns="73152" bIns="73152"/>
+          <a:bodyPr rtlCol="0" anchor="ctr" wrap="square" lIns="57150" rIns="57150" tIns="19050" bIns="19050"/>
           <a:lstStyle/>
           <a:p>
-            <a:pPr algn="l" marL="171450" indent="-171450">
-              <a:spcAft>
-                <a:spcPts val="400"/>
-              </a:spcAft>
-              <a:buClr>
-                <a:srgbClr val="009796"/>
-              </a:buClr>
-              <a:buFont typeface="Wingdings"/>
-              <a:buChar char="§"/>
-            </a:pPr>
-            <a:r>
-              <a:rPr sz="950" b="1">
+            <a:pPr algn="ctr"/>
+            <a:r>
+              <a:rPr sz="900" b="1">
                 <a:solidFill>
                   <a:srgbClr val="262626"/>
                 </a:solidFill>
                 <a:latin typeface="Arial"/>
               </a:rPr>
-              <a:t>Draft: </a:t>
-            </a:r>
-            <a:r>
-              <a:rPr sz="950" b="0">
-                <a:solidFill>
-                  <a:srgbClr val="262626"/>
+              <a:t>289 embarques/mês</a:t>
+            </a:r>
+          </a:p>
+        </p:txBody>
+      </p:sp>
+      <p:cxnSp>
+        <p:nvCxnSpPr>
+          <p:cNvPr id="15" name="Connector 14"/>
+          <p:cNvCxnSpPr/>
+          <p:nvPr/>
+        </p:nvCxnSpPr>
+        <p:spPr>
+          <a:xfrm>
+            <a:off x="4400550" y="2305050"/>
+            <a:ext cx="0" cy="114300"/>
+          </a:xfrm>
+          <a:prstGeom prst="bentConnector3">
+            <a:avLst/>
+          </a:prstGeom>
+          <a:ln w="12700">
+            <a:solidFill>
+              <a:srgbClr val="009796"/>
+            </a:solidFill>
+          </a:ln>
+        </p:spPr>
+        <p:style>
+          <a:lnRef idx="2">
+            <a:schemeClr val="accent1"/>
+          </a:lnRef>
+          <a:fillRef idx="0">
+            <a:schemeClr val="accent1"/>
+          </a:fillRef>
+          <a:effectRef idx="1">
+            <a:schemeClr val="accent1"/>
+          </a:effectRef>
+          <a:fontRef idx="minor">
+            <a:schemeClr val="tx1"/>
+          </a:fontRef>
+        </p:style>
+      </p:cxnSp>
+      <p:sp>
+        <p:nvSpPr>
+          <p:cNvPr id="16" name="Rounded Rectangle 15"/>
+          <p:cNvSpPr/>
+          <p:nvPr/>
+        </p:nvSpPr>
+        <p:spPr>
+          <a:xfrm>
+            <a:off x="3105150" y="2419350"/>
+            <a:ext cx="2590800" cy="590550"/>
+          </a:xfrm>
+          <a:prstGeom prst="roundRect">
+            <a:avLst>
+              <a:gd name="adj" fmla="val 8000"/>
+            </a:avLst>
+          </a:prstGeom>
+          <a:solidFill>
+            <a:srgbClr val="009796"/>
+          </a:solidFill>
+          <a:ln>
+            <a:noFill/>
+          </a:ln>
+        </p:spPr>
+        <p:style>
+          <a:lnRef idx="1">
+            <a:schemeClr val="accent1"/>
+          </a:lnRef>
+          <a:fillRef idx="3">
+            <a:schemeClr val="accent1"/>
+          </a:fillRef>
+          <a:effectRef idx="2">
+            <a:schemeClr val="accent1"/>
+          </a:effectRef>
+          <a:fontRef idx="minor">
+            <a:schemeClr val="lt1"/>
+          </a:fontRef>
+        </p:style>
+        <p:txBody>
+          <a:bodyPr rtlCol="0" anchor="ctr" wrap="square" lIns="57150" rIns="57150" tIns="19050" bIns="19050"/>
+          <a:lstStyle/>
+          <a:p>
+            <a:pPr algn="ctr"/>
+            <a:r>
+              <a:rPr sz="950" b="1">
+                <a:solidFill>
+                  <a:srgbClr val="FFFFFF"/>
                 </a:solidFill>
                 <a:latin typeface="Arial"/>
               </a:rPr>
-              <a:t>cinco caixas riscadas com X — Air Product e Ocean Product sobem para o Co-CEO pelas duas caixas azuis, e Magno Bezerra, Gabriella Pereira e Pamela Ibarra ficam marcados sem destino</a:t>
-            </a:r>
-          </a:p>
-          <a:p>
-            <a:pPr algn="l" marL="171450" indent="-171450">
-              <a:spcAft>
-                <a:spcPts val="400"/>
-              </a:spcAft>
-              <a:buClr>
-                <a:srgbClr val="009796"/>
-              </a:buClr>
-              <a:buFont typeface="Wingdings"/>
-              <a:buChar char="§"/>
-            </a:pPr>
-            <a:r>
-              <a:rPr sz="950" b="1">
-                <a:solidFill>
-                  <a:srgbClr val="262626"/>
+              <a:t>Air Freight Lead Coordinator</a:t>
+            </a:r>
+          </a:p>
+          <a:p>
+            <a:pPr algn="ctr"/>
+            <a:r>
+              <a:rPr sz="750" b="0">
+                <a:solidFill>
+                  <a:srgbClr val="FFFFFF"/>
                 </a:solidFill>
                 <a:latin typeface="Arial"/>
               </a:rPr>
-              <a:t>Air Operations: </a:t>
-            </a:r>
-            <a:r>
-              <a:rPr sz="950" b="0">
-                <a:solidFill>
-                  <a:srgbClr val="262626"/>
+              <a:t>Agentes OFF · 161 terceiros</a:t>
+            </a:r>
+          </a:p>
+          <a:p>
+            <a:pPr algn="ctr"/>
+            <a:r>
+              <a:rPr sz="750" b="0">
+                <a:solidFill>
+                  <a:srgbClr val="FFFFFF"/>
                 </a:solidFill>
                 <a:latin typeface="Arial"/>
               </a:rPr>
-              <a:t>TL que lidera TL; 4 team leaders em L7 respondem a team leaders em L6, e 3 gestores lideram até 2 pessoas</a:t>
-            </a:r>
-          </a:p>
-          <a:p>
-            <a:pPr algn="l" marL="171450" indent="-171450">
-              <a:spcAft>
-                <a:spcPts val="400"/>
-              </a:spcAft>
-              <a:buClr>
-                <a:srgbClr val="009796"/>
-              </a:buClr>
-              <a:buFont typeface="Wingdings"/>
-              <a:buChar char="§"/>
-            </a:pPr>
-            <a:r>
-              <a:rPr sz="950" b="1">
+              <a:t>51 pessoas · sem vaga</a:t>
+            </a:r>
+          </a:p>
+        </p:txBody>
+      </p:sp>
+      <p:sp>
+        <p:nvSpPr>
+          <p:cNvPr id="17" name="Rounded Rectangle 16"/>
+          <p:cNvSpPr/>
+          <p:nvPr/>
+        </p:nvSpPr>
+        <p:spPr>
+          <a:xfrm>
+            <a:off x="3105150" y="3048000"/>
+            <a:ext cx="2590800" cy="247650"/>
+          </a:xfrm>
+          <a:prstGeom prst="roundRect">
+            <a:avLst>
+              <a:gd name="adj" fmla="val 8000"/>
+            </a:avLst>
+          </a:prstGeom>
+          <a:solidFill>
+            <a:srgbClr val="E8F4F4"/>
+          </a:solidFill>
+          <a:ln w="12700">
+            <a:solidFill>
+              <a:srgbClr val="009796"/>
+            </a:solidFill>
+          </a:ln>
+        </p:spPr>
+        <p:style>
+          <a:lnRef idx="1">
+            <a:schemeClr val="accent1"/>
+          </a:lnRef>
+          <a:fillRef idx="3">
+            <a:schemeClr val="accent1"/>
+          </a:fillRef>
+          <a:effectRef idx="2">
+            <a:schemeClr val="accent1"/>
+          </a:effectRef>
+          <a:fontRef idx="minor">
+            <a:schemeClr val="lt1"/>
+          </a:fontRef>
+        </p:style>
+        <p:txBody>
+          <a:bodyPr rtlCol="0" anchor="ctr" wrap="square" lIns="57150" rIns="57150" tIns="19050" bIns="19050"/>
+          <a:lstStyle/>
+          <a:p>
+            <a:pPr algn="ctr"/>
+            <a:r>
+              <a:rPr sz="900" b="1">
                 <a:solidFill>
                   <a:srgbClr val="262626"/>
                 </a:solidFill>
                 <a:latin typeface="Arial"/>
               </a:rPr>
-              <a:t>Americas: </a:t>
-            </a:r>
-            <a:r>
-              <a:rPr sz="950" b="0">
-                <a:solidFill>
-                  <a:srgbClr val="262626"/>
+              <a:t>1.173 embarques/mês</a:t>
+            </a:r>
+          </a:p>
+        </p:txBody>
+      </p:sp>
+      <p:cxnSp>
+        <p:nvCxnSpPr>
+          <p:cNvPr id="18" name="Connector 17"/>
+          <p:cNvCxnSpPr/>
+          <p:nvPr/>
+        </p:nvCxnSpPr>
+        <p:spPr>
+          <a:xfrm>
+            <a:off x="7162800" y="2305050"/>
+            <a:ext cx="0" cy="114300"/>
+          </a:xfrm>
+          <a:prstGeom prst="bentConnector3">
+            <a:avLst/>
+          </a:prstGeom>
+          <a:ln w="12700">
+            <a:solidFill>
+              <a:srgbClr val="FF8E2E"/>
+            </a:solidFill>
+          </a:ln>
+        </p:spPr>
+        <p:style>
+          <a:lnRef idx="2">
+            <a:schemeClr val="accent1"/>
+          </a:lnRef>
+          <a:fillRef idx="0">
+            <a:schemeClr val="accent1"/>
+          </a:fillRef>
+          <a:effectRef idx="1">
+            <a:schemeClr val="accent1"/>
+          </a:effectRef>
+          <a:fontRef idx="minor">
+            <a:schemeClr val="tx1"/>
+          </a:fontRef>
+        </p:style>
+      </p:cxnSp>
+      <p:sp>
+        <p:nvSpPr>
+          <p:cNvPr id="19" name="Rounded Rectangle 18"/>
+          <p:cNvSpPr/>
+          <p:nvPr/>
+        </p:nvSpPr>
+        <p:spPr>
+          <a:xfrm>
+            <a:off x="5867400" y="2419350"/>
+            <a:ext cx="2590800" cy="590550"/>
+          </a:xfrm>
+          <a:prstGeom prst="roundRect">
+            <a:avLst>
+              <a:gd name="adj" fmla="val 8000"/>
+            </a:avLst>
+          </a:prstGeom>
+          <a:solidFill>
+            <a:srgbClr val="FF8E2E"/>
+          </a:solidFill>
+          <a:ln>
+            <a:noFill/>
+          </a:ln>
+        </p:spPr>
+        <p:style>
+          <a:lnRef idx="1">
+            <a:schemeClr val="accent1"/>
+          </a:lnRef>
+          <a:fillRef idx="3">
+            <a:schemeClr val="accent1"/>
+          </a:fillRef>
+          <a:effectRef idx="2">
+            <a:schemeClr val="accent1"/>
+          </a:effectRef>
+          <a:fontRef idx="minor">
+            <a:schemeClr val="lt1"/>
+          </a:fontRef>
+        </p:style>
+        <p:txBody>
+          <a:bodyPr rtlCol="0" anchor="ctr" wrap="square" lIns="57150" rIns="57150" tIns="19050" bIns="19050"/>
+          <a:lstStyle/>
+          <a:p>
+            <a:pPr algn="ctr"/>
+            <a:r>
+              <a:rPr sz="950" b="1">
+                <a:solidFill>
+                  <a:srgbClr val="FFFFFF"/>
                 </a:solidFill>
                 <a:latin typeface="Arial"/>
               </a:rPr>
-              <a:t>as 3 vagas de team leader estão divididas entre dois heads, 1 em Air Operations e 2 em Air Product, para a mesma praça</a:t>
-            </a:r>
-          </a:p>
-          <a:p>
-            <a:pPr algn="l" marL="171450" indent="-171450">
-              <a:spcAft>
-                <a:spcPts val="400"/>
-              </a:spcAft>
-              <a:buClr>
-                <a:srgbClr val="009796"/>
-              </a:buClr>
-              <a:buFont typeface="Wingdings"/>
-              <a:buChar char="§"/>
-            </a:pPr>
-            <a:r>
-              <a:rPr sz="950" b="1">
-                <a:solidFill>
-                  <a:srgbClr val="262626"/>
+              <a:t>Head of Overland</a:t>
+            </a:r>
+          </a:p>
+          <a:p>
+            <a:pPr algn="ctr"/>
+            <a:r>
+              <a:rPr sz="750" b="0">
+                <a:solidFill>
+                  <a:srgbClr val="FFFFFF"/>
                 </a:solidFill>
                 <a:latin typeface="Arial"/>
               </a:rPr>
-              <a:t>Blocos de Operações: </a:t>
-            </a:r>
-            <a:r>
-              <a:rPr sz="950" b="0">
-                <a:solidFill>
-                  <a:srgbClr val="262626"/>
+              <a:t>EUA · MIA, IAH, NY</a:t>
+            </a:r>
+          </a:p>
+          <a:p>
+            <a:pPr algn="ctr"/>
+            <a:r>
+              <a:rPr sz="750" b="0">
+                <a:solidFill>
+                  <a:srgbClr val="FFFFFF"/>
                 </a:solidFill>
                 <a:latin typeface="Arial"/>
               </a:rPr>
-              <a:t>as 12 vagas paradas estão nos EUA (6) e na Europa (6)</a:t>
-            </a:r>
-          </a:p>
-          <a:p>
-            <a:pPr algn="l" marL="171450" indent="-171450">
-              <a:spcAft>
-                <a:spcPts val="400"/>
-              </a:spcAft>
-              <a:buClr>
-                <a:srgbClr val="009796"/>
-              </a:buClr>
-              <a:buFont typeface="Wingdings"/>
-              <a:buChar char="§"/>
-            </a:pPr>
-            <a:r>
-              <a:rPr sz="950" b="1">
+              <a:t>10 pessoas · 9 vagas · 6 a abrir</a:t>
+            </a:r>
+          </a:p>
+        </p:txBody>
+      </p:sp>
+      <p:sp>
+        <p:nvSpPr>
+          <p:cNvPr id="20" name="Rounded Rectangle 19"/>
+          <p:cNvSpPr/>
+          <p:nvPr/>
+        </p:nvSpPr>
+        <p:spPr>
+          <a:xfrm>
+            <a:off x="5867400" y="3048000"/>
+            <a:ext cx="2590800" cy="247650"/>
+          </a:xfrm>
+          <a:prstGeom prst="roundRect">
+            <a:avLst>
+              <a:gd name="adj" fmla="val 8000"/>
+            </a:avLst>
+          </a:prstGeom>
+          <a:solidFill>
+            <a:srgbClr val="E8F4F4"/>
+          </a:solidFill>
+          <a:ln w="12700">
+            <a:solidFill>
+              <a:srgbClr val="FF8E2E"/>
+            </a:solidFill>
+          </a:ln>
+        </p:spPr>
+        <p:style>
+          <a:lnRef idx="1">
+            <a:schemeClr val="accent1"/>
+          </a:lnRef>
+          <a:fillRef idx="3">
+            <a:schemeClr val="accent1"/>
+          </a:fillRef>
+          <a:effectRef idx="2">
+            <a:schemeClr val="accent1"/>
+          </a:effectRef>
+          <a:fontRef idx="minor">
+            <a:schemeClr val="lt1"/>
+          </a:fontRef>
+        </p:style>
+        <p:txBody>
+          <a:bodyPr rtlCol="0" anchor="ctr" wrap="square" lIns="57150" rIns="57150" tIns="19050" bIns="19050"/>
+          <a:lstStyle/>
+          <a:p>
+            <a:pPr algn="ctr"/>
+            <a:r>
+              <a:rPr sz="900" b="1">
                 <a:solidFill>
                   <a:srgbClr val="262626"/>
                 </a:solidFill>
                 <a:latin typeface="Arial"/>
               </a:rPr>
-              <a:t>Inland Freight Europa: </a:t>
-            </a:r>
-            <a:r>
-              <a:rPr sz="950" b="0">
-                <a:solidFill>
-                  <a:srgbClr val="262626"/>
+              <a:t>1.417 embarques/mês</a:t>
+            </a:r>
+          </a:p>
+        </p:txBody>
+      </p:sp>
+      <p:cxnSp>
+        <p:nvCxnSpPr>
+          <p:cNvPr id="21" name="Connector 20"/>
+          <p:cNvCxnSpPr/>
+          <p:nvPr/>
+        </p:nvCxnSpPr>
+        <p:spPr>
+          <a:xfrm>
+            <a:off x="9925050" y="2305050"/>
+            <a:ext cx="0" cy="114300"/>
+          </a:xfrm>
+          <a:prstGeom prst="bentConnector3">
+            <a:avLst/>
+          </a:prstGeom>
+          <a:ln w="12700">
+            <a:solidFill>
+              <a:srgbClr val="FF8E2E"/>
+            </a:solidFill>
+          </a:ln>
+        </p:spPr>
+        <p:style>
+          <a:lnRef idx="2">
+            <a:schemeClr val="accent1"/>
+          </a:lnRef>
+          <a:fillRef idx="0">
+            <a:schemeClr val="accent1"/>
+          </a:fillRef>
+          <a:effectRef idx="1">
+            <a:schemeClr val="accent1"/>
+          </a:effectRef>
+          <a:fontRef idx="minor">
+            <a:schemeClr val="tx1"/>
+          </a:fontRef>
+        </p:style>
+      </p:cxnSp>
+      <p:sp>
+        <p:nvSpPr>
+          <p:cNvPr id="22" name="Rounded Rectangle 21"/>
+          <p:cNvSpPr/>
+          <p:nvPr/>
+        </p:nvSpPr>
+        <p:spPr>
+          <a:xfrm>
+            <a:off x="8629650" y="2419350"/>
+            <a:ext cx="2590800" cy="590550"/>
+          </a:xfrm>
+          <a:prstGeom prst="roundRect">
+            <a:avLst>
+              <a:gd name="adj" fmla="val 8000"/>
+            </a:avLst>
+          </a:prstGeom>
+          <a:solidFill>
+            <a:srgbClr val="FF8E2E"/>
+          </a:solidFill>
+          <a:ln w="19050">
+            <a:solidFill>
+              <a:srgbClr val="FF8E2E"/>
+            </a:solidFill>
+            <a:prstDash val="dash"/>
+          </a:ln>
+        </p:spPr>
+        <p:style>
+          <a:lnRef idx="1">
+            <a:schemeClr val="accent1"/>
+          </a:lnRef>
+          <a:fillRef idx="3">
+            <a:schemeClr val="accent1"/>
+          </a:fillRef>
+          <a:effectRef idx="2">
+            <a:schemeClr val="accent1"/>
+          </a:effectRef>
+          <a:fontRef idx="minor">
+            <a:schemeClr val="lt1"/>
+          </a:fontRef>
+        </p:style>
+        <p:txBody>
+          <a:bodyPr rtlCol="0" anchor="ctr" wrap="square" lIns="57150" rIns="57150" tIns="19050" bIns="19050"/>
+          <a:lstStyle/>
+          <a:p>
+            <a:pPr algn="ctr"/>
+            <a:r>
+              <a:rPr sz="950" b="1">
+                <a:solidFill>
+                  <a:srgbClr val="FFFFFF"/>
                 </a:solidFill>
                 <a:latin typeface="Arial"/>
               </a:rPr>
-              <a:t>4 pessoas, 4 vagas e nenhuma de liderança</a:t>
+              <a:t>VAGA · Head de Europa</a:t>
+            </a:r>
+          </a:p>
+          <a:p>
+            <a:pPr algn="ctr"/>
+            <a:r>
+              <a:rPr sz="750" b="0">
+                <a:solidFill>
+                  <a:srgbClr val="FFFFFF"/>
+                </a:solidFill>
+                <a:latin typeface="Arial"/>
+              </a:rPr>
+              <a:t>Europa · AMS, FRA, LIS</a:t>
+            </a:r>
+          </a:p>
+          <a:p>
+            <a:pPr algn="ctr"/>
+            <a:r>
+              <a:rPr sz="750" b="0">
+                <a:solidFill>
+                  <a:srgbClr val="FFFFFF"/>
+                </a:solidFill>
+                <a:latin typeface="Arial"/>
+              </a:rPr>
+              <a:t>5 pessoas · vaga publicada</a:t>
             </a:r>
           </a:p>
         </p:txBody>
       </p:sp>
-      <p:pic>
-        <p:nvPicPr>
-          <p:cNvPr id="17" name="Logo ATY rodape" descr="aty_footer_black.png"/>
-          <p:cNvPicPr>
-            <a:picLocks noChangeAspect="1"/>
-          </p:cNvPicPr>
+      <p:sp>
+        <p:nvSpPr>
+          <p:cNvPr id="23" name="Rounded Rectangle 22"/>
+          <p:cNvSpPr/>
           <p:nvPr/>
-        </p:nvPicPr>
-        <p:blipFill>
-          <a:blip r:embed="rId4"/>
-          <a:stretch>
-            <a:fillRect/>
-          </a:stretch>
-        </p:blipFill>
+        </p:nvSpPr>
         <p:spPr>
           <a:xfrm>
-            <a:off x="11646408" y="6420612"/>
-            <a:ext cx="198120" cy="94488"/>
+            <a:off x="8629650" y="3048000"/>
+            <a:ext cx="2590800" cy="247650"/>
           </a:xfrm>
-          <a:prstGeom prst="rect">
-            <a:avLst/>
+          <a:prstGeom prst="roundRect">
+            <a:avLst>
+              <a:gd name="adj" fmla="val 8000"/>
+            </a:avLst>
           </a:prstGeom>
+          <a:solidFill>
+            <a:srgbClr val="E8F4F4"/>
+          </a:solidFill>
+          <a:ln w="12700">
+            <a:solidFill>
+              <a:srgbClr val="FF8E2E"/>
+            </a:solidFill>
+          </a:ln>
         </p:spPr>
-      </p:pic>
+        <p:style>
+          <a:lnRef idx="1">
+            <a:schemeClr val="accent1"/>
+          </a:lnRef>
+          <a:fillRef idx="3">
+            <a:schemeClr val="accent1"/>
+          </a:fillRef>
+          <a:effectRef idx="2">
+            <a:schemeClr val="accent1"/>
+          </a:effectRef>
+          <a:fontRef idx="minor">
+            <a:schemeClr val="lt1"/>
+          </a:fontRef>
+        </p:style>
+        <p:txBody>
+          <a:bodyPr rtlCol="0" anchor="ctr" wrap="square" lIns="57150" rIns="57150" tIns="19050" bIns="19050"/>
+          <a:lstStyle/>
+          <a:p>
+            <a:pPr algn="ctr"/>
+            <a:r>
+              <a:rPr sz="900" b="1">
+                <a:solidFill>
+                  <a:srgbClr val="262626"/>
+                </a:solidFill>
+                <a:latin typeface="Arial"/>
+              </a:rPr>
+              <a:t>534 embarques/mês</a:t>
+            </a:r>
+          </a:p>
+        </p:txBody>
+      </p:sp>
+      <p:sp>
+        <p:nvSpPr>
+          <p:cNvPr id="24" name="Rounded Rectangle 23"/>
+          <p:cNvSpPr/>
+          <p:nvPr/>
+        </p:nvSpPr>
+        <p:spPr>
+          <a:xfrm>
+            <a:off x="342900" y="3543300"/>
+            <a:ext cx="5676900" cy="228600"/>
+          </a:xfrm>
+          <a:prstGeom prst="roundRect">
+            <a:avLst>
+              <a:gd name="adj" fmla="val 8000"/>
+            </a:avLst>
+          </a:prstGeom>
+          <a:solidFill>
+            <a:srgbClr val="1D368E"/>
+          </a:solidFill>
+          <a:ln>
+            <a:noFill/>
+          </a:ln>
+        </p:spPr>
+        <p:style>
+          <a:lnRef idx="1">
+            <a:schemeClr val="accent1"/>
+          </a:lnRef>
+          <a:fillRef idx="3">
+            <a:schemeClr val="accent1"/>
+          </a:fillRef>
+          <a:effectRef idx="2">
+            <a:schemeClr val="accent1"/>
+          </a:effectRef>
+          <a:fontRef idx="minor">
+            <a:schemeClr val="lt1"/>
+          </a:fontRef>
+        </p:style>
+        <p:txBody>
+          <a:bodyPr rtlCol="0" anchor="ctr" wrap="square" lIns="57150" rIns="57150" tIns="19050" bIns="19050"/>
+          <a:lstStyle/>
+          <a:p>
+            <a:pPr algn="ctr"/>
+            <a:r>
+              <a:rPr sz="1000" b="1">
+                <a:solidFill>
+                  <a:srgbClr val="FFFFFF"/>
+                </a:solidFill>
+                <a:latin typeface="Arial"/>
+              </a:rPr>
+              <a:t>A conta por praça</a:t>
+            </a:r>
+          </a:p>
+        </p:txBody>
+      </p:sp>
+      <p:sp>
+        <p:nvSpPr>
+          <p:cNvPr id="25" name="Rounded Rectangle 24"/>
+          <p:cNvSpPr/>
+          <p:nvPr/>
+        </p:nvSpPr>
+        <p:spPr>
+          <a:xfrm>
+            <a:off x="342900" y="3800475"/>
+            <a:ext cx="5676900" cy="2409825"/>
+          </a:xfrm>
+          <a:prstGeom prst="roundRect">
+            <a:avLst>
+              <a:gd name="adj" fmla="val 8000"/>
+            </a:avLst>
+          </a:prstGeom>
+          <a:solidFill>
+            <a:srgbClr val="E8F4F4"/>
+          </a:solidFill>
+          <a:ln w="12700">
+            <a:solidFill>
+              <a:srgbClr val="1D368E"/>
+            </a:solidFill>
+          </a:ln>
+        </p:spPr>
+        <p:style>
+          <a:lnRef idx="1">
+            <a:schemeClr val="accent1"/>
+          </a:lnRef>
+          <a:fillRef idx="3">
+            <a:schemeClr val="accent1"/>
+          </a:fillRef>
+          <a:effectRef idx="2">
+            <a:schemeClr val="accent1"/>
+          </a:effectRef>
+          <a:fontRef idx="minor">
+            <a:schemeClr val="lt1"/>
+          </a:fontRef>
+        </p:style>
+        <p:txBody>
+          <a:bodyPr rtlCol="0" anchor="t" wrap="square" lIns="95250" rIns="95250" tIns="19050" bIns="19050"/>
+          <a:lstStyle/>
+          <a:p>
+            <a:pPr algn="l">
+              <a:spcAft>
+                <a:spcPts val="375"/>
+              </a:spcAft>
+            </a:pPr>
+            <a:r>
+              <a:rPr sz="1000" b="1">
+                <a:solidFill>
+                  <a:srgbClr val="262626"/>
+                </a:solidFill>
+                <a:latin typeface="Arial"/>
+              </a:rPr>
+              <a:t/>
+            </a:r>
+            <a:r>
+              <a:rPr b="1" sz="900">
+                <a:solidFill>
+                  <a:srgbClr val="262626"/>
+                </a:solidFill>
+                <a:latin typeface="Arial"/>
+              </a:rPr>
+              <a:t>EUA · 10 pessoas, 9 vagas: </a:t>
+            </a:r>
+            <a:r>
+              <a:rPr sz="900">
+                <a:solidFill>
+                  <a:srgbClr val="262626"/>
+                </a:solidFill>
+                <a:latin typeface="Arial"/>
+              </a:rPr>
+              <a:t>1.417 embarques/mês originados, 142 por pessoa. 1 gestor local, e são 2 Warehouse Team Leaders — um deles sem nenhum liderado</a:t>
+            </a:r>
+          </a:p>
+          <a:p>
+            <a:pPr algn="l">
+              <a:spcAft>
+                <a:spcPts val="375"/>
+              </a:spcAft>
+            </a:pPr>
+            <a:r>
+              <a:rPr b="1" sz="900">
+                <a:solidFill>
+                  <a:srgbClr val="262626"/>
+                </a:solidFill>
+                <a:latin typeface="Arial"/>
+              </a:rPr>
+              <a:t>Europa · 5 pessoas, 7 vagas: </a:t>
+            </a:r>
+            <a:r>
+              <a:rPr sz="900">
+                <a:solidFill>
+                  <a:srgbClr val="262626"/>
+                </a:solidFill>
+                <a:latin typeface="Arial"/>
+              </a:rPr>
+              <a:t>534 embarques/mês, 107 por pessoa. Sem head; a única TL está em Portugal e reporta ao Brasil</a:t>
+            </a:r>
+          </a:p>
+          <a:p>
+            <a:pPr algn="l">
+              <a:spcAft>
+                <a:spcPts val="375"/>
+              </a:spcAft>
+            </a:pPr>
+            <a:r>
+              <a:rPr b="1" sz="900">
+                <a:solidFill>
+                  <a:srgbClr val="262626"/>
+                </a:solidFill>
+                <a:latin typeface="Arial"/>
+              </a:rPr>
+              <a:t>Agentes OFF · </a:t>
+            </a:r>
+            <a:r>
+              <a:rPr sz="900">
+                <a:solidFill>
+                  <a:srgbClr val="262626"/>
+                </a:solidFill>
+                <a:latin typeface="Arial"/>
+              </a:rPr>
+              <a:t>161 agentes terceiros originam 1.173 embarques/mês, 34% do total, coordenados por 51 pessoas no Brasil</a:t>
+            </a:r>
+          </a:p>
+          <a:p>
+            <a:pPr algn="l">
+              <a:spcAft>
+                <a:spcPts val="375"/>
+              </a:spcAft>
+            </a:pPr>
+            <a:r>
+              <a:rPr b="1" sz="900">
+                <a:solidFill>
+                  <a:srgbClr val="262626"/>
+                </a:solidFill>
+                <a:latin typeface="Arial"/>
+              </a:rPr>
+              <a:t>Brasil · </a:t>
+            </a:r>
+            <a:r>
+              <a:rPr sz="900">
+                <a:solidFill>
+                  <a:srgbClr val="262626"/>
+                </a:solidFill>
+                <a:latin typeface="Arial"/>
+              </a:rPr>
+              <a:t>289 embarques/mês originados, mas a equipe processa o lado destino de todos os embarques</a:t>
+            </a:r>
+          </a:p>
+        </p:txBody>
+      </p:sp>
+      <p:sp>
+        <p:nvSpPr>
+          <p:cNvPr id="26" name="Rounded Rectangle 25"/>
+          <p:cNvSpPr/>
+          <p:nvPr/>
+        </p:nvSpPr>
+        <p:spPr>
+          <a:xfrm>
+            <a:off x="6172200" y="3543300"/>
+            <a:ext cx="5676900" cy="228600"/>
+          </a:xfrm>
+          <a:prstGeom prst="roundRect">
+            <a:avLst>
+              <a:gd name="adj" fmla="val 8000"/>
+            </a:avLst>
+          </a:prstGeom>
+          <a:solidFill>
+            <a:srgbClr val="FF8E2E"/>
+          </a:solidFill>
+          <a:ln>
+            <a:noFill/>
+          </a:ln>
+        </p:spPr>
+        <p:style>
+          <a:lnRef idx="1">
+            <a:schemeClr val="accent1"/>
+          </a:lnRef>
+          <a:fillRef idx="3">
+            <a:schemeClr val="accent1"/>
+          </a:fillRef>
+          <a:effectRef idx="2">
+            <a:schemeClr val="accent1"/>
+          </a:effectRef>
+          <a:fontRef idx="minor">
+            <a:schemeClr val="lt1"/>
+          </a:fontRef>
+        </p:style>
+        <p:txBody>
+          <a:bodyPr rtlCol="0" anchor="ctr" wrap="square" lIns="57150" rIns="57150" tIns="19050" bIns="19050"/>
+          <a:lstStyle/>
+          <a:p>
+            <a:pPr algn="ctr"/>
+            <a:r>
+              <a:rPr sz="1000" b="1">
+                <a:solidFill>
+                  <a:srgbClr val="FFFFFF"/>
+                </a:solidFill>
+                <a:latin typeface="Arial"/>
+              </a:rPr>
+              <a:t>As ineficiências da cadeia</a:t>
+            </a:r>
+          </a:p>
+        </p:txBody>
+      </p:sp>
+      <p:sp>
+        <p:nvSpPr>
+          <p:cNvPr id="27" name="Rounded Rectangle 26"/>
+          <p:cNvSpPr/>
+          <p:nvPr/>
+        </p:nvSpPr>
+        <p:spPr>
+          <a:xfrm>
+            <a:off x="6172200" y="3800475"/>
+            <a:ext cx="5676900" cy="2409825"/>
+          </a:xfrm>
+          <a:prstGeom prst="roundRect">
+            <a:avLst>
+              <a:gd name="adj" fmla="val 8000"/>
+            </a:avLst>
+          </a:prstGeom>
+          <a:solidFill>
+            <a:srgbClr val="FDF0E4"/>
+          </a:solidFill>
+          <a:ln w="12700">
+            <a:solidFill>
+              <a:srgbClr val="FF8E2E"/>
+            </a:solidFill>
+          </a:ln>
+        </p:spPr>
+        <p:style>
+          <a:lnRef idx="1">
+            <a:schemeClr val="accent1"/>
+          </a:lnRef>
+          <a:fillRef idx="3">
+            <a:schemeClr val="accent1"/>
+          </a:fillRef>
+          <a:effectRef idx="2">
+            <a:schemeClr val="accent1"/>
+          </a:effectRef>
+          <a:fontRef idx="minor">
+            <a:schemeClr val="lt1"/>
+          </a:fontRef>
+        </p:style>
+        <p:txBody>
+          <a:bodyPr rtlCol="0" anchor="t" wrap="square" lIns="95250" rIns="95250" tIns="19050" bIns="19050"/>
+          <a:lstStyle/>
+          <a:p>
+            <a:pPr algn="l">
+              <a:spcAft>
+                <a:spcPts val="375"/>
+              </a:spcAft>
+            </a:pPr>
+            <a:r>
+              <a:rPr sz="1000" b="1">
+                <a:solidFill>
+                  <a:srgbClr val="262626"/>
+                </a:solidFill>
+                <a:latin typeface="Arial"/>
+              </a:rPr>
+              <a:t/>
+            </a:r>
+            <a:r>
+              <a:rPr b="1" sz="900">
+                <a:solidFill>
+                  <a:srgbClr val="262626"/>
+                </a:solidFill>
+                <a:latin typeface="Arial"/>
+              </a:rPr>
+              <a:t>Europa sem dono: </a:t>
+            </a:r>
+            <a:r>
+              <a:rPr sz="900">
+                <a:solidFill>
+                  <a:srgbClr val="262626"/>
+                </a:solidFill>
+                <a:latin typeface="Arial"/>
+              </a:rPr>
+              <a:t>58% do quadro europeu está em aberto e a praça que origina 534 embarques/mês não tem head nem team leader local</a:t>
+            </a:r>
+          </a:p>
+          <a:p>
+            <a:pPr algn="l">
+              <a:spcAft>
+                <a:spcPts val="375"/>
+              </a:spcAft>
+            </a:pPr>
+            <a:r>
+              <a:rPr b="1" sz="900">
+                <a:solidFill>
+                  <a:srgbClr val="262626"/>
+                </a:solidFill>
+                <a:latin typeface="Arial"/>
+              </a:rPr>
+              <a:t>Fila travada fora do Brasil: </a:t>
+            </a:r>
+            <a:r>
+              <a:rPr sz="900">
+                <a:solidFill>
+                  <a:srgbClr val="262626"/>
+                </a:solidFill>
+                <a:latin typeface="Arial"/>
+              </a:rPr>
+              <a:t>as 12 vagas que nunca foram abertas estão todas em EUA (6) e Europa (6) — o gargalo é a abertura interna</a:t>
+            </a:r>
+          </a:p>
+          <a:p>
+            <a:pPr algn="l">
+              <a:spcAft>
+                <a:spcPts val="375"/>
+              </a:spcAft>
+            </a:pPr>
+            <a:r>
+              <a:rPr b="1" sz="900">
+                <a:solidFill>
+                  <a:srgbClr val="262626"/>
+                </a:solidFill>
+                <a:latin typeface="Arial"/>
+              </a:rPr>
+              <a:t>Gestão à distância: </a:t>
+            </a:r>
+            <a:r>
+              <a:rPr sz="900">
+                <a:solidFill>
+                  <a:srgbClr val="262626"/>
+                </a:solidFill>
+                <a:latin typeface="Arial"/>
+              </a:rPr>
+              <a:t>13 das 15 pessoas de EUA e Europa têm gestor no Brasil; o Head of Overland responde por MIA, IAH e NY de São Paulo</a:t>
+            </a:r>
+          </a:p>
+          <a:p>
+            <a:pPr algn="l">
+              <a:spcAft>
+                <a:spcPts val="375"/>
+              </a:spcAft>
+            </a:pPr>
+            <a:r>
+              <a:rPr b="1" sz="900">
+                <a:solidFill>
+                  <a:srgbClr val="262626"/>
+                </a:solidFill>
+                <a:latin typeface="Arial"/>
+              </a:rPr>
+              <a:t>Camada que se repete: </a:t>
+            </a:r>
+            <a:r>
+              <a:rPr sz="900">
+                <a:solidFill>
+                  <a:srgbClr val="262626"/>
+                </a:solidFill>
+                <a:latin typeface="Arial"/>
+              </a:rPr>
+              <a:t>Air Operations tem 4 níveis de team leader; o draft risca 3 caixas dessa cadeia sem indicar destino</a:t>
+            </a:r>
+          </a:p>
+        </p:txBody>
+      </p:sp>
     </p:spTree>
   </p:cSld>
   <p:clrMapOvr>
@@ -9462,12 +8196,12 @@
           <a:graphicData uri="http://schemas.openxmlformats.org/presentationml/2006/ole">
             <mc:AlternateContent xmlns:mc="http://schemas.openxmlformats.org/markup-compatibility/2006">
               <mc:Choice xmlns:v="urn:schemas-microsoft-com:vml" Requires="v">
-                <p:oleObj name="think-cell Slide" r:id="rId9" imgW="421" imgH="423" progId="TCLayout.ActiveDocument.1">
+                <p:oleObj name="think-cell Slide" r:id="rId8" imgW="421" imgH="423" progId="TCLayout.ActiveDocument.1">
                   <p:embed/>
                 </p:oleObj>
               </mc:Choice>
               <mc:Fallback>
-                <p:oleObj name="think-cell Slide" r:id="rId9" imgW="421" imgH="423" progId="TCLayout.ActiveDocument.1">
+                <p:oleObj name="think-cell Slide" r:id="rId8" imgW="421" imgH="423" progId="TCLayout.ActiveDocument.1">
                   <p:embed/>
                   <p:pic>
                     <p:nvPicPr>
@@ -9482,7 +8216,7 @@
                       <p:nvPr/>
                     </p:nvPicPr>
                     <p:blipFill>
-                      <a:blip r:embed="rId10"/>
+                      <a:blip r:embed="rId9"/>
                       <a:stretch>
                         <a:fillRect/>
                       </a:stretch>
@@ -9522,7 +8256,7 @@
           </p:nvPr>
         </p:nvPicPr>
         <p:blipFill>
-          <a:blip r:embed="rId11"/>
+          <a:blip r:embed="rId10"/>
           <a:stretch>
             <a:fillRect/>
           </a:stretch>
@@ -9761,12 +8495,12 @@
           </p:cNvPicPr>
           <p:nvPr>
             <p:custDataLst>
-              <p:tags r:id="rId6"/>
+              <p:tags r:id="rId5"/>
             </p:custDataLst>
           </p:nvPr>
         </p:nvPicPr>
         <p:blipFill>
-          <a:blip r:embed="rId12"/>
+          <a:blip r:embed="rId11"/>
           <a:srcRect b="428"/>
           <a:stretch>
             <a:fillRect/>
@@ -9791,7 +8525,7 @@
           <p:nvPr/>
         </p:nvPicPr>
         <p:blipFill>
-          <a:blip r:embed="rId13"/>
+          <a:blip r:embed="rId12"/>
           <a:stretch>
             <a:fillRect/>
           </a:stretch>
@@ -9863,13 +8597,13 @@
 <file path=ppt/tags/tag14.xml><?xml version="1.0" encoding="utf-8"?>
 <p:tagLst xmlns:a="http://schemas.openxmlformats.org/drawingml/2006/main" xmlns:r="http://schemas.openxmlformats.org/officeDocument/2006/relationships" xmlns:p="http://schemas.openxmlformats.org/presentationml/2006/main">
   <p:tag name="ALREADY-CHECKED" val="TRUE"/>
+  <p:tag name="THINKCELLSHAPEDONOTDELETE" val="thinkcellActiveDocDoNotDelete"/>
 </p:tagLst>
 </file>
 
 <file path=ppt/tags/tag15.xml><?xml version="1.0" encoding="utf-8"?>
 <p:tagLst xmlns:a="http://schemas.openxmlformats.org/drawingml/2006/main" xmlns:r="http://schemas.openxmlformats.org/officeDocument/2006/relationships" xmlns:p="http://schemas.openxmlformats.org/presentationml/2006/main">
   <p:tag name="ALREADY-CHECKED" val="TRUE"/>
-  <p:tag name="THINKCELLSHAPEDONOTDELETE" val="thinkcellActiveDocDoNotDelete"/>
 </p:tagLst>
 </file>
 
@@ -9891,21 +8625,9 @@
 </p:tagLst>
 </file>
 
-<file path=ppt/tags/tag19.xml><?xml version="1.0" encoding="utf-8"?>
-<p:tagLst xmlns:a="http://schemas.openxmlformats.org/drawingml/2006/main" xmlns:r="http://schemas.openxmlformats.org/officeDocument/2006/relationships" xmlns:p="http://schemas.openxmlformats.org/presentationml/2006/main">
-  <p:tag name="ALREADY-CHECKED" val="TRUE"/>
-</p:tagLst>
-</file>
-
 <file path=ppt/tags/tag2.xml><?xml version="1.0" encoding="utf-8"?>
 <p:tagLst xmlns:a="http://schemas.openxmlformats.org/drawingml/2006/main" xmlns:r="http://schemas.openxmlformats.org/officeDocument/2006/relationships" xmlns:p="http://schemas.openxmlformats.org/presentationml/2006/main">
   <p:tag name="THINKCELLSHAPEDONOTDELETE" val="thinkcellActiveDocDoNotDelete"/>
-</p:tagLst>
-</file>
-
-<file path=ppt/tags/tag20.xml><?xml version="1.0" encoding="utf-8"?>
-<p:tagLst xmlns:a="http://schemas.openxmlformats.org/drawingml/2006/main" xmlns:r="http://schemas.openxmlformats.org/officeDocument/2006/relationships" xmlns:p="http://schemas.openxmlformats.org/presentationml/2006/main">
-  <p:tag name="ALREADY-CHECKED" val="TRUE"/>
 </p:tagLst>
 </file>
 
@@ -11061,15 +9783,6 @@
 </file>
 
 <file path=customXml/item1.xml><?xml version="1.0" encoding="utf-8"?>
-<?mso-contentType ?>
-<FormTemplates xmlns="http://schemas.microsoft.com/sharepoint/v3/contenttype/forms">
-  <Display>DocumentLibraryForm</Display>
-  <Edit>DocumentLibraryForm</Edit>
-  <New>DocumentLibraryForm</New>
-</FormTemplates>
-</file>
-
-<file path=customXml/item2.xml><?xml version="1.0" encoding="utf-8"?>
 <p:properties xmlns:p="http://schemas.microsoft.com/office/2006/metadata/properties" xmlns:xsi="http://www.w3.org/2001/XMLSchema-instance" xmlns:pc="http://schemas.microsoft.com/office/infopath/2007/PartnerControls">
   <documentManagement>
     <_activity xmlns="0efc0232-82fe-4533-96a1-02510e00692b" xsi:nil="true"/>
@@ -11077,7 +9790,7 @@
 </p:properties>
 </file>
 
-<file path=customXml/item3.xml><?xml version="1.0" encoding="utf-8"?>
+<file path=customXml/item2.xml><?xml version="1.0" encoding="utf-8"?>
 <ct:contentTypeSchema xmlns:ct="http://schemas.microsoft.com/office/2006/metadata/contentType" xmlns:ma="http://schemas.microsoft.com/office/2006/metadata/properties/metaAttributes" ct:_="" ma:_="" ma:contentTypeName="Document" ma:contentTypeID="0x010100E17CCA89B0758541BF11A4EAA1F2ACAB" ma:contentTypeVersion="12" ma:contentTypeDescription="Create a new document." ma:contentTypeScope="" ma:versionID="74fdf47dae72a1d9d977c2df6cb144fc">
   <xsd:schema xmlns:xsd="http://www.w3.org/2001/XMLSchema" xmlns:xs="http://www.w3.org/2001/XMLSchema" xmlns:p="http://schemas.microsoft.com/office/2006/metadata/properties" xmlns:ns3="0efc0232-82fe-4533-96a1-02510e00692b" targetNamespace="http://schemas.microsoft.com/office/2006/metadata/properties" ma:root="true" ma:fieldsID="48afc7e2c1b0ec344d0cc8d0ef08b3c4" ns3:_="">
     <xsd:import namespace="0efc0232-82fe-4533-96a1-02510e00692b"/>
@@ -11271,15 +9984,16 @@
 </ct:contentTypeSchema>
 </file>
 
-<file path=customXml/itemProps1.xml><?xml version="1.0" encoding="utf-8"?>
-<ds:datastoreItem xmlns:ds="http://schemas.openxmlformats.org/officeDocument/2006/customXml" ds:itemID="{59D90352-7D0A-4C9E-B1C6-06644330B135}">
-  <ds:schemaRefs>
-    <ds:schemaRef ds:uri="http://schemas.microsoft.com/sharepoint/v3/contenttype/forms"/>
-  </ds:schemaRefs>
-</ds:datastoreItem>
+<file path=customXml/item3.xml><?xml version="1.0" encoding="utf-8"?>
+<?mso-contentType ?>
+<FormTemplates xmlns="http://schemas.microsoft.com/sharepoint/v3/contenttype/forms">
+  <Display>DocumentLibraryForm</Display>
+  <Edit>DocumentLibraryForm</Edit>
+  <New>DocumentLibraryForm</New>
+</FormTemplates>
 </file>
 
-<file path=customXml/itemProps2.xml><?xml version="1.0" encoding="utf-8"?>
+<file path=customXml/itemProps1.xml><?xml version="1.0" encoding="utf-8"?>
 <ds:datastoreItem xmlns:ds="http://schemas.openxmlformats.org/officeDocument/2006/customXml" ds:itemID="{220DB7E4-6410-4C32-99FA-1E1DB469B3CD}">
   <ds:schemaRefs>
     <ds:schemaRef ds:uri="0efc0232-82fe-4533-96a1-02510e00692b"/>
@@ -11295,7 +10009,7 @@
 </ds:datastoreItem>
 </file>
 
-<file path=customXml/itemProps3.xml><?xml version="1.0" encoding="utf-8"?>
+<file path=customXml/itemProps2.xml><?xml version="1.0" encoding="utf-8"?>
 <ds:datastoreItem xmlns:ds="http://schemas.openxmlformats.org/officeDocument/2006/customXml" ds:itemID="{53764D14-9DFA-4960-9EC4-E83D0D9FBD76}">
   <ds:schemaRefs>
     <ds:schemaRef ds:uri="0efc0232-82fe-4533-96a1-02510e00692b"/>
@@ -11312,4 +10026,12 @@
     <ds:schemaRef ds:uri="http://www.w3.org/2001/XMLSchema"/>
   </ds:schemaRefs>
 </ds:datastoreItem>
+</file>
+
+<file path=customXml/itemProps3.xml><?xml version="1.0" encoding="utf-8"?>
+<ds:datastoreItem xmlns:ds="http://schemas.openxmlformats.org/officeDocument/2006/customXml" ds:itemID="{59D90352-7D0A-4C9E-B1C6-06644330B135}">
+  <ds:schemaRefs>
+    <ds:schemaRef ds:uri="http://schemas.microsoft.com/sharepoint/v3/contenttype/forms"/>
+  </ds:schemaRefs>
+</ds:datastoreItem>
 </file>
--- a/20261023 - ATY - Estrutura x Vagas.pptx
+++ b/20261023 - ATY - Estrutura x Vagas.pptx
@@ -6767,7 +6767,7 @@
           <a:lstStyle/>
           <a:p>
             <a:r>
-              <a:t>EUA e Europa originam 1.951 dos 3.413 embarques por mês com 15 pessoas e 16 vagas em aberto; 12 dessas vagas nunca foram abertas e a Europa não tem head</a:t>
+              <a:t>Os 8 setores do COO somam 199 pessoas e 34 vagas, mas 28 nunca foram abertas; a falha se repete em dois padrões — camada de chefia duplicada e vaga sem dono</a:t>
             </a:r>
           </a:p>
         </p:txBody>
@@ -6788,7 +6788,7 @@
           <a:lstStyle/>
           <a:p>
             <a:r>
-              <a:t>Estrutura × Vagas | Operações por praça</a:t>
+              <a:t>Estrutura × Vagas | Operações (COO)</a:t>
             </a:r>
           </a:p>
         </p:txBody>
@@ -6814,7 +6814,7 @@
           <a:lstStyle/>
           <a:p>
             <a:r>
-              <a:t>Embarques originados por mês (média abr–set/26, CIS) · 161 agentes terceiros originam 1.173 · praça = entidade no organograma e escritório de origem no CIS</a:t>
+              <a:t>COO: 200 pessoas · 8 heads diretos · 34 vagas, 6 publicadas · 3.413 embarques originados por mês (CIS, abr–set/26)</a:t>
             </a:r>
           </a:p>
         </p:txBody>
@@ -6835,7 +6835,7 @@
           <a:lstStyle/>
           <a:p>
             <a:r>
-              <a:t>Fonte: ATY | CIS ORDERS (13/10/26, campo off, média mensal abr–set/26) · Colaboradores Factorial (organograma out/26) · planilha de vagas (21/10/26) · Gupy</a:t>
+              <a:t>Fonte: ATY | Colaboradores Factorial (organograma out/26, sem as 5 admissões de novembro) · planilha de vagas (21/10/26) · Gupy · Baseline DRE 26.2 · CIS ORDERS (13/10/26)</a:t>
             </a:r>
           </a:p>
         </p:txBody>
@@ -6870,7 +6870,7 @@
                 </a:solidFill>
                 <a:latin typeface="Arial"/>
               </a:rPr>
-              <a:t>A cadeia de Operações, por praça</a:t>
+              <a:t>Diagnóstico por setor de Operações</a:t>
             </a:r>
           </a:p>
         </p:txBody>
@@ -6905,1043 +6905,1845 @@
                 </a:solidFill>
                 <a:latin typeface="Arial"/>
               </a:rPr>
-              <a:t>cargo, quadro atual, vagas em aberto e embarques originados por mês</a:t>
+              <a:t>quadro atual, vagas em aberto, a falha identificada e o que mudar; em laranja, os setores que travam a fila</a:t>
             </a:r>
           </a:p>
         </p:txBody>
       </p:sp>
+      <p:graphicFrame>
+        <p:nvGraphicFramePr>
+          <p:cNvPr id="9" name="Table 8"/>
+          <p:cNvGraphicFramePr>
+            <a:graphicFrameLocks noGrp="1"/>
+          </p:cNvGraphicFramePr>
+          <p:nvPr/>
+        </p:nvGraphicFramePr>
+        <p:xfrm>
+          <a:off x="342900" y="1866900"/>
+          <a:ext cx="11506200" cy="3143250"/>
+        </p:xfrm>
+        <a:graphic>
+          <a:graphicData uri="http://schemas.openxmlformats.org/drawingml/2006/table">
+            <a:tbl>
+              <a:tblPr firstRow="1" bandRow="1">
+                <a:tableStyleId>{5C22544A-7EE6-4342-B048-85BDC9FD1C3A}</a:tableStyleId>
+              </a:tblPr>
+              <a:tblGrid>
+                <a:gridCol w="1600200"/>
+                <a:gridCol w="647700"/>
+                <a:gridCol w="685800"/>
+                <a:gridCol w="552450"/>
+                <a:gridCol w="609600"/>
+                <a:gridCol w="3333750"/>
+                <a:gridCol w="4076700"/>
+              </a:tblGrid>
+              <a:tr h="285750">
+                <a:tc>
+                  <a:txBody>
+                    <a:bodyPr/>
+                    <a:lstStyle/>
+                    <a:p>
+                      <a:pPr algn="l"/>
+                      <a:r>
+                        <a:rPr sz="800" b="1">
+                          <a:solidFill>
+                            <a:srgbClr val="FFFFFF"/>
+                          </a:solidFill>
+                          <a:latin typeface="Arial"/>
+                        </a:rPr>
+                        <a:t>Setor</a:t>
+                      </a:r>
+                    </a:p>
+                  </a:txBody>
+                  <a:tcPr marL="38100" marR="38100" marT="0" marB="0" anchor="ctr">
+                    <a:solidFill>
+                      <a:srgbClr val="1D368E"/>
+                    </a:solidFill>
+                  </a:tcPr>
+                </a:tc>
+                <a:tc>
+                  <a:txBody>
+                    <a:bodyPr/>
+                    <a:lstStyle/>
+                    <a:p>
+                      <a:pPr algn="ctr"/>
+                      <a:r>
+                        <a:rPr sz="800" b="1">
+                          <a:solidFill>
+                            <a:srgbClr val="FFFFFF"/>
+                          </a:solidFill>
+                          <a:latin typeface="Arial"/>
+                        </a:rPr>
+                        <a:t>Pessoas</a:t>
+                      </a:r>
+                    </a:p>
+                  </a:txBody>
+                  <a:tcPr marL="38100" marR="38100" marT="0" marB="0" anchor="ctr">
+                    <a:solidFill>
+                      <a:srgbClr val="1D368E"/>
+                    </a:solidFill>
+                  </a:tcPr>
+                </a:tc>
+                <a:tc>
+                  <a:txBody>
+                    <a:bodyPr/>
+                    <a:lstStyle/>
+                    <a:p>
+                      <a:pPr algn="ctr"/>
+                      <a:r>
+                        <a:rPr sz="800" b="1">
+                          <a:solidFill>
+                            <a:srgbClr val="FFFFFF"/>
+                          </a:solidFill>
+                          <a:latin typeface="Arial"/>
+                        </a:rPr>
+                        <a:t>Gestores</a:t>
+                      </a:r>
+                    </a:p>
+                  </a:txBody>
+                  <a:tcPr marL="38100" marR="38100" marT="0" marB="0" anchor="ctr">
+                    <a:solidFill>
+                      <a:srgbClr val="1D368E"/>
+                    </a:solidFill>
+                  </a:tcPr>
+                </a:tc>
+                <a:tc>
+                  <a:txBody>
+                    <a:bodyPr/>
+                    <a:lstStyle/>
+                    <a:p>
+                      <a:pPr algn="ctr"/>
+                      <a:r>
+                        <a:rPr sz="800" b="1">
+                          <a:solidFill>
+                            <a:srgbClr val="FFFFFF"/>
+                          </a:solidFill>
+                          <a:latin typeface="Arial"/>
+                        </a:rPr>
+                        <a:t>Vagas</a:t>
+                      </a:r>
+                    </a:p>
+                  </a:txBody>
+                  <a:tcPr marL="38100" marR="38100" marT="0" marB="0" anchor="ctr">
+                    <a:solidFill>
+                      <a:srgbClr val="1D368E"/>
+                    </a:solidFill>
+                  </a:tcPr>
+                </a:tc>
+                <a:tc>
+                  <a:txBody>
+                    <a:bodyPr/>
+                    <a:lstStyle/>
+                    <a:p>
+                      <a:pPr algn="ctr"/>
+                      <a:r>
+                        <a:rPr sz="800" b="1">
+                          <a:solidFill>
+                            <a:srgbClr val="FFFFFF"/>
+                          </a:solidFill>
+                          <a:latin typeface="Arial"/>
+                        </a:rPr>
+                        <a:t>A abrir</a:t>
+                      </a:r>
+                    </a:p>
+                  </a:txBody>
+                  <a:tcPr marL="38100" marR="38100" marT="0" marB="0" anchor="ctr">
+                    <a:solidFill>
+                      <a:srgbClr val="1D368E"/>
+                    </a:solidFill>
+                  </a:tcPr>
+                </a:tc>
+                <a:tc>
+                  <a:txBody>
+                    <a:bodyPr/>
+                    <a:lstStyle/>
+                    <a:p>
+                      <a:pPr algn="l"/>
+                      <a:r>
+                        <a:rPr sz="800" b="1">
+                          <a:solidFill>
+                            <a:srgbClr val="FFFFFF"/>
+                          </a:solidFill>
+                          <a:latin typeface="Arial"/>
+                        </a:rPr>
+                        <a:t>Falha identificada</a:t>
+                      </a:r>
+                    </a:p>
+                  </a:txBody>
+                  <a:tcPr marL="38100" marR="38100" marT="0" marB="0" anchor="ctr">
+                    <a:solidFill>
+                      <a:srgbClr val="1D368E"/>
+                    </a:solidFill>
+                  </a:tcPr>
+                </a:tc>
+                <a:tc>
+                  <a:txBody>
+                    <a:bodyPr/>
+                    <a:lstStyle/>
+                    <a:p>
+                      <a:pPr algn="l"/>
+                      <a:r>
+                        <a:rPr sz="800" b="1">
+                          <a:solidFill>
+                            <a:srgbClr val="FFFFFF"/>
+                          </a:solidFill>
+                          <a:latin typeface="Arial"/>
+                        </a:rPr>
+                        <a:t>Recomendação</a:t>
+                      </a:r>
+                    </a:p>
+                  </a:txBody>
+                  <a:tcPr marL="38100" marR="38100" marT="0" marB="0" anchor="ctr">
+                    <a:solidFill>
+                      <a:srgbClr val="1D368E"/>
+                    </a:solidFill>
+                  </a:tcPr>
+                </a:tc>
+              </a:tr>
+              <a:tr h="285750">
+                <a:tc>
+                  <a:txBody>
+                    <a:bodyPr/>
+                    <a:lstStyle/>
+                    <a:p>
+                      <a:pPr algn="l"/>
+                      <a:r>
+                        <a:rPr sz="800" b="1">
+                          <a:solidFill>
+                            <a:srgbClr val="262626"/>
+                          </a:solidFill>
+                          <a:latin typeface="Arial"/>
+                        </a:rPr>
+                        <a:t>Air Operations</a:t>
+                      </a:r>
+                    </a:p>
+                  </a:txBody>
+                  <a:tcPr marL="38100" marR="38100" marT="0" marB="0" anchor="ctr">
+                    <a:solidFill>
+                      <a:srgbClr val="FDF0E4"/>
+                    </a:solidFill>
+                  </a:tcPr>
+                </a:tc>
+                <a:tc>
+                  <a:txBody>
+                    <a:bodyPr/>
+                    <a:lstStyle/>
+                    <a:p>
+                      <a:pPr algn="ctr"/>
+                      <a:r>
+                        <a:rPr sz="800" b="0">
+                          <a:solidFill>
+                            <a:srgbClr val="262626"/>
+                          </a:solidFill>
+                          <a:latin typeface="Arial"/>
+                        </a:rPr>
+                        <a:t>83</a:t>
+                      </a:r>
+                    </a:p>
+                  </a:txBody>
+                  <a:tcPr marL="38100" marR="38100" marT="0" marB="0" anchor="ctr">
+                    <a:solidFill>
+                      <a:srgbClr val="FDF0E4"/>
+                    </a:solidFill>
+                  </a:tcPr>
+                </a:tc>
+                <a:tc>
+                  <a:txBody>
+                    <a:bodyPr/>
+                    <a:lstStyle/>
+                    <a:p>
+                      <a:pPr algn="ctr"/>
+                      <a:r>
+                        <a:rPr sz="800" b="0">
+                          <a:solidFill>
+                            <a:srgbClr val="262626"/>
+                          </a:solidFill>
+                          <a:latin typeface="Arial"/>
+                        </a:rPr>
+                        <a:t>15</a:t>
+                      </a:r>
+                    </a:p>
+                  </a:txBody>
+                  <a:tcPr marL="38100" marR="38100" marT="0" marB="0" anchor="ctr">
+                    <a:solidFill>
+                      <a:srgbClr val="FDF0E4"/>
+                    </a:solidFill>
+                  </a:tcPr>
+                </a:tc>
+                <a:tc>
+                  <a:txBody>
+                    <a:bodyPr/>
+                    <a:lstStyle/>
+                    <a:p>
+                      <a:pPr algn="ctr"/>
+                      <a:r>
+                        <a:rPr sz="800" b="0">
+                          <a:solidFill>
+                            <a:srgbClr val="262626"/>
+                          </a:solidFill>
+                          <a:latin typeface="Arial"/>
+                        </a:rPr>
+                        <a:t>19</a:t>
+                      </a:r>
+                    </a:p>
+                  </a:txBody>
+                  <a:tcPr marL="38100" marR="38100" marT="0" marB="0" anchor="ctr">
+                    <a:solidFill>
+                      <a:srgbClr val="FDF0E4"/>
+                    </a:solidFill>
+                  </a:tcPr>
+                </a:tc>
+                <a:tc>
+                  <a:txBody>
+                    <a:bodyPr/>
+                    <a:lstStyle/>
+                    <a:p>
+                      <a:pPr algn="ctr"/>
+                      <a:r>
+                        <a:rPr sz="800" b="0">
+                          <a:solidFill>
+                            <a:srgbClr val="262626"/>
+                          </a:solidFill>
+                          <a:latin typeface="Arial"/>
+                        </a:rPr>
+                        <a:t>14</a:t>
+                      </a:r>
+                    </a:p>
+                  </a:txBody>
+                  <a:tcPr marL="38100" marR="38100" marT="0" marB="0" anchor="ctr">
+                    <a:solidFill>
+                      <a:srgbClr val="FDF0E4"/>
+                    </a:solidFill>
+                  </a:tcPr>
+                </a:tc>
+                <a:tc>
+                  <a:txBody>
+                    <a:bodyPr/>
+                    <a:lstStyle/>
+                    <a:p>
+                      <a:pPr algn="l"/>
+                      <a:r>
+                        <a:rPr sz="800" b="0">
+                          <a:solidFill>
+                            <a:srgbClr val="262626"/>
+                          </a:solidFill>
+                          <a:latin typeface="Arial"/>
+                        </a:rPr>
+                        <a:t>4 camadas de team leader: 4 TLs de L7 respondem a TLs de L6 com o título idêntico, e 14 das 19 vagas nunca foram abertas</a:t>
+                      </a:r>
+                    </a:p>
+                  </a:txBody>
+                  <a:tcPr marL="38100" marR="38100" marT="0" marB="0" anchor="ctr">
+                    <a:solidFill>
+                      <a:srgbClr val="FDF0E4"/>
+                    </a:solidFill>
+                  </a:tcPr>
+                </a:tc>
+                <a:tc>
+                  <a:txBody>
+                    <a:bodyPr/>
+                    <a:lstStyle/>
+                    <a:p>
+                      <a:pPr algn="l"/>
+                      <a:r>
+                        <a:rPr sz="800" b="0">
+                          <a:solidFill>
+                            <a:srgbClr val="262626"/>
+                          </a:solidFill>
+                          <a:latin typeface="Arial"/>
+                        </a:rPr>
+                        <a:t>Colapsar para 2 camadas e criar Sr. Team Leader para separar a senioridade real; abrir primeiro as vagas de EUA e Europa</a:t>
+                      </a:r>
+                    </a:p>
+                  </a:txBody>
+                  <a:tcPr marL="38100" marR="38100" marT="0" marB="0" anchor="ctr">
+                    <a:solidFill>
+                      <a:srgbClr val="FDF0E4"/>
+                    </a:solidFill>
+                  </a:tcPr>
+                </a:tc>
+              </a:tr>
+              <a:tr h="285750">
+                <a:tc>
+                  <a:txBody>
+                    <a:bodyPr/>
+                    <a:lstStyle/>
+                    <a:p>
+                      <a:pPr algn="l"/>
+                      <a:r>
+                        <a:rPr sz="800" b="0">
+                          <a:solidFill>
+                            <a:srgbClr val="262626"/>
+                          </a:solidFill>
+                          <a:latin typeface="Arial"/>
+                        </a:rPr>
+                        <a:t>Ocean Operations</a:t>
+                      </a:r>
+                    </a:p>
+                  </a:txBody>
+                  <a:tcPr marL="38100" marR="38100" marT="0" marB="0" anchor="ctr">
+                    <a:solidFill>
+                      <a:srgbClr val="F7F7F7"/>
+                    </a:solidFill>
+                  </a:tcPr>
+                </a:tc>
+                <a:tc>
+                  <a:txBody>
+                    <a:bodyPr/>
+                    <a:lstStyle/>
+                    <a:p>
+                      <a:pPr algn="ctr"/>
+                      <a:r>
+                        <a:rPr sz="800" b="0">
+                          <a:solidFill>
+                            <a:srgbClr val="262626"/>
+                          </a:solidFill>
+                          <a:latin typeface="Arial"/>
+                        </a:rPr>
+                        <a:t>36</a:t>
+                      </a:r>
+                    </a:p>
+                  </a:txBody>
+                  <a:tcPr marL="38100" marR="38100" marT="0" marB="0" anchor="ctr">
+                    <a:solidFill>
+                      <a:srgbClr val="F7F7F7"/>
+                    </a:solidFill>
+                  </a:tcPr>
+                </a:tc>
+                <a:tc>
+                  <a:txBody>
+                    <a:bodyPr/>
+                    <a:lstStyle/>
+                    <a:p>
+                      <a:pPr algn="ctr"/>
+                      <a:r>
+                        <a:rPr sz="800" b="0">
+                          <a:solidFill>
+                            <a:srgbClr val="262626"/>
+                          </a:solidFill>
+                          <a:latin typeface="Arial"/>
+                        </a:rPr>
+                        <a:t>6</a:t>
+                      </a:r>
+                    </a:p>
+                  </a:txBody>
+                  <a:tcPr marL="38100" marR="38100" marT="0" marB="0" anchor="ctr">
+                    <a:solidFill>
+                      <a:srgbClr val="F7F7F7"/>
+                    </a:solidFill>
+                  </a:tcPr>
+                </a:tc>
+                <a:tc>
+                  <a:txBody>
+                    <a:bodyPr/>
+                    <a:lstStyle/>
+                    <a:p>
+                      <a:pPr algn="ctr"/>
+                      <a:r>
+                        <a:rPr sz="800" b="0">
+                          <a:solidFill>
+                            <a:srgbClr val="262626"/>
+                          </a:solidFill>
+                          <a:latin typeface="Arial"/>
+                        </a:rPr>
+                        <a:t>3</a:t>
+                      </a:r>
+                    </a:p>
+                  </a:txBody>
+                  <a:tcPr marL="38100" marR="38100" marT="0" marB="0" anchor="ctr">
+                    <a:solidFill>
+                      <a:srgbClr val="F7F7F7"/>
+                    </a:solidFill>
+                  </a:tcPr>
+                </a:tc>
+                <a:tc>
+                  <a:txBody>
+                    <a:bodyPr/>
+                    <a:lstStyle/>
+                    <a:p>
+                      <a:pPr algn="ctr"/>
+                      <a:r>
+                        <a:rPr sz="800" b="0">
+                          <a:solidFill>
+                            <a:srgbClr val="262626"/>
+                          </a:solidFill>
+                          <a:latin typeface="Arial"/>
+                        </a:rPr>
+                        <a:t>3</a:t>
+                      </a:r>
+                    </a:p>
+                  </a:txBody>
+                  <a:tcPr marL="38100" marR="38100" marT="0" marB="0" anchor="ctr">
+                    <a:solidFill>
+                      <a:srgbClr val="F7F7F7"/>
+                    </a:solidFill>
+                  </a:tcPr>
+                </a:tc>
+                <a:tc>
+                  <a:txBody>
+                    <a:bodyPr/>
+                    <a:lstStyle/>
+                    <a:p>
+                      <a:pPr algn="l"/>
+                      <a:r>
+                        <a:rPr sz="800" b="0">
+                          <a:solidFill>
+                            <a:srgbClr val="262626"/>
+                          </a:solidFill>
+                          <a:latin typeface="Arial"/>
+                        </a:rPr>
+                        <a:t>Times desbalanceados: um TL com 12 diretos e outro com 2; as 3 vagas são reposição e nenhuma foi aberta</a:t>
+                      </a:r>
+                    </a:p>
+                  </a:txBody>
+                  <a:tcPr marL="38100" marR="38100" marT="0" marB="0" anchor="ctr">
+                    <a:solidFill>
+                      <a:srgbClr val="F7F7F7"/>
+                    </a:solidFill>
+                  </a:tcPr>
+                </a:tc>
+                <a:tc>
+                  <a:txBody>
+                    <a:bodyPr/>
+                    <a:lstStyle/>
+                    <a:p>
+                      <a:pPr algn="l"/>
+                      <a:r>
+                        <a:rPr sz="800" b="0">
+                          <a:solidFill>
+                            <a:srgbClr val="262626"/>
+                          </a:solidFill>
+                          <a:latin typeface="Arial"/>
+                        </a:rPr>
+                        <a:t>Reequilibrar os dois times e abrir as 3 reposições, que já estão aprovadas como quadro</a:t>
+                      </a:r>
+                    </a:p>
+                  </a:txBody>
+                  <a:tcPr marL="38100" marR="38100" marT="0" marB="0" anchor="ctr">
+                    <a:solidFill>
+                      <a:srgbClr val="F7F7F7"/>
+                    </a:solidFill>
+                  </a:tcPr>
+                </a:tc>
+              </a:tr>
+              <a:tr h="285750">
+                <a:tc>
+                  <a:txBody>
+                    <a:bodyPr/>
+                    <a:lstStyle/>
+                    <a:p>
+                      <a:pPr algn="l"/>
+                      <a:r>
+                        <a:rPr sz="800" b="1">
+                          <a:solidFill>
+                            <a:srgbClr val="262626"/>
+                          </a:solidFill>
+                          <a:latin typeface="Arial"/>
+                        </a:rPr>
+                        <a:t>Air Product</a:t>
+                      </a:r>
+                    </a:p>
+                  </a:txBody>
+                  <a:tcPr marL="38100" marR="38100" marT="0" marB="0" anchor="ctr">
+                    <a:solidFill>
+                      <a:srgbClr val="FDF0E4"/>
+                    </a:solidFill>
+                  </a:tcPr>
+                </a:tc>
+                <a:tc>
+                  <a:txBody>
+                    <a:bodyPr/>
+                    <a:lstStyle/>
+                    <a:p>
+                      <a:pPr algn="ctr"/>
+                      <a:r>
+                        <a:rPr sz="800" b="0">
+                          <a:solidFill>
+                            <a:srgbClr val="262626"/>
+                          </a:solidFill>
+                          <a:latin typeface="Arial"/>
+                        </a:rPr>
+                        <a:t>29</a:t>
+                      </a:r>
+                    </a:p>
+                  </a:txBody>
+                  <a:tcPr marL="38100" marR="38100" marT="0" marB="0" anchor="ctr">
+                    <a:solidFill>
+                      <a:srgbClr val="FDF0E4"/>
+                    </a:solidFill>
+                  </a:tcPr>
+                </a:tc>
+                <a:tc>
+                  <a:txBody>
+                    <a:bodyPr/>
+                    <a:lstStyle/>
+                    <a:p>
+                      <a:pPr algn="ctr"/>
+                      <a:r>
+                        <a:rPr sz="800" b="0">
+                          <a:solidFill>
+                            <a:srgbClr val="262626"/>
+                          </a:solidFill>
+                          <a:latin typeface="Arial"/>
+                        </a:rPr>
+                        <a:t>6</a:t>
+                      </a:r>
+                    </a:p>
+                  </a:txBody>
+                  <a:tcPr marL="38100" marR="38100" marT="0" marB="0" anchor="ctr">
+                    <a:solidFill>
+                      <a:srgbClr val="FDF0E4"/>
+                    </a:solidFill>
+                  </a:tcPr>
+                </a:tc>
+                <a:tc>
+                  <a:txBody>
+                    <a:bodyPr/>
+                    <a:lstStyle/>
+                    <a:p>
+                      <a:pPr algn="ctr"/>
+                      <a:r>
+                        <a:rPr sz="800" b="0">
+                          <a:solidFill>
+                            <a:srgbClr val="262626"/>
+                          </a:solidFill>
+                          <a:latin typeface="Arial"/>
+                        </a:rPr>
+                        <a:t>7</a:t>
+                      </a:r>
+                    </a:p>
+                  </a:txBody>
+                  <a:tcPr marL="38100" marR="38100" marT="0" marB="0" anchor="ctr">
+                    <a:solidFill>
+                      <a:srgbClr val="FDF0E4"/>
+                    </a:solidFill>
+                  </a:tcPr>
+                </a:tc>
+                <a:tc>
+                  <a:txBody>
+                    <a:bodyPr/>
+                    <a:lstStyle/>
+                    <a:p>
+                      <a:pPr algn="ctr"/>
+                      <a:r>
+                        <a:rPr sz="800" b="0">
+                          <a:solidFill>
+                            <a:srgbClr val="262626"/>
+                          </a:solidFill>
+                          <a:latin typeface="Arial"/>
+                        </a:rPr>
+                        <a:t>7</a:t>
+                      </a:r>
+                    </a:p>
+                  </a:txBody>
+                  <a:tcPr marL="38100" marR="38100" marT="0" marB="0" anchor="ctr">
+                    <a:solidFill>
+                      <a:srgbClr val="FDF0E4"/>
+                    </a:solidFill>
+                  </a:tcPr>
+                </a:tc>
+                <a:tc>
+                  <a:txBody>
+                    <a:bodyPr/>
+                    <a:lstStyle/>
+                    <a:p>
+                      <a:pPr algn="l"/>
+                      <a:r>
+                        <a:rPr sz="800" b="0">
+                          <a:solidFill>
+                            <a:srgbClr val="262626"/>
+                          </a:solidFill>
+                          <a:latin typeface="Arial"/>
+                        </a:rPr>
+                        <a:t>2 diretos para 29 pessoas e 3 das 7 vagas são de chefia, incluindo 2 TL Americas que também existem em Air Operations</a:t>
+                      </a:r>
+                    </a:p>
+                  </a:txBody>
+                  <a:tcPr marL="38100" marR="38100" marT="0" marB="0" anchor="ctr">
+                    <a:solidFill>
+                      <a:srgbClr val="FDF0E4"/>
+                    </a:solidFill>
+                  </a:tcPr>
+                </a:tc>
+                <a:tc>
+                  <a:txBody>
+                    <a:bodyPr/>
+                    <a:lstStyle/>
+                    <a:p>
+                      <a:pPr algn="l"/>
+                      <a:r>
+                        <a:rPr sz="800" b="0">
+                          <a:solidFill>
+                            <a:srgbClr val="262626"/>
+                          </a:solidFill>
+                          <a:latin typeface="Arial"/>
+                        </a:rPr>
+                        <a:t>Consolidar as 3 vagas de TL Americas num único dono antes de publicar, para não contratar o mesmo cargo duas vezes</a:t>
+                      </a:r>
+                    </a:p>
+                  </a:txBody>
+                  <a:tcPr marL="38100" marR="38100" marT="0" marB="0" anchor="ctr">
+                    <a:solidFill>
+                      <a:srgbClr val="FDF0E4"/>
+                    </a:solidFill>
+                  </a:tcPr>
+                </a:tc>
+              </a:tr>
+              <a:tr h="285750">
+                <a:tc>
+                  <a:txBody>
+                    <a:bodyPr/>
+                    <a:lstStyle/>
+                    <a:p>
+                      <a:pPr algn="l"/>
+                      <a:r>
+                        <a:rPr sz="800" b="0">
+                          <a:solidFill>
+                            <a:srgbClr val="262626"/>
+                          </a:solidFill>
+                          <a:latin typeface="Arial"/>
+                        </a:rPr>
+                        <a:t>Ocean Product</a:t>
+                      </a:r>
+                    </a:p>
+                  </a:txBody>
+                  <a:tcPr marL="38100" marR="38100" marT="0" marB="0" anchor="ctr">
+                    <a:solidFill>
+                      <a:srgbClr val="F7F7F7"/>
+                    </a:solidFill>
+                  </a:tcPr>
+                </a:tc>
+                <a:tc>
+                  <a:txBody>
+                    <a:bodyPr/>
+                    <a:lstStyle/>
+                    <a:p>
+                      <a:pPr algn="ctr"/>
+                      <a:r>
+                        <a:rPr sz="800" b="0">
+                          <a:solidFill>
+                            <a:srgbClr val="262626"/>
+                          </a:solidFill>
+                          <a:latin typeface="Arial"/>
+                        </a:rPr>
+                        <a:t>19</a:t>
+                      </a:r>
+                    </a:p>
+                  </a:txBody>
+                  <a:tcPr marL="38100" marR="38100" marT="0" marB="0" anchor="ctr">
+                    <a:solidFill>
+                      <a:srgbClr val="F7F7F7"/>
+                    </a:solidFill>
+                  </a:tcPr>
+                </a:tc>
+                <a:tc>
+                  <a:txBody>
+                    <a:bodyPr/>
+                    <a:lstStyle/>
+                    <a:p>
+                      <a:pPr algn="ctr"/>
+                      <a:r>
+                        <a:rPr sz="800" b="0">
+                          <a:solidFill>
+                            <a:srgbClr val="262626"/>
+                          </a:solidFill>
+                          <a:latin typeface="Arial"/>
+                        </a:rPr>
+                        <a:t>4</a:t>
+                      </a:r>
+                    </a:p>
+                  </a:txBody>
+                  <a:tcPr marL="38100" marR="38100" marT="0" marB="0" anchor="ctr">
+                    <a:solidFill>
+                      <a:srgbClr val="F7F7F7"/>
+                    </a:solidFill>
+                  </a:tcPr>
+                </a:tc>
+                <a:tc>
+                  <a:txBody>
+                    <a:bodyPr/>
+                    <a:lstStyle/>
+                    <a:p>
+                      <a:pPr algn="ctr"/>
+                      <a:r>
+                        <a:rPr sz="800" b="0">
+                          <a:solidFill>
+                            <a:srgbClr val="262626"/>
+                          </a:solidFill>
+                          <a:latin typeface="Arial"/>
+                        </a:rPr>
+                        <a:t>2</a:t>
+                      </a:r>
+                    </a:p>
+                  </a:txBody>
+                  <a:tcPr marL="38100" marR="38100" marT="0" marB="0" anchor="ctr">
+                    <a:solidFill>
+                      <a:srgbClr val="F7F7F7"/>
+                    </a:solidFill>
+                  </a:tcPr>
+                </a:tc>
+                <a:tc>
+                  <a:txBody>
+                    <a:bodyPr/>
+                    <a:lstStyle/>
+                    <a:p>
+                      <a:pPr algn="ctr"/>
+                      <a:r>
+                        <a:rPr sz="800" b="0">
+                          <a:solidFill>
+                            <a:srgbClr val="262626"/>
+                          </a:solidFill>
+                          <a:latin typeface="Arial"/>
+                        </a:rPr>
+                        <a:t>2</a:t>
+                      </a:r>
+                    </a:p>
+                  </a:txBody>
+                  <a:tcPr marL="38100" marR="38100" marT="0" marB="0" anchor="ctr">
+                    <a:solidFill>
+                      <a:srgbClr val="F7F7F7"/>
+                    </a:solidFill>
+                  </a:tcPr>
+                </a:tc>
+                <a:tc>
+                  <a:txBody>
+                    <a:bodyPr/>
+                    <a:lstStyle/>
+                    <a:p>
+                      <a:pPr algn="l"/>
+                      <a:r>
+                        <a:rPr sz="800" b="0">
+                          <a:solidFill>
+                            <a:srgbClr val="262626"/>
+                          </a:solidFill>
+                          <a:latin typeface="Arial"/>
+                        </a:rPr>
+                        <a:t>Asia Trade &amp; Market Intelligence é posição única, sem suplente, e as 2 vagas são reposição</a:t>
+                      </a:r>
+                    </a:p>
+                  </a:txBody>
+                  <a:tcPr marL="38100" marR="38100" marT="0" marB="0" anchor="ctr">
+                    <a:solidFill>
+                      <a:srgbClr val="F7F7F7"/>
+                    </a:solidFill>
+                  </a:tcPr>
+                </a:tc>
+                <a:tc>
+                  <a:txBody>
+                    <a:bodyPr/>
+                    <a:lstStyle/>
+                    <a:p>
+                      <a:pPr algn="l"/>
+                      <a:r>
+                        <a:rPr sz="800" b="0">
+                          <a:solidFill>
+                            <a:srgbClr val="262626"/>
+                          </a:solidFill>
+                          <a:latin typeface="Arial"/>
+                        </a:rPr>
+                        <a:t>Definir cobertura para a praça Ásia e repor as 2 posições de design</a:t>
+                      </a:r>
+                    </a:p>
+                  </a:txBody>
+                  <a:tcPr marL="38100" marR="38100" marT="0" marB="0" anchor="ctr">
+                    <a:solidFill>
+                      <a:srgbClr val="F7F7F7"/>
+                    </a:solidFill>
+                  </a:tcPr>
+                </a:tc>
+              </a:tr>
+              <a:tr h="285750">
+                <a:tc>
+                  <a:txBody>
+                    <a:bodyPr/>
+                    <a:lstStyle/>
+                    <a:p>
+                      <a:pPr algn="l"/>
+                      <a:r>
+                        <a:rPr sz="800" b="0">
+                          <a:solidFill>
+                            <a:srgbClr val="262626"/>
+                          </a:solidFill>
+                          <a:latin typeface="Arial"/>
+                        </a:rPr>
+                        <a:t>Quality &amp; Op. Intel.</a:t>
+                      </a:r>
+                    </a:p>
+                  </a:txBody>
+                  <a:tcPr marL="38100" marR="38100" marT="0" marB="0" anchor="ctr">
+                    <a:solidFill>
+                      <a:srgbClr val="FFFFFF"/>
+                    </a:solidFill>
+                  </a:tcPr>
+                </a:tc>
+                <a:tc>
+                  <a:txBody>
+                    <a:bodyPr/>
+                    <a:lstStyle/>
+                    <a:p>
+                      <a:pPr algn="ctr"/>
+                      <a:r>
+                        <a:rPr sz="800" b="0">
+                          <a:solidFill>
+                            <a:srgbClr val="262626"/>
+                          </a:solidFill>
+                          <a:latin typeface="Arial"/>
+                        </a:rPr>
+                        <a:t>13</a:t>
+                      </a:r>
+                    </a:p>
+                  </a:txBody>
+                  <a:tcPr marL="38100" marR="38100" marT="0" marB="0" anchor="ctr">
+                    <a:solidFill>
+                      <a:srgbClr val="FFFFFF"/>
+                    </a:solidFill>
+                  </a:tcPr>
+                </a:tc>
+                <a:tc>
+                  <a:txBody>
+                    <a:bodyPr/>
+                    <a:lstStyle/>
+                    <a:p>
+                      <a:pPr algn="ctr"/>
+                      <a:r>
+                        <a:rPr sz="800" b="0">
+                          <a:solidFill>
+                            <a:srgbClr val="262626"/>
+                          </a:solidFill>
+                          <a:latin typeface="Arial"/>
+                        </a:rPr>
+                        <a:t>3</a:t>
+                      </a:r>
+                    </a:p>
+                  </a:txBody>
+                  <a:tcPr marL="38100" marR="38100" marT="0" marB="0" anchor="ctr">
+                    <a:solidFill>
+                      <a:srgbClr val="FFFFFF"/>
+                    </a:solidFill>
+                  </a:tcPr>
+                </a:tc>
+                <a:tc>
+                  <a:txBody>
+                    <a:bodyPr/>
+                    <a:lstStyle/>
+                    <a:p>
+                      <a:pPr algn="ctr"/>
+                      <a:r>
+                        <a:rPr sz="800" b="0">
+                          <a:solidFill>
+                            <a:srgbClr val="262626"/>
+                          </a:solidFill>
+                          <a:latin typeface="Arial"/>
+                        </a:rPr>
+                        <a:t>1</a:t>
+                      </a:r>
+                    </a:p>
+                  </a:txBody>
+                  <a:tcPr marL="38100" marR="38100" marT="0" marB="0" anchor="ctr">
+                    <a:solidFill>
+                      <a:srgbClr val="FFFFFF"/>
+                    </a:solidFill>
+                  </a:tcPr>
+                </a:tc>
+                <a:tc>
+                  <a:txBody>
+                    <a:bodyPr/>
+                    <a:lstStyle/>
+                    <a:p>
+                      <a:pPr algn="ctr"/>
+                      <a:r>
+                        <a:rPr sz="800" b="0">
+                          <a:solidFill>
+                            <a:srgbClr val="262626"/>
+                          </a:solidFill>
+                          <a:latin typeface="Arial"/>
+                        </a:rPr>
+                        <a:t>1</a:t>
+                      </a:r>
+                    </a:p>
+                  </a:txBody>
+                  <a:tcPr marL="38100" marR="38100" marT="0" marB="0" anchor="ctr">
+                    <a:solidFill>
+                      <a:srgbClr val="FFFFFF"/>
+                    </a:solidFill>
+                  </a:tcPr>
+                </a:tc>
+                <a:tc>
+                  <a:txBody>
+                    <a:bodyPr/>
+                    <a:lstStyle/>
+                    <a:p>
+                      <a:pPr algn="l"/>
+                      <a:r>
+                        <a:rPr sz="800" b="0">
+                          <a:solidFill>
+                            <a:srgbClr val="262626"/>
+                          </a:solidFill>
+                          <a:latin typeface="Arial"/>
+                        </a:rPr>
+                        <a:t>6 diretos no head, dos quais 4 são especialistas sem camada; 1 analista em MIA reporta a São Paulo</a:t>
+                      </a:r>
+                    </a:p>
+                  </a:txBody>
+                  <a:tcPr marL="38100" marR="38100" marT="0" marB="0" anchor="ctr">
+                    <a:solidFill>
+                      <a:srgbClr val="FFFFFF"/>
+                    </a:solidFill>
+                  </a:tcPr>
+                </a:tc>
+                <a:tc>
+                  <a:txBody>
+                    <a:bodyPr/>
+                    <a:lstStyle/>
+                    <a:p>
+                      <a:pPr algn="l"/>
+                      <a:r>
+                        <a:rPr sz="800" b="0">
+                          <a:solidFill>
+                            <a:srgbClr val="262626"/>
+                          </a:solidFill>
+                          <a:latin typeface="Arial"/>
+                        </a:rPr>
+                        <a:t>Agrupar os 3 Logistics Process Specialist sob o TL que já existe e passar o analista de MIA para a gestão local</a:t>
+                      </a:r>
+                    </a:p>
+                  </a:txBody>
+                  <a:tcPr marL="38100" marR="38100" marT="0" marB="0" anchor="ctr">
+                    <a:solidFill>
+                      <a:srgbClr val="FFFFFF"/>
+                    </a:solidFill>
+                  </a:tcPr>
+                </a:tc>
+              </a:tr>
+              <a:tr h="285750">
+                <a:tc>
+                  <a:txBody>
+                    <a:bodyPr/>
+                    <a:lstStyle/>
+                    <a:p>
+                      <a:pPr algn="l"/>
+                      <a:r>
+                        <a:rPr sz="800" b="0">
+                          <a:solidFill>
+                            <a:srgbClr val="262626"/>
+                          </a:solidFill>
+                          <a:latin typeface="Arial"/>
+                        </a:rPr>
+                        <a:t>Overland</a:t>
+                      </a:r>
+                    </a:p>
+                  </a:txBody>
+                  <a:tcPr marL="38100" marR="38100" marT="0" marB="0" anchor="ctr">
+                    <a:solidFill>
+                      <a:srgbClr val="F7F7F7"/>
+                    </a:solidFill>
+                  </a:tcPr>
+                </a:tc>
+                <a:tc>
+                  <a:txBody>
+                    <a:bodyPr/>
+                    <a:lstStyle/>
+                    <a:p>
+                      <a:pPr algn="ctr"/>
+                      <a:r>
+                        <a:rPr sz="800" b="0">
+                          <a:solidFill>
+                            <a:srgbClr val="262626"/>
+                          </a:solidFill>
+                          <a:latin typeface="Arial"/>
+                        </a:rPr>
+                        <a:t>9</a:t>
+                      </a:r>
+                    </a:p>
+                  </a:txBody>
+                  <a:tcPr marL="38100" marR="38100" marT="0" marB="0" anchor="ctr">
+                    <a:solidFill>
+                      <a:srgbClr val="F7F7F7"/>
+                    </a:solidFill>
+                  </a:tcPr>
+                </a:tc>
+                <a:tc>
+                  <a:txBody>
+                    <a:bodyPr/>
+                    <a:lstStyle/>
+                    <a:p>
+                      <a:pPr algn="ctr"/>
+                      <a:r>
+                        <a:rPr sz="800" b="0">
+                          <a:solidFill>
+                            <a:srgbClr val="262626"/>
+                          </a:solidFill>
+                          <a:latin typeface="Arial"/>
+                        </a:rPr>
+                        <a:t>2</a:t>
+                      </a:r>
+                    </a:p>
+                  </a:txBody>
+                  <a:tcPr marL="38100" marR="38100" marT="0" marB="0" anchor="ctr">
+                    <a:solidFill>
+                      <a:srgbClr val="F7F7F7"/>
+                    </a:solidFill>
+                  </a:tcPr>
+                </a:tc>
+                <a:tc>
+                  <a:txBody>
+                    <a:bodyPr/>
+                    <a:lstStyle/>
+                    <a:p>
+                      <a:pPr algn="ctr"/>
+                      <a:r>
+                        <a:rPr sz="800" b="0">
+                          <a:solidFill>
+                            <a:srgbClr val="262626"/>
+                          </a:solidFill>
+                          <a:latin typeface="Arial"/>
+                        </a:rPr>
+                        <a:t>1</a:t>
+                      </a:r>
+                    </a:p>
+                  </a:txBody>
+                  <a:tcPr marL="38100" marR="38100" marT="0" marB="0" anchor="ctr">
+                    <a:solidFill>
+                      <a:srgbClr val="F7F7F7"/>
+                    </a:solidFill>
+                  </a:tcPr>
+                </a:tc>
+                <a:tc>
+                  <a:txBody>
+                    <a:bodyPr/>
+                    <a:lstStyle/>
+                    <a:p>
+                      <a:pPr algn="ctr"/>
+                      <a:r>
+                        <a:rPr sz="800" b="0">
+                          <a:solidFill>
+                            <a:srgbClr val="262626"/>
+                          </a:solidFill>
+                          <a:latin typeface="Arial"/>
+                        </a:rPr>
+                        <a:t>—</a:t>
+                      </a:r>
+                    </a:p>
+                  </a:txBody>
+                  <a:tcPr marL="38100" marR="38100" marT="0" marB="0" anchor="ctr">
+                    <a:solidFill>
+                      <a:srgbClr val="F7F7F7"/>
+                    </a:solidFill>
+                  </a:tcPr>
+                </a:tc>
+                <a:tc>
+                  <a:txBody>
+                    <a:bodyPr/>
+                    <a:lstStyle/>
+                    <a:p>
+                      <a:pPr algn="l"/>
+                      <a:r>
+                        <a:rPr sz="800" b="0">
+                          <a:solidFill>
+                            <a:srgbClr val="262626"/>
+                          </a:solidFill>
+                          <a:latin typeface="Arial"/>
+                        </a:rPr>
+                        <a:t>2 Warehouse TLs para 5 pessoas, um deles sem nenhum liderado, e o head comanda MIA, IAH e NY de São Paulo</a:t>
+                      </a:r>
+                    </a:p>
+                  </a:txBody>
+                  <a:tcPr marL="38100" marR="38100" marT="0" marB="0" anchor="ctr">
+                    <a:solidFill>
+                      <a:srgbClr val="F7F7F7"/>
+                    </a:solidFill>
+                  </a:tcPr>
+                </a:tc>
+                <a:tc>
+                  <a:txBody>
+                    <a:bodyPr/>
+                    <a:lstStyle/>
+                    <a:p>
+                      <a:pPr algn="l"/>
+                      <a:r>
+                        <a:rPr sz="800" b="0">
+                          <a:solidFill>
+                            <a:srgbClr val="262626"/>
+                          </a:solidFill>
+                          <a:latin typeface="Arial"/>
+                        </a:rPr>
+                        <a:t>Um TL por praça e liderança local nos EUA; decidir se o Head de Europa pertence a Overland ou a Operações</a:t>
+                      </a:r>
+                    </a:p>
+                  </a:txBody>
+                  <a:tcPr marL="38100" marR="38100" marT="0" marB="0" anchor="ctr">
+                    <a:solidFill>
+                      <a:srgbClr val="F7F7F7"/>
+                    </a:solidFill>
+                  </a:tcPr>
+                </a:tc>
+              </a:tr>
+              <a:tr h="285750">
+                <a:tc>
+                  <a:txBody>
+                    <a:bodyPr/>
+                    <a:lstStyle/>
+                    <a:p>
+                      <a:pPr algn="l"/>
+                      <a:r>
+                        <a:rPr sz="800" b="0">
+                          <a:solidFill>
+                            <a:srgbClr val="262626"/>
+                          </a:solidFill>
+                          <a:latin typeface="Arial"/>
+                        </a:rPr>
+                        <a:t>Operational Excellence</a:t>
+                      </a:r>
+                    </a:p>
+                  </a:txBody>
+                  <a:tcPr marL="38100" marR="38100" marT="0" marB="0" anchor="ctr">
+                    <a:solidFill>
+                      <a:srgbClr val="FFFFFF"/>
+                    </a:solidFill>
+                  </a:tcPr>
+                </a:tc>
+                <a:tc>
+                  <a:txBody>
+                    <a:bodyPr/>
+                    <a:lstStyle/>
+                    <a:p>
+                      <a:pPr algn="ctr"/>
+                      <a:r>
+                        <a:rPr sz="800" b="0">
+                          <a:solidFill>
+                            <a:srgbClr val="262626"/>
+                          </a:solidFill>
+                          <a:latin typeface="Arial"/>
+                        </a:rPr>
+                        <a:t>7</a:t>
+                      </a:r>
+                    </a:p>
+                  </a:txBody>
+                  <a:tcPr marL="38100" marR="38100" marT="0" marB="0" anchor="ctr">
+                    <a:solidFill>
+                      <a:srgbClr val="FFFFFF"/>
+                    </a:solidFill>
+                  </a:tcPr>
+                </a:tc>
+                <a:tc>
+                  <a:txBody>
+                    <a:bodyPr/>
+                    <a:lstStyle/>
+                    <a:p>
+                      <a:pPr algn="ctr"/>
+                      <a:r>
+                        <a:rPr sz="800" b="0">
+                          <a:solidFill>
+                            <a:srgbClr val="262626"/>
+                          </a:solidFill>
+                          <a:latin typeface="Arial"/>
+                        </a:rPr>
+                        <a:t>1</a:t>
+                      </a:r>
+                    </a:p>
+                  </a:txBody>
+                  <a:tcPr marL="38100" marR="38100" marT="0" marB="0" anchor="ctr">
+                    <a:solidFill>
+                      <a:srgbClr val="FFFFFF"/>
+                    </a:solidFill>
+                  </a:tcPr>
+                </a:tc>
+                <a:tc>
+                  <a:txBody>
+                    <a:bodyPr/>
+                    <a:lstStyle/>
+                    <a:p>
+                      <a:pPr algn="ctr"/>
+                      <a:r>
+                        <a:rPr sz="800" b="0">
+                          <a:solidFill>
+                            <a:srgbClr val="262626"/>
+                          </a:solidFill>
+                          <a:latin typeface="Arial"/>
+                        </a:rPr>
+                        <a:t>—</a:t>
+                      </a:r>
+                    </a:p>
+                  </a:txBody>
+                  <a:tcPr marL="38100" marR="38100" marT="0" marB="0" anchor="ctr">
+                    <a:solidFill>
+                      <a:srgbClr val="FFFFFF"/>
+                    </a:solidFill>
+                  </a:tcPr>
+                </a:tc>
+                <a:tc>
+                  <a:txBody>
+                    <a:bodyPr/>
+                    <a:lstStyle/>
+                    <a:p>
+                      <a:pPr algn="ctr"/>
+                      <a:r>
+                        <a:rPr sz="800" b="0">
+                          <a:solidFill>
+                            <a:srgbClr val="262626"/>
+                          </a:solidFill>
+                          <a:latin typeface="Arial"/>
+                        </a:rPr>
+                        <a:t>—</a:t>
+                      </a:r>
+                    </a:p>
+                  </a:txBody>
+                  <a:tcPr marL="38100" marR="38100" marT="0" marB="0" anchor="ctr">
+                    <a:solidFill>
+                      <a:srgbClr val="FFFFFF"/>
+                    </a:solidFill>
+                  </a:tcPr>
+                </a:tc>
+                <a:tc>
+                  <a:txBody>
+                    <a:bodyPr/>
+                    <a:lstStyle/>
+                    <a:p>
+                      <a:pPr algn="l"/>
+                      <a:r>
+                        <a:rPr sz="800" b="0">
+                          <a:solidFill>
+                            <a:srgbClr val="262626"/>
+                          </a:solidFill>
+                          <a:latin typeface="Arial"/>
+                        </a:rPr>
+                        <a:t>6 Key Account Executives direto no head, sem nenhuma camada; o DRE de agosto tinha 10 KAM e 4 saíram sem reposição</a:t>
+                      </a:r>
+                    </a:p>
+                  </a:txBody>
+                  <a:tcPr marL="38100" marR="38100" marT="0" marB="0" anchor="ctr">
+                    <a:solidFill>
+                      <a:srgbClr val="FFFFFF"/>
+                    </a:solidFill>
+                  </a:tcPr>
+                </a:tc>
+                <a:tc>
+                  <a:txBody>
+                    <a:bodyPr/>
+                    <a:lstStyle/>
+                    <a:p>
+                      <a:pPr algn="l"/>
+                      <a:r>
+                        <a:rPr sz="800" b="0">
+                          <a:solidFill>
+                            <a:srgbClr val="262626"/>
+                          </a:solidFill>
+                          <a:latin typeface="Arial"/>
+                        </a:rPr>
+                        <a:t>Confirmar o quadro-alvo de KAM antes de repor e avaliar uma camada de coordenação se voltar a 10</a:t>
+                      </a:r>
+                    </a:p>
+                  </a:txBody>
+                  <a:tcPr marL="38100" marR="38100" marT="0" marB="0" anchor="ctr">
+                    <a:solidFill>
+                      <a:srgbClr val="FFFFFF"/>
+                    </a:solidFill>
+                  </a:tcPr>
+                </a:tc>
+              </a:tr>
+              <a:tr h="285750">
+                <a:tc>
+                  <a:txBody>
+                    <a:bodyPr/>
+                    <a:lstStyle/>
+                    <a:p>
+                      <a:pPr algn="l"/>
+                      <a:r>
+                        <a:rPr sz="800" b="0">
+                          <a:solidFill>
+                            <a:srgbClr val="262626"/>
+                          </a:solidFill>
+                          <a:latin typeface="Arial"/>
+                        </a:rPr>
+                        <a:t>Cold Chain</a:t>
+                      </a:r>
+                    </a:p>
+                  </a:txBody>
+                  <a:tcPr marL="38100" marR="38100" marT="0" marB="0" anchor="ctr">
+                    <a:solidFill>
+                      <a:srgbClr val="F7F7F7"/>
+                    </a:solidFill>
+                  </a:tcPr>
+                </a:tc>
+                <a:tc>
+                  <a:txBody>
+                    <a:bodyPr/>
+                    <a:lstStyle/>
+                    <a:p>
+                      <a:pPr algn="ctr"/>
+                      <a:r>
+                        <a:rPr sz="800" b="0">
+                          <a:solidFill>
+                            <a:srgbClr val="262626"/>
+                          </a:solidFill>
+                          <a:latin typeface="Arial"/>
+                        </a:rPr>
+                        <a:t>3</a:t>
+                      </a:r>
+                    </a:p>
+                  </a:txBody>
+                  <a:tcPr marL="38100" marR="38100" marT="0" marB="0" anchor="ctr">
+                    <a:solidFill>
+                      <a:srgbClr val="F7F7F7"/>
+                    </a:solidFill>
+                  </a:tcPr>
+                </a:tc>
+                <a:tc>
+                  <a:txBody>
+                    <a:bodyPr/>
+                    <a:lstStyle/>
+                    <a:p>
+                      <a:pPr algn="ctr"/>
+                      <a:r>
+                        <a:rPr sz="800" b="0">
+                          <a:solidFill>
+                            <a:srgbClr val="262626"/>
+                          </a:solidFill>
+                          <a:latin typeface="Arial"/>
+                        </a:rPr>
+                        <a:t>1</a:t>
+                      </a:r>
+                    </a:p>
+                  </a:txBody>
+                  <a:tcPr marL="38100" marR="38100" marT="0" marB="0" anchor="ctr">
+                    <a:solidFill>
+                      <a:srgbClr val="F7F7F7"/>
+                    </a:solidFill>
+                  </a:tcPr>
+                </a:tc>
+                <a:tc>
+                  <a:txBody>
+                    <a:bodyPr/>
+                    <a:lstStyle/>
+                    <a:p>
+                      <a:pPr algn="ctr"/>
+                      <a:r>
+                        <a:rPr sz="800" b="0">
+                          <a:solidFill>
+                            <a:srgbClr val="262626"/>
+                          </a:solidFill>
+                          <a:latin typeface="Arial"/>
+                        </a:rPr>
+                        <a:t>—</a:t>
+                      </a:r>
+                    </a:p>
+                  </a:txBody>
+                  <a:tcPr marL="38100" marR="38100" marT="0" marB="0" anchor="ctr">
+                    <a:solidFill>
+                      <a:srgbClr val="F7F7F7"/>
+                    </a:solidFill>
+                  </a:tcPr>
+                </a:tc>
+                <a:tc>
+                  <a:txBody>
+                    <a:bodyPr/>
+                    <a:lstStyle/>
+                    <a:p>
+                      <a:pPr algn="ctr"/>
+                      <a:r>
+                        <a:rPr sz="800" b="0">
+                          <a:solidFill>
+                            <a:srgbClr val="262626"/>
+                          </a:solidFill>
+                          <a:latin typeface="Arial"/>
+                        </a:rPr>
+                        <a:t>—</a:t>
+                      </a:r>
+                    </a:p>
+                  </a:txBody>
+                  <a:tcPr marL="38100" marR="38100" marT="0" marB="0" anchor="ctr">
+                    <a:solidFill>
+                      <a:srgbClr val="F7F7F7"/>
+                    </a:solidFill>
+                  </a:tcPr>
+                </a:tc>
+                <a:tc>
+                  <a:txBody>
+                    <a:bodyPr/>
+                    <a:lstStyle/>
+                    <a:p>
+                      <a:pPr algn="l"/>
+                      <a:r>
+                        <a:rPr sz="800" b="0">
+                          <a:solidFill>
+                            <a:srgbClr val="262626"/>
+                          </a:solidFill>
+                          <a:latin typeface="Arial"/>
+                        </a:rPr>
+                        <a:t>Head com 2 liderados: é uma diretoria inteira para coordenar 2 pessoas</a:t>
+                      </a:r>
+                    </a:p>
+                  </a:txBody>
+                  <a:tcPr marL="38100" marR="38100" marT="0" marB="0" anchor="ctr">
+                    <a:solidFill>
+                      <a:srgbClr val="F7F7F7"/>
+                    </a:solidFill>
+                  </a:tcPr>
+                </a:tc>
+                <a:tc>
+                  <a:txBody>
+                    <a:bodyPr/>
+                    <a:lstStyle/>
+                    <a:p>
+                      <a:pPr algn="l"/>
+                      <a:r>
+                        <a:rPr sz="800" b="0">
+                          <a:solidFill>
+                            <a:srgbClr val="262626"/>
+                          </a:solidFill>
+                          <a:latin typeface="Arial"/>
+                        </a:rPr>
+                        <a:t>Fundir com Air Product ou com Quality e manter Cold Chain como especialidade, não como área</a:t>
+                      </a:r>
+                    </a:p>
+                  </a:txBody>
+                  <a:tcPr marL="38100" marR="38100" marT="0" marB="0" anchor="ctr">
+                    <a:solidFill>
+                      <a:srgbClr val="F7F7F7"/>
+                    </a:solidFill>
+                  </a:tcPr>
+                </a:tc>
+              </a:tr>
+              <a:tr h="285750">
+                <a:tc>
+                  <a:txBody>
+                    <a:bodyPr/>
+                    <a:lstStyle/>
+                    <a:p>
+                      <a:pPr algn="l"/>
+                      <a:r>
+                        <a:rPr sz="800" b="1">
+                          <a:solidFill>
+                            <a:srgbClr val="262626"/>
+                          </a:solidFill>
+                          <a:latin typeface="Arial"/>
+                        </a:rPr>
+                        <a:t>Special Operations</a:t>
+                      </a:r>
+                    </a:p>
+                  </a:txBody>
+                  <a:tcPr marL="38100" marR="38100" marT="0" marB="0" anchor="ctr">
+                    <a:solidFill>
+                      <a:srgbClr val="FDF0E4"/>
+                    </a:solidFill>
+                  </a:tcPr>
+                </a:tc>
+                <a:tc>
+                  <a:txBody>
+                    <a:bodyPr/>
+                    <a:lstStyle/>
+                    <a:p>
+                      <a:pPr algn="ctr"/>
+                      <a:r>
+                        <a:rPr sz="800" b="0">
+                          <a:solidFill>
+                            <a:srgbClr val="262626"/>
+                          </a:solidFill>
+                          <a:latin typeface="Arial"/>
+                        </a:rPr>
+                        <a:t>—</a:t>
+                      </a:r>
+                    </a:p>
+                  </a:txBody>
+                  <a:tcPr marL="38100" marR="38100" marT="0" marB="0" anchor="ctr">
+                    <a:solidFill>
+                      <a:srgbClr val="FDF0E4"/>
+                    </a:solidFill>
+                  </a:tcPr>
+                </a:tc>
+                <a:tc>
+                  <a:txBody>
+                    <a:bodyPr/>
+                    <a:lstStyle/>
+                    <a:p>
+                      <a:pPr algn="ctr"/>
+                      <a:r>
+                        <a:rPr sz="800" b="0">
+                          <a:solidFill>
+                            <a:srgbClr val="262626"/>
+                          </a:solidFill>
+                          <a:latin typeface="Arial"/>
+                        </a:rPr>
+                        <a:t>—</a:t>
+                      </a:r>
+                    </a:p>
+                  </a:txBody>
+                  <a:tcPr marL="38100" marR="38100" marT="0" marB="0" anchor="ctr">
+                    <a:solidFill>
+                      <a:srgbClr val="FDF0E4"/>
+                    </a:solidFill>
+                  </a:tcPr>
+                </a:tc>
+                <a:tc>
+                  <a:txBody>
+                    <a:bodyPr/>
+                    <a:lstStyle/>
+                    <a:p>
+                      <a:pPr algn="ctr"/>
+                      <a:r>
+                        <a:rPr sz="800" b="0">
+                          <a:solidFill>
+                            <a:srgbClr val="262626"/>
+                          </a:solidFill>
+                          <a:latin typeface="Arial"/>
+                        </a:rPr>
+                        <a:t>1</a:t>
+                      </a:r>
+                    </a:p>
+                  </a:txBody>
+                  <a:tcPr marL="38100" marR="38100" marT="0" marB="0" anchor="ctr">
+                    <a:solidFill>
+                      <a:srgbClr val="FDF0E4"/>
+                    </a:solidFill>
+                  </a:tcPr>
+                </a:tc>
+                <a:tc>
+                  <a:txBody>
+                    <a:bodyPr/>
+                    <a:lstStyle/>
+                    <a:p>
+                      <a:pPr algn="ctr"/>
+                      <a:r>
+                        <a:rPr sz="800" b="0">
+                          <a:solidFill>
+                            <a:srgbClr val="262626"/>
+                          </a:solidFill>
+                          <a:latin typeface="Arial"/>
+                        </a:rPr>
+                        <a:t>1</a:t>
+                      </a:r>
+                    </a:p>
+                  </a:txBody>
+                  <a:tcPr marL="38100" marR="38100" marT="0" marB="0" anchor="ctr">
+                    <a:solidFill>
+                      <a:srgbClr val="FDF0E4"/>
+                    </a:solidFill>
+                  </a:tcPr>
+                </a:tc>
+                <a:tc>
+                  <a:txBody>
+                    <a:bodyPr/>
+                    <a:lstStyle/>
+                    <a:p>
+                      <a:pPr algn="l"/>
+                      <a:r>
+                        <a:rPr sz="800" b="0">
+                          <a:solidFill>
+                            <a:srgbClr val="262626"/>
+                          </a:solidFill>
+                          <a:latin typeface="Arial"/>
+                        </a:rPr>
+                        <a:t>Tem 1 vaga na planilha e não tem head nem equipe no organograma</a:t>
+                      </a:r>
+                    </a:p>
+                  </a:txBody>
+                  <a:tcPr marL="38100" marR="38100" marT="0" marB="0" anchor="ctr">
+                    <a:solidFill>
+                      <a:srgbClr val="FDF0E4"/>
+                    </a:solidFill>
+                  </a:tcPr>
+                </a:tc>
+                <a:tc>
+                  <a:txBody>
+                    <a:bodyPr/>
+                    <a:lstStyle/>
+                    <a:p>
+                      <a:pPr algn="l"/>
+                      <a:r>
+                        <a:rPr sz="800" b="0">
+                          <a:solidFill>
+                            <a:srgbClr val="262626"/>
+                          </a:solidFill>
+                          <a:latin typeface="Arial"/>
+                        </a:rPr>
+                        <a:t>Definir o dono da frente antes de abrir a vaga</a:t>
+                      </a:r>
+                    </a:p>
+                  </a:txBody>
+                  <a:tcPr marL="38100" marR="38100" marT="0" marB="0" anchor="ctr">
+                    <a:solidFill>
+                      <a:srgbClr val="FDF0E4"/>
+                    </a:solidFill>
+                  </a:tcPr>
+                </a:tc>
+              </a:tr>
+              <a:tr h="285750">
+                <a:tc>
+                  <a:txBody>
+                    <a:bodyPr/>
+                    <a:lstStyle/>
+                    <a:p>
+                      <a:pPr algn="l"/>
+                      <a:r>
+                        <a:rPr sz="800" b="1">
+                          <a:solidFill>
+                            <a:srgbClr val="262626"/>
+                          </a:solidFill>
+                          <a:latin typeface="Arial"/>
+                        </a:rPr>
+                        <a:t>Total Operações</a:t>
+                      </a:r>
+                    </a:p>
+                  </a:txBody>
+                  <a:tcPr marL="38100" marR="38100" marT="0" marB="0" anchor="ctr">
+                    <a:solidFill>
+                      <a:srgbClr val="E8F4F4"/>
+                    </a:solidFill>
+                  </a:tcPr>
+                </a:tc>
+                <a:tc>
+                  <a:txBody>
+                    <a:bodyPr/>
+                    <a:lstStyle/>
+                    <a:p>
+                      <a:pPr algn="ctr"/>
+                      <a:r>
+                        <a:rPr sz="800" b="1">
+                          <a:solidFill>
+                            <a:srgbClr val="262626"/>
+                          </a:solidFill>
+                          <a:latin typeface="Arial"/>
+                        </a:rPr>
+                        <a:t>199</a:t>
+                      </a:r>
+                    </a:p>
+                  </a:txBody>
+                  <a:tcPr marL="38100" marR="38100" marT="0" marB="0" anchor="ctr">
+                    <a:solidFill>
+                      <a:srgbClr val="E8F4F4"/>
+                    </a:solidFill>
+                  </a:tcPr>
+                </a:tc>
+                <a:tc>
+                  <a:txBody>
+                    <a:bodyPr/>
+                    <a:lstStyle/>
+                    <a:p>
+                      <a:pPr algn="ctr"/>
+                      <a:r>
+                        <a:rPr sz="800" b="1">
+                          <a:solidFill>
+                            <a:srgbClr val="262626"/>
+                          </a:solidFill>
+                          <a:latin typeface="Arial"/>
+                        </a:rPr>
+                        <a:t>38</a:t>
+                      </a:r>
+                    </a:p>
+                  </a:txBody>
+                  <a:tcPr marL="38100" marR="38100" marT="0" marB="0" anchor="ctr">
+                    <a:solidFill>
+                      <a:srgbClr val="E8F4F4"/>
+                    </a:solidFill>
+                  </a:tcPr>
+                </a:tc>
+                <a:tc>
+                  <a:txBody>
+                    <a:bodyPr/>
+                    <a:lstStyle/>
+                    <a:p>
+                      <a:pPr algn="ctr"/>
+                      <a:r>
+                        <a:rPr sz="800" b="1">
+                          <a:solidFill>
+                            <a:srgbClr val="262626"/>
+                          </a:solidFill>
+                          <a:latin typeface="Arial"/>
+                        </a:rPr>
+                        <a:t>34</a:t>
+                      </a:r>
+                    </a:p>
+                  </a:txBody>
+                  <a:tcPr marL="38100" marR="38100" marT="0" marB="0" anchor="ctr">
+                    <a:solidFill>
+                      <a:srgbClr val="E8F4F4"/>
+                    </a:solidFill>
+                  </a:tcPr>
+                </a:tc>
+                <a:tc>
+                  <a:txBody>
+                    <a:bodyPr/>
+                    <a:lstStyle/>
+                    <a:p>
+                      <a:pPr algn="ctr"/>
+                      <a:r>
+                        <a:rPr sz="800" b="1">
+                          <a:solidFill>
+                            <a:srgbClr val="262626"/>
+                          </a:solidFill>
+                          <a:latin typeface="Arial"/>
+                        </a:rPr>
+                        <a:t>28</a:t>
+                      </a:r>
+                    </a:p>
+                  </a:txBody>
+                  <a:tcPr marL="38100" marR="38100" marT="0" marB="0" anchor="ctr">
+                    <a:solidFill>
+                      <a:srgbClr val="E8F4F4"/>
+                    </a:solidFill>
+                  </a:tcPr>
+                </a:tc>
+                <a:tc>
+                  <a:txBody>
+                    <a:bodyPr/>
+                    <a:lstStyle/>
+                    <a:p>
+                      <a:pPr algn="l"/>
+                      <a:r>
+                        <a:rPr sz="800" b="1">
+                          <a:solidFill>
+                            <a:srgbClr val="262626"/>
+                          </a:solidFill>
+                          <a:latin typeface="Arial"/>
+                        </a:rPr>
+                        <a:t>8 heads, 2 deles com 2 liderados ou menos</a:t>
+                      </a:r>
+                    </a:p>
+                  </a:txBody>
+                  <a:tcPr marL="38100" marR="38100" marT="0" marB="0" anchor="ctr">
+                    <a:solidFill>
+                      <a:srgbClr val="E8F4F4"/>
+                    </a:solidFill>
+                  </a:tcPr>
+                </a:tc>
+                <a:tc>
+                  <a:txBody>
+                    <a:bodyPr/>
+                    <a:lstStyle/>
+                    <a:p>
+                      <a:pPr algn="l"/>
+                      <a:r>
+                        <a:rPr sz="800" b="1">
+                          <a:solidFill>
+                            <a:srgbClr val="262626"/>
+                          </a:solidFill>
+                          <a:latin typeface="Arial"/>
+                        </a:rPr>
+                        <a:t/>
+                      </a:r>
+                    </a:p>
+                  </a:txBody>
+                  <a:tcPr marL="38100" marR="38100" marT="0" marB="0" anchor="ctr">
+                    <a:solidFill>
+                      <a:srgbClr val="E8F4F4"/>
+                    </a:solidFill>
+                  </a:tcPr>
+                </a:tc>
+              </a:tr>
+            </a:tbl>
+          </a:graphicData>
+        </a:graphic>
+      </p:graphicFrame>
       <p:sp>
         <p:nvSpPr>
-          <p:cNvPr id="9" name="Rounded Rectangle 8"/>
+          <p:cNvPr id="10" name="Rounded Rectangle 9"/>
           <p:cNvSpPr/>
           <p:nvPr/>
         </p:nvSpPr>
         <p:spPr>
           <a:xfrm>
-            <a:off x="5143500" y="1847850"/>
-            <a:ext cx="1905000" cy="342900"/>
-          </a:xfrm>
-          <a:prstGeom prst="roundRect">
-            <a:avLst>
-              <a:gd name="adj" fmla="val 8000"/>
-            </a:avLst>
-          </a:prstGeom>
-          <a:solidFill>
-            <a:srgbClr val="1D368E"/>
-          </a:solidFill>
-          <a:ln>
-            <a:noFill/>
-          </a:ln>
-        </p:spPr>
-        <p:style>
-          <a:lnRef idx="1">
-            <a:schemeClr val="accent1"/>
-          </a:lnRef>
-          <a:fillRef idx="3">
-            <a:schemeClr val="accent1"/>
-          </a:fillRef>
-          <a:effectRef idx="2">
-            <a:schemeClr val="accent1"/>
-          </a:effectRef>
-          <a:fontRef idx="minor">
-            <a:schemeClr val="lt1"/>
-          </a:fontRef>
-        </p:style>
-        <p:txBody>
-          <a:bodyPr rtlCol="0" anchor="ctr" wrap="square" lIns="57150" rIns="57150" tIns="19050" bIns="19050"/>
-          <a:lstStyle/>
-          <a:p>
-            <a:pPr algn="ctr"/>
-            <a:r>
-              <a:rPr sz="1100" b="1">
-                <a:solidFill>
-                  <a:srgbClr val="FFFFFF"/>
-                </a:solidFill>
-                <a:latin typeface="Arial"/>
-              </a:rPr>
-              <a:t>COO</a:t>
-            </a:r>
-          </a:p>
-          <a:p>
-            <a:pPr algn="ctr"/>
-            <a:r>
-              <a:rPr sz="850" b="0">
-                <a:solidFill>
-                  <a:srgbClr val="FFFFFF"/>
-                </a:solidFill>
-                <a:latin typeface="Arial"/>
-              </a:rPr>
-              <a:t>200 pessoas</a:t>
-            </a:r>
-          </a:p>
-        </p:txBody>
-      </p:sp>
-      <p:cxnSp>
-        <p:nvCxnSpPr>
-          <p:cNvPr id="10" name="Connector 9"/>
-          <p:cNvCxnSpPr/>
-          <p:nvPr/>
-        </p:nvCxnSpPr>
-        <p:spPr>
-          <a:xfrm>
-            <a:off x="6096000" y="2190750"/>
-            <a:ext cx="0" cy="114300"/>
-          </a:xfrm>
-          <a:prstGeom prst="bentConnector3">
-            <a:avLst/>
-          </a:prstGeom>
-          <a:ln w="12700">
-            <a:solidFill>
-              <a:srgbClr val="BFBFBF"/>
-            </a:solidFill>
-          </a:ln>
-        </p:spPr>
-        <p:style>
-          <a:lnRef idx="2">
-            <a:schemeClr val="accent1"/>
-          </a:lnRef>
-          <a:fillRef idx="0">
-            <a:schemeClr val="accent1"/>
-          </a:fillRef>
-          <a:effectRef idx="1">
-            <a:schemeClr val="accent1"/>
-          </a:effectRef>
-          <a:fontRef idx="minor">
-            <a:schemeClr val="tx1"/>
-          </a:fontRef>
-        </p:style>
-      </p:cxnSp>
-      <p:cxnSp>
-        <p:nvCxnSpPr>
-          <p:cNvPr id="11" name="Connector 10"/>
-          <p:cNvCxnSpPr/>
-          <p:nvPr/>
-        </p:nvCxnSpPr>
-        <p:spPr>
-          <a:xfrm>
-            <a:off x="1771650" y="2305050"/>
-            <a:ext cx="8648700" cy="0"/>
-          </a:xfrm>
-          <a:prstGeom prst="bentConnector3">
-            <a:avLst/>
-          </a:prstGeom>
-          <a:ln w="12700">
-            <a:solidFill>
-              <a:srgbClr val="BFBFBF"/>
-            </a:solidFill>
-          </a:ln>
-        </p:spPr>
-        <p:style>
-          <a:lnRef idx="2">
-            <a:schemeClr val="accent1"/>
-          </a:lnRef>
-          <a:fillRef idx="0">
-            <a:schemeClr val="accent1"/>
-          </a:fillRef>
-          <a:effectRef idx="1">
-            <a:schemeClr val="accent1"/>
-          </a:effectRef>
-          <a:fontRef idx="minor">
-            <a:schemeClr val="tx1"/>
-          </a:fontRef>
-        </p:style>
-      </p:cxnSp>
-      <p:cxnSp>
-        <p:nvCxnSpPr>
-          <p:cNvPr id="12" name="Connector 11"/>
-          <p:cNvCxnSpPr/>
-          <p:nvPr/>
-        </p:nvCxnSpPr>
-        <p:spPr>
-          <a:xfrm>
-            <a:off x="1638300" y="2305050"/>
-            <a:ext cx="0" cy="114300"/>
-          </a:xfrm>
-          <a:prstGeom prst="bentConnector3">
-            <a:avLst/>
-          </a:prstGeom>
-          <a:ln w="12700">
-            <a:solidFill>
-              <a:srgbClr val="009796"/>
-            </a:solidFill>
-          </a:ln>
-        </p:spPr>
-        <p:style>
-          <a:lnRef idx="2">
-            <a:schemeClr val="accent1"/>
-          </a:lnRef>
-          <a:fillRef idx="0">
-            <a:schemeClr val="accent1"/>
-          </a:fillRef>
-          <a:effectRef idx="1">
-            <a:schemeClr val="accent1"/>
-          </a:effectRef>
-          <a:fontRef idx="minor">
-            <a:schemeClr val="tx1"/>
-          </a:fontRef>
-        </p:style>
-      </p:cxnSp>
-      <p:sp>
-        <p:nvSpPr>
-          <p:cNvPr id="13" name="Rounded Rectangle 12"/>
-          <p:cNvSpPr/>
-          <p:nvPr/>
-        </p:nvSpPr>
-        <p:spPr>
-          <a:xfrm>
-            <a:off x="342900" y="2419350"/>
-            <a:ext cx="2590800" cy="590550"/>
-          </a:xfrm>
-          <a:prstGeom prst="roundRect">
-            <a:avLst>
-              <a:gd name="adj" fmla="val 8000"/>
-            </a:avLst>
-          </a:prstGeom>
-          <a:solidFill>
-            <a:srgbClr val="009796"/>
-          </a:solidFill>
-          <a:ln>
-            <a:noFill/>
-          </a:ln>
-        </p:spPr>
-        <p:style>
-          <a:lnRef idx="1">
-            <a:schemeClr val="accent1"/>
-          </a:lnRef>
-          <a:fillRef idx="3">
-            <a:schemeClr val="accent1"/>
-          </a:fillRef>
-          <a:effectRef idx="2">
-            <a:schemeClr val="accent1"/>
-          </a:effectRef>
-          <a:fontRef idx="minor">
-            <a:schemeClr val="lt1"/>
-          </a:fontRef>
-        </p:style>
-        <p:txBody>
-          <a:bodyPr rtlCol="0" anchor="ctr" wrap="square" lIns="57150" rIns="57150" tIns="19050" bIns="19050"/>
-          <a:lstStyle/>
-          <a:p>
-            <a:pPr algn="ctr"/>
-            <a:r>
-              <a:rPr sz="950" b="1">
-                <a:solidFill>
-                  <a:srgbClr val="FFFFFF"/>
-                </a:solidFill>
-                <a:latin typeface="Arial"/>
-              </a:rPr>
-              <a:t>Head of Air Operations</a:t>
-            </a:r>
-          </a:p>
-          <a:p>
-            <a:pPr algn="ctr"/>
-            <a:r>
-              <a:rPr sz="750" b="0">
-                <a:solidFill>
-                  <a:srgbClr val="FFFFFF"/>
-                </a:solidFill>
-                <a:latin typeface="Arial"/>
-              </a:rPr>
-              <a:t>Customer Care e Exportação · Brasil</a:t>
-            </a:r>
-          </a:p>
-          <a:p>
-            <a:pPr algn="ctr"/>
-            <a:r>
-              <a:rPr sz="750" b="0">
-                <a:solidFill>
-                  <a:srgbClr val="FFFFFF"/>
-                </a:solidFill>
-                <a:latin typeface="Arial"/>
-              </a:rPr>
-              <a:t>316 pessoas · 33 vagas · 29 a abrir</a:t>
-            </a:r>
-          </a:p>
-        </p:txBody>
-      </p:sp>
-      <p:sp>
-        <p:nvSpPr>
-          <p:cNvPr id="14" name="Rounded Rectangle 13"/>
-          <p:cNvSpPr/>
-          <p:nvPr/>
-        </p:nvSpPr>
-        <p:spPr>
-          <a:xfrm>
-            <a:off x="342900" y="3048000"/>
-            <a:ext cx="2590800" cy="247650"/>
-          </a:xfrm>
-          <a:prstGeom prst="roundRect">
-            <a:avLst>
-              <a:gd name="adj" fmla="val 8000"/>
-            </a:avLst>
-          </a:prstGeom>
-          <a:solidFill>
-            <a:srgbClr val="E8F4F4"/>
-          </a:solidFill>
-          <a:ln w="12700">
-            <a:solidFill>
-              <a:srgbClr val="009796"/>
-            </a:solidFill>
-          </a:ln>
-        </p:spPr>
-        <p:style>
-          <a:lnRef idx="1">
-            <a:schemeClr val="accent1"/>
-          </a:lnRef>
-          <a:fillRef idx="3">
-            <a:schemeClr val="accent1"/>
-          </a:fillRef>
-          <a:effectRef idx="2">
-            <a:schemeClr val="accent1"/>
-          </a:effectRef>
-          <a:fontRef idx="minor">
-            <a:schemeClr val="lt1"/>
-          </a:fontRef>
-        </p:style>
-        <p:txBody>
-          <a:bodyPr rtlCol="0" anchor="ctr" wrap="square" lIns="57150" rIns="57150" tIns="19050" bIns="19050"/>
-          <a:lstStyle/>
-          <a:p>
-            <a:pPr algn="ctr"/>
-            <a:r>
-              <a:rPr sz="900" b="1">
-                <a:solidFill>
-                  <a:srgbClr val="262626"/>
-                </a:solidFill>
-                <a:latin typeface="Arial"/>
-              </a:rPr>
-              <a:t>289 embarques/mês</a:t>
-            </a:r>
-          </a:p>
-        </p:txBody>
-      </p:sp>
-      <p:cxnSp>
-        <p:nvCxnSpPr>
-          <p:cNvPr id="15" name="Connector 14"/>
-          <p:cNvCxnSpPr/>
-          <p:nvPr/>
-        </p:nvCxnSpPr>
-        <p:spPr>
-          <a:xfrm>
-            <a:off x="4400550" y="2305050"/>
-            <a:ext cx="0" cy="114300"/>
-          </a:xfrm>
-          <a:prstGeom prst="bentConnector3">
-            <a:avLst/>
-          </a:prstGeom>
-          <a:ln w="12700">
-            <a:solidFill>
-              <a:srgbClr val="009796"/>
-            </a:solidFill>
-          </a:ln>
-        </p:spPr>
-        <p:style>
-          <a:lnRef idx="2">
-            <a:schemeClr val="accent1"/>
-          </a:lnRef>
-          <a:fillRef idx="0">
-            <a:schemeClr val="accent1"/>
-          </a:fillRef>
-          <a:effectRef idx="1">
-            <a:schemeClr val="accent1"/>
-          </a:effectRef>
-          <a:fontRef idx="minor">
-            <a:schemeClr val="tx1"/>
-          </a:fontRef>
-        </p:style>
-      </p:cxnSp>
-      <p:sp>
-        <p:nvSpPr>
-          <p:cNvPr id="16" name="Rounded Rectangle 15"/>
-          <p:cNvSpPr/>
-          <p:nvPr/>
-        </p:nvSpPr>
-        <p:spPr>
-          <a:xfrm>
-            <a:off x="3105150" y="2419350"/>
-            <a:ext cx="2590800" cy="590550"/>
-          </a:xfrm>
-          <a:prstGeom prst="roundRect">
-            <a:avLst>
-              <a:gd name="adj" fmla="val 8000"/>
-            </a:avLst>
-          </a:prstGeom>
-          <a:solidFill>
-            <a:srgbClr val="009796"/>
-          </a:solidFill>
-          <a:ln>
-            <a:noFill/>
-          </a:ln>
-        </p:spPr>
-        <p:style>
-          <a:lnRef idx="1">
-            <a:schemeClr val="accent1"/>
-          </a:lnRef>
-          <a:fillRef idx="3">
-            <a:schemeClr val="accent1"/>
-          </a:fillRef>
-          <a:effectRef idx="2">
-            <a:schemeClr val="accent1"/>
-          </a:effectRef>
-          <a:fontRef idx="minor">
-            <a:schemeClr val="lt1"/>
-          </a:fontRef>
-        </p:style>
-        <p:txBody>
-          <a:bodyPr rtlCol="0" anchor="ctr" wrap="square" lIns="57150" rIns="57150" tIns="19050" bIns="19050"/>
-          <a:lstStyle/>
-          <a:p>
-            <a:pPr algn="ctr"/>
-            <a:r>
-              <a:rPr sz="950" b="1">
-                <a:solidFill>
-                  <a:srgbClr val="FFFFFF"/>
-                </a:solidFill>
-                <a:latin typeface="Arial"/>
-              </a:rPr>
-              <a:t>Air Freight Lead Coordinator</a:t>
-            </a:r>
-          </a:p>
-          <a:p>
-            <a:pPr algn="ctr"/>
-            <a:r>
-              <a:rPr sz="750" b="0">
-                <a:solidFill>
-                  <a:srgbClr val="FFFFFF"/>
-                </a:solidFill>
-                <a:latin typeface="Arial"/>
-              </a:rPr>
-              <a:t>Agentes OFF · 161 terceiros</a:t>
-            </a:r>
-          </a:p>
-          <a:p>
-            <a:pPr algn="ctr"/>
-            <a:r>
-              <a:rPr sz="750" b="0">
-                <a:solidFill>
-                  <a:srgbClr val="FFFFFF"/>
-                </a:solidFill>
-                <a:latin typeface="Arial"/>
-              </a:rPr>
-              <a:t>51 pessoas · sem vaga</a:t>
-            </a:r>
-          </a:p>
-        </p:txBody>
-      </p:sp>
-      <p:sp>
-        <p:nvSpPr>
-          <p:cNvPr id="17" name="Rounded Rectangle 16"/>
-          <p:cNvSpPr/>
-          <p:nvPr/>
-        </p:nvSpPr>
-        <p:spPr>
-          <a:xfrm>
-            <a:off x="3105150" y="3048000"/>
-            <a:ext cx="2590800" cy="247650"/>
-          </a:xfrm>
-          <a:prstGeom prst="roundRect">
-            <a:avLst>
-              <a:gd name="adj" fmla="val 8000"/>
-            </a:avLst>
-          </a:prstGeom>
-          <a:solidFill>
-            <a:srgbClr val="E8F4F4"/>
-          </a:solidFill>
-          <a:ln w="12700">
-            <a:solidFill>
-              <a:srgbClr val="009796"/>
-            </a:solidFill>
-          </a:ln>
-        </p:spPr>
-        <p:style>
-          <a:lnRef idx="1">
-            <a:schemeClr val="accent1"/>
-          </a:lnRef>
-          <a:fillRef idx="3">
-            <a:schemeClr val="accent1"/>
-          </a:fillRef>
-          <a:effectRef idx="2">
-            <a:schemeClr val="accent1"/>
-          </a:effectRef>
-          <a:fontRef idx="minor">
-            <a:schemeClr val="lt1"/>
-          </a:fontRef>
-        </p:style>
-        <p:txBody>
-          <a:bodyPr rtlCol="0" anchor="ctr" wrap="square" lIns="57150" rIns="57150" tIns="19050" bIns="19050"/>
-          <a:lstStyle/>
-          <a:p>
-            <a:pPr algn="ctr"/>
-            <a:r>
-              <a:rPr sz="900" b="1">
-                <a:solidFill>
-                  <a:srgbClr val="262626"/>
-                </a:solidFill>
-                <a:latin typeface="Arial"/>
-              </a:rPr>
-              <a:t>1.173 embarques/mês</a:t>
-            </a:r>
-          </a:p>
-        </p:txBody>
-      </p:sp>
-      <p:cxnSp>
-        <p:nvCxnSpPr>
-          <p:cNvPr id="18" name="Connector 17"/>
-          <p:cNvCxnSpPr/>
-          <p:nvPr/>
-        </p:nvCxnSpPr>
-        <p:spPr>
-          <a:xfrm>
-            <a:off x="7162800" y="2305050"/>
-            <a:ext cx="0" cy="114300"/>
-          </a:xfrm>
-          <a:prstGeom prst="bentConnector3">
-            <a:avLst/>
-          </a:prstGeom>
-          <a:ln w="12700">
-            <a:solidFill>
-              <a:srgbClr val="FF8E2E"/>
-            </a:solidFill>
-          </a:ln>
-        </p:spPr>
-        <p:style>
-          <a:lnRef idx="2">
-            <a:schemeClr val="accent1"/>
-          </a:lnRef>
-          <a:fillRef idx="0">
-            <a:schemeClr val="accent1"/>
-          </a:fillRef>
-          <a:effectRef idx="1">
-            <a:schemeClr val="accent1"/>
-          </a:effectRef>
-          <a:fontRef idx="minor">
-            <a:schemeClr val="tx1"/>
-          </a:fontRef>
-        </p:style>
-      </p:cxnSp>
-      <p:sp>
-        <p:nvSpPr>
-          <p:cNvPr id="19" name="Rounded Rectangle 18"/>
-          <p:cNvSpPr/>
-          <p:nvPr/>
-        </p:nvSpPr>
-        <p:spPr>
-          <a:xfrm>
-            <a:off x="5867400" y="2419350"/>
-            <a:ext cx="2590800" cy="590550"/>
-          </a:xfrm>
-          <a:prstGeom prst="roundRect">
-            <a:avLst>
-              <a:gd name="adj" fmla="val 8000"/>
-            </a:avLst>
-          </a:prstGeom>
-          <a:solidFill>
-            <a:srgbClr val="FF8E2E"/>
-          </a:solidFill>
-          <a:ln>
-            <a:noFill/>
-          </a:ln>
-        </p:spPr>
-        <p:style>
-          <a:lnRef idx="1">
-            <a:schemeClr val="accent1"/>
-          </a:lnRef>
-          <a:fillRef idx="3">
-            <a:schemeClr val="accent1"/>
-          </a:fillRef>
-          <a:effectRef idx="2">
-            <a:schemeClr val="accent1"/>
-          </a:effectRef>
-          <a:fontRef idx="minor">
-            <a:schemeClr val="lt1"/>
-          </a:fontRef>
-        </p:style>
-        <p:txBody>
-          <a:bodyPr rtlCol="0" anchor="ctr" wrap="square" lIns="57150" rIns="57150" tIns="19050" bIns="19050"/>
-          <a:lstStyle/>
-          <a:p>
-            <a:pPr algn="ctr"/>
-            <a:r>
-              <a:rPr sz="950" b="1">
-                <a:solidFill>
-                  <a:srgbClr val="FFFFFF"/>
-                </a:solidFill>
-                <a:latin typeface="Arial"/>
-              </a:rPr>
-              <a:t>Head of Overland</a:t>
-            </a:r>
-          </a:p>
-          <a:p>
-            <a:pPr algn="ctr"/>
-            <a:r>
-              <a:rPr sz="750" b="0">
-                <a:solidFill>
-                  <a:srgbClr val="FFFFFF"/>
-                </a:solidFill>
-                <a:latin typeface="Arial"/>
-              </a:rPr>
-              <a:t>EUA · MIA, IAH, NY</a:t>
-            </a:r>
-          </a:p>
-          <a:p>
-            <a:pPr algn="ctr"/>
-            <a:r>
-              <a:rPr sz="750" b="0">
-                <a:solidFill>
-                  <a:srgbClr val="FFFFFF"/>
-                </a:solidFill>
-                <a:latin typeface="Arial"/>
-              </a:rPr>
-              <a:t>10 pessoas · 9 vagas · 6 a abrir</a:t>
-            </a:r>
-          </a:p>
-        </p:txBody>
-      </p:sp>
-      <p:sp>
-        <p:nvSpPr>
-          <p:cNvPr id="20" name="Rounded Rectangle 19"/>
-          <p:cNvSpPr/>
-          <p:nvPr/>
-        </p:nvSpPr>
-        <p:spPr>
-          <a:xfrm>
-            <a:off x="5867400" y="3048000"/>
-            <a:ext cx="2590800" cy="247650"/>
-          </a:xfrm>
-          <a:prstGeom prst="roundRect">
-            <a:avLst>
-              <a:gd name="adj" fmla="val 8000"/>
-            </a:avLst>
-          </a:prstGeom>
-          <a:solidFill>
-            <a:srgbClr val="E8F4F4"/>
-          </a:solidFill>
-          <a:ln w="12700">
-            <a:solidFill>
-              <a:srgbClr val="FF8E2E"/>
-            </a:solidFill>
-          </a:ln>
-        </p:spPr>
-        <p:style>
-          <a:lnRef idx="1">
-            <a:schemeClr val="accent1"/>
-          </a:lnRef>
-          <a:fillRef idx="3">
-            <a:schemeClr val="accent1"/>
-          </a:fillRef>
-          <a:effectRef idx="2">
-            <a:schemeClr val="accent1"/>
-          </a:effectRef>
-          <a:fontRef idx="minor">
-            <a:schemeClr val="lt1"/>
-          </a:fontRef>
-        </p:style>
-        <p:txBody>
-          <a:bodyPr rtlCol="0" anchor="ctr" wrap="square" lIns="57150" rIns="57150" tIns="19050" bIns="19050"/>
-          <a:lstStyle/>
-          <a:p>
-            <a:pPr algn="ctr"/>
-            <a:r>
-              <a:rPr sz="900" b="1">
-                <a:solidFill>
-                  <a:srgbClr val="262626"/>
-                </a:solidFill>
-                <a:latin typeface="Arial"/>
-              </a:rPr>
-              <a:t>1.417 embarques/mês</a:t>
-            </a:r>
-          </a:p>
-        </p:txBody>
-      </p:sp>
-      <p:cxnSp>
-        <p:nvCxnSpPr>
-          <p:cNvPr id="21" name="Connector 20"/>
-          <p:cNvCxnSpPr/>
-          <p:nvPr/>
-        </p:nvCxnSpPr>
-        <p:spPr>
-          <a:xfrm>
-            <a:off x="9925050" y="2305050"/>
-            <a:ext cx="0" cy="114300"/>
-          </a:xfrm>
-          <a:prstGeom prst="bentConnector3">
-            <a:avLst/>
-          </a:prstGeom>
-          <a:ln w="12700">
-            <a:solidFill>
-              <a:srgbClr val="FF8E2E"/>
-            </a:solidFill>
-          </a:ln>
-        </p:spPr>
-        <p:style>
-          <a:lnRef idx="2">
-            <a:schemeClr val="accent1"/>
-          </a:lnRef>
-          <a:fillRef idx="0">
-            <a:schemeClr val="accent1"/>
-          </a:fillRef>
-          <a:effectRef idx="1">
-            <a:schemeClr val="accent1"/>
-          </a:effectRef>
-          <a:fontRef idx="minor">
-            <a:schemeClr val="tx1"/>
-          </a:fontRef>
-        </p:style>
-      </p:cxnSp>
-      <p:sp>
-        <p:nvSpPr>
-          <p:cNvPr id="22" name="Rounded Rectangle 21"/>
-          <p:cNvSpPr/>
-          <p:nvPr/>
-        </p:nvSpPr>
-        <p:spPr>
-          <a:xfrm>
-            <a:off x="8629650" y="2419350"/>
-            <a:ext cx="2590800" cy="590550"/>
-          </a:xfrm>
-          <a:prstGeom prst="roundRect">
-            <a:avLst>
-              <a:gd name="adj" fmla="val 8000"/>
-            </a:avLst>
-          </a:prstGeom>
-          <a:solidFill>
-            <a:srgbClr val="FF8E2E"/>
-          </a:solidFill>
-          <a:ln w="19050">
-            <a:solidFill>
-              <a:srgbClr val="FF8E2E"/>
-            </a:solidFill>
-            <a:prstDash val="dash"/>
-          </a:ln>
-        </p:spPr>
-        <p:style>
-          <a:lnRef idx="1">
-            <a:schemeClr val="accent1"/>
-          </a:lnRef>
-          <a:fillRef idx="3">
-            <a:schemeClr val="accent1"/>
-          </a:fillRef>
-          <a:effectRef idx="2">
-            <a:schemeClr val="accent1"/>
-          </a:effectRef>
-          <a:fontRef idx="minor">
-            <a:schemeClr val="lt1"/>
-          </a:fontRef>
-        </p:style>
-        <p:txBody>
-          <a:bodyPr rtlCol="0" anchor="ctr" wrap="square" lIns="57150" rIns="57150" tIns="19050" bIns="19050"/>
-          <a:lstStyle/>
-          <a:p>
-            <a:pPr algn="ctr"/>
-            <a:r>
-              <a:rPr sz="950" b="1">
-                <a:solidFill>
-                  <a:srgbClr val="FFFFFF"/>
-                </a:solidFill>
-                <a:latin typeface="Arial"/>
-              </a:rPr>
-              <a:t>VAGA · Head de Europa</a:t>
-            </a:r>
-          </a:p>
-          <a:p>
-            <a:pPr algn="ctr"/>
-            <a:r>
-              <a:rPr sz="750" b="0">
-                <a:solidFill>
-                  <a:srgbClr val="FFFFFF"/>
-                </a:solidFill>
-                <a:latin typeface="Arial"/>
-              </a:rPr>
-              <a:t>Europa · AMS, FRA, LIS</a:t>
-            </a:r>
-          </a:p>
-          <a:p>
-            <a:pPr algn="ctr"/>
-            <a:r>
-              <a:rPr sz="750" b="0">
-                <a:solidFill>
-                  <a:srgbClr val="FFFFFF"/>
-                </a:solidFill>
-                <a:latin typeface="Arial"/>
-              </a:rPr>
-              <a:t>5 pessoas · vaga publicada</a:t>
-            </a:r>
-          </a:p>
-        </p:txBody>
-      </p:sp>
-      <p:sp>
-        <p:nvSpPr>
-          <p:cNvPr id="23" name="Rounded Rectangle 22"/>
-          <p:cNvSpPr/>
-          <p:nvPr/>
-        </p:nvSpPr>
-        <p:spPr>
-          <a:xfrm>
-            <a:off x="8629650" y="3048000"/>
-            <a:ext cx="2590800" cy="247650"/>
-          </a:xfrm>
-          <a:prstGeom prst="roundRect">
-            <a:avLst>
-              <a:gd name="adj" fmla="val 8000"/>
-            </a:avLst>
-          </a:prstGeom>
-          <a:solidFill>
-            <a:srgbClr val="E8F4F4"/>
-          </a:solidFill>
-          <a:ln w="12700">
-            <a:solidFill>
-              <a:srgbClr val="FF8E2E"/>
-            </a:solidFill>
-          </a:ln>
-        </p:spPr>
-        <p:style>
-          <a:lnRef idx="1">
-            <a:schemeClr val="accent1"/>
-          </a:lnRef>
-          <a:fillRef idx="3">
-            <a:schemeClr val="accent1"/>
-          </a:fillRef>
-          <a:effectRef idx="2">
-            <a:schemeClr val="accent1"/>
-          </a:effectRef>
-          <a:fontRef idx="minor">
-            <a:schemeClr val="lt1"/>
-          </a:fontRef>
-        </p:style>
-        <p:txBody>
-          <a:bodyPr rtlCol="0" anchor="ctr" wrap="square" lIns="57150" rIns="57150" tIns="19050" bIns="19050"/>
-          <a:lstStyle/>
-          <a:p>
-            <a:pPr algn="ctr"/>
-            <a:r>
-              <a:rPr sz="900" b="1">
-                <a:solidFill>
-                  <a:srgbClr val="262626"/>
-                </a:solidFill>
-                <a:latin typeface="Arial"/>
-              </a:rPr>
-              <a:t>534 embarques/mês</a:t>
-            </a:r>
-          </a:p>
-        </p:txBody>
-      </p:sp>
-      <p:sp>
-        <p:nvSpPr>
-          <p:cNvPr id="24" name="Rounded Rectangle 23"/>
-          <p:cNvSpPr/>
-          <p:nvPr/>
-        </p:nvSpPr>
-        <p:spPr>
-          <a:xfrm>
-            <a:off x="342900" y="3543300"/>
-            <a:ext cx="5676900" cy="228600"/>
-          </a:xfrm>
-          <a:prstGeom prst="roundRect">
-            <a:avLst>
-              <a:gd name="adj" fmla="val 8000"/>
-            </a:avLst>
-          </a:prstGeom>
-          <a:solidFill>
-            <a:srgbClr val="1D368E"/>
-          </a:solidFill>
-          <a:ln>
-            <a:noFill/>
-          </a:ln>
-        </p:spPr>
-        <p:style>
-          <a:lnRef idx="1">
-            <a:schemeClr val="accent1"/>
-          </a:lnRef>
-          <a:fillRef idx="3">
-            <a:schemeClr val="accent1"/>
-          </a:fillRef>
-          <a:effectRef idx="2">
-            <a:schemeClr val="accent1"/>
-          </a:effectRef>
-          <a:fontRef idx="minor">
-            <a:schemeClr val="lt1"/>
-          </a:fontRef>
-        </p:style>
-        <p:txBody>
-          <a:bodyPr rtlCol="0" anchor="ctr" wrap="square" lIns="57150" rIns="57150" tIns="19050" bIns="19050"/>
-          <a:lstStyle/>
-          <a:p>
-            <a:pPr algn="ctr"/>
-            <a:r>
-              <a:rPr sz="1000" b="1">
-                <a:solidFill>
-                  <a:srgbClr val="FFFFFF"/>
-                </a:solidFill>
-                <a:latin typeface="Arial"/>
-              </a:rPr>
-              <a:t>A conta por praça</a:t>
-            </a:r>
-          </a:p>
-        </p:txBody>
-      </p:sp>
-      <p:sp>
-        <p:nvSpPr>
-          <p:cNvPr id="25" name="Rounded Rectangle 24"/>
-          <p:cNvSpPr/>
-          <p:nvPr/>
-        </p:nvSpPr>
-        <p:spPr>
-          <a:xfrm>
-            <a:off x="342900" y="3800475"/>
-            <a:ext cx="5676900" cy="2409825"/>
-          </a:xfrm>
-          <a:prstGeom prst="roundRect">
-            <a:avLst>
-              <a:gd name="adj" fmla="val 8000"/>
-            </a:avLst>
-          </a:prstGeom>
-          <a:solidFill>
-            <a:srgbClr val="E8F4F4"/>
-          </a:solidFill>
-          <a:ln w="12700">
-            <a:solidFill>
-              <a:srgbClr val="1D368E"/>
-            </a:solidFill>
-          </a:ln>
-        </p:spPr>
-        <p:style>
-          <a:lnRef idx="1">
-            <a:schemeClr val="accent1"/>
-          </a:lnRef>
-          <a:fillRef idx="3">
-            <a:schemeClr val="accent1"/>
-          </a:fillRef>
-          <a:effectRef idx="2">
-            <a:schemeClr val="accent1"/>
-          </a:effectRef>
-          <a:fontRef idx="minor">
-            <a:schemeClr val="lt1"/>
-          </a:fontRef>
-        </p:style>
-        <p:txBody>
-          <a:bodyPr rtlCol="0" anchor="t" wrap="square" lIns="95250" rIns="95250" tIns="19050" bIns="19050"/>
-          <a:lstStyle/>
-          <a:p>
-            <a:pPr algn="l">
-              <a:spcAft>
-                <a:spcPts val="375"/>
-              </a:spcAft>
-            </a:pPr>
-            <a:r>
-              <a:rPr sz="1000" b="1">
-                <a:solidFill>
-                  <a:srgbClr val="262626"/>
-                </a:solidFill>
-                <a:latin typeface="Arial"/>
-              </a:rPr>
-              <a:t/>
-            </a:r>
-            <a:r>
-              <a:rPr b="1" sz="900">
-                <a:solidFill>
-                  <a:srgbClr val="262626"/>
-                </a:solidFill>
-                <a:latin typeface="Arial"/>
-              </a:rPr>
-              <a:t>EUA · 10 pessoas, 9 vagas: </a:t>
-            </a:r>
-            <a:r>
-              <a:rPr sz="900">
-                <a:solidFill>
-                  <a:srgbClr val="262626"/>
-                </a:solidFill>
-                <a:latin typeface="Arial"/>
-              </a:rPr>
-              <a:t>1.417 embarques/mês originados, 142 por pessoa. 1 gestor local, e são 2 Warehouse Team Leaders — um deles sem nenhum liderado</a:t>
-            </a:r>
-          </a:p>
-          <a:p>
-            <a:pPr algn="l">
-              <a:spcAft>
-                <a:spcPts val="375"/>
-              </a:spcAft>
-            </a:pPr>
-            <a:r>
-              <a:rPr b="1" sz="900">
-                <a:solidFill>
-                  <a:srgbClr val="262626"/>
-                </a:solidFill>
-                <a:latin typeface="Arial"/>
-              </a:rPr>
-              <a:t>Europa · 5 pessoas, 7 vagas: </a:t>
-            </a:r>
-            <a:r>
-              <a:rPr sz="900">
-                <a:solidFill>
-                  <a:srgbClr val="262626"/>
-                </a:solidFill>
-                <a:latin typeface="Arial"/>
-              </a:rPr>
-              <a:t>534 embarques/mês, 107 por pessoa. Sem head; a única TL está em Portugal e reporta ao Brasil</a:t>
-            </a:r>
-          </a:p>
-          <a:p>
-            <a:pPr algn="l">
-              <a:spcAft>
-                <a:spcPts val="375"/>
-              </a:spcAft>
-            </a:pPr>
-            <a:r>
-              <a:rPr b="1" sz="900">
-                <a:solidFill>
-                  <a:srgbClr val="262626"/>
-                </a:solidFill>
-                <a:latin typeface="Arial"/>
-              </a:rPr>
-              <a:t>Agentes OFF · </a:t>
-            </a:r>
-            <a:r>
-              <a:rPr sz="900">
-                <a:solidFill>
-                  <a:srgbClr val="262626"/>
-                </a:solidFill>
-                <a:latin typeface="Arial"/>
-              </a:rPr>
-              <a:t>161 agentes terceiros originam 1.173 embarques/mês, 34% do total, coordenados por 51 pessoas no Brasil</a:t>
-            </a:r>
-          </a:p>
-          <a:p>
-            <a:pPr algn="l">
-              <a:spcAft>
-                <a:spcPts val="375"/>
-              </a:spcAft>
-            </a:pPr>
-            <a:r>
-              <a:rPr b="1" sz="900">
-                <a:solidFill>
-                  <a:srgbClr val="262626"/>
-                </a:solidFill>
-                <a:latin typeface="Arial"/>
-              </a:rPr>
-              <a:t>Brasil · </a:t>
-            </a:r>
-            <a:r>
-              <a:rPr sz="900">
-                <a:solidFill>
-                  <a:srgbClr val="262626"/>
-                </a:solidFill>
-                <a:latin typeface="Arial"/>
-              </a:rPr>
-              <a:t>289 embarques/mês originados, mas a equipe processa o lado destino de todos os embarques</a:t>
-            </a:r>
-          </a:p>
-        </p:txBody>
-      </p:sp>
-      <p:sp>
-        <p:nvSpPr>
-          <p:cNvPr id="26" name="Rounded Rectangle 25"/>
-          <p:cNvSpPr/>
-          <p:nvPr/>
-        </p:nvSpPr>
-        <p:spPr>
-          <a:xfrm>
-            <a:off x="6172200" y="3543300"/>
-            <a:ext cx="5676900" cy="228600"/>
+            <a:off x="342900" y="5143500"/>
+            <a:ext cx="11506200" cy="228600"/>
           </a:xfrm>
           <a:prstGeom prst="roundRect">
             <a:avLst>
@@ -7981,21 +8783,21 @@
                 </a:solidFill>
                 <a:latin typeface="Arial"/>
               </a:rPr>
-              <a:t>As ineficiências da cadeia</a:t>
+              <a:t>As três mudanças que destravam mais</a:t>
             </a:r>
           </a:p>
         </p:txBody>
       </p:sp>
       <p:sp>
         <p:nvSpPr>
-          <p:cNvPr id="27" name="Rounded Rectangle 26"/>
+          <p:cNvPr id="11" name="Rounded Rectangle 10"/>
           <p:cNvSpPr/>
           <p:nvPr/>
         </p:nvSpPr>
         <p:spPr>
           <a:xfrm>
-            <a:off x="6172200" y="3800475"/>
-            <a:ext cx="5676900" cy="2409825"/>
+            <a:off x="342900" y="5400675"/>
+            <a:ext cx="11506200" cy="809625"/>
           </a:xfrm>
           <a:prstGeom prst="roundRect">
             <a:avLst>
@@ -8050,7 +8852,7 @@
                 </a:solidFill>
                 <a:latin typeface="Arial"/>
               </a:rPr>
-              <a:t>Europa sem dono: </a:t>
+              <a:t>1. Air Operations, de 4 camadas para 2: </a:t>
             </a:r>
             <a:r>
               <a:rPr sz="900">
@@ -8059,7 +8861,7 @@
                 </a:solidFill>
                 <a:latin typeface="Arial"/>
               </a:rPr>
-              <a:t>58% do quadro europeu está em aberto e a praça que origina 534 embarques/mês não tem head nem team leader local</a:t>
+              <a:t>é o maior setor (83 pessoas, 15 gestores) e o que concentra as vagas; separar Sr. Team Leader de Team Leader resolve a cadeia de TL sobre TL e libera 2 níveis</a:t>
             </a:r>
           </a:p>
           <a:p>
@@ -8075,7 +8877,7 @@
                 </a:solidFill>
                 <a:latin typeface="Arial"/>
               </a:rPr>
-              <a:t>Fila travada fora do Brasil: </a:t>
+              <a:t>2. Um dono para as vagas de chefia: </a:t>
             </a:r>
             <a:r>
               <a:rPr sz="900">
@@ -8084,7 +8886,7 @@
                 </a:solidFill>
                 <a:latin typeface="Arial"/>
               </a:rPr>
-              <a:t>as 12 vagas que nunca foram abertas estão todas em EUA (6) e Europa (6) — o gargalo é a abertura interna</a:t>
+              <a:t>as 3 de TL Americas estão divididas entre Air Operations e Air Product, e a de Head de Europa está dentro de Overland — definir o dono antes de publicar</a:t>
             </a:r>
           </a:p>
           <a:p>
@@ -8100,7 +8902,7 @@
                 </a:solidFill>
                 <a:latin typeface="Arial"/>
               </a:rPr>
-              <a:t>Gestão à distância: </a:t>
+              <a:t>3. Liderança na praça que origina o volume: </a:t>
             </a:r>
             <a:r>
               <a:rPr sz="900">
@@ -8109,32 +8911,7 @@
                 </a:solidFill>
                 <a:latin typeface="Arial"/>
               </a:rPr>
-              <a:t>13 das 15 pessoas de EUA e Europa têm gestor no Brasil; o Head of Overland responde por MIA, IAH e NY de São Paulo</a:t>
-            </a:r>
-          </a:p>
-          <a:p>
-            <a:pPr algn="l">
-              <a:spcAft>
-                <a:spcPts val="375"/>
-              </a:spcAft>
-            </a:pPr>
-            <a:r>
-              <a:rPr b="1" sz="900">
-                <a:solidFill>
-                  <a:srgbClr val="262626"/>
-                </a:solidFill>
-                <a:latin typeface="Arial"/>
-              </a:rPr>
-              <a:t>Camada que se repete: </a:t>
-            </a:r>
-            <a:r>
-              <a:rPr sz="900">
-                <a:solidFill>
-                  <a:srgbClr val="262626"/>
-                </a:solidFill>
-                <a:latin typeface="Arial"/>
-              </a:rPr>
-              <a:t>Air Operations tem 4 níveis de team leader; o draft risca 3 caixas dessa cadeia sem indicar destino</a:t>
+              <a:t>EUA e Europa originam 1.951 dos 3.413 embarques por mês com 15 pessoas; a Europa não tem head nem TL local e as 12 vagas paradas estão todas nas duas</a:t>
             </a:r>
           </a:p>
         </p:txBody>
